--- a/deliverables/MietCheck_Praesentation.pptx
+++ b/deliverables/MietCheck_Praesentation.pptx
@@ -2,26 +2,26 @@
 <file path=ppt/presentation.xml><?xml version="1.0" encoding="utf-8"?>
 <p:presentation xmlns:p="http://schemas.openxmlformats.org/presentationml/2006/main">
   <p:sldMasterIdLst>
-    <p:sldMasterId xmlns:r="http://schemas.openxmlformats.org/officeDocument/2006/relationships" id="2147483648" r:id="R75324078bb3946eb"/>
+    <p:sldMasterId xmlns:r="http://schemas.openxmlformats.org/officeDocument/2006/relationships" id="2147483648" r:id="R2ed3c811527a48a4"/>
   </p:sldMasterIdLst>
   <p:notesMasterIdLst>
-    <p:notesMasterId xmlns:r="http://schemas.openxmlformats.org/officeDocument/2006/relationships" r:id="Rc88d52f636064f83"/>
+    <p:notesMasterId xmlns:r="http://schemas.openxmlformats.org/officeDocument/2006/relationships" r:id="R6e5b81aac8b64d54"/>
   </p:notesMasterIdLst>
   <p:sldIdLst>
-    <p:sldId xmlns:r="http://schemas.openxmlformats.org/officeDocument/2006/relationships" id="256" r:id="Raefb9e3d115e42a5"/>
-    <p:sldId xmlns:r="http://schemas.openxmlformats.org/officeDocument/2006/relationships" id="257" r:id="R0c587ce39be94f38"/>
-    <p:sldId xmlns:r="http://schemas.openxmlformats.org/officeDocument/2006/relationships" id="258" r:id="R3adbdf37452548a0"/>
-    <p:sldId xmlns:r="http://schemas.openxmlformats.org/officeDocument/2006/relationships" id="259" r:id="Rcba21ef9a72b478b"/>
-    <p:sldId xmlns:r="http://schemas.openxmlformats.org/officeDocument/2006/relationships" id="260" r:id="R82ddeb0468324f48"/>
-    <p:sldId xmlns:r="http://schemas.openxmlformats.org/officeDocument/2006/relationships" id="261" r:id="R2dc2a4cb7146437e"/>
-    <p:sldId xmlns:r="http://schemas.openxmlformats.org/officeDocument/2006/relationships" id="262" r:id="R7731acd1ad27433b"/>
-    <p:sldId xmlns:r="http://schemas.openxmlformats.org/officeDocument/2006/relationships" id="263" r:id="Rbea6ca6a1a8f4494"/>
-    <p:sldId xmlns:r="http://schemas.openxmlformats.org/officeDocument/2006/relationships" id="264" r:id="Rc807cf6e4487470e"/>
-    <p:sldId xmlns:r="http://schemas.openxmlformats.org/officeDocument/2006/relationships" id="265" r:id="R9b4c01135850469d"/>
-    <p:sldId xmlns:r="http://schemas.openxmlformats.org/officeDocument/2006/relationships" id="266" r:id="R4fab4fe5c88642f7"/>
-    <p:sldId xmlns:r="http://schemas.openxmlformats.org/officeDocument/2006/relationships" id="267" r:id="R4380dbda21f74c65"/>
-    <p:sldId xmlns:r="http://schemas.openxmlformats.org/officeDocument/2006/relationships" id="268" r:id="R0da7e247681840a3"/>
-    <p:sldId xmlns:r="http://schemas.openxmlformats.org/officeDocument/2006/relationships" id="269" r:id="R3b57737208c04035"/>
+    <p:sldId xmlns:r="http://schemas.openxmlformats.org/officeDocument/2006/relationships" id="256" r:id="R7eef9dd699f24630"/>
+    <p:sldId xmlns:r="http://schemas.openxmlformats.org/officeDocument/2006/relationships" id="257" r:id="Rac611ec249a64d37"/>
+    <p:sldId xmlns:r="http://schemas.openxmlformats.org/officeDocument/2006/relationships" id="258" r:id="R08b4ba35de2e4d51"/>
+    <p:sldId xmlns:r="http://schemas.openxmlformats.org/officeDocument/2006/relationships" id="259" r:id="Rc4fbcc0abfed4b58"/>
+    <p:sldId xmlns:r="http://schemas.openxmlformats.org/officeDocument/2006/relationships" id="260" r:id="Re2a3bbff5997465e"/>
+    <p:sldId xmlns:r="http://schemas.openxmlformats.org/officeDocument/2006/relationships" id="261" r:id="Rf1b16a4d14f548a2"/>
+    <p:sldId xmlns:r="http://schemas.openxmlformats.org/officeDocument/2006/relationships" id="262" r:id="Rde7e3db2fd1e4aa7"/>
+    <p:sldId xmlns:r="http://schemas.openxmlformats.org/officeDocument/2006/relationships" id="263" r:id="R6d325a275fc044c9"/>
+    <p:sldId xmlns:r="http://schemas.openxmlformats.org/officeDocument/2006/relationships" id="264" r:id="R6fc18b977f134eff"/>
+    <p:sldId xmlns:r="http://schemas.openxmlformats.org/officeDocument/2006/relationships" id="265" r:id="Rc3bcdf1881244a76"/>
+    <p:sldId xmlns:r="http://schemas.openxmlformats.org/officeDocument/2006/relationships" id="266" r:id="Rd900c21d899847ec"/>
+    <p:sldId xmlns:r="http://schemas.openxmlformats.org/officeDocument/2006/relationships" id="267" r:id="R12d77845039e4c42"/>
+    <p:sldId xmlns:r="http://schemas.openxmlformats.org/officeDocument/2006/relationships" id="268" r:id="Rfec8690f2e104059"/>
+    <p:sldId xmlns:r="http://schemas.openxmlformats.org/officeDocument/2006/relationships" id="269" r:id="R4ef482a192824939"/>
   </p:sldIdLst>
   <p:sldSz cx="12192000" cy="6858000"/>
   <p:notesSz cx="6858000" cy="9144000"/>
@@ -1668,7 +1668,7 @@
   </p:cSld>
   <p:clrMap bg1="lt1" tx1="dk1" bg2="lt2" tx2="dk2" accent1="accent1" accent2="accent2" accent3="accent3" accent4="accent4" accent5="accent5" accent6="accent6" hlink="hlink" folHlink="folHlink"/>
   <p:sldLayoutIdLst>
-    <p:sldLayoutId xmlns:r="http://schemas.openxmlformats.org/officeDocument/2006/relationships" id="2147483649" r:id="R53a3f5236ca54f66"/>
+    <p:sldLayoutId xmlns:r="http://schemas.openxmlformats.org/officeDocument/2006/relationships" id="2147483649" r:id="Rb8e7f79ecff4448f"/>
   </p:sldLayoutIdLst>
   <p:txStyles>
     <p:titleStyle>
@@ -2910,7 +2910,7 @@
           <p:cNvPr id="8" name="cover-accent">
             <a:extLst xmlns:a="http://schemas.openxmlformats.org/drawingml/2006/main">
               <a:ext uri="{FF2B5EF4-FFF2-40B4-BE49-F238E27FC236}">
-                <a16:creationId xmlns:a16="http://schemas.microsoft.com/office/drawing/2014/main" id="{F1F1316B-D515-4648-A459-EA877B85AAF0}"/>
+                <a16:creationId xmlns:a16="http://schemas.microsoft.com/office/drawing/2014/main" id="{2F5CE8BC-A1CB-46BC-B1FB-603D55B6C5D5}"/>
               </a:ext>
             </a:extLst>
           </p:cNvPr>
@@ -2943,7 +2943,7 @@
           <p:cNvPr id="2" name="cover-brand">
             <a:extLst xmlns:a="http://schemas.openxmlformats.org/drawingml/2006/main">
               <a:ext uri="{FF2B5EF4-FFF2-40B4-BE49-F238E27FC236}">
-                <a16:creationId xmlns:a16="http://schemas.microsoft.com/office/drawing/2014/main" id="{14946499-5AA2-4443-9570-4E7991512C3B}"/>
+                <a16:creationId xmlns:a16="http://schemas.microsoft.com/office/drawing/2014/main" id="{B80C002B-F0E5-400E-8896-4883E691D752}"/>
               </a:ext>
             </a:extLst>
           </p:cNvPr>
@@ -2988,7 +2988,7 @@
           <p:cNvPr id="3" name="cover-title">
             <a:extLst xmlns:a="http://schemas.openxmlformats.org/drawingml/2006/main">
               <a:ext uri="{FF2B5EF4-FFF2-40B4-BE49-F238E27FC236}">
-                <a16:creationId xmlns:a16="http://schemas.microsoft.com/office/drawing/2014/main" id="{8841AD42-A1BC-4705-A78A-39496CE04572}"/>
+                <a16:creationId xmlns:a16="http://schemas.microsoft.com/office/drawing/2014/main" id="{24B7092F-4920-4B1E-AC59-85D79D6E9530}"/>
               </a:ext>
             </a:extLst>
           </p:cNvPr>
@@ -3035,7 +3035,7 @@
           <p:cNvPr id="4" name="cover-subtitle">
             <a:extLst xmlns:a="http://schemas.openxmlformats.org/drawingml/2006/main">
               <a:ext uri="{FF2B5EF4-FFF2-40B4-BE49-F238E27FC236}">
-                <a16:creationId xmlns:a16="http://schemas.microsoft.com/office/drawing/2014/main" id="{49659566-A5F0-4C00-B92C-3D082B57026D}"/>
+                <a16:creationId xmlns:a16="http://schemas.microsoft.com/office/drawing/2014/main" id="{4FF374D0-E1D6-49B6-8C83-D764572BA01A}"/>
               </a:ext>
             </a:extLst>
           </p:cNvPr>
@@ -3080,19 +3080,19 @@
           <p:cNvPr id="5" name="cover-meta">
             <a:extLst xmlns:a="http://schemas.openxmlformats.org/drawingml/2006/main">
               <a:ext uri="{FF2B5EF4-FFF2-40B4-BE49-F238E27FC236}">
-                <a16:creationId xmlns:a16="http://schemas.microsoft.com/office/drawing/2014/main" id="{D48E3171-14C8-40F7-AAE2-DC5E9D247063}"/>
-              </a:ext>
-            </a:extLst>
-          </p:cNvPr>
-          <p:cNvSpPr>
-            <a:spLocks xmlns:a="http://schemas.openxmlformats.org/drawingml/2006/main" noGrp="1"/>
-          </p:cNvSpPr>
-          <p:nvPr/>
-        </p:nvSpPr>
-        <p:spPr>
-          <a:xfrm xmlns:a="http://schemas.openxmlformats.org/drawingml/2006/main">
-            <a:off x="533400" y="5924550"/>
-            <a:ext cx="5334000" cy="304800"/>
+                <a16:creationId xmlns:a16="http://schemas.microsoft.com/office/drawing/2014/main" id="{111E5189-12F0-4C5E-BCCF-624AD098A6A1}"/>
+              </a:ext>
+            </a:extLst>
+          </p:cNvPr>
+          <p:cNvSpPr>
+            <a:spLocks xmlns:a="http://schemas.openxmlformats.org/drawingml/2006/main" noGrp="1"/>
+          </p:cNvSpPr>
+          <p:nvPr/>
+        </p:nvSpPr>
+        <p:spPr>
+          <a:xfrm xmlns:a="http://schemas.openxmlformats.org/drawingml/2006/main">
+            <a:off x="533400" y="5657850"/>
+            <a:ext cx="5334000" cy="609600"/>
           </a:xfrm>
           <a:prstGeom xmlns:a="http://schemas.openxmlformats.org/drawingml/2006/main" prst="rect">
             <a:avLst/>
@@ -3105,7 +3105,7 @@
           <a:lstStyle xmlns:a="http://schemas.openxmlformats.org/drawingml/2006/main"/>
           <a:p xmlns:a="http://schemas.openxmlformats.org/drawingml/2006/main">
             <a:pPr algn="l">
-              <a:defRPr sz="1350" b="0" i="0">
+              <a:defRPr sz="1200" b="0" i="0">
                 <a:solidFill>
                   <a:srgbClr val="667085"/>
                 </a:solidFill>
@@ -3115,7 +3115,8 @@
               </a:defRPr>
             </a:pPr>
             <a:r>
-              <a:t>Nele Knaak · Data Analytics &amp; Big Data · 2026</a:t>
+              <a:t>Nele Knaak · Matrikel-Nr.: [EINTRAGEN]
+Prüfer/in: [EINTRAGEN] · Abgabe: [TT.MM.JJJJ]</a:t>
             </a:r>
           </a:p>
         </p:txBody>
@@ -3125,7 +3126,7 @@
           <p:cNvPr id="6" name="cover-image-back">
             <a:extLst xmlns:a="http://schemas.openxmlformats.org/drawingml/2006/main">
               <a:ext uri="{FF2B5EF4-FFF2-40B4-BE49-F238E27FC236}">
-                <a16:creationId xmlns:a16="http://schemas.microsoft.com/office/drawing/2014/main" id="{E6CC6C6B-3A8D-468E-9928-E4F8C0B41014}"/>
+                <a16:creationId xmlns:a16="http://schemas.microsoft.com/office/drawing/2014/main" id="{66BF2759-A76D-4D09-8BB4-0661D2735632}"/>
               </a:ext>
             </a:extLst>
           </p:cNvPr>
@@ -3164,7 +3165,7 @@
           <p:nvPr/>
         </p:nvPicPr>
         <p:blipFill>
-          <a:blip xmlns:r="http://schemas.openxmlformats.org/officeDocument/2006/relationships" xmlns:a="http://schemas.openxmlformats.org/drawingml/2006/main" r:embed="Re18e8b7855a64dad"/>
+          <a:blip xmlns:r="http://schemas.openxmlformats.org/officeDocument/2006/relationships" xmlns:a="http://schemas.openxmlformats.org/drawingml/2006/main" r:embed="R051d8e8e304c4d25"/>
           <a:srcRect xmlns:a="http://schemas.openxmlformats.org/drawingml/2006/main" l="13781" t="0" r="13781" b="0"/>
           <a:stretch xmlns:a="http://schemas.openxmlformats.org/drawingml/2006/main">
             <a:fillRect l="0" t="0" r="0" b="0"/>
@@ -3185,7 +3186,7 @@
     </p:spTree>
     <p:extLst>
       <p:ext uri="{BB962C8B-B14F-4D97-AF65-F5344CB8AC3E}">
-        <p14:creationId xmlns:p14="http://schemas.microsoft.com/office/powerpoint/2010/main" val="477790122"/>
+        <p14:creationId xmlns:p14="http://schemas.microsoft.com/office/powerpoint/2010/main" val="387336420"/>
       </p:ext>
     </p:extLst>
   </p:cSld>
@@ -3216,7 +3217,7 @@
           <p:cNvPr id="12" name="title-10">
             <a:extLst xmlns:a="http://schemas.openxmlformats.org/drawingml/2006/main">
               <a:ext uri="{FF2B5EF4-FFF2-40B4-BE49-F238E27FC236}">
-                <a16:creationId xmlns:a16="http://schemas.microsoft.com/office/drawing/2014/main" id="{4B9364AA-F9A3-49E5-8436-F638A1C12AFF}"/>
+                <a16:creationId xmlns:a16="http://schemas.microsoft.com/office/drawing/2014/main" id="{A82E0B9D-6FC3-46A9-9433-330AC298750B}"/>
               </a:ext>
             </a:extLst>
           </p:cNvPr>
@@ -3261,7 +3262,7 @@
           <p:cNvPr id="2" name="source-10">
             <a:extLst xmlns:a="http://schemas.openxmlformats.org/drawingml/2006/main">
               <a:ext uri="{FF2B5EF4-FFF2-40B4-BE49-F238E27FC236}">
-                <a16:creationId xmlns:a16="http://schemas.microsoft.com/office/drawing/2014/main" id="{1DBA291C-AE64-4FE8-8428-A5E05977ACC4}"/>
+                <a16:creationId xmlns:a16="http://schemas.microsoft.com/office/drawing/2014/main" id="{2941ADB7-CAE3-4050-B6CF-FF7CBC487645}"/>
               </a:ext>
             </a:extLst>
           </p:cNvPr>
@@ -3306,7 +3307,7 @@
           <p:cNvPr id="3" name="page-10">
             <a:extLst xmlns:a="http://schemas.openxmlformats.org/drawingml/2006/main">
               <a:ext uri="{FF2B5EF4-FFF2-40B4-BE49-F238E27FC236}">
-                <a16:creationId xmlns:a16="http://schemas.microsoft.com/office/drawing/2014/main" id="{E2939921-442B-4265-B625-A56F3D36C437}"/>
+                <a16:creationId xmlns:a16="http://schemas.microsoft.com/office/drawing/2014/main" id="{471ADCF8-60BD-436F-89F4-A36B18ED571F}"/>
               </a:ext>
             </a:extLst>
           </p:cNvPr>
@@ -3351,7 +3352,7 @@
           <p:cNvPr id="4" name="screenshot-back">
             <a:extLst xmlns:a="http://schemas.openxmlformats.org/drawingml/2006/main">
               <a:ext uri="{FF2B5EF4-FFF2-40B4-BE49-F238E27FC236}">
-                <a16:creationId xmlns:a16="http://schemas.microsoft.com/office/drawing/2014/main" id="{17D67F0C-339F-47F4-9070-CA4B01C0F858}"/>
+                <a16:creationId xmlns:a16="http://schemas.microsoft.com/office/drawing/2014/main" id="{695226D4-076D-44D5-BAF5-64F4B814A595}"/>
               </a:ext>
             </a:extLst>
           </p:cNvPr>
@@ -3384,7 +3385,7 @@
           <p:cNvPr id="5" name="product-one">
             <a:extLst xmlns:a="http://schemas.openxmlformats.org/drawingml/2006/main">
               <a:ext uri="{FF2B5EF4-FFF2-40B4-BE49-F238E27FC236}">
-                <a16:creationId xmlns:a16="http://schemas.microsoft.com/office/drawing/2014/main" id="{18442B5D-D9C7-433D-B333-4FB435E2B6E9}"/>
+                <a16:creationId xmlns:a16="http://schemas.microsoft.com/office/drawing/2014/main" id="{0190F02F-E9AB-43DD-90A1-839E85AA8F1A}"/>
               </a:ext>
             </a:extLst>
           </p:cNvPr>
@@ -3429,7 +3430,7 @@
           <p:cNvPr id="6" name="product-two">
             <a:extLst xmlns:a="http://schemas.openxmlformats.org/drawingml/2006/main">
               <a:ext uri="{FF2B5EF4-FFF2-40B4-BE49-F238E27FC236}">
-                <a16:creationId xmlns:a16="http://schemas.microsoft.com/office/drawing/2014/main" id="{C7AB43F5-0FB0-465E-9B93-FE3965EA8CE2}"/>
+                <a16:creationId xmlns:a16="http://schemas.microsoft.com/office/drawing/2014/main" id="{5B70C3CB-487B-48B1-BF9B-E276143CA75E}"/>
               </a:ext>
             </a:extLst>
           </p:cNvPr>
@@ -3474,7 +3475,7 @@
           <p:cNvPr id="7" name="product-three">
             <a:extLst xmlns:a="http://schemas.openxmlformats.org/drawingml/2006/main">
               <a:ext uri="{FF2B5EF4-FFF2-40B4-BE49-F238E27FC236}">
-                <a16:creationId xmlns:a16="http://schemas.microsoft.com/office/drawing/2014/main" id="{43003FAB-111B-4EA5-876E-ADB5CC3DDE42}"/>
+                <a16:creationId xmlns:a16="http://schemas.microsoft.com/office/drawing/2014/main" id="{443561DE-82E1-4CC4-8FED-BF757928B12F}"/>
               </a:ext>
             </a:extLst>
           </p:cNvPr>
@@ -3523,7 +3524,7 @@
           <p:nvPr/>
         </p:nvPicPr>
         <p:blipFill>
-          <a:blip xmlns:r="http://schemas.openxmlformats.org/officeDocument/2006/relationships" xmlns:a="http://schemas.openxmlformats.org/drawingml/2006/main" r:embed="Rf4602a6bfaa14377"/>
+          <a:blip xmlns:r="http://schemas.openxmlformats.org/officeDocument/2006/relationships" xmlns:a="http://schemas.openxmlformats.org/drawingml/2006/main" r:embed="Re7efb069443a4cf6"/>
           <a:srcRect xmlns:a="http://schemas.openxmlformats.org/drawingml/2006/main" l="0" t="24967" r="0" b="24967"/>
           <a:stretch xmlns:a="http://schemas.openxmlformats.org/drawingml/2006/main">
             <a:fillRect l="0" t="0" r="0" b="0"/>
@@ -3544,7 +3545,7 @@
           <p:cNvPr id="9" name="product-mask">
             <a:extLst xmlns:a="http://schemas.openxmlformats.org/drawingml/2006/main">
               <a:ext uri="{FF2B5EF4-FFF2-40B4-BE49-F238E27FC236}">
-                <a16:creationId xmlns:a16="http://schemas.microsoft.com/office/drawing/2014/main" id="{EE2E2D41-5816-469E-AB5D-D2A53F1FBB7C}"/>
+                <a16:creationId xmlns:a16="http://schemas.microsoft.com/office/drawing/2014/main" id="{AF7F66EE-75AA-44DF-9131-63471C022582}"/>
               </a:ext>
             </a:extLst>
           </p:cNvPr>
@@ -3577,7 +3578,7 @@
           <p:cNvPr id="10" name="product-mask-copy">
             <a:extLst xmlns:a="http://schemas.openxmlformats.org/drawingml/2006/main">
               <a:ext uri="{FF2B5EF4-FFF2-40B4-BE49-F238E27FC236}">
-                <a16:creationId xmlns:a16="http://schemas.microsoft.com/office/drawing/2014/main" id="{3400BC87-1B46-4448-B5C2-268CA5127A41}"/>
+                <a16:creationId xmlns:a16="http://schemas.microsoft.com/office/drawing/2014/main" id="{93513561-D5A8-4F72-BC60-7A1F23FD2DAE}"/>
               </a:ext>
             </a:extLst>
           </p:cNvPr>
@@ -3622,7 +3623,7 @@
           <p:cNvPr id="11" name="product-mask-subcopy">
             <a:extLst xmlns:a="http://schemas.openxmlformats.org/drawingml/2006/main">
               <a:ext uri="{FF2B5EF4-FFF2-40B4-BE49-F238E27FC236}">
-                <a16:creationId xmlns:a16="http://schemas.microsoft.com/office/drawing/2014/main" id="{7AA43EFA-20C6-416D-BA01-7134A61DFB4B}"/>
+                <a16:creationId xmlns:a16="http://schemas.microsoft.com/office/drawing/2014/main" id="{F325C2DD-EFA2-43ED-B582-34DEF617C256}"/>
               </a:ext>
             </a:extLst>
           </p:cNvPr>
@@ -3665,7 +3666,7 @@
     </p:spTree>
     <p:extLst>
       <p:ext uri="{BB962C8B-B14F-4D97-AF65-F5344CB8AC3E}">
-        <p14:creationId xmlns:p14="http://schemas.microsoft.com/office/powerpoint/2010/main" val="1566091667"/>
+        <p14:creationId xmlns:p14="http://schemas.microsoft.com/office/powerpoint/2010/main" val="1554764577"/>
       </p:ext>
     </p:extLst>
   </p:cSld>
@@ -3696,7 +3697,7 @@
           <p:cNvPr id="26" name="title-11">
             <a:extLst xmlns:a="http://schemas.openxmlformats.org/drawingml/2006/main">
               <a:ext uri="{FF2B5EF4-FFF2-40B4-BE49-F238E27FC236}">
-                <a16:creationId xmlns:a16="http://schemas.microsoft.com/office/drawing/2014/main" id="{4BBFF05A-DB1A-43E9-B33F-3C6C32342FCB}"/>
+                <a16:creationId xmlns:a16="http://schemas.microsoft.com/office/drawing/2014/main" id="{F3B6E8D7-9739-4977-AD19-5AC32E782B0E}"/>
               </a:ext>
             </a:extLst>
           </p:cNvPr>
@@ -3741,7 +3742,7 @@
           <p:cNvPr id="2" name="source-11">
             <a:extLst xmlns:a="http://schemas.openxmlformats.org/drawingml/2006/main">
               <a:ext uri="{FF2B5EF4-FFF2-40B4-BE49-F238E27FC236}">
-                <a16:creationId xmlns:a16="http://schemas.microsoft.com/office/drawing/2014/main" id="{A1ED67E4-3683-4C5A-BACA-73D4F5F115C8}"/>
+                <a16:creationId xmlns:a16="http://schemas.microsoft.com/office/drawing/2014/main" id="{3043B9B6-E81A-4E43-BFCC-B4EAE7ABB70D}"/>
               </a:ext>
             </a:extLst>
           </p:cNvPr>
@@ -3786,7 +3787,7 @@
           <p:cNvPr id="3" name="page-11">
             <a:extLst xmlns:a="http://schemas.openxmlformats.org/drawingml/2006/main">
               <a:ext uri="{FF2B5EF4-FFF2-40B4-BE49-F238E27FC236}">
-                <a16:creationId xmlns:a16="http://schemas.microsoft.com/office/drawing/2014/main" id="{FA7BB8DF-83ED-4AE5-A729-61F959A6EF04}"/>
+                <a16:creationId xmlns:a16="http://schemas.microsoft.com/office/drawing/2014/main" id="{E6737DEE-5F9E-4F84-9877-535EEDA584D4}"/>
               </a:ext>
             </a:extLst>
           </p:cNvPr>
@@ -3831,7 +3832,7 @@
           <p:cNvPr id="4" name="limits-lead">
             <a:extLst xmlns:a="http://schemas.openxmlformats.org/drawingml/2006/main">
               <a:ext uri="{FF2B5EF4-FFF2-40B4-BE49-F238E27FC236}">
-                <a16:creationId xmlns:a16="http://schemas.microsoft.com/office/drawing/2014/main" id="{458E9E20-7FA8-494D-BB57-BDC2A4A6F056}"/>
+                <a16:creationId xmlns:a16="http://schemas.microsoft.com/office/drawing/2014/main" id="{BA51CD8B-A43F-414C-AA24-22A35706A6AA}"/>
               </a:ext>
             </a:extLst>
           </p:cNvPr>
@@ -3898,7 +3899,7 @@
           <p:cNvPr id="6" name="limits-left-title">
             <a:extLst xmlns:a="http://schemas.openxmlformats.org/drawingml/2006/main">
               <a:ext uri="{FF2B5EF4-FFF2-40B4-BE49-F238E27FC236}">
-                <a16:creationId xmlns:a16="http://schemas.microsoft.com/office/drawing/2014/main" id="{2B010F2C-CD01-4831-943E-D50EC248D429}"/>
+                <a16:creationId xmlns:a16="http://schemas.microsoft.com/office/drawing/2014/main" id="{4EB8064A-0538-41D2-B2B0-711AF12841AE}"/>
               </a:ext>
             </a:extLst>
           </p:cNvPr>
@@ -3943,7 +3944,7 @@
           <p:cNvPr id="7" name="limits-right-title">
             <a:extLst xmlns:a="http://schemas.openxmlformats.org/drawingml/2006/main">
               <a:ext uri="{FF2B5EF4-FFF2-40B4-BE49-F238E27FC236}">
-                <a16:creationId xmlns:a16="http://schemas.microsoft.com/office/drawing/2014/main" id="{F80A7937-AE6F-4883-A1C9-631E459A5D5C}"/>
+                <a16:creationId xmlns:a16="http://schemas.microsoft.com/office/drawing/2014/main" id="{8C3523F2-D224-4861-8E9A-D9414044347B}"/>
               </a:ext>
             </a:extLst>
           </p:cNvPr>
@@ -3988,7 +3989,7 @@
           <p:cNvPr id="8" name="limit-dot-0">
             <a:extLst xmlns:a="http://schemas.openxmlformats.org/drawingml/2006/main">
               <a:ext uri="{FF2B5EF4-FFF2-40B4-BE49-F238E27FC236}">
-                <a16:creationId xmlns:a16="http://schemas.microsoft.com/office/drawing/2014/main" id="{4B4CB273-96C9-4A7D-AD3F-1DB66B2D1664}"/>
+                <a16:creationId xmlns:a16="http://schemas.microsoft.com/office/drawing/2014/main" id="{8E41C597-41AA-4F1E-BA93-B39EF4B9C869}"/>
               </a:ext>
             </a:extLst>
           </p:cNvPr>
@@ -4021,7 +4022,7 @@
           <p:cNvPr id="9" name="limit-copy-0">
             <a:extLst xmlns:a="http://schemas.openxmlformats.org/drawingml/2006/main">
               <a:ext uri="{FF2B5EF4-FFF2-40B4-BE49-F238E27FC236}">
-                <a16:creationId xmlns:a16="http://schemas.microsoft.com/office/drawing/2014/main" id="{DADC4C46-CD09-4830-B207-AFFE631BD1A1}"/>
+                <a16:creationId xmlns:a16="http://schemas.microsoft.com/office/drawing/2014/main" id="{02000E97-5EA6-4596-97D2-92B05592A5E6}"/>
               </a:ext>
             </a:extLst>
           </p:cNvPr>
@@ -4066,7 +4067,7 @@
           <p:cNvPr id="10" name="mit-dot-0">
             <a:extLst xmlns:a="http://schemas.openxmlformats.org/drawingml/2006/main">
               <a:ext uri="{FF2B5EF4-FFF2-40B4-BE49-F238E27FC236}">
-                <a16:creationId xmlns:a16="http://schemas.microsoft.com/office/drawing/2014/main" id="{7DF84267-BB72-40BF-BCB7-78360A228851}"/>
+                <a16:creationId xmlns:a16="http://schemas.microsoft.com/office/drawing/2014/main" id="{3687C15A-B31F-4FB2-A8DB-DE4A273A6101}"/>
               </a:ext>
             </a:extLst>
           </p:cNvPr>
@@ -4099,7 +4100,7 @@
           <p:cNvPr id="11" name="mit-copy-0">
             <a:extLst xmlns:a="http://schemas.openxmlformats.org/drawingml/2006/main">
               <a:ext uri="{FF2B5EF4-FFF2-40B4-BE49-F238E27FC236}">
-                <a16:creationId xmlns:a16="http://schemas.microsoft.com/office/drawing/2014/main" id="{6FBECAE1-2BC3-47C3-A156-64EC6A683356}"/>
+                <a16:creationId xmlns:a16="http://schemas.microsoft.com/office/drawing/2014/main" id="{7D6624FC-2873-4AAF-ADF3-1282A9642382}"/>
               </a:ext>
             </a:extLst>
           </p:cNvPr>
@@ -4144,7 +4145,7 @@
           <p:cNvPr id="12" name="limit-dot-1">
             <a:extLst xmlns:a="http://schemas.openxmlformats.org/drawingml/2006/main">
               <a:ext uri="{FF2B5EF4-FFF2-40B4-BE49-F238E27FC236}">
-                <a16:creationId xmlns:a16="http://schemas.microsoft.com/office/drawing/2014/main" id="{AA4A3F48-4FB0-47DF-9EA6-A403CBA6BFCB}"/>
+                <a16:creationId xmlns:a16="http://schemas.microsoft.com/office/drawing/2014/main" id="{F1B494AD-B630-48F6-8564-49731A87029F}"/>
               </a:ext>
             </a:extLst>
           </p:cNvPr>
@@ -4177,7 +4178,7 @@
           <p:cNvPr id="13" name="limit-copy-1">
             <a:extLst xmlns:a="http://schemas.openxmlformats.org/drawingml/2006/main">
               <a:ext uri="{FF2B5EF4-FFF2-40B4-BE49-F238E27FC236}">
-                <a16:creationId xmlns:a16="http://schemas.microsoft.com/office/drawing/2014/main" id="{F7D00C48-914E-454D-89CB-9EBF5C9E3A8B}"/>
+                <a16:creationId xmlns:a16="http://schemas.microsoft.com/office/drawing/2014/main" id="{62879143-5950-4263-A6E2-519A1141F1F7}"/>
               </a:ext>
             </a:extLst>
           </p:cNvPr>
@@ -4222,7 +4223,7 @@
           <p:cNvPr id="14" name="mit-dot-1">
             <a:extLst xmlns:a="http://schemas.openxmlformats.org/drawingml/2006/main">
               <a:ext uri="{FF2B5EF4-FFF2-40B4-BE49-F238E27FC236}">
-                <a16:creationId xmlns:a16="http://schemas.microsoft.com/office/drawing/2014/main" id="{6EE432FE-82D6-493A-873C-B72EAB17E7FF}"/>
+                <a16:creationId xmlns:a16="http://schemas.microsoft.com/office/drawing/2014/main" id="{73D154C2-1319-4AD5-87B8-FDD31B55A068}"/>
               </a:ext>
             </a:extLst>
           </p:cNvPr>
@@ -4255,7 +4256,7 @@
           <p:cNvPr id="15" name="mit-copy-1">
             <a:extLst xmlns:a="http://schemas.openxmlformats.org/drawingml/2006/main">
               <a:ext uri="{FF2B5EF4-FFF2-40B4-BE49-F238E27FC236}">
-                <a16:creationId xmlns:a16="http://schemas.microsoft.com/office/drawing/2014/main" id="{ED4267F0-704D-4A72-BAEB-1D174DBE7A50}"/>
+                <a16:creationId xmlns:a16="http://schemas.microsoft.com/office/drawing/2014/main" id="{03BD5A2F-3CB4-4FC1-B19E-63216D91C620}"/>
               </a:ext>
             </a:extLst>
           </p:cNvPr>
@@ -4300,7 +4301,7 @@
           <p:cNvPr id="16" name="limit-dot-2">
             <a:extLst xmlns:a="http://schemas.openxmlformats.org/drawingml/2006/main">
               <a:ext uri="{FF2B5EF4-FFF2-40B4-BE49-F238E27FC236}">
-                <a16:creationId xmlns:a16="http://schemas.microsoft.com/office/drawing/2014/main" id="{3B21C23A-E168-481A-966F-031DAA995DF4}"/>
+                <a16:creationId xmlns:a16="http://schemas.microsoft.com/office/drawing/2014/main" id="{9C708776-07DD-49AA-AE4C-2E01EB4F39B4}"/>
               </a:ext>
             </a:extLst>
           </p:cNvPr>
@@ -4333,7 +4334,7 @@
           <p:cNvPr id="17" name="limit-copy-2">
             <a:extLst xmlns:a="http://schemas.openxmlformats.org/drawingml/2006/main">
               <a:ext uri="{FF2B5EF4-FFF2-40B4-BE49-F238E27FC236}">
-                <a16:creationId xmlns:a16="http://schemas.microsoft.com/office/drawing/2014/main" id="{EC936815-BBEA-461B-A016-EE78461B8C4C}"/>
+                <a16:creationId xmlns:a16="http://schemas.microsoft.com/office/drawing/2014/main" id="{DB854338-70CC-4528-B829-E22E6A446E45}"/>
               </a:ext>
             </a:extLst>
           </p:cNvPr>
@@ -4378,7 +4379,7 @@
           <p:cNvPr id="18" name="mit-dot-2">
             <a:extLst xmlns:a="http://schemas.openxmlformats.org/drawingml/2006/main">
               <a:ext uri="{FF2B5EF4-FFF2-40B4-BE49-F238E27FC236}">
-                <a16:creationId xmlns:a16="http://schemas.microsoft.com/office/drawing/2014/main" id="{79604495-474E-4179-8EDE-3BBA8CE5E137}"/>
+                <a16:creationId xmlns:a16="http://schemas.microsoft.com/office/drawing/2014/main" id="{13C097CF-CB30-44E8-925F-2C84637293C7}"/>
               </a:ext>
             </a:extLst>
           </p:cNvPr>
@@ -4411,7 +4412,7 @@
           <p:cNvPr id="19" name="mit-copy-2">
             <a:extLst xmlns:a="http://schemas.openxmlformats.org/drawingml/2006/main">
               <a:ext uri="{FF2B5EF4-FFF2-40B4-BE49-F238E27FC236}">
-                <a16:creationId xmlns:a16="http://schemas.microsoft.com/office/drawing/2014/main" id="{0E4E0922-2343-4572-9FC9-11F7B63E88C2}"/>
+                <a16:creationId xmlns:a16="http://schemas.microsoft.com/office/drawing/2014/main" id="{F94180CC-1BF2-4449-81E4-18C301440C7C}"/>
               </a:ext>
             </a:extLst>
           </p:cNvPr>
@@ -4456,7 +4457,7 @@
           <p:cNvPr id="20" name="limit-dot-3">
             <a:extLst xmlns:a="http://schemas.openxmlformats.org/drawingml/2006/main">
               <a:ext uri="{FF2B5EF4-FFF2-40B4-BE49-F238E27FC236}">
-                <a16:creationId xmlns:a16="http://schemas.microsoft.com/office/drawing/2014/main" id="{F058B7EB-37EE-44BF-A590-1D268A52DEE2}"/>
+                <a16:creationId xmlns:a16="http://schemas.microsoft.com/office/drawing/2014/main" id="{179EF765-3F3B-4FDB-B316-44C3F3C771E5}"/>
               </a:ext>
             </a:extLst>
           </p:cNvPr>
@@ -4489,7 +4490,7 @@
           <p:cNvPr id="21" name="limit-copy-3">
             <a:extLst xmlns:a="http://schemas.openxmlformats.org/drawingml/2006/main">
               <a:ext uri="{FF2B5EF4-FFF2-40B4-BE49-F238E27FC236}">
-                <a16:creationId xmlns:a16="http://schemas.microsoft.com/office/drawing/2014/main" id="{03AC0479-EAC2-4F90-BD08-B31BBF420521}"/>
+                <a16:creationId xmlns:a16="http://schemas.microsoft.com/office/drawing/2014/main" id="{A1BA1B03-3DC4-47C5-B4C7-F8D307BBE16E}"/>
               </a:ext>
             </a:extLst>
           </p:cNvPr>
@@ -4534,7 +4535,7 @@
           <p:cNvPr id="22" name="mit-dot-3">
             <a:extLst xmlns:a="http://schemas.openxmlformats.org/drawingml/2006/main">
               <a:ext uri="{FF2B5EF4-FFF2-40B4-BE49-F238E27FC236}">
-                <a16:creationId xmlns:a16="http://schemas.microsoft.com/office/drawing/2014/main" id="{98FA0BED-1842-4B25-9AE6-B9C807A5CAC3}"/>
+                <a16:creationId xmlns:a16="http://schemas.microsoft.com/office/drawing/2014/main" id="{0D90BAD7-5FB7-43BE-96BC-75C5F70B4C4C}"/>
               </a:ext>
             </a:extLst>
           </p:cNvPr>
@@ -4567,7 +4568,7 @@
           <p:cNvPr id="23" name="mit-copy-3">
             <a:extLst xmlns:a="http://schemas.openxmlformats.org/drawingml/2006/main">
               <a:ext uri="{FF2B5EF4-FFF2-40B4-BE49-F238E27FC236}">
-                <a16:creationId xmlns:a16="http://schemas.microsoft.com/office/drawing/2014/main" id="{8DB310D9-3BC1-4794-B741-EF256C4208A8}"/>
+                <a16:creationId xmlns:a16="http://schemas.microsoft.com/office/drawing/2014/main" id="{6C69A5D9-5AA0-4AA2-ADFE-79A5E8BA0457}"/>
               </a:ext>
             </a:extLst>
           </p:cNvPr>
@@ -4612,7 +4613,7 @@
           <p:cNvPr id="24" name="not-advice">
             <a:extLst xmlns:a="http://schemas.openxmlformats.org/drawingml/2006/main">
               <a:ext uri="{FF2B5EF4-FFF2-40B4-BE49-F238E27FC236}">
-                <a16:creationId xmlns:a16="http://schemas.microsoft.com/office/drawing/2014/main" id="{E341E591-6528-4876-9BC4-9D123655F69B}"/>
+                <a16:creationId xmlns:a16="http://schemas.microsoft.com/office/drawing/2014/main" id="{4A5D1CB5-11AC-4F57-BD9D-11A701D70129}"/>
               </a:ext>
             </a:extLst>
           </p:cNvPr>
@@ -4645,7 +4646,7 @@
           <p:cNvPr id="25" name="not-advice-text">
             <a:extLst xmlns:a="http://schemas.openxmlformats.org/drawingml/2006/main">
               <a:ext uri="{FF2B5EF4-FFF2-40B4-BE49-F238E27FC236}">
-                <a16:creationId xmlns:a16="http://schemas.microsoft.com/office/drawing/2014/main" id="{6EEDBEA8-D767-498C-B514-A6548A2BC235}"/>
+                <a16:creationId xmlns:a16="http://schemas.microsoft.com/office/drawing/2014/main" id="{35EEE9E7-5204-4228-9C05-DF358CBB88F1}"/>
               </a:ext>
             </a:extLst>
           </p:cNvPr>
@@ -4688,7 +4689,7 @@
     </p:spTree>
     <p:extLst>
       <p:ext uri="{BB962C8B-B14F-4D97-AF65-F5344CB8AC3E}">
-        <p14:creationId xmlns:p14="http://schemas.microsoft.com/office/powerpoint/2010/main" val="2060607795"/>
+        <p14:creationId xmlns:p14="http://schemas.microsoft.com/office/powerpoint/2010/main" val="916866484"/>
       </p:ext>
     </p:extLst>
   </p:cSld>
@@ -4719,7 +4720,7 @@
           <p:cNvPr id="7" name="conclusion-kicker">
             <a:extLst xmlns:a="http://schemas.openxmlformats.org/drawingml/2006/main">
               <a:ext uri="{FF2B5EF4-FFF2-40B4-BE49-F238E27FC236}">
-                <a16:creationId xmlns:a16="http://schemas.microsoft.com/office/drawing/2014/main" id="{9527694B-1903-4275-A679-9A94340EB5E9}"/>
+                <a16:creationId xmlns:a16="http://schemas.microsoft.com/office/drawing/2014/main" id="{B3FD4219-6ECA-4418-A85A-E17D7721E302}"/>
               </a:ext>
             </a:extLst>
           </p:cNvPr>
@@ -4764,7 +4765,7 @@
           <p:cNvPr id="2" name="conclusion-title">
             <a:extLst xmlns:a="http://schemas.openxmlformats.org/drawingml/2006/main">
               <a:ext uri="{FF2B5EF4-FFF2-40B4-BE49-F238E27FC236}">
-                <a16:creationId xmlns:a16="http://schemas.microsoft.com/office/drawing/2014/main" id="{08F4DD74-A46E-4D43-B356-8E5EB251FE7B}"/>
+                <a16:creationId xmlns:a16="http://schemas.microsoft.com/office/drawing/2014/main" id="{F9CF28D6-D87A-4C9F-B5BD-DDA8F4678FEC}"/>
               </a:ext>
             </a:extLst>
           </p:cNvPr>
@@ -4810,7 +4811,7 @@
           <p:cNvPr id="3" name="conclusion-proof">
             <a:extLst xmlns:a="http://schemas.openxmlformats.org/drawingml/2006/main">
               <a:ext uri="{FF2B5EF4-FFF2-40B4-BE49-F238E27FC236}">
-                <a16:creationId xmlns:a16="http://schemas.microsoft.com/office/drawing/2014/main" id="{4B54F1A7-18D8-46FB-9692-7FC3D574E41A}"/>
+                <a16:creationId xmlns:a16="http://schemas.microsoft.com/office/drawing/2014/main" id="{82832F94-88CF-4501-96D0-EC101EBAC9EB}"/>
               </a:ext>
             </a:extLst>
           </p:cNvPr>
@@ -4877,7 +4878,7 @@
           <p:cNvPr id="5" name="conclusion-close">
             <a:extLst xmlns:a="http://schemas.openxmlformats.org/drawingml/2006/main">
               <a:ext uri="{FF2B5EF4-FFF2-40B4-BE49-F238E27FC236}">
-                <a16:creationId xmlns:a16="http://schemas.microsoft.com/office/drawing/2014/main" id="{CCAE4B8C-9E84-4819-A9C1-C01A18C10CF5}"/>
+                <a16:creationId xmlns:a16="http://schemas.microsoft.com/office/drawing/2014/main" id="{B4865161-FB30-4C11-85FA-A764E3EDE539}"/>
               </a:ext>
             </a:extLst>
           </p:cNvPr>
@@ -4922,7 +4923,7 @@
           <p:cNvPr id="6" name="conclusion-page">
             <a:extLst xmlns:a="http://schemas.openxmlformats.org/drawingml/2006/main">
               <a:ext uri="{FF2B5EF4-FFF2-40B4-BE49-F238E27FC236}">
-                <a16:creationId xmlns:a16="http://schemas.microsoft.com/office/drawing/2014/main" id="{96D2B463-2AAB-42AF-BE55-1AC775682BBE}"/>
+                <a16:creationId xmlns:a16="http://schemas.microsoft.com/office/drawing/2014/main" id="{35EE5F8C-A8D1-485E-B79A-C2894CA368D0}"/>
               </a:ext>
             </a:extLst>
           </p:cNvPr>
@@ -4965,7 +4966,7 @@
     </p:spTree>
     <p:extLst>
       <p:ext uri="{BB962C8B-B14F-4D97-AF65-F5344CB8AC3E}">
-        <p14:creationId xmlns:p14="http://schemas.microsoft.com/office/powerpoint/2010/main" val="1478105598"/>
+        <p14:creationId xmlns:p14="http://schemas.microsoft.com/office/powerpoint/2010/main" val="1279290700"/>
       </p:ext>
     </p:extLst>
   </p:cSld>
@@ -4996,7 +4997,7 @@
           <p:cNvPr id="13" name="title-13">
             <a:extLst xmlns:a="http://schemas.openxmlformats.org/drawingml/2006/main">
               <a:ext uri="{FF2B5EF4-FFF2-40B4-BE49-F238E27FC236}">
-                <a16:creationId xmlns:a16="http://schemas.microsoft.com/office/drawing/2014/main" id="{93696119-DDA9-4A2C-9A48-982602F660AD}"/>
+                <a16:creationId xmlns:a16="http://schemas.microsoft.com/office/drawing/2014/main" id="{BEB0394B-702D-45B8-BD53-85E26D42040D}"/>
               </a:ext>
             </a:extLst>
           </p:cNvPr>
@@ -5041,7 +5042,7 @@
           <p:cNvPr id="2" name="source-13">
             <a:extLst xmlns:a="http://schemas.openxmlformats.org/drawingml/2006/main">
               <a:ext uri="{FF2B5EF4-FFF2-40B4-BE49-F238E27FC236}">
-                <a16:creationId xmlns:a16="http://schemas.microsoft.com/office/drawing/2014/main" id="{83707F87-5B9C-4B66-9D9C-29A20FD6797D}"/>
+                <a16:creationId xmlns:a16="http://schemas.microsoft.com/office/drawing/2014/main" id="{E531939F-152B-4C54-8CCD-D775035C327D}"/>
               </a:ext>
             </a:extLst>
           </p:cNvPr>
@@ -5086,7 +5087,7 @@
           <p:cNvPr id="3" name="page-13">
             <a:extLst xmlns:a="http://schemas.openxmlformats.org/drawingml/2006/main">
               <a:ext uri="{FF2B5EF4-FFF2-40B4-BE49-F238E27FC236}">
-                <a16:creationId xmlns:a16="http://schemas.microsoft.com/office/drawing/2014/main" id="{EA57FBD8-CDCA-44DD-91FA-4E6FE52127B6}"/>
+                <a16:creationId xmlns:a16="http://schemas.microsoft.com/office/drawing/2014/main" id="{1BA36FF2-778B-40BE-9CD4-34CCEE442688}"/>
               </a:ext>
             </a:extLst>
           </p:cNvPr>
@@ -5131,7 +5132,7 @@
           <p:cNvPr id="4" name="sources-one-title">
             <a:extLst xmlns:a="http://schemas.openxmlformats.org/drawingml/2006/main">
               <a:ext uri="{FF2B5EF4-FFF2-40B4-BE49-F238E27FC236}">
-                <a16:creationId xmlns:a16="http://schemas.microsoft.com/office/drawing/2014/main" id="{9D66DAA3-8D4C-473A-A299-284DDB9309E3}"/>
+                <a16:creationId xmlns:a16="http://schemas.microsoft.com/office/drawing/2014/main" id="{9E5DD94F-3496-40CF-9132-DBFF9A919E63}"/>
               </a:ext>
             </a:extLst>
           </p:cNvPr>
@@ -5176,7 +5177,7 @@
           <p:cNvPr id="5" name="sources-one-body">
             <a:extLst xmlns:a="http://schemas.openxmlformats.org/drawingml/2006/main">
               <a:ext uri="{FF2B5EF4-FFF2-40B4-BE49-F238E27FC236}">
-                <a16:creationId xmlns:a16="http://schemas.microsoft.com/office/drawing/2014/main" id="{4C5D4375-07B4-41A0-BE93-58DA547ADD4D}"/>
+                <a16:creationId xmlns:a16="http://schemas.microsoft.com/office/drawing/2014/main" id="{2742AB32-A755-4259-A019-003B8E9C0778}"/>
               </a:ext>
             </a:extLst>
           </p:cNvPr>
@@ -5223,7 +5224,7 @@
           <p:cNvPr id="6" name="sources-two-title">
             <a:extLst xmlns:a="http://schemas.openxmlformats.org/drawingml/2006/main">
               <a:ext uri="{FF2B5EF4-FFF2-40B4-BE49-F238E27FC236}">
-                <a16:creationId xmlns:a16="http://schemas.microsoft.com/office/drawing/2014/main" id="{BD00628D-D27A-4E7B-B080-0667B2553618}"/>
+                <a16:creationId xmlns:a16="http://schemas.microsoft.com/office/drawing/2014/main" id="{55F1DBB8-28E0-4456-8774-7C628A87B1B3}"/>
               </a:ext>
             </a:extLst>
           </p:cNvPr>
@@ -5268,7 +5269,7 @@
           <p:cNvPr id="7" name="sources-two-body">
             <a:extLst xmlns:a="http://schemas.openxmlformats.org/drawingml/2006/main">
               <a:ext uri="{FF2B5EF4-FFF2-40B4-BE49-F238E27FC236}">
-                <a16:creationId xmlns:a16="http://schemas.microsoft.com/office/drawing/2014/main" id="{CE03C17D-4814-4EA0-83A5-2BF38B9AE04F}"/>
+                <a16:creationId xmlns:a16="http://schemas.microsoft.com/office/drawing/2014/main" id="{E4103BF6-AE93-4ED1-8ED4-D23B3DDCC87C}"/>
               </a:ext>
             </a:extLst>
           </p:cNvPr>
@@ -5337,7 +5338,7 @@
           <p:cNvPr id="9" name="sources-repro-title">
             <a:extLst xmlns:a="http://schemas.openxmlformats.org/drawingml/2006/main">
               <a:ext uri="{FF2B5EF4-FFF2-40B4-BE49-F238E27FC236}">
-                <a16:creationId xmlns:a16="http://schemas.microsoft.com/office/drawing/2014/main" id="{7D30E10B-C1C0-4649-823C-19DCBA43DAAB}"/>
+                <a16:creationId xmlns:a16="http://schemas.microsoft.com/office/drawing/2014/main" id="{546C87BE-C9E6-4C7F-A6FB-776C6C4DFBCB}"/>
               </a:ext>
             </a:extLst>
           </p:cNvPr>
@@ -5382,7 +5383,7 @@
           <p:cNvPr id="10" name="sources-repro-body">
             <a:extLst xmlns:a="http://schemas.openxmlformats.org/drawingml/2006/main">
               <a:ext uri="{FF2B5EF4-FFF2-40B4-BE49-F238E27FC236}">
-                <a16:creationId xmlns:a16="http://schemas.microsoft.com/office/drawing/2014/main" id="{E05FECC3-DCE5-4817-9816-D3DBE01C33A9}"/>
+                <a16:creationId xmlns:a16="http://schemas.microsoft.com/office/drawing/2014/main" id="{CEC07F85-8AA3-4BEE-B45E-ED89E3D448C9}"/>
               </a:ext>
             </a:extLst>
           </p:cNvPr>
@@ -5427,7 +5428,7 @@
           <p:cNvPr id="11" name="sources-code">
             <a:extLst xmlns:a="http://schemas.openxmlformats.org/drawingml/2006/main">
               <a:ext uri="{FF2B5EF4-FFF2-40B4-BE49-F238E27FC236}">
-                <a16:creationId xmlns:a16="http://schemas.microsoft.com/office/drawing/2014/main" id="{4E41CA60-901F-4354-BD8F-60B8F01062E8}"/>
+                <a16:creationId xmlns:a16="http://schemas.microsoft.com/office/drawing/2014/main" id="{12AD8F1C-D4D0-4E2D-84C4-DEF78205EC3B}"/>
               </a:ext>
             </a:extLst>
           </p:cNvPr>
@@ -5460,7 +5461,7 @@
           <p:cNvPr id="12" name="sources-code-text">
             <a:extLst xmlns:a="http://schemas.openxmlformats.org/drawingml/2006/main">
               <a:ext uri="{FF2B5EF4-FFF2-40B4-BE49-F238E27FC236}">
-                <a16:creationId xmlns:a16="http://schemas.microsoft.com/office/drawing/2014/main" id="{FFA51586-FF4A-4DE9-9396-42997E71607C}"/>
+                <a16:creationId xmlns:a16="http://schemas.microsoft.com/office/drawing/2014/main" id="{4BB8B597-4D8A-4FD4-B84A-0F958678BC47}"/>
               </a:ext>
             </a:extLst>
           </p:cNvPr>
@@ -5503,7 +5504,7 @@
     </p:spTree>
     <p:extLst>
       <p:ext uri="{BB962C8B-B14F-4D97-AF65-F5344CB8AC3E}">
-        <p14:creationId xmlns:p14="http://schemas.microsoft.com/office/powerpoint/2010/main" val="484726908"/>
+        <p14:creationId xmlns:p14="http://schemas.microsoft.com/office/powerpoint/2010/main" val="747513772"/>
       </p:ext>
     </p:extLst>
   </p:cSld>
@@ -5534,7 +5535,7 @@
           <p:cNvPr id="7" name="title-14">
             <a:extLst xmlns:a="http://schemas.openxmlformats.org/drawingml/2006/main">
               <a:ext uri="{FF2B5EF4-FFF2-40B4-BE49-F238E27FC236}">
-                <a16:creationId xmlns:a16="http://schemas.microsoft.com/office/drawing/2014/main" id="{70EE301D-22A7-4C0A-B85F-C536BA243E6B}"/>
+                <a16:creationId xmlns:a16="http://schemas.microsoft.com/office/drawing/2014/main" id="{A24A7D28-A9C7-4580-A865-35AD7769F51B}"/>
               </a:ext>
             </a:extLst>
           </p:cNvPr>
@@ -5579,7 +5580,7 @@
           <p:cNvPr id="2" name="source-14">
             <a:extLst xmlns:a="http://schemas.openxmlformats.org/drawingml/2006/main">
               <a:ext uri="{FF2B5EF4-FFF2-40B4-BE49-F238E27FC236}">
-                <a16:creationId xmlns:a16="http://schemas.microsoft.com/office/drawing/2014/main" id="{25828580-A52B-43D5-B1A8-F105DAD304F3}"/>
+                <a16:creationId xmlns:a16="http://schemas.microsoft.com/office/drawing/2014/main" id="{2ABF3631-6D6A-4C2A-BDFC-EE21613870B8}"/>
               </a:ext>
             </a:extLst>
           </p:cNvPr>
@@ -5624,7 +5625,7 @@
           <p:cNvPr id="3" name="page-14">
             <a:extLst xmlns:a="http://schemas.openxmlformats.org/drawingml/2006/main">
               <a:ext uri="{FF2B5EF4-FFF2-40B4-BE49-F238E27FC236}">
-                <a16:creationId xmlns:a16="http://schemas.microsoft.com/office/drawing/2014/main" id="{CA090D69-9AC9-4B96-83BD-538A6A6C8E8D}"/>
+                <a16:creationId xmlns:a16="http://schemas.microsoft.com/office/drawing/2014/main" id="{5544BD15-CFC7-4F56-8C86-9D746950845D}"/>
               </a:ext>
             </a:extLst>
           </p:cNvPr>
@@ -5669,7 +5670,7 @@
           <p:cNvPr id="4" name="method-detail-lead">
             <a:extLst xmlns:a="http://schemas.openxmlformats.org/drawingml/2006/main">
               <a:ext uri="{FF2B5EF4-FFF2-40B4-BE49-F238E27FC236}">
-                <a16:creationId xmlns:a16="http://schemas.microsoft.com/office/drawing/2014/main" id="{0494C52F-47B3-439A-B14D-D8A3A7DDC374}"/>
+                <a16:creationId xmlns:a16="http://schemas.microsoft.com/office/drawing/2014/main" id="{C92C2A12-68B5-4B1C-A5F3-99CAF265623B}"/>
               </a:ext>
             </a:extLst>
           </p:cNvPr>
@@ -6136,7 +6137,7 @@
           <p:cNvPr id="6" name="method-detail-conclusion">
             <a:extLst xmlns:a="http://schemas.openxmlformats.org/drawingml/2006/main">
               <a:ext uri="{FF2B5EF4-FFF2-40B4-BE49-F238E27FC236}">
-                <a16:creationId xmlns:a16="http://schemas.microsoft.com/office/drawing/2014/main" id="{703B4447-B87B-4B15-A02D-CF08B288DAFD}"/>
+                <a16:creationId xmlns:a16="http://schemas.microsoft.com/office/drawing/2014/main" id="{BA5E43BA-78E6-466B-A2A3-167A4ABE0E7A}"/>
               </a:ext>
             </a:extLst>
           </p:cNvPr>
@@ -6179,7 +6180,7 @@
     </p:spTree>
     <p:extLst>
       <p:ext uri="{BB962C8B-B14F-4D97-AF65-F5344CB8AC3E}">
-        <p14:creationId xmlns:p14="http://schemas.microsoft.com/office/powerpoint/2010/main" val="1885169000"/>
+        <p14:creationId xmlns:p14="http://schemas.microsoft.com/office/powerpoint/2010/main" val="632947082"/>
       </p:ext>
     </p:extLst>
   </p:cSld>
@@ -6210,7 +6211,7 @@
           <p:cNvPr id="21" name="title-2">
             <a:extLst xmlns:a="http://schemas.openxmlformats.org/drawingml/2006/main">
               <a:ext uri="{FF2B5EF4-FFF2-40B4-BE49-F238E27FC236}">
-                <a16:creationId xmlns:a16="http://schemas.microsoft.com/office/drawing/2014/main" id="{5FAA324E-0DFB-4A56-B8C6-153098CD7E03}"/>
+                <a16:creationId xmlns:a16="http://schemas.microsoft.com/office/drawing/2014/main" id="{1B6F8710-3F68-40AC-8BCB-51DD842B0CE0}"/>
               </a:ext>
             </a:extLst>
           </p:cNvPr>
@@ -6255,7 +6256,7 @@
           <p:cNvPr id="2" name="source-2">
             <a:extLst xmlns:a="http://schemas.openxmlformats.org/drawingml/2006/main">
               <a:ext uri="{FF2B5EF4-FFF2-40B4-BE49-F238E27FC236}">
-                <a16:creationId xmlns:a16="http://schemas.microsoft.com/office/drawing/2014/main" id="{3CB24587-3765-4C73-8B08-3931D6B5ECCF}"/>
+                <a16:creationId xmlns:a16="http://schemas.microsoft.com/office/drawing/2014/main" id="{7103D617-DD69-43B5-A107-D2FE77C3CBDC}"/>
               </a:ext>
             </a:extLst>
           </p:cNvPr>
@@ -6300,7 +6301,7 @@
           <p:cNvPr id="3" name="page-2">
             <a:extLst xmlns:a="http://schemas.openxmlformats.org/drawingml/2006/main">
               <a:ext uri="{FF2B5EF4-FFF2-40B4-BE49-F238E27FC236}">
-                <a16:creationId xmlns:a16="http://schemas.microsoft.com/office/drawing/2014/main" id="{28E4AC30-8487-4A7F-AAC6-A972C4C5A6C1}"/>
+                <a16:creationId xmlns:a16="http://schemas.microsoft.com/office/drawing/2014/main" id="{9F3EB397-8F4E-455E-B897-19AB0E12902E}"/>
               </a:ext>
             </a:extLst>
           </p:cNvPr>
@@ -6345,7 +6346,7 @@
           <p:cNvPr id="4" name="three-lead">
             <a:extLst xmlns:a="http://schemas.openxmlformats.org/drawingml/2006/main">
               <a:ext uri="{FF2B5EF4-FFF2-40B4-BE49-F238E27FC236}">
-                <a16:creationId xmlns:a16="http://schemas.microsoft.com/office/drawing/2014/main" id="{281C62F7-95D5-4E3C-AAFD-87DDB7AA4671}"/>
+                <a16:creationId xmlns:a16="http://schemas.microsoft.com/office/drawing/2014/main" id="{32A6914D-DC33-472D-88EB-DE8262075941}"/>
               </a:ext>
             </a:extLst>
           </p:cNvPr>
@@ -6434,7 +6435,7 @@
           <p:cNvPr id="7" name="accent-0">
             <a:extLst xmlns:a="http://schemas.openxmlformats.org/drawingml/2006/main">
               <a:ext uri="{FF2B5EF4-FFF2-40B4-BE49-F238E27FC236}">
-                <a16:creationId xmlns:a16="http://schemas.microsoft.com/office/drawing/2014/main" id="{5B8BF3E1-641B-42A5-86E5-944EC3083CF3}"/>
+                <a16:creationId xmlns:a16="http://schemas.microsoft.com/office/drawing/2014/main" id="{346E8148-991E-4783-8E74-6F064FDA14E1}"/>
               </a:ext>
             </a:extLst>
           </p:cNvPr>
@@ -6467,7 +6468,7 @@
           <p:cNvPr id="8" name="reality-label-0">
             <a:extLst xmlns:a="http://schemas.openxmlformats.org/drawingml/2006/main">
               <a:ext uri="{FF2B5EF4-FFF2-40B4-BE49-F238E27FC236}">
-                <a16:creationId xmlns:a16="http://schemas.microsoft.com/office/drawing/2014/main" id="{0AB4AD9F-1936-49CA-B4D1-31E05223F695}"/>
+                <a16:creationId xmlns:a16="http://schemas.microsoft.com/office/drawing/2014/main" id="{D36E312E-B999-4D96-8E3A-AD6D5BDBC565}"/>
               </a:ext>
             </a:extLst>
           </p:cNvPr>
@@ -6512,7 +6513,7 @@
           <p:cNvPr id="9" name="reality-stat-0">
             <a:extLst xmlns:a="http://schemas.openxmlformats.org/drawingml/2006/main">
               <a:ext uri="{FF2B5EF4-FFF2-40B4-BE49-F238E27FC236}">
-                <a16:creationId xmlns:a16="http://schemas.microsoft.com/office/drawing/2014/main" id="{836CAD72-BF5F-439A-B7D6-4A88DA63AA6E}"/>
+                <a16:creationId xmlns:a16="http://schemas.microsoft.com/office/drawing/2014/main" id="{1BDE4B0C-52C4-4BA0-98C4-24C3C83656A2}"/>
               </a:ext>
             </a:extLst>
           </p:cNvPr>
@@ -6557,7 +6558,7 @@
           <p:cNvPr id="10" name="reality-body-0">
             <a:extLst xmlns:a="http://schemas.openxmlformats.org/drawingml/2006/main">
               <a:ext uri="{FF2B5EF4-FFF2-40B4-BE49-F238E27FC236}">
-                <a16:creationId xmlns:a16="http://schemas.microsoft.com/office/drawing/2014/main" id="{648F92E6-69B2-4F9A-8D68-B547EC10462E}"/>
+                <a16:creationId xmlns:a16="http://schemas.microsoft.com/office/drawing/2014/main" id="{F183CC51-04B9-4A22-B5FD-CEDA075F6A8F}"/>
               </a:ext>
             </a:extLst>
           </p:cNvPr>
@@ -6602,7 +6603,7 @@
           <p:cNvPr id="11" name="accent-1">
             <a:extLst xmlns:a="http://schemas.openxmlformats.org/drawingml/2006/main">
               <a:ext uri="{FF2B5EF4-FFF2-40B4-BE49-F238E27FC236}">
-                <a16:creationId xmlns:a16="http://schemas.microsoft.com/office/drawing/2014/main" id="{2EC37963-11E0-45E7-8789-DF272026B615}"/>
+                <a16:creationId xmlns:a16="http://schemas.microsoft.com/office/drawing/2014/main" id="{E31BB1CA-A8B8-4211-8FE2-8B83DE60AC3C}"/>
               </a:ext>
             </a:extLst>
           </p:cNvPr>
@@ -6635,7 +6636,7 @@
           <p:cNvPr id="12" name="reality-label-1">
             <a:extLst xmlns:a="http://schemas.openxmlformats.org/drawingml/2006/main">
               <a:ext uri="{FF2B5EF4-FFF2-40B4-BE49-F238E27FC236}">
-                <a16:creationId xmlns:a16="http://schemas.microsoft.com/office/drawing/2014/main" id="{86477400-0364-418E-89DD-8357BF1B39C5}"/>
+                <a16:creationId xmlns:a16="http://schemas.microsoft.com/office/drawing/2014/main" id="{F4D5F652-DA77-4096-B344-E4F2FC8DE36A}"/>
               </a:ext>
             </a:extLst>
           </p:cNvPr>
@@ -6680,7 +6681,7 @@
           <p:cNvPr id="13" name="reality-stat-1">
             <a:extLst xmlns:a="http://schemas.openxmlformats.org/drawingml/2006/main">
               <a:ext uri="{FF2B5EF4-FFF2-40B4-BE49-F238E27FC236}">
-                <a16:creationId xmlns:a16="http://schemas.microsoft.com/office/drawing/2014/main" id="{9C31B26C-9FF1-4026-96F1-3CFA865751F5}"/>
+                <a16:creationId xmlns:a16="http://schemas.microsoft.com/office/drawing/2014/main" id="{CA20D8C4-6EF2-4085-BE2B-2CD88EB65D7B}"/>
               </a:ext>
             </a:extLst>
           </p:cNvPr>
@@ -6725,7 +6726,7 @@
           <p:cNvPr id="14" name="reality-body-1">
             <a:extLst xmlns:a="http://schemas.openxmlformats.org/drawingml/2006/main">
               <a:ext uri="{FF2B5EF4-FFF2-40B4-BE49-F238E27FC236}">
-                <a16:creationId xmlns:a16="http://schemas.microsoft.com/office/drawing/2014/main" id="{E4D71CD3-15BE-4AC7-91D7-DCF614E0EEC9}"/>
+                <a16:creationId xmlns:a16="http://schemas.microsoft.com/office/drawing/2014/main" id="{B2489FD6-FCD1-4EBC-8BE2-76C64C12ABA5}"/>
               </a:ext>
             </a:extLst>
           </p:cNvPr>
@@ -6770,7 +6771,7 @@
           <p:cNvPr id="15" name="accent-2">
             <a:extLst xmlns:a="http://schemas.openxmlformats.org/drawingml/2006/main">
               <a:ext uri="{FF2B5EF4-FFF2-40B4-BE49-F238E27FC236}">
-                <a16:creationId xmlns:a16="http://schemas.microsoft.com/office/drawing/2014/main" id="{A156479A-3D15-4E55-89DF-232C4BF7F82C}"/>
+                <a16:creationId xmlns:a16="http://schemas.microsoft.com/office/drawing/2014/main" id="{09052263-7A2C-4758-A339-D646A5635053}"/>
               </a:ext>
             </a:extLst>
           </p:cNvPr>
@@ -6803,7 +6804,7 @@
           <p:cNvPr id="16" name="reality-label-2">
             <a:extLst xmlns:a="http://schemas.openxmlformats.org/drawingml/2006/main">
               <a:ext uri="{FF2B5EF4-FFF2-40B4-BE49-F238E27FC236}">
-                <a16:creationId xmlns:a16="http://schemas.microsoft.com/office/drawing/2014/main" id="{A352DE9D-41C9-45FB-8B70-A9EA637ED705}"/>
+                <a16:creationId xmlns:a16="http://schemas.microsoft.com/office/drawing/2014/main" id="{CCF5514B-5D8A-4F81-AA4A-6F563EFDD86C}"/>
               </a:ext>
             </a:extLst>
           </p:cNvPr>
@@ -6848,7 +6849,7 @@
           <p:cNvPr id="17" name="reality-stat-2">
             <a:extLst xmlns:a="http://schemas.openxmlformats.org/drawingml/2006/main">
               <a:ext uri="{FF2B5EF4-FFF2-40B4-BE49-F238E27FC236}">
-                <a16:creationId xmlns:a16="http://schemas.microsoft.com/office/drawing/2014/main" id="{50BA2036-C596-4974-B3BB-36281496351D}"/>
+                <a16:creationId xmlns:a16="http://schemas.microsoft.com/office/drawing/2014/main" id="{F4E6999A-C800-4C17-8DC7-BF3D6F39F714}"/>
               </a:ext>
             </a:extLst>
           </p:cNvPr>
@@ -6893,7 +6894,7 @@
           <p:cNvPr id="18" name="reality-body-2">
             <a:extLst xmlns:a="http://schemas.openxmlformats.org/drawingml/2006/main">
               <a:ext uri="{FF2B5EF4-FFF2-40B4-BE49-F238E27FC236}">
-                <a16:creationId xmlns:a16="http://schemas.microsoft.com/office/drawing/2014/main" id="{6DBBC3B1-681D-4797-A242-51AB12D994B5}"/>
+                <a16:creationId xmlns:a16="http://schemas.microsoft.com/office/drawing/2014/main" id="{38734978-386F-408D-9817-68B036A72658}"/>
               </a:ext>
             </a:extLst>
           </p:cNvPr>
@@ -6938,7 +6939,7 @@
           <p:cNvPr id="19" name="hook-band">
             <a:extLst xmlns:a="http://schemas.openxmlformats.org/drawingml/2006/main">
               <a:ext uri="{FF2B5EF4-FFF2-40B4-BE49-F238E27FC236}">
-                <a16:creationId xmlns:a16="http://schemas.microsoft.com/office/drawing/2014/main" id="{BDB4896C-CB8C-4F7D-8BA5-563B66C43188}"/>
+                <a16:creationId xmlns:a16="http://schemas.microsoft.com/office/drawing/2014/main" id="{6F24746E-E42E-4AFF-B356-D063B7139DC8}"/>
               </a:ext>
             </a:extLst>
           </p:cNvPr>
@@ -6971,7 +6972,7 @@
           <p:cNvPr id="20" name="hook-copy">
             <a:extLst xmlns:a="http://schemas.openxmlformats.org/drawingml/2006/main">
               <a:ext uri="{FF2B5EF4-FFF2-40B4-BE49-F238E27FC236}">
-                <a16:creationId xmlns:a16="http://schemas.microsoft.com/office/drawing/2014/main" id="{FE4FAEEC-A005-4EE8-B3F0-5826E1519BB3}"/>
+                <a16:creationId xmlns:a16="http://schemas.microsoft.com/office/drawing/2014/main" id="{7AE18D89-1FF2-48F2-9A35-6CFCC2AEA9C7}"/>
               </a:ext>
             </a:extLst>
           </p:cNvPr>
@@ -7014,7 +7015,7 @@
     </p:spTree>
     <p:extLst>
       <p:ext uri="{BB962C8B-B14F-4D97-AF65-F5344CB8AC3E}">
-        <p14:creationId xmlns:p14="http://schemas.microsoft.com/office/powerpoint/2010/main" val="1215554510"/>
+        <p14:creationId xmlns:p14="http://schemas.microsoft.com/office/powerpoint/2010/main" val="274063515"/>
       </p:ext>
     </p:extLst>
   </p:cSld>
@@ -7045,7 +7046,7 @@
           <p:cNvPr id="6" name="title-3">
             <a:extLst xmlns:a="http://schemas.openxmlformats.org/drawingml/2006/main">
               <a:ext uri="{FF2B5EF4-FFF2-40B4-BE49-F238E27FC236}">
-                <a16:creationId xmlns:a16="http://schemas.microsoft.com/office/drawing/2014/main" id="{344A33AD-324D-4C12-95F8-5F07399A6E63}"/>
+                <a16:creationId xmlns:a16="http://schemas.microsoft.com/office/drawing/2014/main" id="{14A479A9-E339-4F53-B341-510CB91C8B11}"/>
               </a:ext>
             </a:extLst>
           </p:cNvPr>
@@ -7090,7 +7091,7 @@
           <p:cNvPr id="2" name="source-3">
             <a:extLst xmlns:a="http://schemas.openxmlformats.org/drawingml/2006/main">
               <a:ext uri="{FF2B5EF4-FFF2-40B4-BE49-F238E27FC236}">
-                <a16:creationId xmlns:a16="http://schemas.microsoft.com/office/drawing/2014/main" id="{FD35377B-B123-460E-962F-5B9DAF1ED3FB}"/>
+                <a16:creationId xmlns:a16="http://schemas.microsoft.com/office/drawing/2014/main" id="{8CB95B97-BC70-45B1-A815-0BE5F3CD399A}"/>
               </a:ext>
             </a:extLst>
           </p:cNvPr>
@@ -7135,7 +7136,7 @@
           <p:cNvPr id="3" name="page-3">
             <a:extLst xmlns:a="http://schemas.openxmlformats.org/drawingml/2006/main">
               <a:ext uri="{FF2B5EF4-FFF2-40B4-BE49-F238E27FC236}">
-                <a16:creationId xmlns:a16="http://schemas.microsoft.com/office/drawing/2014/main" id="{C4BC6862-134C-460B-9F5D-A7672C0D5EA5}"/>
+                <a16:creationId xmlns:a16="http://schemas.microsoft.com/office/drawing/2014/main" id="{401AA314-FC7F-42E9-A105-585EFDC041FE}"/>
               </a:ext>
             </a:extLst>
           </p:cNvPr>
@@ -7180,7 +7181,7 @@
           <p:cNvPr id="4" name="competitor-lead">
             <a:extLst xmlns:a="http://schemas.openxmlformats.org/drawingml/2006/main">
               <a:ext uri="{FF2B5EF4-FFF2-40B4-BE49-F238E27FC236}">
-                <a16:creationId xmlns:a16="http://schemas.microsoft.com/office/drawing/2014/main" id="{94B49650-A259-48DB-B881-89A3164CB1FF}"/>
+                <a16:creationId xmlns:a16="http://schemas.microsoft.com/office/drawing/2014/main" id="{CE49B3D4-506D-4E78-A5DB-03BB83A3024C}"/>
               </a:ext>
             </a:extLst>
           </p:cNvPr>
@@ -7921,7 +7922,7 @@
     </p:spTree>
     <p:extLst>
       <p:ext uri="{BB962C8B-B14F-4D97-AF65-F5344CB8AC3E}">
-        <p14:creationId xmlns:p14="http://schemas.microsoft.com/office/powerpoint/2010/main" val="860729038"/>
+        <p14:creationId xmlns:p14="http://schemas.microsoft.com/office/powerpoint/2010/main" val="1912436972"/>
       </p:ext>
     </p:extLst>
   </p:cSld>
@@ -7952,7 +7953,7 @@
           <p:cNvPr id="22" name="title-4">
             <a:extLst xmlns:a="http://schemas.openxmlformats.org/drawingml/2006/main">
               <a:ext uri="{FF2B5EF4-FFF2-40B4-BE49-F238E27FC236}">
-                <a16:creationId xmlns:a16="http://schemas.microsoft.com/office/drawing/2014/main" id="{479E83E3-46DB-47E6-AE19-B892EB19FA21}"/>
+                <a16:creationId xmlns:a16="http://schemas.microsoft.com/office/drawing/2014/main" id="{C3F53B92-D432-40EF-B89B-D2AF3A8F94C3}"/>
               </a:ext>
             </a:extLst>
           </p:cNvPr>
@@ -7997,7 +7998,7 @@
           <p:cNvPr id="2" name="source-4">
             <a:extLst xmlns:a="http://schemas.openxmlformats.org/drawingml/2006/main">
               <a:ext uri="{FF2B5EF4-FFF2-40B4-BE49-F238E27FC236}">
-                <a16:creationId xmlns:a16="http://schemas.microsoft.com/office/drawing/2014/main" id="{23BB8AD7-5A80-4465-B404-E09345CB96C5}"/>
+                <a16:creationId xmlns:a16="http://schemas.microsoft.com/office/drawing/2014/main" id="{C48FCE65-ABAC-445D-AC6F-61B4BAA95986}"/>
               </a:ext>
             </a:extLst>
           </p:cNvPr>
@@ -8042,7 +8043,7 @@
           <p:cNvPr id="3" name="page-4">
             <a:extLst xmlns:a="http://schemas.openxmlformats.org/drawingml/2006/main">
               <a:ext uri="{FF2B5EF4-FFF2-40B4-BE49-F238E27FC236}">
-                <a16:creationId xmlns:a16="http://schemas.microsoft.com/office/drawing/2014/main" id="{F9C5ED72-C4EE-4CAA-A9AB-55C3663D86CB}"/>
+                <a16:creationId xmlns:a16="http://schemas.microsoft.com/office/drawing/2014/main" id="{4ABA5A1E-4998-4323-9349-79DB0B657CCC}"/>
               </a:ext>
             </a:extLst>
           </p:cNvPr>
@@ -8087,7 +8088,7 @@
           <p:cNvPr id="4" name="data-lead">
             <a:extLst xmlns:a="http://schemas.openxmlformats.org/drawingml/2006/main">
               <a:ext uri="{FF2B5EF4-FFF2-40B4-BE49-F238E27FC236}">
-                <a16:creationId xmlns:a16="http://schemas.microsoft.com/office/drawing/2014/main" id="{F5B55161-7B4F-45A2-BAD8-A4B961CA2E25}"/>
+                <a16:creationId xmlns:a16="http://schemas.microsoft.com/office/drawing/2014/main" id="{54D635F0-AE29-424D-B9E8-D49E32DA603D}"/>
               </a:ext>
             </a:extLst>
           </p:cNvPr>
@@ -8132,7 +8133,7 @@
           <p:cNvPr id="5" name="data-panel-0">
             <a:extLst xmlns:a="http://schemas.openxmlformats.org/drawingml/2006/main">
               <a:ext uri="{FF2B5EF4-FFF2-40B4-BE49-F238E27FC236}">
-                <a16:creationId xmlns:a16="http://schemas.microsoft.com/office/drawing/2014/main" id="{43F8DFC6-D341-44CA-A385-9891837FBFF2}"/>
+                <a16:creationId xmlns:a16="http://schemas.microsoft.com/office/drawing/2014/main" id="{AE5D5362-4FE2-4D35-845C-C5641617E5EC}"/>
               </a:ext>
             </a:extLst>
           </p:cNvPr>
@@ -8165,7 +8166,7 @@
           <p:cNvPr id="6" name="data-stat-0">
             <a:extLst xmlns:a="http://schemas.openxmlformats.org/drawingml/2006/main">
               <a:ext uri="{FF2B5EF4-FFF2-40B4-BE49-F238E27FC236}">
-                <a16:creationId xmlns:a16="http://schemas.microsoft.com/office/drawing/2014/main" id="{885472D8-CE89-4105-A871-5BC565561124}"/>
+                <a16:creationId xmlns:a16="http://schemas.microsoft.com/office/drawing/2014/main" id="{B37C9F24-9DF0-45CA-8893-3C57A182AE83}"/>
               </a:ext>
             </a:extLst>
           </p:cNvPr>
@@ -8210,7 +8211,7 @@
           <p:cNvPr id="7" name="data-label-0">
             <a:extLst xmlns:a="http://schemas.openxmlformats.org/drawingml/2006/main">
               <a:ext uri="{FF2B5EF4-FFF2-40B4-BE49-F238E27FC236}">
-                <a16:creationId xmlns:a16="http://schemas.microsoft.com/office/drawing/2014/main" id="{4FACC127-15CB-40D4-BEA2-DD2932FFBD86}"/>
+                <a16:creationId xmlns:a16="http://schemas.microsoft.com/office/drawing/2014/main" id="{66397C5D-C01C-41DC-A0DD-F30490CFD433}"/>
               </a:ext>
             </a:extLst>
           </p:cNvPr>
@@ -8255,7 +8256,7 @@
           <p:cNvPr id="8" name="data-detail-0">
             <a:extLst xmlns:a="http://schemas.openxmlformats.org/drawingml/2006/main">
               <a:ext uri="{FF2B5EF4-FFF2-40B4-BE49-F238E27FC236}">
-                <a16:creationId xmlns:a16="http://schemas.microsoft.com/office/drawing/2014/main" id="{E71A81B2-3B44-4978-ACD3-F30C10D25443}"/>
+                <a16:creationId xmlns:a16="http://schemas.microsoft.com/office/drawing/2014/main" id="{80A3FADD-115F-4BFA-B7D5-249EEAB06B62}"/>
               </a:ext>
             </a:extLst>
           </p:cNvPr>
@@ -8300,7 +8301,7 @@
           <p:cNvPr id="9" name="data-panel-1">
             <a:extLst xmlns:a="http://schemas.openxmlformats.org/drawingml/2006/main">
               <a:ext uri="{FF2B5EF4-FFF2-40B4-BE49-F238E27FC236}">
-                <a16:creationId xmlns:a16="http://schemas.microsoft.com/office/drawing/2014/main" id="{E56B163E-97E6-4FA2-993B-B9C56114F0AD}"/>
+                <a16:creationId xmlns:a16="http://schemas.microsoft.com/office/drawing/2014/main" id="{552FBC59-4CE0-4F70-8BBD-002E5766D7F6}"/>
               </a:ext>
             </a:extLst>
           </p:cNvPr>
@@ -8333,7 +8334,7 @@
           <p:cNvPr id="10" name="data-stat-1">
             <a:extLst xmlns:a="http://schemas.openxmlformats.org/drawingml/2006/main">
               <a:ext uri="{FF2B5EF4-FFF2-40B4-BE49-F238E27FC236}">
-                <a16:creationId xmlns:a16="http://schemas.microsoft.com/office/drawing/2014/main" id="{F8B0A15A-AC10-4328-934C-7CDA05340308}"/>
+                <a16:creationId xmlns:a16="http://schemas.microsoft.com/office/drawing/2014/main" id="{638B2965-528B-4F20-9E2F-23C32D7BBD37}"/>
               </a:ext>
             </a:extLst>
           </p:cNvPr>
@@ -8378,7 +8379,7 @@
           <p:cNvPr id="11" name="data-label-1">
             <a:extLst xmlns:a="http://schemas.openxmlformats.org/drawingml/2006/main">
               <a:ext uri="{FF2B5EF4-FFF2-40B4-BE49-F238E27FC236}">
-                <a16:creationId xmlns:a16="http://schemas.microsoft.com/office/drawing/2014/main" id="{547FC88A-99B1-49B4-9986-62DAAC8EEAC0}"/>
+                <a16:creationId xmlns:a16="http://schemas.microsoft.com/office/drawing/2014/main" id="{0E8768A3-3194-46A0-BB56-D876BFFD5F82}"/>
               </a:ext>
             </a:extLst>
           </p:cNvPr>
@@ -8423,7 +8424,7 @@
           <p:cNvPr id="12" name="data-detail-1">
             <a:extLst xmlns:a="http://schemas.openxmlformats.org/drawingml/2006/main">
               <a:ext uri="{FF2B5EF4-FFF2-40B4-BE49-F238E27FC236}">
-                <a16:creationId xmlns:a16="http://schemas.microsoft.com/office/drawing/2014/main" id="{0ABC5800-94B7-460D-A359-156D9A60933F}"/>
+                <a16:creationId xmlns:a16="http://schemas.microsoft.com/office/drawing/2014/main" id="{A70EE766-8D29-4323-856A-CC79144FAA9F}"/>
               </a:ext>
             </a:extLst>
           </p:cNvPr>
@@ -8468,7 +8469,7 @@
           <p:cNvPr id="13" name="data-panel-2">
             <a:extLst xmlns:a="http://schemas.openxmlformats.org/drawingml/2006/main">
               <a:ext uri="{FF2B5EF4-FFF2-40B4-BE49-F238E27FC236}">
-                <a16:creationId xmlns:a16="http://schemas.microsoft.com/office/drawing/2014/main" id="{70EB243C-7509-43F7-8EB9-B275A0D63D84}"/>
+                <a16:creationId xmlns:a16="http://schemas.microsoft.com/office/drawing/2014/main" id="{D29E0ED4-8793-4D8B-A8DD-EF6230C1C947}"/>
               </a:ext>
             </a:extLst>
           </p:cNvPr>
@@ -8501,7 +8502,7 @@
           <p:cNvPr id="14" name="data-stat-2">
             <a:extLst xmlns:a="http://schemas.openxmlformats.org/drawingml/2006/main">
               <a:ext uri="{FF2B5EF4-FFF2-40B4-BE49-F238E27FC236}">
-                <a16:creationId xmlns:a16="http://schemas.microsoft.com/office/drawing/2014/main" id="{85DB4DD1-03DC-4C08-9114-94DE0C0B437F}"/>
+                <a16:creationId xmlns:a16="http://schemas.microsoft.com/office/drawing/2014/main" id="{5172CC5D-18FD-4236-9751-88871ACD6DED}"/>
               </a:ext>
             </a:extLst>
           </p:cNvPr>
@@ -8546,7 +8547,7 @@
           <p:cNvPr id="15" name="data-label-2">
             <a:extLst xmlns:a="http://schemas.openxmlformats.org/drawingml/2006/main">
               <a:ext uri="{FF2B5EF4-FFF2-40B4-BE49-F238E27FC236}">
-                <a16:creationId xmlns:a16="http://schemas.microsoft.com/office/drawing/2014/main" id="{E7698AAA-5C32-418E-BDCD-4ACE967B07DC}"/>
+                <a16:creationId xmlns:a16="http://schemas.microsoft.com/office/drawing/2014/main" id="{7060F282-0511-44C7-A58C-B31E0DF3AD89}"/>
               </a:ext>
             </a:extLst>
           </p:cNvPr>
@@ -8591,7 +8592,7 @@
           <p:cNvPr id="16" name="data-detail-2">
             <a:extLst xmlns:a="http://schemas.openxmlformats.org/drawingml/2006/main">
               <a:ext uri="{FF2B5EF4-FFF2-40B4-BE49-F238E27FC236}">
-                <a16:creationId xmlns:a16="http://schemas.microsoft.com/office/drawing/2014/main" id="{9F8850F0-C8EB-43FA-B23C-0A3047459A7C}"/>
+                <a16:creationId xmlns:a16="http://schemas.microsoft.com/office/drawing/2014/main" id="{0C49A8FD-D319-4C20-9B0E-3C03220DEA00}"/>
               </a:ext>
             </a:extLst>
           </p:cNvPr>
@@ -8658,7 +8659,7 @@
           <p:cNvPr id="18" name="prov-1">
             <a:extLst xmlns:a="http://schemas.openxmlformats.org/drawingml/2006/main">
               <a:ext uri="{FF2B5EF4-FFF2-40B4-BE49-F238E27FC236}">
-                <a16:creationId xmlns:a16="http://schemas.microsoft.com/office/drawing/2014/main" id="{1B5DF4B0-D18B-4788-A0CD-41C5EAF143F3}"/>
+                <a16:creationId xmlns:a16="http://schemas.microsoft.com/office/drawing/2014/main" id="{479576FE-C323-40AA-B4E1-3BA8CC75717B}"/>
               </a:ext>
             </a:extLst>
           </p:cNvPr>
@@ -8703,7 +8704,7 @@
           <p:cNvPr id="19" name="prov-2">
             <a:extLst xmlns:a="http://schemas.openxmlformats.org/drawingml/2006/main">
               <a:ext uri="{FF2B5EF4-FFF2-40B4-BE49-F238E27FC236}">
-                <a16:creationId xmlns:a16="http://schemas.microsoft.com/office/drawing/2014/main" id="{69671826-0EB7-49E8-883B-491173657F74}"/>
+                <a16:creationId xmlns:a16="http://schemas.microsoft.com/office/drawing/2014/main" id="{EDBD8DAC-0EC1-41E7-8589-4155E2449FD1}"/>
               </a:ext>
             </a:extLst>
           </p:cNvPr>
@@ -8748,7 +8749,7 @@
           <p:cNvPr id="20" name="prov-3">
             <a:extLst xmlns:a="http://schemas.openxmlformats.org/drawingml/2006/main">
               <a:ext uri="{FF2B5EF4-FFF2-40B4-BE49-F238E27FC236}">
-                <a16:creationId xmlns:a16="http://schemas.microsoft.com/office/drawing/2014/main" id="{AAC86265-B275-4BA5-ACEF-5D2F7762329B}"/>
+                <a16:creationId xmlns:a16="http://schemas.microsoft.com/office/drawing/2014/main" id="{5DA8B677-BDE3-439C-AFD7-873E239E5276}"/>
               </a:ext>
             </a:extLst>
           </p:cNvPr>
@@ -8793,7 +8794,7 @@
           <p:cNvPr id="21" name="prov-4">
             <a:extLst xmlns:a="http://schemas.openxmlformats.org/drawingml/2006/main">
               <a:ext uri="{FF2B5EF4-FFF2-40B4-BE49-F238E27FC236}">
-                <a16:creationId xmlns:a16="http://schemas.microsoft.com/office/drawing/2014/main" id="{C7204973-CECE-4CF0-A2D3-EAF337FAC7D4}"/>
+                <a16:creationId xmlns:a16="http://schemas.microsoft.com/office/drawing/2014/main" id="{42FF99D7-CB7B-4567-A5BC-F642039D1087}"/>
               </a:ext>
             </a:extLst>
           </p:cNvPr>
@@ -8836,7 +8837,7 @@
     </p:spTree>
     <p:extLst>
       <p:ext uri="{BB962C8B-B14F-4D97-AF65-F5344CB8AC3E}">
-        <p14:creationId xmlns:p14="http://schemas.microsoft.com/office/powerpoint/2010/main" val="1584701513"/>
+        <p14:creationId xmlns:p14="http://schemas.microsoft.com/office/powerpoint/2010/main" val="2141241915"/>
       </p:ext>
     </p:extLst>
   </p:cSld>
@@ -8867,7 +8868,7 @@
           <p:cNvPr id="36" name="title-5">
             <a:extLst xmlns:a="http://schemas.openxmlformats.org/drawingml/2006/main">
               <a:ext uri="{FF2B5EF4-FFF2-40B4-BE49-F238E27FC236}">
-                <a16:creationId xmlns:a16="http://schemas.microsoft.com/office/drawing/2014/main" id="{F31215A4-CE5D-4213-9F95-3C35F1DC570A}"/>
+                <a16:creationId xmlns:a16="http://schemas.microsoft.com/office/drawing/2014/main" id="{3C3A82A8-CD44-4BBF-A597-A7CE1260A8AE}"/>
               </a:ext>
             </a:extLst>
           </p:cNvPr>
@@ -8912,7 +8913,7 @@
           <p:cNvPr id="2" name="source-5">
             <a:extLst xmlns:a="http://schemas.openxmlformats.org/drawingml/2006/main">
               <a:ext uri="{FF2B5EF4-FFF2-40B4-BE49-F238E27FC236}">
-                <a16:creationId xmlns:a16="http://schemas.microsoft.com/office/drawing/2014/main" id="{87591DCB-7CEA-4DB3-888A-C76DC9F4D8A7}"/>
+                <a16:creationId xmlns:a16="http://schemas.microsoft.com/office/drawing/2014/main" id="{BD87311A-B539-4D40-963B-9440F4A42EC5}"/>
               </a:ext>
             </a:extLst>
           </p:cNvPr>
@@ -8957,7 +8958,7 @@
           <p:cNvPr id="3" name="page-5">
             <a:extLst xmlns:a="http://schemas.openxmlformats.org/drawingml/2006/main">
               <a:ext uri="{FF2B5EF4-FFF2-40B4-BE49-F238E27FC236}">
-                <a16:creationId xmlns:a16="http://schemas.microsoft.com/office/drawing/2014/main" id="{E33FCFC7-5863-42C5-B894-ED86D5F9FC6C}"/>
+                <a16:creationId xmlns:a16="http://schemas.microsoft.com/office/drawing/2014/main" id="{776A9E0F-AF75-4B0E-BE4C-85191657E5D4}"/>
               </a:ext>
             </a:extLst>
           </p:cNvPr>
@@ -9002,7 +9003,7 @@
           <p:cNvPr id="4" name="qua-lead">
             <a:extLst xmlns:a="http://schemas.openxmlformats.org/drawingml/2006/main">
               <a:ext uri="{FF2B5EF4-FFF2-40B4-BE49-F238E27FC236}">
-                <a16:creationId xmlns:a16="http://schemas.microsoft.com/office/drawing/2014/main" id="{8809B4C2-632F-4C95-99E8-2A1F650F2DAC}"/>
+                <a16:creationId xmlns:a16="http://schemas.microsoft.com/office/drawing/2014/main" id="{3B9EFDB8-8DCA-426F-9DDA-2A9C9B21665F}"/>
               </a:ext>
             </a:extLst>
           </p:cNvPr>
@@ -9069,7 +9070,7 @@
           <p:cNvPr id="6" name="qua-node-0">
             <a:extLst xmlns:a="http://schemas.openxmlformats.org/drawingml/2006/main">
               <a:ext uri="{FF2B5EF4-FFF2-40B4-BE49-F238E27FC236}">
-                <a16:creationId xmlns:a16="http://schemas.microsoft.com/office/drawing/2014/main" id="{A6B791C4-9845-4290-8ACF-EF22879C5894}"/>
+                <a16:creationId xmlns:a16="http://schemas.microsoft.com/office/drawing/2014/main" id="{6959C6C8-D65C-4BE4-A5A3-4E0B7DEBBEA2}"/>
               </a:ext>
             </a:extLst>
           </p:cNvPr>
@@ -9102,7 +9103,7 @@
           <p:cNvPr id="7" name="qua-code-0">
             <a:extLst xmlns:a="http://schemas.openxmlformats.org/drawingml/2006/main">
               <a:ext uri="{FF2B5EF4-FFF2-40B4-BE49-F238E27FC236}">
-                <a16:creationId xmlns:a16="http://schemas.microsoft.com/office/drawing/2014/main" id="{7C26EFA0-BDA3-43AA-81D7-01B95D598D34}"/>
+                <a16:creationId xmlns:a16="http://schemas.microsoft.com/office/drawing/2014/main" id="{39B2D777-AF0D-4E47-92DA-F41E4B5F88F6}"/>
               </a:ext>
             </a:extLst>
           </p:cNvPr>
@@ -9147,7 +9148,7 @@
           <p:cNvPr id="8" name="qua-title-0">
             <a:extLst xmlns:a="http://schemas.openxmlformats.org/drawingml/2006/main">
               <a:ext uri="{FF2B5EF4-FFF2-40B4-BE49-F238E27FC236}">
-                <a16:creationId xmlns:a16="http://schemas.microsoft.com/office/drawing/2014/main" id="{4E37A3DC-17D3-4341-9FFE-906D0307D03A}"/>
+                <a16:creationId xmlns:a16="http://schemas.microsoft.com/office/drawing/2014/main" id="{406C2ECE-8511-4B7C-8FE1-FF65957719F6}"/>
               </a:ext>
             </a:extLst>
           </p:cNvPr>
@@ -9192,7 +9193,7 @@
           <p:cNvPr id="9" name="qua-body-0">
             <a:extLst xmlns:a="http://schemas.openxmlformats.org/drawingml/2006/main">
               <a:ext uri="{FF2B5EF4-FFF2-40B4-BE49-F238E27FC236}">
-                <a16:creationId xmlns:a16="http://schemas.microsoft.com/office/drawing/2014/main" id="{8C924F8E-A376-410F-BF0A-BFB591A787EF}"/>
+                <a16:creationId xmlns:a16="http://schemas.microsoft.com/office/drawing/2014/main" id="{8B072CF6-10A0-42AA-B9B5-921E56AE8925}"/>
               </a:ext>
             </a:extLst>
           </p:cNvPr>
@@ -9238,7 +9239,7 @@
           <p:cNvPr id="10" name="qua-node-1">
             <a:extLst xmlns:a="http://schemas.openxmlformats.org/drawingml/2006/main">
               <a:ext uri="{FF2B5EF4-FFF2-40B4-BE49-F238E27FC236}">
-                <a16:creationId xmlns:a16="http://schemas.microsoft.com/office/drawing/2014/main" id="{808437AE-DA35-45CF-AF1E-CB15CD23CC1B}"/>
+                <a16:creationId xmlns:a16="http://schemas.microsoft.com/office/drawing/2014/main" id="{E8AF20C0-81C2-495A-B4EE-A09A7257885F}"/>
               </a:ext>
             </a:extLst>
           </p:cNvPr>
@@ -9271,7 +9272,7 @@
           <p:cNvPr id="11" name="qua-code-1">
             <a:extLst xmlns:a="http://schemas.openxmlformats.org/drawingml/2006/main">
               <a:ext uri="{FF2B5EF4-FFF2-40B4-BE49-F238E27FC236}">
-                <a16:creationId xmlns:a16="http://schemas.microsoft.com/office/drawing/2014/main" id="{25213DBE-1ED6-49AA-B49D-35D5AE793405}"/>
+                <a16:creationId xmlns:a16="http://schemas.microsoft.com/office/drawing/2014/main" id="{4BB87973-4823-4762-AEA8-11696DAF95B7}"/>
               </a:ext>
             </a:extLst>
           </p:cNvPr>
@@ -9316,7 +9317,7 @@
           <p:cNvPr id="12" name="qua-title-1">
             <a:extLst xmlns:a="http://schemas.openxmlformats.org/drawingml/2006/main">
               <a:ext uri="{FF2B5EF4-FFF2-40B4-BE49-F238E27FC236}">
-                <a16:creationId xmlns:a16="http://schemas.microsoft.com/office/drawing/2014/main" id="{6B78B685-2F54-41B1-AD52-EB07E007CCBB}"/>
+                <a16:creationId xmlns:a16="http://schemas.microsoft.com/office/drawing/2014/main" id="{B7631F02-E2B3-41D6-B5A7-C4201F8DDA65}"/>
               </a:ext>
             </a:extLst>
           </p:cNvPr>
@@ -9361,7 +9362,7 @@
           <p:cNvPr id="13" name="qua-body-1">
             <a:extLst xmlns:a="http://schemas.openxmlformats.org/drawingml/2006/main">
               <a:ext uri="{FF2B5EF4-FFF2-40B4-BE49-F238E27FC236}">
-                <a16:creationId xmlns:a16="http://schemas.microsoft.com/office/drawing/2014/main" id="{5EC54B92-8AAA-42C4-8286-6C3225F901E3}"/>
+                <a16:creationId xmlns:a16="http://schemas.microsoft.com/office/drawing/2014/main" id="{07359966-173F-46DA-BE5D-350AFF5D3F78}"/>
               </a:ext>
             </a:extLst>
           </p:cNvPr>
@@ -9407,7 +9408,7 @@
           <p:cNvPr id="14" name="qua-node-2">
             <a:extLst xmlns:a="http://schemas.openxmlformats.org/drawingml/2006/main">
               <a:ext uri="{FF2B5EF4-FFF2-40B4-BE49-F238E27FC236}">
-                <a16:creationId xmlns:a16="http://schemas.microsoft.com/office/drawing/2014/main" id="{201EDF1B-2880-4CEE-95FC-BEA86D9AC1E3}"/>
+                <a16:creationId xmlns:a16="http://schemas.microsoft.com/office/drawing/2014/main" id="{25C4924A-A74B-4F17-B9C7-9D912FBF5A75}"/>
               </a:ext>
             </a:extLst>
           </p:cNvPr>
@@ -9440,7 +9441,7 @@
           <p:cNvPr id="15" name="qua-code-2">
             <a:extLst xmlns:a="http://schemas.openxmlformats.org/drawingml/2006/main">
               <a:ext uri="{FF2B5EF4-FFF2-40B4-BE49-F238E27FC236}">
-                <a16:creationId xmlns:a16="http://schemas.microsoft.com/office/drawing/2014/main" id="{F72D5A98-7002-45F6-84BF-3F7975C1101D}"/>
+                <a16:creationId xmlns:a16="http://schemas.microsoft.com/office/drawing/2014/main" id="{4CE57165-33A9-4481-A40D-E81B90B3A800}"/>
               </a:ext>
             </a:extLst>
           </p:cNvPr>
@@ -9485,7 +9486,7 @@
           <p:cNvPr id="16" name="qua-title-2">
             <a:extLst xmlns:a="http://schemas.openxmlformats.org/drawingml/2006/main">
               <a:ext uri="{FF2B5EF4-FFF2-40B4-BE49-F238E27FC236}">
-                <a16:creationId xmlns:a16="http://schemas.microsoft.com/office/drawing/2014/main" id="{1C6CCCF7-D0B3-4299-87D2-952D6ED50BE8}"/>
+                <a16:creationId xmlns:a16="http://schemas.microsoft.com/office/drawing/2014/main" id="{71F257DF-80AD-47C6-ACFD-8746A863D0A3}"/>
               </a:ext>
             </a:extLst>
           </p:cNvPr>
@@ -9530,7 +9531,7 @@
           <p:cNvPr id="17" name="qua-body-2">
             <a:extLst xmlns:a="http://schemas.openxmlformats.org/drawingml/2006/main">
               <a:ext uri="{FF2B5EF4-FFF2-40B4-BE49-F238E27FC236}">
-                <a16:creationId xmlns:a16="http://schemas.microsoft.com/office/drawing/2014/main" id="{F1418D42-A8AB-4E2F-8DB1-F15D5A23FC06}"/>
+                <a16:creationId xmlns:a16="http://schemas.microsoft.com/office/drawing/2014/main" id="{34A8FE05-3F05-4ACD-B83A-59B7ABB11AE7}"/>
               </a:ext>
             </a:extLst>
           </p:cNvPr>
@@ -9576,7 +9577,7 @@
           <p:cNvPr id="18" name="qua-node-3">
             <a:extLst xmlns:a="http://schemas.openxmlformats.org/drawingml/2006/main">
               <a:ext uri="{FF2B5EF4-FFF2-40B4-BE49-F238E27FC236}">
-                <a16:creationId xmlns:a16="http://schemas.microsoft.com/office/drawing/2014/main" id="{196F1E35-22B0-4895-8D96-EE699AD037FB}"/>
+                <a16:creationId xmlns:a16="http://schemas.microsoft.com/office/drawing/2014/main" id="{AEB46F4A-7D2A-46DF-B5BF-88952FA96863}"/>
               </a:ext>
             </a:extLst>
           </p:cNvPr>
@@ -9609,7 +9610,7 @@
           <p:cNvPr id="19" name="qua-code-3">
             <a:extLst xmlns:a="http://schemas.openxmlformats.org/drawingml/2006/main">
               <a:ext uri="{FF2B5EF4-FFF2-40B4-BE49-F238E27FC236}">
-                <a16:creationId xmlns:a16="http://schemas.microsoft.com/office/drawing/2014/main" id="{045A54CD-0B27-4DA5-BE39-50E0DBDDAA3C}"/>
+                <a16:creationId xmlns:a16="http://schemas.microsoft.com/office/drawing/2014/main" id="{0923F28E-B60A-4864-B25B-CA640F539BAA}"/>
               </a:ext>
             </a:extLst>
           </p:cNvPr>
@@ -9654,7 +9655,7 @@
           <p:cNvPr id="20" name="qua-title-3">
             <a:extLst xmlns:a="http://schemas.openxmlformats.org/drawingml/2006/main">
               <a:ext uri="{FF2B5EF4-FFF2-40B4-BE49-F238E27FC236}">
-                <a16:creationId xmlns:a16="http://schemas.microsoft.com/office/drawing/2014/main" id="{0D1D3419-BF59-428C-89A1-F9CF4A1080F9}"/>
+                <a16:creationId xmlns:a16="http://schemas.microsoft.com/office/drawing/2014/main" id="{1F580B97-71B5-4CAF-8648-CE828C16FB46}"/>
               </a:ext>
             </a:extLst>
           </p:cNvPr>
@@ -9699,7 +9700,7 @@
           <p:cNvPr id="21" name="qua-body-3">
             <a:extLst xmlns:a="http://schemas.openxmlformats.org/drawingml/2006/main">
               <a:ext uri="{FF2B5EF4-FFF2-40B4-BE49-F238E27FC236}">
-                <a16:creationId xmlns:a16="http://schemas.microsoft.com/office/drawing/2014/main" id="{D9760C0A-FFCA-4F96-B62B-E98234AF114C}"/>
+                <a16:creationId xmlns:a16="http://schemas.microsoft.com/office/drawing/2014/main" id="{049E6160-44CD-4792-8BDA-AAFEB20EAE4A}"/>
               </a:ext>
             </a:extLst>
           </p:cNvPr>
@@ -9745,7 +9746,7 @@
           <p:cNvPr id="22" name="qua-node-4">
             <a:extLst xmlns:a="http://schemas.openxmlformats.org/drawingml/2006/main">
               <a:ext uri="{FF2B5EF4-FFF2-40B4-BE49-F238E27FC236}">
-                <a16:creationId xmlns:a16="http://schemas.microsoft.com/office/drawing/2014/main" id="{B2E0407D-9BA0-4FAB-94CD-53CCE42D00D1}"/>
+                <a16:creationId xmlns:a16="http://schemas.microsoft.com/office/drawing/2014/main" id="{E5E4E6A3-2DEF-457E-9C34-53A675049F0E}"/>
               </a:ext>
             </a:extLst>
           </p:cNvPr>
@@ -9778,7 +9779,7 @@
           <p:cNvPr id="23" name="qua-code-4">
             <a:extLst xmlns:a="http://schemas.openxmlformats.org/drawingml/2006/main">
               <a:ext uri="{FF2B5EF4-FFF2-40B4-BE49-F238E27FC236}">
-                <a16:creationId xmlns:a16="http://schemas.microsoft.com/office/drawing/2014/main" id="{7B1A4B9A-CC75-4B22-9F00-D01465356853}"/>
+                <a16:creationId xmlns:a16="http://schemas.microsoft.com/office/drawing/2014/main" id="{EE9C3232-7395-43B5-8CCC-6032AA6A7652}"/>
               </a:ext>
             </a:extLst>
           </p:cNvPr>
@@ -9823,7 +9824,7 @@
           <p:cNvPr id="24" name="qua-title-4">
             <a:extLst xmlns:a="http://schemas.openxmlformats.org/drawingml/2006/main">
               <a:ext uri="{FF2B5EF4-FFF2-40B4-BE49-F238E27FC236}">
-                <a16:creationId xmlns:a16="http://schemas.microsoft.com/office/drawing/2014/main" id="{59D1F001-D476-4126-9BD5-E439B52044AE}"/>
+                <a16:creationId xmlns:a16="http://schemas.microsoft.com/office/drawing/2014/main" id="{8F76B851-D0EB-41FD-8056-9D17E3B4D55B}"/>
               </a:ext>
             </a:extLst>
           </p:cNvPr>
@@ -9868,7 +9869,7 @@
           <p:cNvPr id="25" name="qua-body-4">
             <a:extLst xmlns:a="http://schemas.openxmlformats.org/drawingml/2006/main">
               <a:ext uri="{FF2B5EF4-FFF2-40B4-BE49-F238E27FC236}">
-                <a16:creationId xmlns:a16="http://schemas.microsoft.com/office/drawing/2014/main" id="{3AD0DC6F-2EA8-49B9-A369-2B1EF9DC9993}"/>
+                <a16:creationId xmlns:a16="http://schemas.microsoft.com/office/drawing/2014/main" id="{6CFBC138-8353-4339-BB9A-CDE3EF1BC674}"/>
               </a:ext>
             </a:extLst>
           </p:cNvPr>
@@ -9914,7 +9915,7 @@
           <p:cNvPr id="26" name="qua-node-5">
             <a:extLst xmlns:a="http://schemas.openxmlformats.org/drawingml/2006/main">
               <a:ext uri="{FF2B5EF4-FFF2-40B4-BE49-F238E27FC236}">
-                <a16:creationId xmlns:a16="http://schemas.microsoft.com/office/drawing/2014/main" id="{C90F6A88-740A-4BA2-AFBA-EA96DC3A949F}"/>
+                <a16:creationId xmlns:a16="http://schemas.microsoft.com/office/drawing/2014/main" id="{20A67A14-0B06-45F0-AB16-55E6844F9110}"/>
               </a:ext>
             </a:extLst>
           </p:cNvPr>
@@ -9947,7 +9948,7 @@
           <p:cNvPr id="27" name="qua-code-5">
             <a:extLst xmlns:a="http://schemas.openxmlformats.org/drawingml/2006/main">
               <a:ext uri="{FF2B5EF4-FFF2-40B4-BE49-F238E27FC236}">
-                <a16:creationId xmlns:a16="http://schemas.microsoft.com/office/drawing/2014/main" id="{99509251-8305-479A-A33D-43955CB263FC}"/>
+                <a16:creationId xmlns:a16="http://schemas.microsoft.com/office/drawing/2014/main" id="{672BF717-7EA4-40BE-9FB2-047414F7EB0E}"/>
               </a:ext>
             </a:extLst>
           </p:cNvPr>
@@ -9992,7 +9993,7 @@
           <p:cNvPr id="28" name="qua-title-5">
             <a:extLst xmlns:a="http://schemas.openxmlformats.org/drawingml/2006/main">
               <a:ext uri="{FF2B5EF4-FFF2-40B4-BE49-F238E27FC236}">
-                <a16:creationId xmlns:a16="http://schemas.microsoft.com/office/drawing/2014/main" id="{E47FA6E2-E90F-408A-9575-BCF318DF8E9F}"/>
+                <a16:creationId xmlns:a16="http://schemas.microsoft.com/office/drawing/2014/main" id="{E61D3E07-8A1E-42B9-A1D9-A8B2709B445E}"/>
               </a:ext>
             </a:extLst>
           </p:cNvPr>
@@ -10037,7 +10038,7 @@
           <p:cNvPr id="29" name="qua-body-5">
             <a:extLst xmlns:a="http://schemas.openxmlformats.org/drawingml/2006/main">
               <a:ext uri="{FF2B5EF4-FFF2-40B4-BE49-F238E27FC236}">
-                <a16:creationId xmlns:a16="http://schemas.microsoft.com/office/drawing/2014/main" id="{49677FCC-B148-40BE-9C91-801485471E85}"/>
+                <a16:creationId xmlns:a16="http://schemas.microsoft.com/office/drawing/2014/main" id="{9C63FF74-B4EC-4099-AFD5-DA7FD34ACBBB}"/>
               </a:ext>
             </a:extLst>
           </p:cNvPr>
@@ -10083,7 +10084,7 @@
           <p:cNvPr id="30" name="qua-node-6">
             <a:extLst xmlns:a="http://schemas.openxmlformats.org/drawingml/2006/main">
               <a:ext uri="{FF2B5EF4-FFF2-40B4-BE49-F238E27FC236}">
-                <a16:creationId xmlns:a16="http://schemas.microsoft.com/office/drawing/2014/main" id="{0305275A-F453-476A-9105-588555D67000}"/>
+                <a16:creationId xmlns:a16="http://schemas.microsoft.com/office/drawing/2014/main" id="{8ADBCA57-B2B1-43E2-9DAB-DE91710F3258}"/>
               </a:ext>
             </a:extLst>
           </p:cNvPr>
@@ -10116,7 +10117,7 @@
           <p:cNvPr id="31" name="qua-code-6">
             <a:extLst xmlns:a="http://schemas.openxmlformats.org/drawingml/2006/main">
               <a:ext uri="{FF2B5EF4-FFF2-40B4-BE49-F238E27FC236}">
-                <a16:creationId xmlns:a16="http://schemas.microsoft.com/office/drawing/2014/main" id="{6B6AE767-95A8-4218-A02B-002AA112D629}"/>
+                <a16:creationId xmlns:a16="http://schemas.microsoft.com/office/drawing/2014/main" id="{AC7EF38C-745B-491C-8DF2-30334D8B7BC1}"/>
               </a:ext>
             </a:extLst>
           </p:cNvPr>
@@ -10161,7 +10162,7 @@
           <p:cNvPr id="32" name="qua-title-6">
             <a:extLst xmlns:a="http://schemas.openxmlformats.org/drawingml/2006/main">
               <a:ext uri="{FF2B5EF4-FFF2-40B4-BE49-F238E27FC236}">
-                <a16:creationId xmlns:a16="http://schemas.microsoft.com/office/drawing/2014/main" id="{E55CF6C3-51B2-449D-BDBF-B1DBB7BDD46C}"/>
+                <a16:creationId xmlns:a16="http://schemas.microsoft.com/office/drawing/2014/main" id="{C281CA9B-2676-492D-800F-853AF7B537CB}"/>
               </a:ext>
             </a:extLst>
           </p:cNvPr>
@@ -10206,7 +10207,7 @@
           <p:cNvPr id="33" name="qua-body-6">
             <a:extLst xmlns:a="http://schemas.openxmlformats.org/drawingml/2006/main">
               <a:ext uri="{FF2B5EF4-FFF2-40B4-BE49-F238E27FC236}">
-                <a16:creationId xmlns:a16="http://schemas.microsoft.com/office/drawing/2014/main" id="{6481681E-1E60-486E-BE14-38C2E3D2E2BF}"/>
+                <a16:creationId xmlns:a16="http://schemas.microsoft.com/office/drawing/2014/main" id="{BF5CBD95-5119-4187-ACD1-3DBE4258D4E2}"/>
               </a:ext>
             </a:extLst>
           </p:cNvPr>
@@ -10252,7 +10253,7 @@
           <p:cNvPr id="34" name="qua-proof">
             <a:extLst xmlns:a="http://schemas.openxmlformats.org/drawingml/2006/main">
               <a:ext uri="{FF2B5EF4-FFF2-40B4-BE49-F238E27FC236}">
-                <a16:creationId xmlns:a16="http://schemas.microsoft.com/office/drawing/2014/main" id="{297E1E9A-CC61-4996-9E73-BE9800AE003F}"/>
+                <a16:creationId xmlns:a16="http://schemas.microsoft.com/office/drawing/2014/main" id="{17371D18-AC5A-42C1-8A7B-4FD1D38D74A2}"/>
               </a:ext>
             </a:extLst>
           </p:cNvPr>
@@ -10285,7 +10286,7 @@
           <p:cNvPr id="35" name="qua-proof-text">
             <a:extLst xmlns:a="http://schemas.openxmlformats.org/drawingml/2006/main">
               <a:ext uri="{FF2B5EF4-FFF2-40B4-BE49-F238E27FC236}">
-                <a16:creationId xmlns:a16="http://schemas.microsoft.com/office/drawing/2014/main" id="{ED71B806-9F27-4B6B-89D0-0BC4C995D583}"/>
+                <a16:creationId xmlns:a16="http://schemas.microsoft.com/office/drawing/2014/main" id="{44401676-FF3D-4A0F-876E-87171D9072A8}"/>
               </a:ext>
             </a:extLst>
           </p:cNvPr>
@@ -10328,7 +10329,7 @@
     </p:spTree>
     <p:extLst>
       <p:ext uri="{BB962C8B-B14F-4D97-AF65-F5344CB8AC3E}">
-        <p14:creationId xmlns:p14="http://schemas.microsoft.com/office/powerpoint/2010/main" val="1060054947"/>
+        <p14:creationId xmlns:p14="http://schemas.microsoft.com/office/powerpoint/2010/main" val="203850756"/>
       </p:ext>
     </p:extLst>
   </p:cSld>
@@ -10359,7 +10360,7 @@
           <p:cNvPr id="26" name="title-6">
             <a:extLst xmlns:a="http://schemas.openxmlformats.org/drawingml/2006/main">
               <a:ext uri="{FF2B5EF4-FFF2-40B4-BE49-F238E27FC236}">
-                <a16:creationId xmlns:a16="http://schemas.microsoft.com/office/drawing/2014/main" id="{269CDC5D-10D1-4458-9026-7DC26ABC6830}"/>
+                <a16:creationId xmlns:a16="http://schemas.microsoft.com/office/drawing/2014/main" id="{50005EA8-3442-4ADA-A6FE-B369229271B0}"/>
               </a:ext>
             </a:extLst>
           </p:cNvPr>
@@ -10404,7 +10405,7 @@
           <p:cNvPr id="2" name="source-6">
             <a:extLst xmlns:a="http://schemas.openxmlformats.org/drawingml/2006/main">
               <a:ext uri="{FF2B5EF4-FFF2-40B4-BE49-F238E27FC236}">
-                <a16:creationId xmlns:a16="http://schemas.microsoft.com/office/drawing/2014/main" id="{300A5C6B-7D67-4092-A1FA-326C55C3E1AA}"/>
+                <a16:creationId xmlns:a16="http://schemas.microsoft.com/office/drawing/2014/main" id="{94B0BF1A-73FB-48B3-87FF-342524546AEE}"/>
               </a:ext>
             </a:extLst>
           </p:cNvPr>
@@ -10449,7 +10450,7 @@
           <p:cNvPr id="3" name="page-6">
             <a:extLst xmlns:a="http://schemas.openxmlformats.org/drawingml/2006/main">
               <a:ext uri="{FF2B5EF4-FFF2-40B4-BE49-F238E27FC236}">
-                <a16:creationId xmlns:a16="http://schemas.microsoft.com/office/drawing/2014/main" id="{5D7A9F77-30EF-4597-9262-B3742DF0385F}"/>
+                <a16:creationId xmlns:a16="http://schemas.microsoft.com/office/drawing/2014/main" id="{7CA99323-1B87-4FC0-8548-CF2E703E9721}"/>
               </a:ext>
             </a:extLst>
           </p:cNvPr>
@@ -10494,7 +10495,7 @@
           <p:cNvPr id="4" name="spatial-lead">
             <a:extLst xmlns:a="http://schemas.openxmlformats.org/drawingml/2006/main">
               <a:ext uri="{FF2B5EF4-FFF2-40B4-BE49-F238E27FC236}">
-                <a16:creationId xmlns:a16="http://schemas.microsoft.com/office/drawing/2014/main" id="{148E5136-FC5C-44F8-BE9F-736A3D0BEF03}"/>
+                <a16:creationId xmlns:a16="http://schemas.microsoft.com/office/drawing/2014/main" id="{A5AFC7EF-084B-4217-8C94-C011E70C6863}"/>
               </a:ext>
             </a:extLst>
           </p:cNvPr>
@@ -10561,7 +10562,7 @@
           <p:cNvPr id="6" name="spatial-panel-0">
             <a:extLst xmlns:a="http://schemas.openxmlformats.org/drawingml/2006/main">
               <a:ext uri="{FF2B5EF4-FFF2-40B4-BE49-F238E27FC236}">
-                <a16:creationId xmlns:a16="http://schemas.microsoft.com/office/drawing/2014/main" id="{E117E14D-B6BB-4353-B150-AB02D01F4762}"/>
+                <a16:creationId xmlns:a16="http://schemas.microsoft.com/office/drawing/2014/main" id="{83184A07-EF94-4409-8C71-1B82177819C1}"/>
               </a:ext>
             </a:extLst>
           </p:cNvPr>
@@ -10594,7 +10595,7 @@
           <p:cNvPr id="7" name="spatial-bar-0">
             <a:extLst xmlns:a="http://schemas.openxmlformats.org/drawingml/2006/main">
               <a:ext uri="{FF2B5EF4-FFF2-40B4-BE49-F238E27FC236}">
-                <a16:creationId xmlns:a16="http://schemas.microsoft.com/office/drawing/2014/main" id="{C1C80CA7-9B85-435F-9C01-102CCF18C76B}"/>
+                <a16:creationId xmlns:a16="http://schemas.microsoft.com/office/drawing/2014/main" id="{C9AE9321-C22E-4C26-A6B5-285089EBA4E2}"/>
               </a:ext>
             </a:extLst>
           </p:cNvPr>
@@ -10627,7 +10628,7 @@
           <p:cNvPr id="8" name="spatial-title-0">
             <a:extLst xmlns:a="http://schemas.openxmlformats.org/drawingml/2006/main">
               <a:ext uri="{FF2B5EF4-FFF2-40B4-BE49-F238E27FC236}">
-                <a16:creationId xmlns:a16="http://schemas.microsoft.com/office/drawing/2014/main" id="{CD7FF3A2-A3ED-4EF2-A81A-912A8CB2F051}"/>
+                <a16:creationId xmlns:a16="http://schemas.microsoft.com/office/drawing/2014/main" id="{69B44284-EA46-4E34-A1FD-C8D0C37D03F4}"/>
               </a:ext>
             </a:extLst>
           </p:cNvPr>
@@ -10672,7 +10673,7 @@
           <p:cNvPr id="9" name="spatial-rows-0">
             <a:extLst xmlns:a="http://schemas.openxmlformats.org/drawingml/2006/main">
               <a:ext uri="{FF2B5EF4-FFF2-40B4-BE49-F238E27FC236}">
-                <a16:creationId xmlns:a16="http://schemas.microsoft.com/office/drawing/2014/main" id="{EB3F9650-5411-4196-9016-544697534148}"/>
+                <a16:creationId xmlns:a16="http://schemas.microsoft.com/office/drawing/2014/main" id="{A8127BFD-EB9F-4D2E-B75A-064B16F2B05C}"/>
               </a:ext>
             </a:extLst>
           </p:cNvPr>
@@ -10717,7 +10718,7 @@
           <p:cNvPr id="10" name="spatial-blocks-0">
             <a:extLst xmlns:a="http://schemas.openxmlformats.org/drawingml/2006/main">
               <a:ext uri="{FF2B5EF4-FFF2-40B4-BE49-F238E27FC236}">
-                <a16:creationId xmlns:a16="http://schemas.microsoft.com/office/drawing/2014/main" id="{D717487A-3308-41DA-AA71-109D5C101CED}"/>
+                <a16:creationId xmlns:a16="http://schemas.microsoft.com/office/drawing/2014/main" id="{4D3659E3-5693-4081-AEFA-DFF116E3C7A3}"/>
               </a:ext>
             </a:extLst>
           </p:cNvPr>
@@ -10762,7 +10763,7 @@
           <p:cNvPr id="11" name="spatial-body-0">
             <a:extLst xmlns:a="http://schemas.openxmlformats.org/drawingml/2006/main">
               <a:ext uri="{FF2B5EF4-FFF2-40B4-BE49-F238E27FC236}">
-                <a16:creationId xmlns:a16="http://schemas.microsoft.com/office/drawing/2014/main" id="{CF315AAF-FF0C-46F1-94BF-C41396B3A53D}"/>
+                <a16:creationId xmlns:a16="http://schemas.microsoft.com/office/drawing/2014/main" id="{2603BD95-019C-4DDE-A99E-4F39C31864BC}"/>
               </a:ext>
             </a:extLst>
           </p:cNvPr>
@@ -10807,7 +10808,7 @@
           <p:cNvPr id="12" name="spatial-panel-1">
             <a:extLst xmlns:a="http://schemas.openxmlformats.org/drawingml/2006/main">
               <a:ext uri="{FF2B5EF4-FFF2-40B4-BE49-F238E27FC236}">
-                <a16:creationId xmlns:a16="http://schemas.microsoft.com/office/drawing/2014/main" id="{F67AC26A-BCBD-44B1-86ED-2AB6DF65068F}"/>
+                <a16:creationId xmlns:a16="http://schemas.microsoft.com/office/drawing/2014/main" id="{ED654561-A5DD-4DF0-9A23-5BAB2E4801BC}"/>
               </a:ext>
             </a:extLst>
           </p:cNvPr>
@@ -10840,7 +10841,7 @@
           <p:cNvPr id="13" name="spatial-bar-1">
             <a:extLst xmlns:a="http://schemas.openxmlformats.org/drawingml/2006/main">
               <a:ext uri="{FF2B5EF4-FFF2-40B4-BE49-F238E27FC236}">
-                <a16:creationId xmlns:a16="http://schemas.microsoft.com/office/drawing/2014/main" id="{0F2A520F-434D-497E-A185-6A6D9887E407}"/>
+                <a16:creationId xmlns:a16="http://schemas.microsoft.com/office/drawing/2014/main" id="{3B64230C-7FE8-4872-A980-A0553AE7578C}"/>
               </a:ext>
             </a:extLst>
           </p:cNvPr>
@@ -10873,7 +10874,7 @@
           <p:cNvPr id="14" name="spatial-title-1">
             <a:extLst xmlns:a="http://schemas.openxmlformats.org/drawingml/2006/main">
               <a:ext uri="{FF2B5EF4-FFF2-40B4-BE49-F238E27FC236}">
-                <a16:creationId xmlns:a16="http://schemas.microsoft.com/office/drawing/2014/main" id="{13AAF135-375D-4982-BE24-1247DC30FA91}"/>
+                <a16:creationId xmlns:a16="http://schemas.microsoft.com/office/drawing/2014/main" id="{551E5C9F-DB3A-42ED-B2B0-D462719620DA}"/>
               </a:ext>
             </a:extLst>
           </p:cNvPr>
@@ -10918,7 +10919,7 @@
           <p:cNvPr id="15" name="spatial-rows-1">
             <a:extLst xmlns:a="http://schemas.openxmlformats.org/drawingml/2006/main">
               <a:ext uri="{FF2B5EF4-FFF2-40B4-BE49-F238E27FC236}">
-                <a16:creationId xmlns:a16="http://schemas.microsoft.com/office/drawing/2014/main" id="{1938720D-C4BD-4C2B-82E9-189DAB5B8DAF}"/>
+                <a16:creationId xmlns:a16="http://schemas.microsoft.com/office/drawing/2014/main" id="{27FF2603-70F2-4DA5-BA56-5F826288AA92}"/>
               </a:ext>
             </a:extLst>
           </p:cNvPr>
@@ -10963,7 +10964,7 @@
           <p:cNvPr id="16" name="spatial-blocks-1">
             <a:extLst xmlns:a="http://schemas.openxmlformats.org/drawingml/2006/main">
               <a:ext uri="{FF2B5EF4-FFF2-40B4-BE49-F238E27FC236}">
-                <a16:creationId xmlns:a16="http://schemas.microsoft.com/office/drawing/2014/main" id="{842D2001-B0E7-4699-987B-D3BA44862631}"/>
+                <a16:creationId xmlns:a16="http://schemas.microsoft.com/office/drawing/2014/main" id="{3805DBC7-B593-4193-BA37-8CADC52A5854}"/>
               </a:ext>
             </a:extLst>
           </p:cNvPr>
@@ -11008,7 +11009,7 @@
           <p:cNvPr id="17" name="spatial-body-1">
             <a:extLst xmlns:a="http://schemas.openxmlformats.org/drawingml/2006/main">
               <a:ext uri="{FF2B5EF4-FFF2-40B4-BE49-F238E27FC236}">
-                <a16:creationId xmlns:a16="http://schemas.microsoft.com/office/drawing/2014/main" id="{8E611AB0-4A7F-4F55-8074-232172FA99F1}"/>
+                <a16:creationId xmlns:a16="http://schemas.microsoft.com/office/drawing/2014/main" id="{D7DDC511-9324-46E1-AFF4-31858528FC25}"/>
               </a:ext>
             </a:extLst>
           </p:cNvPr>
@@ -11053,7 +11054,7 @@
           <p:cNvPr id="18" name="spatial-panel-2">
             <a:extLst xmlns:a="http://schemas.openxmlformats.org/drawingml/2006/main">
               <a:ext uri="{FF2B5EF4-FFF2-40B4-BE49-F238E27FC236}">
-                <a16:creationId xmlns:a16="http://schemas.microsoft.com/office/drawing/2014/main" id="{A5C272F3-2BCF-4FE2-A122-C5F3FA638CC4}"/>
+                <a16:creationId xmlns:a16="http://schemas.microsoft.com/office/drawing/2014/main" id="{F15C104B-962B-4FD9-9763-C954EE057ECA}"/>
               </a:ext>
             </a:extLst>
           </p:cNvPr>
@@ -11086,7 +11087,7 @@
           <p:cNvPr id="19" name="spatial-bar-2">
             <a:extLst xmlns:a="http://schemas.openxmlformats.org/drawingml/2006/main">
               <a:ext uri="{FF2B5EF4-FFF2-40B4-BE49-F238E27FC236}">
-                <a16:creationId xmlns:a16="http://schemas.microsoft.com/office/drawing/2014/main" id="{4FB2AADC-3763-44B5-85C6-954CDE97BF5A}"/>
+                <a16:creationId xmlns:a16="http://schemas.microsoft.com/office/drawing/2014/main" id="{0D8577BD-B191-41AD-B7CA-5CDDD19DB673}"/>
               </a:ext>
             </a:extLst>
           </p:cNvPr>
@@ -11119,7 +11120,7 @@
           <p:cNvPr id="20" name="spatial-title-2">
             <a:extLst xmlns:a="http://schemas.openxmlformats.org/drawingml/2006/main">
               <a:ext uri="{FF2B5EF4-FFF2-40B4-BE49-F238E27FC236}">
-                <a16:creationId xmlns:a16="http://schemas.microsoft.com/office/drawing/2014/main" id="{AB78CD1F-37E1-4F74-94B7-AA2239B09A6B}"/>
+                <a16:creationId xmlns:a16="http://schemas.microsoft.com/office/drawing/2014/main" id="{6A92D06E-9715-4BAF-B1FD-9F9F3CEF2CC9}"/>
               </a:ext>
             </a:extLst>
           </p:cNvPr>
@@ -11164,7 +11165,7 @@
           <p:cNvPr id="21" name="spatial-rows-2">
             <a:extLst xmlns:a="http://schemas.openxmlformats.org/drawingml/2006/main">
               <a:ext uri="{FF2B5EF4-FFF2-40B4-BE49-F238E27FC236}">
-                <a16:creationId xmlns:a16="http://schemas.microsoft.com/office/drawing/2014/main" id="{4C7B6950-52E0-45D4-AD0E-823CB89349BA}"/>
+                <a16:creationId xmlns:a16="http://schemas.microsoft.com/office/drawing/2014/main" id="{7F67D915-E199-4785-83D4-5E3558040B7E}"/>
               </a:ext>
             </a:extLst>
           </p:cNvPr>
@@ -11209,7 +11210,7 @@
           <p:cNvPr id="22" name="spatial-blocks-2">
             <a:extLst xmlns:a="http://schemas.openxmlformats.org/drawingml/2006/main">
               <a:ext uri="{FF2B5EF4-FFF2-40B4-BE49-F238E27FC236}">
-                <a16:creationId xmlns:a16="http://schemas.microsoft.com/office/drawing/2014/main" id="{320C8E59-74D7-4FF0-AA77-979CD3CC687C}"/>
+                <a16:creationId xmlns:a16="http://schemas.microsoft.com/office/drawing/2014/main" id="{4200C609-8B87-4C58-B103-CC4A23A607B2}"/>
               </a:ext>
             </a:extLst>
           </p:cNvPr>
@@ -11254,7 +11255,7 @@
           <p:cNvPr id="23" name="spatial-body-2">
             <a:extLst xmlns:a="http://schemas.openxmlformats.org/drawingml/2006/main">
               <a:ext uri="{FF2B5EF4-FFF2-40B4-BE49-F238E27FC236}">
-                <a16:creationId xmlns:a16="http://schemas.microsoft.com/office/drawing/2014/main" id="{F2DEF1A2-1F6B-44B1-B880-84A5F90F046E}"/>
+                <a16:creationId xmlns:a16="http://schemas.microsoft.com/office/drawing/2014/main" id="{05767D46-28B8-44C5-9C56-B9996CC35C45}"/>
               </a:ext>
             </a:extLst>
           </p:cNvPr>
@@ -11299,7 +11300,7 @@
           <p:cNvPr id="24" name="zero-overlap">
             <a:extLst xmlns:a="http://schemas.openxmlformats.org/drawingml/2006/main">
               <a:ext uri="{FF2B5EF4-FFF2-40B4-BE49-F238E27FC236}">
-                <a16:creationId xmlns:a16="http://schemas.microsoft.com/office/drawing/2014/main" id="{34ECEC5E-6CBD-48E1-A9C1-BC0D90F4FDF9}"/>
+                <a16:creationId xmlns:a16="http://schemas.microsoft.com/office/drawing/2014/main" id="{27168938-AD1D-444B-812F-CAB25DBCE3E5}"/>
               </a:ext>
             </a:extLst>
           </p:cNvPr>
@@ -11332,7 +11333,7 @@
           <p:cNvPr id="25" name="zero-overlap-text">
             <a:extLst xmlns:a="http://schemas.openxmlformats.org/drawingml/2006/main">
               <a:ext uri="{FF2B5EF4-FFF2-40B4-BE49-F238E27FC236}">
-                <a16:creationId xmlns:a16="http://schemas.microsoft.com/office/drawing/2014/main" id="{177B73BB-A1A0-4B58-A56D-FDD29323D26B}"/>
+                <a16:creationId xmlns:a16="http://schemas.microsoft.com/office/drawing/2014/main" id="{4D018353-2DA6-4EF6-98D4-DBECF275002A}"/>
               </a:ext>
             </a:extLst>
           </p:cNvPr>
@@ -11375,7 +11376,7 @@
     </p:spTree>
     <p:extLst>
       <p:ext uri="{BB962C8B-B14F-4D97-AF65-F5344CB8AC3E}">
-        <p14:creationId xmlns:p14="http://schemas.microsoft.com/office/powerpoint/2010/main" val="293564384"/>
+        <p14:creationId xmlns:p14="http://schemas.microsoft.com/office/powerpoint/2010/main" val="1721180713"/>
       </p:ext>
     </p:extLst>
   </p:cSld>
@@ -11406,7 +11407,7 @@
           <p:cNvPr id="12" name="title-7">
             <a:extLst xmlns:a="http://schemas.openxmlformats.org/drawingml/2006/main">
               <a:ext uri="{FF2B5EF4-FFF2-40B4-BE49-F238E27FC236}">
-                <a16:creationId xmlns:a16="http://schemas.microsoft.com/office/drawing/2014/main" id="{CD2000E0-140D-46DD-AB88-D83C73DF4C64}"/>
+                <a16:creationId xmlns:a16="http://schemas.microsoft.com/office/drawing/2014/main" id="{E990B8BA-D406-4187-B7A8-9F59A684C9AB}"/>
               </a:ext>
             </a:extLst>
           </p:cNvPr>
@@ -11451,7 +11452,7 @@
           <p:cNvPr id="2" name="source-7">
             <a:extLst xmlns:a="http://schemas.openxmlformats.org/drawingml/2006/main">
               <a:ext uri="{FF2B5EF4-FFF2-40B4-BE49-F238E27FC236}">
-                <a16:creationId xmlns:a16="http://schemas.microsoft.com/office/drawing/2014/main" id="{699EB310-5A70-46F6-93DA-2A3B1B1BF82B}"/>
+                <a16:creationId xmlns:a16="http://schemas.microsoft.com/office/drawing/2014/main" id="{300D2DA8-E580-43A8-AFF9-659A2E23E135}"/>
               </a:ext>
             </a:extLst>
           </p:cNvPr>
@@ -11496,7 +11497,7 @@
           <p:cNvPr id="3" name="page-7">
             <a:extLst xmlns:a="http://schemas.openxmlformats.org/drawingml/2006/main">
               <a:ext uri="{FF2B5EF4-FFF2-40B4-BE49-F238E27FC236}">
-                <a16:creationId xmlns:a16="http://schemas.microsoft.com/office/drawing/2014/main" id="{D7D95732-C78F-47A6-8956-E1C3B4797FE6}"/>
+                <a16:creationId xmlns:a16="http://schemas.microsoft.com/office/drawing/2014/main" id="{2A378912-C2B2-482B-B14C-6366426ABC5F}"/>
               </a:ext>
             </a:extLst>
           </p:cNvPr>
@@ -11541,7 +11542,7 @@
           <p:cNvPr id="4" name="benchmark-callout-one">
             <a:extLst xmlns:a="http://schemas.openxmlformats.org/drawingml/2006/main">
               <a:ext uri="{FF2B5EF4-FFF2-40B4-BE49-F238E27FC236}">
-                <a16:creationId xmlns:a16="http://schemas.microsoft.com/office/drawing/2014/main" id="{C726DE14-ED9E-4204-8FA2-8ADA5CD0DF08}"/>
+                <a16:creationId xmlns:a16="http://schemas.microsoft.com/office/drawing/2014/main" id="{E2897885-8EBD-4C01-888B-5ACC0378806F}"/>
               </a:ext>
             </a:extLst>
           </p:cNvPr>
@@ -11574,7 +11575,7 @@
           <p:cNvPr id="5" name="benchmark-callout-one-title">
             <a:extLst xmlns:a="http://schemas.openxmlformats.org/drawingml/2006/main">
               <a:ext uri="{FF2B5EF4-FFF2-40B4-BE49-F238E27FC236}">
-                <a16:creationId xmlns:a16="http://schemas.microsoft.com/office/drawing/2014/main" id="{9E1DC7F9-94DC-4485-B4CE-D5BFDEC7A23F}"/>
+                <a16:creationId xmlns:a16="http://schemas.microsoft.com/office/drawing/2014/main" id="{DFDC6295-5015-4E56-BA04-FDDAA14F2154}"/>
               </a:ext>
             </a:extLst>
           </p:cNvPr>
@@ -11619,7 +11620,7 @@
           <p:cNvPr id="6" name="benchmark-callout-one-body">
             <a:extLst xmlns:a="http://schemas.openxmlformats.org/drawingml/2006/main">
               <a:ext uri="{FF2B5EF4-FFF2-40B4-BE49-F238E27FC236}">
-                <a16:creationId xmlns:a16="http://schemas.microsoft.com/office/drawing/2014/main" id="{E8DC41BB-2DCE-4F10-95D2-89DFB8509086}"/>
+                <a16:creationId xmlns:a16="http://schemas.microsoft.com/office/drawing/2014/main" id="{5F0429CE-C9BD-4B8F-94E2-F48A9C3B1B76}"/>
               </a:ext>
             </a:extLst>
           </p:cNvPr>
@@ -11664,7 +11665,7 @@
           <p:cNvPr id="7" name="benchmark-callout-two">
             <a:extLst xmlns:a="http://schemas.openxmlformats.org/drawingml/2006/main">
               <a:ext uri="{FF2B5EF4-FFF2-40B4-BE49-F238E27FC236}">
-                <a16:creationId xmlns:a16="http://schemas.microsoft.com/office/drawing/2014/main" id="{DF0BD567-5D01-4635-AD64-BF89D921FF11}"/>
+                <a16:creationId xmlns:a16="http://schemas.microsoft.com/office/drawing/2014/main" id="{9F0F4947-4F5E-46D6-9F4A-4D280836A4C1}"/>
               </a:ext>
             </a:extLst>
           </p:cNvPr>
@@ -11697,7 +11698,7 @@
           <p:cNvPr id="8" name="benchmark-callout-two-title">
             <a:extLst xmlns:a="http://schemas.openxmlformats.org/drawingml/2006/main">
               <a:ext uri="{FF2B5EF4-FFF2-40B4-BE49-F238E27FC236}">
-                <a16:creationId xmlns:a16="http://schemas.microsoft.com/office/drawing/2014/main" id="{8A5CE399-EBB0-435C-89EA-74592B238789}"/>
+                <a16:creationId xmlns:a16="http://schemas.microsoft.com/office/drawing/2014/main" id="{E388F04C-C860-4FAF-A470-DFC3433722C1}"/>
               </a:ext>
             </a:extLst>
           </p:cNvPr>
@@ -11742,7 +11743,7 @@
           <p:cNvPr id="9" name="benchmark-callout-two-body">
             <a:extLst xmlns:a="http://schemas.openxmlformats.org/drawingml/2006/main">
               <a:ext uri="{FF2B5EF4-FFF2-40B4-BE49-F238E27FC236}">
-                <a16:creationId xmlns:a16="http://schemas.microsoft.com/office/drawing/2014/main" id="{B942740B-FA9F-46D4-80F6-2A18C81BFB82}"/>
+                <a16:creationId xmlns:a16="http://schemas.microsoft.com/office/drawing/2014/main" id="{FC3A05ED-92ED-4645-891C-74F73AFC8946}"/>
               </a:ext>
             </a:extLst>
           </p:cNvPr>
@@ -11787,7 +11788,7 @@
           <p:cNvPr id="10" name="benchmark-interpretation">
             <a:extLst xmlns:a="http://schemas.openxmlformats.org/drawingml/2006/main">
               <a:ext uri="{FF2B5EF4-FFF2-40B4-BE49-F238E27FC236}">
-                <a16:creationId xmlns:a16="http://schemas.microsoft.com/office/drawing/2014/main" id="{CE3780BF-7C42-4004-860C-09B399913515}"/>
+                <a16:creationId xmlns:a16="http://schemas.microsoft.com/office/drawing/2014/main" id="{B8BDAEB3-47EF-4F6B-A558-306BD39B2DA0}"/>
               </a:ext>
             </a:extLst>
           </p:cNvPr>
@@ -11839,14 +11840,14 @@
         </p:xfrm>
         <a:graphic xmlns:a="http://schemas.openxmlformats.org/drawingml/2006/main">
           <a:graphicData uri="http://schemas.openxmlformats.org/drawingml/2006/chart">
-            <c:chart xmlns:r="http://schemas.openxmlformats.org/officeDocument/2006/relationships" xmlns:c="http://schemas.openxmlformats.org/drawingml/2006/chart" r:id="R9dad57064fe64ac6"/>
+            <c:chart xmlns:r="http://schemas.openxmlformats.org/officeDocument/2006/relationships" xmlns:c="http://schemas.openxmlformats.org/drawingml/2006/chart" r:id="R3db4e6f74d2d496c"/>
           </a:graphicData>
         </a:graphic>
       </p:graphicFrame>
     </p:spTree>
     <p:extLst>
       <p:ext uri="{BB962C8B-B14F-4D97-AF65-F5344CB8AC3E}">
-        <p14:creationId xmlns:p14="http://schemas.microsoft.com/office/powerpoint/2010/main" val="1695182741"/>
+        <p14:creationId xmlns:p14="http://schemas.microsoft.com/office/powerpoint/2010/main" val="334940402"/>
       </p:ext>
     </p:extLst>
   </p:cSld>
@@ -11877,7 +11878,7 @@
           <p:cNvPr id="14" name="title-8">
             <a:extLst xmlns:a="http://schemas.openxmlformats.org/drawingml/2006/main">
               <a:ext uri="{FF2B5EF4-FFF2-40B4-BE49-F238E27FC236}">
-                <a16:creationId xmlns:a16="http://schemas.microsoft.com/office/drawing/2014/main" id="{5EF18D27-C117-4201-B0D3-714B6D57CF52}"/>
+                <a16:creationId xmlns:a16="http://schemas.microsoft.com/office/drawing/2014/main" id="{5A1BC00A-3C91-4993-B839-44E203B628EB}"/>
               </a:ext>
             </a:extLst>
           </p:cNvPr>
@@ -11922,7 +11923,7 @@
           <p:cNvPr id="2" name="source-8">
             <a:extLst xmlns:a="http://schemas.openxmlformats.org/drawingml/2006/main">
               <a:ext uri="{FF2B5EF4-FFF2-40B4-BE49-F238E27FC236}">
-                <a16:creationId xmlns:a16="http://schemas.microsoft.com/office/drawing/2014/main" id="{B1A72826-F67D-43E7-B01F-BB5D527D182A}"/>
+                <a16:creationId xmlns:a16="http://schemas.microsoft.com/office/drawing/2014/main" id="{99D9CD9B-4925-4BF1-BC72-C1EE510D0EB7}"/>
               </a:ext>
             </a:extLst>
           </p:cNvPr>
@@ -11967,7 +11968,7 @@
           <p:cNvPr id="3" name="page-8">
             <a:extLst xmlns:a="http://schemas.openxmlformats.org/drawingml/2006/main">
               <a:ext uri="{FF2B5EF4-FFF2-40B4-BE49-F238E27FC236}">
-                <a16:creationId xmlns:a16="http://schemas.microsoft.com/office/drawing/2014/main" id="{C60C5534-7E77-448F-9CC5-0FE021F575B0}"/>
+                <a16:creationId xmlns:a16="http://schemas.microsoft.com/office/drawing/2014/main" id="{CD3BDDA6-FE34-4473-826F-702762C78827}"/>
               </a:ext>
             </a:extLst>
           </p:cNvPr>
@@ -12012,7 +12013,7 @@
           <p:cNvPr id="4" name="final-lead">
             <a:extLst xmlns:a="http://schemas.openxmlformats.org/drawingml/2006/main">
               <a:ext uri="{FF2B5EF4-FFF2-40B4-BE49-F238E27FC236}">
-                <a16:creationId xmlns:a16="http://schemas.microsoft.com/office/drawing/2014/main" id="{1BCBDD14-6987-48BF-B6B6-5357C1A2F1BB}"/>
+                <a16:creationId xmlns:a16="http://schemas.microsoft.com/office/drawing/2014/main" id="{9DBDE320-C1A1-4B6E-AB98-475092237BE3}"/>
               </a:ext>
             </a:extLst>
           </p:cNvPr>
@@ -12057,7 +12058,7 @@
           <p:cNvPr id="5" name="final-chart-title">
             <a:extLst xmlns:a="http://schemas.openxmlformats.org/drawingml/2006/main">
               <a:ext uri="{FF2B5EF4-FFF2-40B4-BE49-F238E27FC236}">
-                <a16:creationId xmlns:a16="http://schemas.microsoft.com/office/drawing/2014/main" id="{12A3E849-6FE7-432A-AD8A-F7BEFCD07989}"/>
+                <a16:creationId xmlns:a16="http://schemas.microsoft.com/office/drawing/2014/main" id="{660F3D57-D395-4713-9D30-5283801E4E68}"/>
               </a:ext>
             </a:extLst>
           </p:cNvPr>
@@ -12102,7 +12103,7 @@
           <p:cNvPr id="6" name="final-metric-one">
             <a:extLst xmlns:a="http://schemas.openxmlformats.org/drawingml/2006/main">
               <a:ext uri="{FF2B5EF4-FFF2-40B4-BE49-F238E27FC236}">
-                <a16:creationId xmlns:a16="http://schemas.microsoft.com/office/drawing/2014/main" id="{819608CE-74B9-40F6-A6C6-0B0D040955AE}"/>
+                <a16:creationId xmlns:a16="http://schemas.microsoft.com/office/drawing/2014/main" id="{0B1823AF-C7D8-45C8-9136-34A7ADEC4D81}"/>
               </a:ext>
             </a:extLst>
           </p:cNvPr>
@@ -12135,7 +12136,7 @@
           <p:cNvPr id="7" name="final-metric-one-stat">
             <a:extLst xmlns:a="http://schemas.openxmlformats.org/drawingml/2006/main">
               <a:ext uri="{FF2B5EF4-FFF2-40B4-BE49-F238E27FC236}">
-                <a16:creationId xmlns:a16="http://schemas.microsoft.com/office/drawing/2014/main" id="{F17895AF-5EE6-40C7-848F-9A2B5D73EE06}"/>
+                <a16:creationId xmlns:a16="http://schemas.microsoft.com/office/drawing/2014/main" id="{02C2B236-09BA-47C5-B704-8445D32A1158}"/>
               </a:ext>
             </a:extLst>
           </p:cNvPr>
@@ -12180,7 +12181,7 @@
           <p:cNvPr id="8" name="final-metric-one-body">
             <a:extLst xmlns:a="http://schemas.openxmlformats.org/drawingml/2006/main">
               <a:ext uri="{FF2B5EF4-FFF2-40B4-BE49-F238E27FC236}">
-                <a16:creationId xmlns:a16="http://schemas.microsoft.com/office/drawing/2014/main" id="{E7BB7297-1C37-46DF-8F58-83C864D4C57A}"/>
+                <a16:creationId xmlns:a16="http://schemas.microsoft.com/office/drawing/2014/main" id="{CF6395FF-9F43-4CF6-8862-0719A650B4AB}"/>
               </a:ext>
             </a:extLst>
           </p:cNvPr>
@@ -12225,7 +12226,7 @@
           <p:cNvPr id="9" name="final-metric-two">
             <a:extLst xmlns:a="http://schemas.openxmlformats.org/drawingml/2006/main">
               <a:ext uri="{FF2B5EF4-FFF2-40B4-BE49-F238E27FC236}">
-                <a16:creationId xmlns:a16="http://schemas.microsoft.com/office/drawing/2014/main" id="{B211FB01-69E3-4B52-88D9-810C6644AC01}"/>
+                <a16:creationId xmlns:a16="http://schemas.microsoft.com/office/drawing/2014/main" id="{83E8F88A-46E2-411C-84C7-504EF22734A8}"/>
               </a:ext>
             </a:extLst>
           </p:cNvPr>
@@ -12258,7 +12259,7 @@
           <p:cNvPr id="10" name="final-metric-two-stat">
             <a:extLst xmlns:a="http://schemas.openxmlformats.org/drawingml/2006/main">
               <a:ext uri="{FF2B5EF4-FFF2-40B4-BE49-F238E27FC236}">
-                <a16:creationId xmlns:a16="http://schemas.microsoft.com/office/drawing/2014/main" id="{23481738-E7BC-43E1-822A-7B8C81976774}"/>
+                <a16:creationId xmlns:a16="http://schemas.microsoft.com/office/drawing/2014/main" id="{06126204-2B1A-497B-B29F-5B395624FE58}"/>
               </a:ext>
             </a:extLst>
           </p:cNvPr>
@@ -12303,7 +12304,7 @@
           <p:cNvPr id="11" name="final-metric-two-body">
             <a:extLst xmlns:a="http://schemas.openxmlformats.org/drawingml/2006/main">
               <a:ext uri="{FF2B5EF4-FFF2-40B4-BE49-F238E27FC236}">
-                <a16:creationId xmlns:a16="http://schemas.microsoft.com/office/drawing/2014/main" id="{63D9C7DC-2BC8-4AD5-9DD4-C5ABF61B239A}"/>
+                <a16:creationId xmlns:a16="http://schemas.microsoft.com/office/drawing/2014/main" id="{D9E72225-8EE5-4976-BBBB-C6C6BFAF7580}"/>
               </a:ext>
             </a:extLst>
           </p:cNvPr>
@@ -12348,7 +12349,7 @@
           <p:cNvPr id="12" name="final-warning">
             <a:extLst xmlns:a="http://schemas.openxmlformats.org/drawingml/2006/main">
               <a:ext uri="{FF2B5EF4-FFF2-40B4-BE49-F238E27FC236}">
-                <a16:creationId xmlns:a16="http://schemas.microsoft.com/office/drawing/2014/main" id="{14A5A0F6-413C-4FC2-ADA6-616CC3E0382F}"/>
+                <a16:creationId xmlns:a16="http://schemas.microsoft.com/office/drawing/2014/main" id="{58EAE273-2BFF-423A-9F74-D1E0F70529D4}"/>
               </a:ext>
             </a:extLst>
           </p:cNvPr>
@@ -12400,14 +12401,14 @@
         </p:xfrm>
         <a:graphic xmlns:a="http://schemas.openxmlformats.org/drawingml/2006/main">
           <a:graphicData uri="http://schemas.openxmlformats.org/drawingml/2006/chart">
-            <c:chart xmlns:r="http://schemas.openxmlformats.org/officeDocument/2006/relationships" xmlns:c="http://schemas.openxmlformats.org/drawingml/2006/chart" r:id="Ra7aee7af29d541bf"/>
+            <c:chart xmlns:r="http://schemas.openxmlformats.org/officeDocument/2006/relationships" xmlns:c="http://schemas.openxmlformats.org/drawingml/2006/chart" r:id="Rd1ae6056a4d64e54"/>
           </a:graphicData>
         </a:graphic>
       </p:graphicFrame>
     </p:spTree>
     <p:extLst>
       <p:ext uri="{BB962C8B-B14F-4D97-AF65-F5344CB8AC3E}">
-        <p14:creationId xmlns:p14="http://schemas.microsoft.com/office/powerpoint/2010/main" val="719555260"/>
+        <p14:creationId xmlns:p14="http://schemas.microsoft.com/office/powerpoint/2010/main" val="2093405202"/>
       </p:ext>
     </p:extLst>
   </p:cSld>
@@ -12438,7 +12439,7 @@
           <p:cNvPr id="15" name="title-9">
             <a:extLst xmlns:a="http://schemas.openxmlformats.org/drawingml/2006/main">
               <a:ext uri="{FF2B5EF4-FFF2-40B4-BE49-F238E27FC236}">
-                <a16:creationId xmlns:a16="http://schemas.microsoft.com/office/drawing/2014/main" id="{172E5AF7-75A2-413B-9E39-29E4C6976B36}"/>
+                <a16:creationId xmlns:a16="http://schemas.microsoft.com/office/drawing/2014/main" id="{9FBCE0A1-F775-4AEC-AA89-9F33708537FE}"/>
               </a:ext>
             </a:extLst>
           </p:cNvPr>
@@ -12483,7 +12484,7 @@
           <p:cNvPr id="2" name="source-9">
             <a:extLst xmlns:a="http://schemas.openxmlformats.org/drawingml/2006/main">
               <a:ext uri="{FF2B5EF4-FFF2-40B4-BE49-F238E27FC236}">
-                <a16:creationId xmlns:a16="http://schemas.microsoft.com/office/drawing/2014/main" id="{7A61F4CC-10C0-4AFD-8625-4530D34BADA2}"/>
+                <a16:creationId xmlns:a16="http://schemas.microsoft.com/office/drawing/2014/main" id="{AA7F9863-0584-4030-8747-656A42E0F0A5}"/>
               </a:ext>
             </a:extLst>
           </p:cNvPr>
@@ -12528,7 +12529,7 @@
           <p:cNvPr id="3" name="page-9">
             <a:extLst xmlns:a="http://schemas.openxmlformats.org/drawingml/2006/main">
               <a:ext uri="{FF2B5EF4-FFF2-40B4-BE49-F238E27FC236}">
-                <a16:creationId xmlns:a16="http://schemas.microsoft.com/office/drawing/2014/main" id="{FA5F541D-6325-4958-A24E-28C91438DB7E}"/>
+                <a16:creationId xmlns:a16="http://schemas.microsoft.com/office/drawing/2014/main" id="{19E453A8-EDB0-4E91-A27A-1268EA2EAC26}"/>
               </a:ext>
             </a:extLst>
           </p:cNvPr>
@@ -12573,7 +12574,7 @@
           <p:cNvPr id="4" name="berlin-chart-title">
             <a:extLst xmlns:a="http://schemas.openxmlformats.org/drawingml/2006/main">
               <a:ext uri="{FF2B5EF4-FFF2-40B4-BE49-F238E27FC236}">
-                <a16:creationId xmlns:a16="http://schemas.microsoft.com/office/drawing/2014/main" id="{C244159F-C262-431D-9638-CEFDDC8411AD}"/>
+                <a16:creationId xmlns:a16="http://schemas.microsoft.com/office/drawing/2014/main" id="{B8DAD2EA-E836-4A48-BE8C-AC6A270C954B}"/>
               </a:ext>
             </a:extLst>
           </p:cNvPr>
@@ -12618,7 +12619,7 @@
           <p:cNvPr id="5" name="berlin-stock">
             <a:extLst xmlns:a="http://schemas.openxmlformats.org/drawingml/2006/main">
               <a:ext uri="{FF2B5EF4-FFF2-40B4-BE49-F238E27FC236}">
-                <a16:creationId xmlns:a16="http://schemas.microsoft.com/office/drawing/2014/main" id="{9E6C409E-39C8-449C-9281-C1F88E60E856}"/>
+                <a16:creationId xmlns:a16="http://schemas.microsoft.com/office/drawing/2014/main" id="{AB082D93-FBF8-4875-A737-65873FD43A88}"/>
               </a:ext>
             </a:extLst>
           </p:cNvPr>
@@ -12651,7 +12652,7 @@
           <p:cNvPr id="6" name="berlin-stock-stat">
             <a:extLst xmlns:a="http://schemas.openxmlformats.org/drawingml/2006/main">
               <a:ext uri="{FF2B5EF4-FFF2-40B4-BE49-F238E27FC236}">
-                <a16:creationId xmlns:a16="http://schemas.microsoft.com/office/drawing/2014/main" id="{10B43C9A-B296-4938-B3EA-B3CBE14BAEC7}"/>
+                <a16:creationId xmlns:a16="http://schemas.microsoft.com/office/drawing/2014/main" id="{B7C54161-1D3B-436B-BD7E-ED6AE1EE1039}"/>
               </a:ext>
             </a:extLst>
           </p:cNvPr>
@@ -12696,7 +12697,7 @@
           <p:cNvPr id="7" name="berlin-stock-body">
             <a:extLst xmlns:a="http://schemas.openxmlformats.org/drawingml/2006/main">
               <a:ext uri="{FF2B5EF4-FFF2-40B4-BE49-F238E27FC236}">
-                <a16:creationId xmlns:a16="http://schemas.microsoft.com/office/drawing/2014/main" id="{5FA07464-12CF-4FF5-9121-F7C5F3897146}"/>
+                <a16:creationId xmlns:a16="http://schemas.microsoft.com/office/drawing/2014/main" id="{CD3DA0DE-4AAA-4AEA-BA23-D64028048020}"/>
               </a:ext>
             </a:extLst>
           </p:cNvPr>
@@ -12741,7 +12742,7 @@
           <p:cNvPr id="8" name="berlin-market">
             <a:extLst xmlns:a="http://schemas.openxmlformats.org/drawingml/2006/main">
               <a:ext uri="{FF2B5EF4-FFF2-40B4-BE49-F238E27FC236}">
-                <a16:creationId xmlns:a16="http://schemas.microsoft.com/office/drawing/2014/main" id="{D7A24E9E-B9BB-4AC5-8EB0-9BDE4BCF7223}"/>
+                <a16:creationId xmlns:a16="http://schemas.microsoft.com/office/drawing/2014/main" id="{FB35482C-826D-4B93-8B95-C3DB319A9A0D}"/>
               </a:ext>
             </a:extLst>
           </p:cNvPr>
@@ -12774,7 +12775,7 @@
           <p:cNvPr id="9" name="berlin-market-stat">
             <a:extLst xmlns:a="http://schemas.openxmlformats.org/drawingml/2006/main">
               <a:ext uri="{FF2B5EF4-FFF2-40B4-BE49-F238E27FC236}">
-                <a16:creationId xmlns:a16="http://schemas.microsoft.com/office/drawing/2014/main" id="{47C3C0E2-1382-4A2B-A66D-50C0313FF5A6}"/>
+                <a16:creationId xmlns:a16="http://schemas.microsoft.com/office/drawing/2014/main" id="{B350EF5B-6D57-481D-883D-3EB4241349FF}"/>
               </a:ext>
             </a:extLst>
           </p:cNvPr>
@@ -12819,7 +12820,7 @@
           <p:cNvPr id="10" name="berlin-market-body">
             <a:extLst xmlns:a="http://schemas.openxmlformats.org/drawingml/2006/main">
               <a:ext uri="{FF2B5EF4-FFF2-40B4-BE49-F238E27FC236}">
-                <a16:creationId xmlns:a16="http://schemas.microsoft.com/office/drawing/2014/main" id="{67CC61D2-6CC0-4E3D-A84F-0E363F65C0B8}"/>
+                <a16:creationId xmlns:a16="http://schemas.microsoft.com/office/drawing/2014/main" id="{F16D010A-33FB-4666-B3FB-C5324A8C0794}"/>
               </a:ext>
             </a:extLst>
           </p:cNvPr>
@@ -12864,7 +12865,7 @@
           <p:cNvPr id="11" name="berlin-premium">
             <a:extLst xmlns:a="http://schemas.openxmlformats.org/drawingml/2006/main">
               <a:ext uri="{FF2B5EF4-FFF2-40B4-BE49-F238E27FC236}">
-                <a16:creationId xmlns:a16="http://schemas.microsoft.com/office/drawing/2014/main" id="{C63D4638-33E2-44B7-8D88-364B9398F8E6}"/>
+                <a16:creationId xmlns:a16="http://schemas.microsoft.com/office/drawing/2014/main" id="{8AFF188C-67AC-4A78-86BB-6E60B51D5F72}"/>
               </a:ext>
             </a:extLst>
           </p:cNvPr>
@@ -12897,7 +12898,7 @@
           <p:cNvPr id="12" name="berlin-premium-stat">
             <a:extLst xmlns:a="http://schemas.openxmlformats.org/drawingml/2006/main">
               <a:ext uri="{FF2B5EF4-FFF2-40B4-BE49-F238E27FC236}">
-                <a16:creationId xmlns:a16="http://schemas.microsoft.com/office/drawing/2014/main" id="{3F510D24-0291-42FF-9394-6D465A8A5532}"/>
+                <a16:creationId xmlns:a16="http://schemas.microsoft.com/office/drawing/2014/main" id="{BA8E2AEE-7E69-4B52-8109-840A8DC684E3}"/>
               </a:ext>
             </a:extLst>
           </p:cNvPr>
@@ -12942,7 +12943,7 @@
           <p:cNvPr id="13" name="berlin-premium-body">
             <a:extLst xmlns:a="http://schemas.openxmlformats.org/drawingml/2006/main">
               <a:ext uri="{FF2B5EF4-FFF2-40B4-BE49-F238E27FC236}">
-                <a16:creationId xmlns:a16="http://schemas.microsoft.com/office/drawing/2014/main" id="{1282808E-F6BC-4CD7-82DA-7551A6897DC9}"/>
+                <a16:creationId xmlns:a16="http://schemas.microsoft.com/office/drawing/2014/main" id="{B12357BF-06CB-4B24-9434-1FEE70D02B33}"/>
               </a:ext>
             </a:extLst>
           </p:cNvPr>
@@ -12994,14 +12995,14 @@
         </p:xfrm>
         <a:graphic xmlns:a="http://schemas.openxmlformats.org/drawingml/2006/main">
           <a:graphicData uri="http://schemas.openxmlformats.org/drawingml/2006/chart">
-            <c:chart xmlns:r="http://schemas.openxmlformats.org/officeDocument/2006/relationships" xmlns:c="http://schemas.openxmlformats.org/drawingml/2006/chart" r:id="R9d942f04fe354b26"/>
+            <c:chart xmlns:r="http://schemas.openxmlformats.org/officeDocument/2006/relationships" xmlns:c="http://schemas.openxmlformats.org/drawingml/2006/chart" r:id="R7e541d23dfdf479b"/>
           </a:graphicData>
         </a:graphic>
       </p:graphicFrame>
     </p:spTree>
     <p:extLst>
       <p:ext uri="{BB962C8B-B14F-4D97-AF65-F5344CB8AC3E}">
-        <p14:creationId xmlns:p14="http://schemas.microsoft.com/office/powerpoint/2010/main" val="1033701092"/>
+        <p14:creationId xmlns:p14="http://schemas.microsoft.com/office/powerpoint/2010/main" val="813791167"/>
       </p:ext>
     </p:extLst>
   </p:cSld>

--- a/deliverables/MietCheck_Praesentation.pptx
+++ b/deliverables/MietCheck_Praesentation.pptx
@@ -2,26 +2,27 @@
 <file path=ppt/presentation.xml><?xml version="1.0" encoding="utf-8"?>
 <p:presentation xmlns:p="http://schemas.openxmlformats.org/presentationml/2006/main">
   <p:sldMasterIdLst>
-    <p:sldMasterId xmlns:r="http://schemas.openxmlformats.org/officeDocument/2006/relationships" id="2147483648" r:id="R57033de2805e4e86"/>
+    <p:sldMasterId xmlns:r="http://schemas.openxmlformats.org/officeDocument/2006/relationships" id="2147483648" r:id="Rd74af7b903c94f74"/>
   </p:sldMasterIdLst>
   <p:notesMasterIdLst>
-    <p:notesMasterId xmlns:r="http://schemas.openxmlformats.org/officeDocument/2006/relationships" r:id="R68cdf93425874aec"/>
+    <p:notesMasterId xmlns:r="http://schemas.openxmlformats.org/officeDocument/2006/relationships" r:id="R6a9eccaec81749cf"/>
   </p:notesMasterIdLst>
   <p:sldIdLst>
-    <p:sldId xmlns:r="http://schemas.openxmlformats.org/officeDocument/2006/relationships" id="256" r:id="R352f34d02ec74d85"/>
-    <p:sldId xmlns:r="http://schemas.openxmlformats.org/officeDocument/2006/relationships" id="257" r:id="Ra1240c7bddc6412e"/>
-    <p:sldId xmlns:r="http://schemas.openxmlformats.org/officeDocument/2006/relationships" id="258" r:id="Rc31fc35cde394625"/>
-    <p:sldId xmlns:r="http://schemas.openxmlformats.org/officeDocument/2006/relationships" id="259" r:id="R68af630028fd4141"/>
-    <p:sldId xmlns:r="http://schemas.openxmlformats.org/officeDocument/2006/relationships" id="260" r:id="R72ec798dd6d24236"/>
-    <p:sldId xmlns:r="http://schemas.openxmlformats.org/officeDocument/2006/relationships" id="261" r:id="R0e993c5bfecd4b5d"/>
-    <p:sldId xmlns:r="http://schemas.openxmlformats.org/officeDocument/2006/relationships" id="262" r:id="R28923ee6dbb74a84"/>
-    <p:sldId xmlns:r="http://schemas.openxmlformats.org/officeDocument/2006/relationships" id="263" r:id="R6cea39de38a24bf2"/>
-    <p:sldId xmlns:r="http://schemas.openxmlformats.org/officeDocument/2006/relationships" id="264" r:id="R3ccbef653795475a"/>
-    <p:sldId xmlns:r="http://schemas.openxmlformats.org/officeDocument/2006/relationships" id="265" r:id="R915f25b11eb943d1"/>
-    <p:sldId xmlns:r="http://schemas.openxmlformats.org/officeDocument/2006/relationships" id="266" r:id="Rfcb7b62eaef843f6"/>
-    <p:sldId xmlns:r="http://schemas.openxmlformats.org/officeDocument/2006/relationships" id="267" r:id="R3519b03896d34720"/>
-    <p:sldId xmlns:r="http://schemas.openxmlformats.org/officeDocument/2006/relationships" id="268" r:id="Rf74e57f78eb1483b"/>
-    <p:sldId xmlns:r="http://schemas.openxmlformats.org/officeDocument/2006/relationships" id="269" r:id="R388337ec100a4c0e"/>
+    <p:sldId xmlns:r="http://schemas.openxmlformats.org/officeDocument/2006/relationships" id="256" r:id="R59f82947c98749bf"/>
+    <p:sldId xmlns:r="http://schemas.openxmlformats.org/officeDocument/2006/relationships" id="257" r:id="Rf95952049be54bdc"/>
+    <p:sldId xmlns:r="http://schemas.openxmlformats.org/officeDocument/2006/relationships" id="258" r:id="Rf3a063a0d7ab49c1"/>
+    <p:sldId xmlns:r="http://schemas.openxmlformats.org/officeDocument/2006/relationships" id="259" r:id="Rc2787b436e65461f"/>
+    <p:sldId xmlns:r="http://schemas.openxmlformats.org/officeDocument/2006/relationships" id="260" r:id="Ra51d294c4efe48ae"/>
+    <p:sldId xmlns:r="http://schemas.openxmlformats.org/officeDocument/2006/relationships" id="261" r:id="Ra6e422a3cf984d78"/>
+    <p:sldId xmlns:r="http://schemas.openxmlformats.org/officeDocument/2006/relationships" id="262" r:id="R8fd5b83a351d44d9"/>
+    <p:sldId xmlns:r="http://schemas.openxmlformats.org/officeDocument/2006/relationships" id="263" r:id="R63c68c28d7b54be2"/>
+    <p:sldId xmlns:r="http://schemas.openxmlformats.org/officeDocument/2006/relationships" id="264" r:id="R24d527aeb4fc4a27"/>
+    <p:sldId xmlns:r="http://schemas.openxmlformats.org/officeDocument/2006/relationships" id="265" r:id="R7d0a6b7aa5e6412d"/>
+    <p:sldId xmlns:r="http://schemas.openxmlformats.org/officeDocument/2006/relationships" id="266" r:id="Rca0b0f4d5b9148da"/>
+    <p:sldId xmlns:r="http://schemas.openxmlformats.org/officeDocument/2006/relationships" id="267" r:id="R0b1141bb46c74302"/>
+    <p:sldId xmlns:r="http://schemas.openxmlformats.org/officeDocument/2006/relationships" id="268" r:id="Re54bd115386f448f"/>
+    <p:sldId xmlns:r="http://schemas.openxmlformats.org/officeDocument/2006/relationships" id="269" r:id="Re1b9434ea07247c3"/>
+    <p:sldId xmlns:r="http://schemas.openxmlformats.org/officeDocument/2006/relationships" id="270" r:id="R3b45aeb1fe1e4740"/>
   </p:sldIdLst>
   <p:sldSz cx="12192000" cy="6858000"/>
   <p:notesSz cx="6858000" cy="9144000"/>
@@ -550,17 +551,12 @@
           <a:lstStyle xmlns:a="http://schemas.openxmlformats.org/drawingml/2006/main"/>
           <a:p xmlns:a="http://schemas.openxmlformats.org/drawingml/2006/main">
             <a:r>
-              <a:t>Zeit: ca. 40 Sekunden.</a:t>
-            </a:r>
-          </a:p>
-          <a:p xmlns:a="http://schemas.openxmlformats.org/drawingml/2006/main">
-            <a:r>
-              <a:t>Einstieg: Ein Mietrechner suggeriert oft, es gebe genau eine faire Miete. Das ist fachlich problematisch.</a:t>
-            </a:r>
-          </a:p>
-          <a:p xmlns:a="http://schemas.openxmlformats.org/drawingml/2006/main">
-            <a:r>
-              <a:t>MietCheck trennt deshalb drei Messkonzepte und macht ihren Unterschied zur eigentlichen Entscheidungshilfe.</a:t>
+              <a:t>Zeit: ca. 35 Sekunden.</a:t>
+            </a:r>
+          </a:p>
+          <a:p xmlns:a="http://schemas.openxmlformats.org/drawingml/2006/main">
+            <a:r>
+              <a:t>MietCheck führt durch den vollständigen QUA³CK-Prozess. Die App wird in dieser Präsentation mit verifizierten Screenshots gezeigt; eine Live-Demo ist nicht erforderlich.</a:t>
             </a:r>
           </a:p>
         </p:txBody>
@@ -630,22 +626,12 @@
           <a:lstStyle xmlns:a="http://schemas.openxmlformats.org/drawingml/2006/main"/>
           <a:p xmlns:a="http://schemas.openxmlformats.org/drawingml/2006/main">
             <a:r>
-              <a:t>Zeit: ca. 90 Sekunden plus kurze Live-Demo.</a:t>
-            </a:r>
-          </a:p>
-          <a:p xmlns:a="http://schemas.openxmlformats.org/drawingml/2006/main">
-            <a:r>
-              <a:t>Demo: Region Berlin, 70 Quadratmeter, Baujahr 1985, aktuelle Kaltmiete 850 Euro, Einkommen 3.200 Euro.</a:t>
-            </a:r>
-          </a:p>
-          <a:p xmlns:a="http://schemas.openxmlformats.org/drawingml/2006/main">
-            <a:r>
-              <a:t>Dann Region wechseln oder Wohnfläche auf 90 Quadratmeter setzen und zeigen, dass Werte und Belastung sofort neu berechnet werden.</a:t>
-            </a:r>
-          </a:p>
-          <a:p xmlns:a="http://schemas.openxmlformats.org/drawingml/2006/main">
-            <a:r>
-              <a:t>Zum Schluss Methodik-Tab öffnen: Quellen, Modellvergleich und 86,8-Prozent-Coverage sind direkt im Produkt sichtbar.</a:t>
+              <a:t>Zeit: ca. 45 Sekunden.</a:t>
+            </a:r>
+          </a:p>
+          <a:p xmlns:a="http://schemas.openxmlformats.org/drawingml/2006/main">
+            <a:r>
+              <a:t>Der Screenshot ersetzt die Live-Demo. Er zeigt das Berlin-Szenario, drei getrennte Mietwerte und den Umzugsaufschlag direkt am Ergebnis.</a:t>
             </a:r>
           </a:p>
         </p:txBody>
@@ -715,17 +701,12 @@
           <a:lstStyle xmlns:a="http://schemas.openxmlformats.org/drawingml/2006/main"/>
           <a:p xmlns:a="http://schemas.openxmlformats.org/drawingml/2006/main">
             <a:r>
-              <a:t>Zeit: ca. 65 Sekunden.</a:t>
-            </a:r>
-          </a:p>
-          <a:p xmlns:a="http://schemas.openxmlformats.org/drawingml/2006/main">
-            <a:r>
-              <a:t>Räumliche und sozioökonomische Merkmale können bestehende Ungleichheiten abbilden. Eine gute Prognose legitimiert deshalb keine Miete.</a:t>
-            </a:r>
-          </a:p>
-          <a:p xmlns:a="http://schemas.openxmlformats.org/drawingml/2006/main">
-            <a:r>
-              <a:t>Das System ist ausdrücklich nicht für Vermieterpreisoptimierung, Bonität oder Rechtsentscheidungen vorgesehen.</a:t>
+              <a:t>Zeit: ca. 40 Sekunden.</a:t>
+            </a:r>
+          </a:p>
+          <a:p xmlns:a="http://schemas.openxmlformats.org/drawingml/2006/main">
+            <a:r>
+              <a:t>Der zweite Screenshot zeigt, wie aktuelle GREIX-Quartale und der Markt-IQR die Angebotsseite erklären. Diese Streuung ist nicht dasselbe wie Modellunsicherheit.</a:t>
             </a:r>
           </a:p>
         </p:txBody>
@@ -800,17 +781,7 @@
           </a:p>
           <a:p xmlns:a="http://schemas.openxmlformats.org/drawingml/2006/main">
             <a:r>
-              <a:t>Rückbezug auf die Eröffnung: Das Projekt ersetzt eine Scheingenauigkeit durch drei verständliche, belegte Realitäten.</a:t>
-            </a:r>
-          </a:p>
-          <a:p xmlns:a="http://schemas.openxmlformats.org/drawingml/2006/main">
-            <a:r>
-              <a:t>Schluss: Ich zeige damit nicht nur ein Modell, sondern eine vollständige Nachweiskette vom öffentlichen Download bis zur getesteten App.</a:t>
-            </a:r>
-          </a:p>
-          <a:p xmlns:a="http://schemas.openxmlformats.org/drawingml/2006/main">
-            <a:r>
-              <a:t>Danach Fragen oder bei Bedarf direkt zur Live-Demo wechseln.</a:t>
+              <a:t>Der Methodik-Screenshot belegt, dass die wissenschaftliche Nachweiskette in der App selbst sichtbar ist. Es gibt keine Live-Demo und damit kein Netzwerk- oder Login-Risiko.</a:t>
             </a:r>
           </a:p>
         </p:txBody>
@@ -880,7 +851,12 @@
           <a:lstStyle xmlns:a="http://schemas.openxmlformats.org/drawingml/2006/main"/>
           <a:p xmlns:a="http://schemas.openxmlformats.org/drawingml/2006/main">
             <a:r>
-              <a:t>Appendix / Quellenfolie. Bei Fragen zur Datenlizenz oder Reproduzierbarkeit verwenden.</a:t>
+              <a:t>Zeit: ca. 55 Sekunden.</a:t>
+            </a:r>
+          </a:p>
+          <a:p xmlns:a="http://schemas.openxmlformats.org/drawingml/2006/main">
+            <a:r>
+              <a:t>Nicht beobachtete Wohnungsmerkmale, Zeitversatz, begrenzte GREIX-Abdeckung und Coverage-Unterdeckung stehen sichtbar in App, Model Card und Risk Assessment.</a:t>
             </a:r>
           </a:p>
         </p:txBody>
@@ -950,7 +926,82 @@
           <a:lstStyle xmlns:a="http://schemas.openxmlformats.org/drawingml/2006/main"/>
           <a:p xmlns:a="http://schemas.openxmlformats.org/drawingml/2006/main">
             <a:r>
-              <a:t>Appendix / methodische Detailfolie. Bei Fragen zu Parametern, Subgruppen oder Neubaufehlern verwenden.</a:t>
+              <a:t>Zeit: ca. 45 Sekunden.</a:t>
+            </a:r>
+          </a:p>
+          <a:p xmlns:a="http://schemas.openxmlformats.org/drawingml/2006/main">
+            <a:r>
+              <a:t>Q definiert den Nutzen, U prüft Daten und Skalierung, A wählt und optimiert, C bewertet ehrlich, K überträgt das Wissen in die App. Genau diese geschlossene Kette ist das Ergebnis.</a:t>
+            </a:r>
+          </a:p>
+        </p:txBody>
+      </p:sp>
+      <p:sp>
+        <p:nvSpPr>
+          <p:cNvPr id="4" name="Slide Number Placeholder 3"/>
+          <p:cNvSpPr>
+            <a:spLocks xmlns:a="http://schemas.openxmlformats.org/drawingml/2006/main" noGrp="1"/>
+          </p:cNvSpPr>
+          <p:nvPr>
+            <p:ph type="sldNum" idx="5"/>
+          </p:nvPr>
+        </p:nvSpPr>
+        <p:spPr/>
+        <p:txBody>
+          <a:bodyPr xmlns:a="http://schemas.openxmlformats.org/drawingml/2006/main"/>
+          <a:lstStyle xmlns:a="http://schemas.openxmlformats.org/drawingml/2006/main"/>
+          <a:p xmlns:a="http://schemas.openxmlformats.org/drawingml/2006/main"/>
+        </p:txBody>
+      </p:sp>
+    </p:spTree>
+  </p:cSld>
+  <p:clrMapOvr>
+    <a:masterClrMapping xmlns:a="http://schemas.openxmlformats.org/drawingml/2006/main"/>
+  </p:clrMapOvr>
+</p:notes>
+</file>
+
+<file path=ppt/notesSlides/notesSlide15.xml><?xml version="1.0" encoding="utf-8"?>
+<p:notes xmlns:p="http://schemas.openxmlformats.org/presentationml/2006/main">
+  <p:cSld>
+    <p:spTree>
+      <p:nvGrpSpPr>
+        <p:cNvPr id="1" name=""/>
+        <p:cNvGrpSpPr/>
+        <p:nvPr/>
+      </p:nvGrpSpPr>
+      <p:grpSpPr>
+        <a:xfrm xmlns:a="http://schemas.openxmlformats.org/drawingml/2006/main"/>
+      </p:grpSpPr>
+      <p:sp>
+        <p:nvSpPr>
+          <p:cNvPr id="2" name="Slide Image Placeholder 1"/>
+          <p:cNvSpPr>
+            <a:spLocks xmlns:a="http://schemas.openxmlformats.org/drawingml/2006/main" noGrp="1"/>
+          </p:cNvSpPr>
+          <p:nvPr>
+            <p:ph type="sldImg" idx="0"/>
+          </p:nvPr>
+        </p:nvSpPr>
+        <p:spPr/>
+      </p:sp>
+      <p:sp>
+        <p:nvSpPr>
+          <p:cNvPr id="3" name="Notes Placeholder 2"/>
+          <p:cNvSpPr>
+            <a:spLocks xmlns:a="http://schemas.openxmlformats.org/drawingml/2006/main" noGrp="1"/>
+          </p:cNvSpPr>
+          <p:nvPr>
+            <p:ph type="body" idx="1"/>
+          </p:nvPr>
+        </p:nvSpPr>
+        <p:spPr/>
+        <p:txBody>
+          <a:bodyPr xmlns:a="http://schemas.openxmlformats.org/drawingml/2006/main"/>
+          <a:lstStyle xmlns:a="http://schemas.openxmlformats.org/drawingml/2006/main"/>
+          <a:p xmlns:a="http://schemas.openxmlformats.org/drawingml/2006/main">
+            <a:r>
+              <a:t>Backup-Folie für Quellen- und Reproduzierbarkeitsfragen. Die Primärquellen und der vollständige Laufweg sind im öffentlichen Repository dokumentiert.</a:t>
             </a:r>
           </a:p>
         </p:txBody>
@@ -1020,17 +1071,12 @@
           <a:lstStyle xmlns:a="http://schemas.openxmlformats.org/drawingml/2006/main"/>
           <a:p xmlns:a="http://schemas.openxmlformats.org/drawingml/2006/main">
             <a:r>
-              <a:t>Zeit: ca. 65 Sekunden.</a:t>
-            </a:r>
-          </a:p>
-          <a:p xmlns:a="http://schemas.openxmlformats.org/drawingml/2006/main">
-            <a:r>
-              <a:t>Bestandsmiete ist ein historischer Vertragsbestand, Angebotsmiete ein aktueller Suchmarkt. Beides darf nicht als rechtlich zulässige Miete gelesen werden.</a:t>
-            </a:r>
-          </a:p>
-          <a:p xmlns:a="http://schemas.openxmlformats.org/drawingml/2006/main">
-            <a:r>
-              <a:t>Die persönliche Miete ergänzt den eigentlichen Nutzen: Was würde ein Umzug monatlich verändern?</a:t>
+              <a:t>Zeit: ca. 55 Sekunden.</a:t>
+            </a:r>
+          </a:p>
+          <a:p xmlns:a="http://schemas.openxmlformats.org/drawingml/2006/main">
+            <a:r>
+              <a:t>Die Forschungsfrage trennt bewusst drei Messkonzepte. Der Umzugsaufschlag ist ein deskriptiver Vergleich und keine zulässige oder faire Miete.</a:t>
             </a:r>
           </a:p>
         </p:txBody>
@@ -1100,17 +1146,12 @@
           <a:lstStyle xmlns:a="http://schemas.openxmlformats.org/drawingml/2006/main"/>
           <a:p xmlns:a="http://schemas.openxmlformats.org/drawingml/2006/main">
             <a:r>
-              <a:t>Zeit: ca. 60 Sekunden.</a:t>
-            </a:r>
-          </a:p>
-          <a:p xmlns:a="http://schemas.openxmlformats.org/drawingml/2006/main">
-            <a:r>
-              <a:t>Die Matrix ist bewusst vorsichtig formuliert. 'Nicht offen' bedeutet: auf der geprüften öffentlichen Produktseite war die Information nicht belastbar dokumentiert.</a:t>
-            </a:r>
-          </a:p>
-          <a:p xmlns:a="http://schemas.openxmlformats.org/drawingml/2006/main">
-            <a:r>
-              <a:t>Der USP ist also eine nachgewiesene Kombination, keine absolute Weltneuheitsbehauptung.</a:t>
+              <a:t>Zeit: ca. 55 Sekunden.</a:t>
+            </a:r>
+          </a:p>
+          <a:p xmlns:a="http://schemas.openxmlformats.org/drawingml/2006/main">
+            <a:r>
+              <a:t>Der USP ist nicht ein weiterer Preisrechner. Die vier Go/No-Go-Regeln wurden vor dem finalen Test definiert, damit die Bewertung nicht nachträglich passend gemacht wird.</a:t>
             </a:r>
           </a:p>
         </p:txBody>
@@ -1180,17 +1221,12 @@
           <a:lstStyle xmlns:a="http://schemas.openxmlformats.org/drawingml/2006/main"/>
           <a:p xmlns:a="http://schemas.openxmlformats.org/drawingml/2006/main">
             <a:r>
-              <a:t>Zeit: ca. 70 Sekunden.</a:t>
-            </a:r>
-          </a:p>
-          <a:p xmlns:a="http://schemas.openxmlformats.org/drawingml/2006/main">
-            <a:r>
-              <a:t>Der alte Kaggle-Datensatz von 2018/2019 wurde verworfen: zu alt und lizenzrechtlich weniger sauber für ein öffentliches Produkt.</a:t>
-            </a:r>
-          </a:p>
-          <a:p xmlns:a="http://schemas.openxmlformats.org/drawingml/2006/main">
-            <a:r>
-              <a:t>Der neue Download protokolliert URL, Abrufzeitpunkt, Dateigröße und SHA-256. Die Rohdaten bleiben außerhalb von Git.</a:t>
+              <a:t>Zeit: ca. 55 Sekunden.</a:t>
+            </a:r>
+          </a:p>
+          <a:p xmlns:a="http://schemas.openxmlformats.org/drawingml/2006/main">
+            <a:r>
+              <a:t>Das Trainingsziel ist die Zensus-Bestandsmiete zum Stichtag 15. Mai 2022. GREIX aktualisiert nur die Marktseite der App und wird nicht fälschlich in das historische Trainingsziel gemischt.</a:t>
             </a:r>
           </a:p>
         </p:txBody>
@@ -1260,17 +1296,12 @@
           <a:lstStyle xmlns:a="http://schemas.openxmlformats.org/drawingml/2006/main"/>
           <a:p xmlns:a="http://schemas.openxmlformats.org/drawingml/2006/main">
             <a:r>
-              <a:t>Zeit: ca. 70 Sekunden.</a:t>
-            </a:r>
-          </a:p>
-          <a:p xmlns:a="http://schemas.openxmlformats.org/drawingml/2006/main">
-            <a:r>
-              <a:t>Die rechenintensiven Schritte liegen in getesteten Skripten. Die Notebooks lesen dieselben versionierten Reports und können nicht unbemerkt andere Zahlen zeigen.</a:t>
-            </a:r>
-          </a:p>
-          <a:p xmlns:a="http://schemas.openxmlformats.org/drawingml/2006/main">
-            <a:r>
-              <a:t>Das ist wichtig für Reproduzierbarkeit und verhindert Notebook-Drift.</a:t>
+              <a:t>Zeit: ca. 80 Sekunden.</a:t>
+            </a:r>
+          </a:p>
+          <a:p xmlns:a="http://schemas.openxmlformats.org/drawingml/2006/main">
+            <a:r>
+              <a:t>StandardScaler nutzt ausschließlich Mittelwert und Standardabweichung des jeweiligen Trainingsfolds. Das ist für Ridge, SVM und MLP nötig. Entscheidungsbaum, Random Forest und HGB sind gegenüber monotoner Skalierung invariant; der HGB-Champion speichert deshalb bewusst keinen unnötigen Scaler.</a:t>
             </a:r>
           </a:p>
         </p:txBody>
@@ -1340,17 +1371,12 @@
           <a:lstStyle xmlns:a="http://schemas.openxmlformats.org/drawingml/2006/main"/>
           <a:p xmlns:a="http://schemas.openxmlformats.org/drawingml/2006/main">
             <a:r>
-              <a:t>Zeit: ca. 75 Sekunden.</a:t>
-            </a:r>
-          </a:p>
-          <a:p xmlns:a="http://schemas.openxmlformats.org/drawingml/2006/main">
-            <a:r>
-              <a:t>Das ist die wichtigste methodische Entscheidung. Bei einem zufälligen Split wären nahe Zellen mit fast identischem Umfeld in Training und Test.</a:t>
-            </a:r>
-          </a:p>
-          <a:p xmlns:a="http://schemas.openxmlformats.org/drawingml/2006/main">
-            <a:r>
-              <a:t>Die räumliche Trennung misst Generalisierung auf neue Gebiete und erklärt, warum das finale Ergebnis strenger ausfällt als frühere Prototypwerte.</a:t>
+              <a:t>Zeit: ca. 65 Sekunden.</a:t>
+            </a:r>
+          </a:p>
+          <a:p xmlns:a="http://schemas.openxmlformats.org/drawingml/2006/main">
+            <a:r>
+              <a:t>Ein Random Split würde räumliche Nachbarschaft in Train und Test verteilen. Die drei Hash-dokumentierten Blockmengen überschneiden sich nicht.</a:t>
             </a:r>
           </a:p>
         </p:txBody>
@@ -1425,12 +1451,7 @@
           </a:p>
           <a:p xmlns:a="http://schemas.openxmlformats.org/drawingml/2006/main">
             <a:r>
-              <a:t>Fünf Modellfamilien laufen auf exakt denselben räumlichen Folds. So ist der Vergleich fair.</a:t>
-            </a:r>
-          </a:p>
-          <a:p xmlns:a="http://schemas.openxmlformats.org/drawingml/2006/main">
-            <a:r>
-              <a:t>HGB gewinnt knapp vor Random Forest. Die Wahl beruht zusätzlich auf Laufzeit, Modellgröße und Deployment-Eignung – nicht nur auf der dritten Nachkommastelle.</a:t>
+              <a:t>Sieben Kandidaten inklusive Baseline, LinearSVR und einzelner Decision Tree laufen auf denselben 600.000 Zeilen. Der RBF-SVR wird ergänzend auf 10.000 räumlich validierten Zeilen geprüft, weil exakte Kernel-SVR superlinear skaliert.</a:t>
             </a:r>
           </a:p>
         </p:txBody>
@@ -1500,22 +1521,12 @@
           <a:lstStyle xmlns:a="http://schemas.openxmlformats.org/drawingml/2006/main"/>
           <a:p xmlns:a="http://schemas.openxmlformats.org/drawingml/2006/main">
             <a:r>
-              <a:t>Zeit: ca. 90 Sekunden.</a:t>
-            </a:r>
-          </a:p>
-          <a:p xmlns:a="http://schemas.openxmlformats.org/drawingml/2006/main">
-            <a:r>
-              <a:t>Das finale Modell erreicht MAE 1,413 Euro pro Quadratmeter, Median-AE 0,956 und R² 0,584.</a:t>
-            </a:r>
-          </a:p>
-          <a:p xmlns:a="http://schemas.openxmlformats.org/drawingml/2006/main">
-            <a:r>
-              <a:t>Die Intervalle wurden separat kalibriert. Nominal waren 90 Prozent geplant, auf neuen Raumblöcken sind es 86,8 Prozent.</a:t>
-            </a:r>
-          </a:p>
-          <a:p xmlns:a="http://schemas.openxmlformats.org/drawingml/2006/main">
-            <a:r>
-              <a:t>Genau diese Abweichung zeigt die App offen. Das ist wissenschaftlich stärker als eine falsche Garantie.</a:t>
+              <a:t>Zeit: ca. 75 Sekunden.</a:t>
+            </a:r>
+          </a:p>
+          <a:p xmlns:a="http://schemas.openxmlformats.org/drawingml/2006/main">
+            <a:r>
+              <a:t>A² zeigt den inkrementellen Zusatznutzen der Feature-Gruppen. A³ vergleicht acht HGB-Konfigurationen ausschließlich auf Entwicklungsblöcken und berücksichtigt Mittelwert, Streuung und schlechtesten Fold.</a:t>
             </a:r>
           </a:p>
         </p:txBody>
@@ -1590,17 +1601,7 @@
           </a:p>
           <a:p xmlns:a="http://schemas.openxmlformats.org/drawingml/2006/main">
             <a:r>
-              <a:t>Der Verlauf ist der aktuelle Angebotsmarkt. Der grüne Bestandsanker ist bewusst nicht auf 2026 hochgerechnet.</a:t>
-            </a:r>
-          </a:p>
-          <a:p xmlns:a="http://schemas.openxmlformats.org/drawingml/2006/main">
-            <a:r>
-              <a:t>Die 113 Prozent sind daher ein deskriptiver Umzugsaufschlag, keine Mietpreisbremse- oder Fairnessaussage.</a:t>
-            </a:r>
-          </a:p>
-          <a:p xmlns:a="http://schemas.openxmlformats.org/drawingml/2006/main">
-            <a:r>
-              <a:t>Genau diese saubere Trennung ist der Kern der App.</a:t>
+              <a:t>Der unangetastete Test umfasst 276.458 Zeilen aus 99 Raumblöcken. MAE 1,413 €/m², R² 0,584 und 38,3 Prozent Verbesserung. Die empirische Coverage liegt bei 86,8 statt nominal 90 Prozent und wird nicht versteckt.</a:t>
             </a:r>
           </a:p>
         </p:txBody>
@@ -1668,7 +1669,7 @@
   </p:cSld>
   <p:clrMap bg1="lt1" tx1="dk1" bg2="lt2" tx2="dk2" accent1="accent1" accent2="accent2" accent3="accent3" accent4="accent4" accent5="accent5" accent6="accent6" hlink="hlink" folHlink="folHlink"/>
   <p:sldLayoutIdLst>
-    <p:sldLayoutId xmlns:r="http://schemas.openxmlformats.org/officeDocument/2006/relationships" id="2147483649" r:id="R980d8eb8cfb84898"/>
+    <p:sldLayoutId xmlns:r="http://schemas.openxmlformats.org/officeDocument/2006/relationships" id="2147483649" r:id="R164199c1b63e4da9"/>
   </p:sldLayoutIdLst>
   <p:txStyles>
     <p:titleStyle>
@@ -2225,20 +2226,26 @@
           </c:dPt>
           <c:cat>
             <c:strLit>
-              <c:ptCount val="5"/>
+              <c:ptCount val="7"/>
               <c:pt idx="0">
-                <c:v>Kategorie-Median</c:v>
+                <c:v>Median</c:v>
               </c:pt>
               <c:pt idx="1">
                 <c:v>Ridge</c:v>
               </c:pt>
               <c:pt idx="2">
+                <c:v>LinearSVR</c:v>
+              </c:pt>
+              <c:pt idx="3">
+                <c:v>Tree</c:v>
+              </c:pt>
+              <c:pt idx="4">
                 <c:v>MLP</c:v>
               </c:pt>
-              <c:pt idx="3">
-                <c:v>Random Forest</c:v>
+              <c:pt idx="5">
+                <c:v>RF</c:v>
               </c:pt>
-              <c:pt idx="4">
+              <c:pt idx="6">
                 <c:v>HGB</c:v>
               </c:pt>
             </c:strLit>
@@ -2246,21 +2253,27 @@
           <c:val>
             <c:numLit>
               <c:formatCode>General</c:formatCode>
-              <c:ptCount val="5"/>
+              <c:ptCount val="7"/>
               <c:pt idx="0">
-                <c:v>1.719</c:v>
+                <c:v>1.7191110849380493</c:v>
               </c:pt>
               <c:pt idx="1">
-                <c:v>1.632</c:v>
+                <c:v>1.632184624671936</c:v>
               </c:pt>
               <c:pt idx="2">
-                <c:v>1.397</c:v>
+                <c:v>1.6346849997838337</c:v>
               </c:pt>
               <c:pt idx="3">
-                <c:v>1.32</c:v>
+                <c:v>1.3927625020345051</c:v>
               </c:pt>
               <c:pt idx="4">
-                <c:v>1.305</c:v>
+                <c:v>1.3965997695922852</c:v>
+              </c:pt>
+              <c:pt idx="5">
+                <c:v>1.320151448249817</c:v>
+              </c:pt>
+              <c:pt idx="6">
+                <c:v>1.3045032421747844</c:v>
               </c:pt>
             </c:numLit>
           </c:val>
@@ -2271,9 +2284,9 @@
             <a:lstStyle xmlns:a="http://schemas.openxmlformats.org/drawingml/2006/main"/>
             <a:p xmlns:a="http://schemas.openxmlformats.org/drawingml/2006/main">
               <a:pPr>
-                <a:defRPr sz="1200" b="1">
+                <a:defRPr sz="825" b="1">
                   <a:solidFill>
-                    <a:srgbClr val="102138"/>
+                    <a:srgbClr val="14213D"/>
                   </a:solidFill>
                 </a:defRPr>
               </a:pPr>
@@ -2430,6 +2443,237 @@
 </file>
 
 <file path=ppt/slides/charts/chart2.xml><?xml version="1.0" encoding="utf-8"?>
+<c:chartSpace xmlns:c="http://schemas.openxmlformats.org/drawingml/2006/chart">
+  <c:lang val="en-US"/>
+  <c:chart>
+    <c:plotArea>
+      <c:barChart>
+        <c:barDir val="col"/>
+        <c:grouping val="clustered"/>
+        <c:varyColors val="0"/>
+        <c:ser>
+          <c:idx val="0"/>
+          <c:order val="0"/>
+          <c:tx>
+            <c:v>MAE</c:v>
+          </c:tx>
+          <c:spPr>
+            <a:solidFill xmlns:a="http://schemas.openxmlformats.org/drawingml/2006/main">
+              <a:srgbClr val="667587"/>
+            </a:solidFill>
+          </c:spPr>
+          <c:dPt>
+            <c:idx val="1"/>
+            <c:spPr>
+              <a:solidFill xmlns:a="http://schemas.openxmlformats.org/drawingml/2006/main">
+                <a:srgbClr val="0F7B62"/>
+              </a:solidFill>
+            </c:spPr>
+          </c:dPt>
+          <c:cat>
+            <c:strLit>
+              <c:ptCount val="4"/>
+              <c:pt idx="0">
+                <c:v>Kategorien</c:v>
+              </c:pt>
+              <c:pt idx="1">
+                <c:v>+ Lage</c:v>
+              </c:pt>
+              <c:pt idx="2">
+                <c:v>+ Umfeld</c:v>
+              </c:pt>
+              <c:pt idx="3">
+                <c:v>+ Qualität</c:v>
+              </c:pt>
+            </c:strLit>
+          </c:cat>
+          <c:val>
+            <c:numLit>
+              <c:formatCode>General</c:formatCode>
+              <c:ptCount val="4"/>
+              <c:pt idx="0">
+                <c:v>1.645225723584493</c:v>
+              </c:pt>
+              <c:pt idx="1">
+                <c:v>1.3506381114323933</c:v>
+              </c:pt>
+              <c:pt idx="2">
+                <c:v>1.315356691678365</c:v>
+              </c:pt>
+              <c:pt idx="3">
+                <c:v>1.29402760664622</c:v>
+              </c:pt>
+            </c:numLit>
+          </c:val>
+        </c:ser>
+        <c:dLbls>
+          <c:txPr>
+            <a:bodyPr xmlns:a="http://schemas.openxmlformats.org/drawingml/2006/main" anchorCtr="1"/>
+            <a:lstStyle xmlns:a="http://schemas.openxmlformats.org/drawingml/2006/main"/>
+            <a:p xmlns:a="http://schemas.openxmlformats.org/drawingml/2006/main">
+              <a:pPr>
+                <a:defRPr sz="900" b="1">
+                  <a:solidFill>
+                    <a:srgbClr val="14213D"/>
+                  </a:solidFill>
+                </a:defRPr>
+              </a:pPr>
+            </a:p>
+          </c:txPr>
+          <c:dLblPos val="outEnd"/>
+          <c:showLegendKey val="0"/>
+          <c:showVal val="1"/>
+          <c:showCatName val="0"/>
+          <c:showSerName val="0"/>
+          <c:showPercent val="0"/>
+          <c:showBubbleSize val="0"/>
+          <c:showLeaderLines val="0"/>
+        </c:dLbls>
+        <c:gapWidth val="75"/>
+        <c:axId val="48650112"/>
+        <c:axId val="48672768"/>
+      </c:barChart>
+      <c:catAx>
+        <c:axId val="48650112"/>
+        <c:scaling>
+          <c:orientation val="minMax"/>
+        </c:scaling>
+        <c:delete val="0"/>
+        <c:axPos val="b"/>
+        <c:numFmt formatCode="General"/>
+        <c:majorTickMark val="none"/>
+        <c:minorTickMark val="none"/>
+        <c:spPr>
+          <a:ln xmlns:a="http://schemas.openxmlformats.org/drawingml/2006/main" w="9525">
+            <a:solidFill>
+              <a:srgbClr val="D6E1DF"/>
+            </a:solidFill>
+            <a:prstDash val="solid"/>
+          </a:ln>
+        </c:spPr>
+        <c:txPr>
+          <a:bodyPr xmlns:a="http://schemas.openxmlformats.org/drawingml/2006/main" anchorCtr="1"/>
+          <a:lstStyle xmlns:a="http://schemas.openxmlformats.org/drawingml/2006/main"/>
+          <a:p xmlns:a="http://schemas.openxmlformats.org/drawingml/2006/main">
+            <a:pPr>
+              <a:defRPr sz="1275">
+                <a:solidFill>
+                  <a:srgbClr val="102138"/>
+                </a:solidFill>
+              </a:defRPr>
+            </a:pPr>
+          </a:p>
+        </c:txPr>
+        <c:crossAx val="48672768"/>
+        <c:lblAlgn val="ctr"/>
+        <c:lblOffset val="100"/>
+        <c:noMultiLvlLbl val="0"/>
+      </c:catAx>
+      <c:valAx>
+        <c:axId val="48672768"/>
+        <c:scaling>
+          <c:orientation val="minMax"/>
+          <c:max val="2.6"/>
+          <c:min val="0"/>
+        </c:scaling>
+        <c:delete val="0"/>
+        <c:axPos val="l"/>
+        <c:majorGridlines>
+          <c:spPr>
+            <a:ln xmlns:a="http://schemas.openxmlformats.org/drawingml/2006/main" w="9525">
+              <a:solidFill>
+                <a:srgbClr val="D6E1DF"/>
+              </a:solidFill>
+              <a:prstDash val="solid"/>
+            </a:ln>
+          </c:spPr>
+        </c:majorGridlines>
+        <c:title>
+          <c:tx>
+            <c:rich>
+              <a:bodyPr xmlns:a="http://schemas.openxmlformats.org/drawingml/2006/main"/>
+              <a:lstStyle xmlns:a="http://schemas.openxmlformats.org/drawingml/2006/main"/>
+              <a:p xmlns:a="http://schemas.openxmlformats.org/drawingml/2006/main">
+                <a:r>
+                  <a:rPr sz="1200">
+                    <a:solidFill>
+                      <a:srgbClr val="667587"/>
+                    </a:solidFill>
+                  </a:rPr>
+                  <a:t>MAE in €/m²</a:t>
+                </a:r>
+              </a:p>
+            </c:rich>
+          </c:tx>
+          <c:txPr>
+            <a:bodyPr xmlns:a="http://schemas.openxmlformats.org/drawingml/2006/main" anchorCtr="1"/>
+            <a:lstStyle xmlns:a="http://schemas.openxmlformats.org/drawingml/2006/main"/>
+            <a:p xmlns:a="http://schemas.openxmlformats.org/drawingml/2006/main">
+              <a:pPr>
+                <a:defRPr sz="1200">
+                  <a:solidFill>
+                    <a:srgbClr val="667587"/>
+                  </a:solidFill>
+                </a:defRPr>
+              </a:pPr>
+            </a:p>
+          </c:txPr>
+        </c:title>
+        <c:numFmt formatCode="General"/>
+        <c:majorTickMark val="none"/>
+        <c:minorTickMark val="none"/>
+        <c:spPr>
+          <a:ln xmlns:a="http://schemas.openxmlformats.org/drawingml/2006/main" w="9525">
+            <a:solidFill>
+              <a:srgbClr val="D4D4D4"/>
+            </a:solidFill>
+            <a:prstDash val="solid"/>
+          </a:ln>
+        </c:spPr>
+        <c:txPr>
+          <a:bodyPr xmlns:a="http://schemas.openxmlformats.org/drawingml/2006/main" anchorCtr="1"/>
+          <a:lstStyle xmlns:a="http://schemas.openxmlformats.org/drawingml/2006/main"/>
+          <a:p xmlns:a="http://schemas.openxmlformats.org/drawingml/2006/main">
+            <a:pPr>
+              <a:defRPr sz="1125">
+                <a:solidFill>
+                  <a:srgbClr val="667587"/>
+                </a:solidFill>
+              </a:defRPr>
+            </a:pPr>
+          </a:p>
+        </c:txPr>
+        <c:crossAx val="48650112"/>
+        <c:crossBetween val="between"/>
+        <c:majorUnit val="0.5"/>
+      </c:valAx>
+      <c:spPr>
+        <a:noFill xmlns:a="http://schemas.openxmlformats.org/drawingml/2006/main"/>
+        <a:ln xmlns:a="http://schemas.openxmlformats.org/drawingml/2006/main" w="0">
+          <a:solidFill>
+            <a:srgbClr val="F7F9F8"/>
+          </a:solidFill>
+          <a:prstDash val="solid"/>
+        </a:ln>
+      </c:spPr>
+    </c:plotArea>
+    <c:plotVisOnly val="1"/>
+  </c:chart>
+  <c:spPr>
+    <a:solidFill xmlns:a="http://schemas.openxmlformats.org/drawingml/2006/main">
+      <a:srgbClr val="F7F9F8"/>
+    </a:solidFill>
+    <a:ln xmlns:a="http://schemas.openxmlformats.org/drawingml/2006/main" w="0">
+      <a:solidFill>
+        <a:srgbClr val="F7F9F8"/>
+      </a:solidFill>
+      <a:prstDash val="solid"/>
+    </a:ln>
+  </c:spPr>
+</c:chartSpace>
+</file>
+
+<file path=ppt/slides/charts/chart3.xml><?xml version="1.0" encoding="utf-8"?>
 <c:chartSpace xmlns:c="http://schemas.openxmlformats.org/drawingml/2006/chart">
   <c:lang val="en-US"/>
   <c:chart>
@@ -2648,244 +2892,6 @@
 </c:chartSpace>
 </file>
 
-<file path=ppt/slides/charts/chart3.xml><?xml version="1.0" encoding="utf-8"?>
-<c:chartSpace xmlns:c="http://schemas.openxmlformats.org/drawingml/2006/chart">
-  <c:lang val="en-US"/>
-  <c:chart>
-    <c:plotArea>
-      <c:lineChart>
-        <c:grouping val="standard"/>
-        <c:ser>
-          <c:idx val="0"/>
-          <c:order val="0"/>
-          <c:tx>
-            <c:v>Median</c:v>
-          </c:tx>
-          <c:spPr>
-            <a:ln xmlns:a="http://schemas.openxmlformats.org/drawingml/2006/main" w="38100">
-              <a:solidFill>
-                <a:srgbClr val="315CFF"/>
-              </a:solidFill>
-              <a:prstDash val="solid"/>
-            </a:ln>
-          </c:spPr>
-          <c:marker>
-            <c:symbol val="circle"/>
-            <c:size val="7"/>
-          </c:marker>
-          <c:cat>
-            <c:numLit>
-              <c:formatCode>General</c:formatCode>
-              <c:ptCount val="8"/>
-              <c:pt idx="0">
-                <c:v>2012</c:v>
-              </c:pt>
-              <c:pt idx="1">
-                <c:v>2014</c:v>
-              </c:pt>
-              <c:pt idx="2">
-                <c:v>2016</c:v>
-              </c:pt>
-              <c:pt idx="3">
-                <c:v>2018</c:v>
-              </c:pt>
-              <c:pt idx="4">
-                <c:v>2020</c:v>
-              </c:pt>
-              <c:pt idx="5">
-                <c:v>2022</c:v>
-              </c:pt>
-              <c:pt idx="6">
-                <c:v>2024</c:v>
-              </c:pt>
-              <c:pt idx="7">
-                <c:v>2026</c:v>
-              </c:pt>
-            </c:numLit>
-          </c:cat>
-          <c:val>
-            <c:numLit>
-              <c:formatCode>General</c:formatCode>
-              <c:ptCount val="8"/>
-              <c:pt idx="0">
-                <c:v>6.86</c:v>
-              </c:pt>
-              <c:pt idx="1">
-                <c:v>8</c:v>
-              </c:pt>
-              <c:pt idx="2">
-                <c:v>8.53</c:v>
-              </c:pt>
-              <c:pt idx="3">
-                <c:v>10</c:v>
-              </c:pt>
-              <c:pt idx="4">
-                <c:v>10</c:v>
-              </c:pt>
-              <c:pt idx="5">
-                <c:v>10.88</c:v>
-              </c:pt>
-              <c:pt idx="6">
-                <c:v>15.45</c:v>
-              </c:pt>
-              <c:pt idx="7">
-                <c:v>15.5</c:v>
-              </c:pt>
-            </c:numLit>
-          </c:val>
-        </c:ser>
-        <c:dLbls>
-          <c:showLegendKey val="0"/>
-          <c:showVal val="0"/>
-          <c:showCatName val="0"/>
-          <c:showSerName val="0"/>
-          <c:showPercent val="0"/>
-          <c:showBubbleSize val="0"/>
-          <c:showLeaderLines val="0"/>
-        </c:dLbls>
-        <c:axId val="48650112"/>
-        <c:axId val="48672768"/>
-      </c:lineChart>
-      <c:catAx>
-        <c:axId val="48650112"/>
-        <c:scaling>
-          <c:orientation val="minMax"/>
-        </c:scaling>
-        <c:delete val="0"/>
-        <c:axPos val="b"/>
-        <c:numFmt formatCode="General"/>
-        <c:majorTickMark val="none"/>
-        <c:minorTickMark val="none"/>
-        <c:spPr>
-          <a:ln xmlns:a="http://schemas.openxmlformats.org/drawingml/2006/main" w="9525">
-            <a:solidFill>
-              <a:srgbClr val="D6E1DF"/>
-            </a:solidFill>
-            <a:prstDash val="solid"/>
-          </a:ln>
-        </c:spPr>
-        <c:txPr>
-          <a:bodyPr xmlns:a="http://schemas.openxmlformats.org/drawingml/2006/main" anchorCtr="1"/>
-          <a:lstStyle xmlns:a="http://schemas.openxmlformats.org/drawingml/2006/main"/>
-          <a:p xmlns:a="http://schemas.openxmlformats.org/drawingml/2006/main">
-            <a:pPr>
-              <a:defRPr sz="1125">
-                <a:solidFill>
-                  <a:srgbClr val="667587"/>
-                </a:solidFill>
-              </a:defRPr>
-            </a:pPr>
-          </a:p>
-        </c:txPr>
-        <c:crossAx val="48672768"/>
-        <c:lblAlgn val="ctr"/>
-        <c:lblOffset val="100"/>
-        <c:noMultiLvlLbl val="0"/>
-      </c:catAx>
-      <c:valAx>
-        <c:axId val="48672768"/>
-        <c:scaling>
-          <c:orientation val="minMax"/>
-          <c:max val="17"/>
-          <c:min val="5"/>
-        </c:scaling>
-        <c:delete val="0"/>
-        <c:axPos val="l"/>
-        <c:majorGridlines>
-          <c:spPr>
-            <a:ln xmlns:a="http://schemas.openxmlformats.org/drawingml/2006/main" w="9525">
-              <a:solidFill>
-                <a:srgbClr val="D6E1DF"/>
-              </a:solidFill>
-              <a:prstDash val="solid"/>
-            </a:ln>
-          </c:spPr>
-        </c:majorGridlines>
-        <c:title>
-          <c:tx>
-            <c:rich>
-              <a:bodyPr xmlns:a="http://schemas.openxmlformats.org/drawingml/2006/main"/>
-              <a:lstStyle xmlns:a="http://schemas.openxmlformats.org/drawingml/2006/main"/>
-              <a:p xmlns:a="http://schemas.openxmlformats.org/drawingml/2006/main">
-                <a:r>
-                  <a:rPr sz="1200">
-                    <a:solidFill>
-                      <a:srgbClr val="667587"/>
-                    </a:solidFill>
-                  </a:rPr>
-                  <a:t>€/m²</a:t>
-                </a:r>
-              </a:p>
-            </c:rich>
-          </c:tx>
-          <c:txPr>
-            <a:bodyPr xmlns:a="http://schemas.openxmlformats.org/drawingml/2006/main" anchorCtr="1"/>
-            <a:lstStyle xmlns:a="http://schemas.openxmlformats.org/drawingml/2006/main"/>
-            <a:p xmlns:a="http://schemas.openxmlformats.org/drawingml/2006/main">
-              <a:pPr>
-                <a:defRPr sz="1200">
-                  <a:solidFill>
-                    <a:srgbClr val="667587"/>
-                  </a:solidFill>
-                </a:defRPr>
-              </a:pPr>
-            </a:p>
-          </c:txPr>
-        </c:title>
-        <c:numFmt formatCode="General"/>
-        <c:majorTickMark val="none"/>
-        <c:minorTickMark val="none"/>
-        <c:spPr>
-          <a:ln xmlns:a="http://schemas.openxmlformats.org/drawingml/2006/main" w="9525">
-            <a:solidFill>
-              <a:srgbClr val="D4D4D4"/>
-            </a:solidFill>
-            <a:prstDash val="solid"/>
-          </a:ln>
-        </c:spPr>
-        <c:txPr>
-          <a:bodyPr xmlns:a="http://schemas.openxmlformats.org/drawingml/2006/main" anchorCtr="1"/>
-          <a:lstStyle xmlns:a="http://schemas.openxmlformats.org/drawingml/2006/main"/>
-          <a:p xmlns:a="http://schemas.openxmlformats.org/drawingml/2006/main">
-            <a:pPr>
-              <a:defRPr sz="1125">
-                <a:solidFill>
-                  <a:srgbClr val="667587"/>
-                </a:solidFill>
-              </a:defRPr>
-            </a:pPr>
-          </a:p>
-        </c:txPr>
-        <c:crossAx val="48650112"/>
-        <c:crossBetween val="between"/>
-        <c:majorUnit val="2"/>
-      </c:valAx>
-      <c:spPr>
-        <a:noFill xmlns:a="http://schemas.openxmlformats.org/drawingml/2006/main"/>
-        <a:ln xmlns:a="http://schemas.openxmlformats.org/drawingml/2006/main" w="0">
-          <a:solidFill>
-            <a:srgbClr val="F7F9F8"/>
-          </a:solidFill>
-          <a:prstDash val="solid"/>
-        </a:ln>
-      </c:spPr>
-    </c:plotArea>
-    <c:plotVisOnly val="1"/>
-  </c:chart>
-  <c:spPr>
-    <a:solidFill xmlns:a="http://schemas.openxmlformats.org/drawingml/2006/main">
-      <a:srgbClr val="F7F9F8"/>
-    </a:solidFill>
-    <a:ln xmlns:a="http://schemas.openxmlformats.org/drawingml/2006/main" w="0">
-      <a:solidFill>
-        <a:srgbClr val="F7F9F8"/>
-      </a:solidFill>
-      <a:prstDash val="solid"/>
-    </a:ln>
-  </c:spPr>
-</c:chartSpace>
-</file>
-
 <file path=ppt/slides/slide1.xml><?xml version="1.0" encoding="utf-8"?>
 <p:sld xmlns:p="http://schemas.openxmlformats.org/presentationml/2006/main">
   <p:cSld>
@@ -3034,6 +3040,7 @@
           <a:lstStyle xmlns:a="http://schemas.openxmlformats.org/drawingml/2006/main"/>
           <a:p xmlns:a="http://schemas.openxmlformats.org/drawingml/2006/main">
             <a:pPr algn="l">
+              <a:buNone/>
               <a:defRPr sz="2250" b="1" i="0">
                 <a:solidFill>
                   <a:srgbClr val="19C99A"/>
@@ -3079,6 +3086,7 @@
           <a:lstStyle xmlns:a="http://schemas.openxmlformats.org/drawingml/2006/main"/>
           <a:p xmlns:a="http://schemas.openxmlformats.org/drawingml/2006/main">
             <a:pPr algn="l">
+              <a:buNone/>
               <a:defRPr sz="1125" b="1" i="0">
                 <a:solidFill>
                   <a:srgbClr val="B9C8D3"/>
@@ -3089,7 +3097,7 @@
               </a:defRPr>
             </a:pPr>
             <a:r>
-              <a:t>BESTAND · ANGEBOT · PERSÖNLICHE MIETE</a:t>
+              <a:t>Q → U → A¹/A²/A³ → C → K</a:t>
             </a:r>
           </a:p>
         </p:txBody>
@@ -3124,6 +3132,7 @@
           <a:lstStyle xmlns:a="http://schemas.openxmlformats.org/drawingml/2006/main"/>
           <a:p xmlns:a="http://schemas.openxmlformats.org/drawingml/2006/main">
             <a:pPr algn="l">
+              <a:buNone/>
               <a:defRPr sz="4350" b="1" i="0">
                 <a:solidFill>
                   <a:srgbClr val="FFFFFF"/>
@@ -3134,9 +3143,9 @@
               </a:defRPr>
             </a:pPr>
             <a:r>
-              <a:t>Drei
-Mietrealitäten.
-Klare Entscheidung.</a:t>
+              <a:t>MietCheck.
+Von Big Data
+zur Entscheidung.</a:t>
             </a:r>
           </a:p>
         </p:txBody>
@@ -3171,6 +3180,7 @@
           <a:lstStyle xmlns:a="http://schemas.openxmlformats.org/drawingml/2006/main"/>
           <a:p xmlns:a="http://schemas.openxmlformats.org/drawingml/2006/main">
             <a:pPr algn="l">
+              <a:buNone/>
               <a:defRPr sz="1950" b="0" i="0">
                 <a:solidFill>
                   <a:srgbClr val="DCE5EA"/>
@@ -3181,7 +3191,7 @@
               </a:defRPr>
             </a:pPr>
             <a:r>
-              <a:t>Machine Learning verbindet Zensus-Bestand, aktuellen GREIX-Angebotsmarkt und persönliche Mietbelastung.</a:t>
+              <a:t>2,06 Mio. Zensuszeilen, räumlich validiertes Machine Learning und aktuelle GREIX-Angebotsmieten.</a:t>
             </a:r>
           </a:p>
         </p:txBody>
@@ -3216,6 +3226,7 @@
           <a:lstStyle xmlns:a="http://schemas.openxmlformats.org/drawingml/2006/main"/>
           <a:p xmlns:a="http://schemas.openxmlformats.org/drawingml/2006/main">
             <a:pPr algn="l">
+              <a:buNone/>
               <a:defRPr sz="1200" b="0" i="0">
                 <a:solidFill>
                   <a:srgbClr val="AFC0CB"/>
@@ -3269,28 +3280,26 @@
       </p:sp>
       <p:pic>
         <p:nvPicPr>
-          <p:cNvPr id="20" name=""/>
+          <p:cNvPr id="22" name=""/>
           <p:cNvPicPr>
             <a:picLocks xmlns:a="http://schemas.openxmlformats.org/drawingml/2006/main" noChangeAspect="1"/>
           </p:cNvPicPr>
           <p:nvPr/>
         </p:nvPicPr>
         <p:blipFill>
-          <a:blip xmlns:r="http://schemas.openxmlformats.org/officeDocument/2006/relationships" xmlns:a="http://schemas.openxmlformats.org/drawingml/2006/main" r:embed="R03fbe7f6399741d8"/>
+          <a:blip xmlns:r="http://schemas.openxmlformats.org/officeDocument/2006/relationships" xmlns:a="http://schemas.openxmlformats.org/drawingml/2006/main" r:embed="R4498b7bb4f214c20"/>
           <a:srcRect xmlns:a="http://schemas.openxmlformats.org/drawingml/2006/main" l="13781" t="0" r="13781" b="0"/>
           <a:stretch xmlns:a="http://schemas.openxmlformats.org/drawingml/2006/main">
             <a:fillRect l="0" t="0" r="0" b="0"/>
           </a:stretch>
         </p:blipFill>
         <p:spPr>
-          <a:xfrm xmlns:a="http://schemas.openxmlformats.org/drawingml/2006/main">
+          <a:xfrm xmlns:a="http://schemas.openxmlformats.org/drawingml/2006/main" flipH="0" flipV="0">
             <a:off x="6343650" y="495300"/>
             <a:ext cx="5238750" cy="5524500"/>
           </a:xfrm>
           <a:prstGeom xmlns:a="http://schemas.openxmlformats.org/drawingml/2006/main" prst="roundRect">
-            <a:avLst>
-              <a:gd name="adj" fmla="val 2909"/>
-            </a:avLst>
+            <a:avLst/>
           </a:prstGeom>
         </p:spPr>
       </p:pic>
@@ -3452,6 +3461,7 @@
           <a:lstStyle xmlns:a="http://schemas.openxmlformats.org/drawingml/2006/main"/>
           <a:p xmlns:a="http://schemas.openxmlformats.org/drawingml/2006/main">
             <a:pPr algn="l">
+              <a:buNone/>
               <a:defRPr sz="3225" b="1" i="0">
                 <a:solidFill>
                   <a:srgbClr val="FFFFFF"/>
@@ -3462,7 +3472,7 @@
               </a:defRPr>
             </a:pPr>
             <a:r>
-              <a:t>MietCheck macht Methodik nutzbar</a:t>
+              <a:t>K · Dein Mietbild: drei Werte bleiben getrennt</a:t>
             </a:r>
           </a:p>
         </p:txBody>
@@ -3497,6 +3507,7 @@
           <a:lstStyle xmlns:a="http://schemas.openxmlformats.org/drawingml/2006/main"/>
           <a:p xmlns:a="http://schemas.openxmlformats.org/drawingml/2006/main">
             <a:pPr algn="l">
+              <a:buNone/>
               <a:defRPr sz="900" b="0" i="0">
                 <a:solidFill>
                   <a:srgbClr val="667587"/>
@@ -3542,6 +3553,7 @@
           <a:lstStyle xmlns:a="http://schemas.openxmlformats.org/drawingml/2006/main"/>
           <a:p xmlns:a="http://schemas.openxmlformats.org/drawingml/2006/main">
             <a:pPr algn="r">
+              <a:buNone/>
               <a:defRPr sz="975" b="0" i="0">
                 <a:solidFill>
                   <a:srgbClr val="667587"/>
@@ -3620,6 +3632,7 @@
           <a:lstStyle xmlns:a="http://schemas.openxmlformats.org/drawingml/2006/main"/>
           <a:p xmlns:a="http://schemas.openxmlformats.org/drawingml/2006/main">
             <a:pPr algn="l">
+              <a:buNone/>
               <a:defRPr sz="1350" b="1" i="0">
                 <a:solidFill>
                   <a:srgbClr val="0F7B62"/>
@@ -3630,7 +3643,7 @@
               </a:defRPr>
             </a:pPr>
             <a:r>
-              <a:t>1 · Region &amp; Szenario</a:t>
+              <a:t>1 · Szenario eingeben</a:t>
             </a:r>
           </a:p>
         </p:txBody>
@@ -3665,6 +3678,7 @@
           <a:lstStyle xmlns:a="http://schemas.openxmlformats.org/drawingml/2006/main"/>
           <a:p xmlns:a="http://schemas.openxmlformats.org/drawingml/2006/main">
             <a:pPr algn="l">
+              <a:buNone/>
               <a:defRPr sz="1350" b="1" i="0">
                 <a:solidFill>
                   <a:srgbClr val="315CFF"/>
@@ -3675,7 +3689,7 @@
               </a:defRPr>
             </a:pPr>
             <a:r>
-              <a:t>2 · drei getrennte Werte</a:t>
+              <a:t>2 · drei Mietrealitäten</a:t>
             </a:r>
           </a:p>
         </p:txBody>
@@ -3710,6 +3724,7 @@
           <a:lstStyle xmlns:a="http://schemas.openxmlformats.org/drawingml/2006/main"/>
           <a:p xmlns:a="http://schemas.openxmlformats.org/drawingml/2006/main">
             <a:pPr algn="l">
+              <a:buNone/>
               <a:defRPr sz="1350" b="1" i="0">
                 <a:solidFill>
                   <a:srgbClr val="E85D3F"/>
@@ -3720,28 +3735,28 @@
               </a:defRPr>
             </a:pPr>
             <a:r>
-              <a:t>3 · Unsicherheit &amp; Grenzen</a:t>
+              <a:t>3 · Umzugsaufschlag</a:t>
             </a:r>
           </a:p>
         </p:txBody>
       </p:sp>
       <p:pic>
         <p:nvPicPr>
-          <p:cNvPr id="25" name=""/>
+          <p:cNvPr id="27" name=""/>
           <p:cNvPicPr>
             <a:picLocks xmlns:a="http://schemas.openxmlformats.org/drawingml/2006/main" noChangeAspect="1"/>
           </p:cNvPicPr>
           <p:nvPr/>
         </p:nvPicPr>
         <p:blipFill>
-          <a:blip xmlns:r="http://schemas.openxmlformats.org/officeDocument/2006/relationships" xmlns:a="http://schemas.openxmlformats.org/drawingml/2006/main" r:embed="R794b35af55b44f9f"/>
+          <a:blip xmlns:r="http://schemas.openxmlformats.org/officeDocument/2006/relationships" xmlns:a="http://schemas.openxmlformats.org/drawingml/2006/main" r:embed="R70b145f3195e4925"/>
           <a:srcRect xmlns:a="http://schemas.openxmlformats.org/drawingml/2006/main" l="0" t="24967" r="0" b="24967"/>
           <a:stretch xmlns:a="http://schemas.openxmlformats.org/drawingml/2006/main">
             <a:fillRect l="0" t="0" r="0" b="0"/>
           </a:stretch>
         </p:blipFill>
         <p:spPr>
-          <a:xfrm xmlns:a="http://schemas.openxmlformats.org/drawingml/2006/main">
+          <a:xfrm xmlns:a="http://schemas.openxmlformats.org/drawingml/2006/main" flipH="0" flipV="0">
             <a:off x="552450" y="1485900"/>
             <a:ext cx="10858500" cy="4152900"/>
           </a:xfrm>
@@ -3813,6 +3828,7 @@
           <a:lstStyle xmlns:a="http://schemas.openxmlformats.org/drawingml/2006/main"/>
           <a:p xmlns:a="http://schemas.openxmlformats.org/drawingml/2006/main">
             <a:pPr algn="l">
+              <a:buNone/>
               <a:defRPr sz="1875" b="1" i="0">
                 <a:solidFill>
                   <a:srgbClr val="FFFFFF"/>
@@ -3823,7 +3839,7 @@
               </a:defRPr>
             </a:pPr>
             <a:r>
-              <a:t>Drei Mietrealitäten · direkt am Ergebnis</a:t>
+              <a:t>Ergebnis statt Scheingenauigkeit</a:t>
             </a:r>
           </a:p>
         </p:txBody>
@@ -3858,6 +3874,7 @@
           <a:lstStyle xmlns:a="http://schemas.openxmlformats.org/drawingml/2006/main"/>
           <a:p xmlns:a="http://schemas.openxmlformats.org/drawingml/2006/main">
             <a:pPr algn="l">
+              <a:buNone/>
               <a:defRPr sz="1275" b="0" i="0">
                 <a:solidFill>
                   <a:srgbClr val="CFE8DF"/>
@@ -3868,7 +3885,7 @@
               </a:defRPr>
             </a:pPr>
             <a:r>
-              <a:t>Bestand, Angebot und persönliche Belastung bleiben methodisch getrennt.</a:t>
+              <a:t>Bestandsanker, Angebot und persönliche Belastung mit klarer Zeitreferenz.</a:t>
             </a:r>
           </a:p>
         </p:txBody>
@@ -3904,10 +3921,10 @@
       </p:grpSpPr>
       <p:sp>
         <p:nvSpPr>
-          <p:cNvPr id="29" name="header-11">
-            <a:extLst xmlns:a="http://schemas.openxmlformats.org/drawingml/2006/main">
-              <a:ext uri="{FF2B5EF4-FFF2-40B4-BE49-F238E27FC236}">
-                <a16:creationId xmlns:a16="http://schemas.microsoft.com/office/drawing/2014/main" id="{69C0D3BE-8666-42D8-A511-6D32A785DAAB}"/>
+          <p:cNvPr id="15" name="header-10">
+            <a:extLst xmlns:a="http://schemas.openxmlformats.org/drawingml/2006/main">
+              <a:ext uri="{FF2B5EF4-FFF2-40B4-BE49-F238E27FC236}">
+                <a16:creationId xmlns:a16="http://schemas.microsoft.com/office/drawing/2014/main" id="{82D220AE-A37C-40D3-B430-DD3AC338E8AB}"/>
               </a:ext>
             </a:extLst>
           </p:cNvPr>
@@ -3937,10 +3954,10 @@
       </p:sp>
       <p:sp>
         <p:nvSpPr>
-          <p:cNvPr id="2" name="header-teal-11">
-            <a:extLst xmlns:a="http://schemas.openxmlformats.org/drawingml/2006/main">
-              <a:ext uri="{FF2B5EF4-FFF2-40B4-BE49-F238E27FC236}">
-                <a16:creationId xmlns:a16="http://schemas.microsoft.com/office/drawing/2014/main" id="{2241EBF9-3B9C-45FA-BF42-71FDB3E5C263}"/>
+          <p:cNvPr id="2" name="header-teal-10">
+            <a:extLst xmlns:a="http://schemas.openxmlformats.org/drawingml/2006/main">
+              <a:ext uri="{FF2B5EF4-FFF2-40B4-BE49-F238E27FC236}">
+                <a16:creationId xmlns:a16="http://schemas.microsoft.com/office/drawing/2014/main" id="{DAC24D5E-7B44-43F7-8880-EC321B193C33}"/>
               </a:ext>
             </a:extLst>
           </p:cNvPr>
@@ -3970,10 +3987,10 @@
       </p:sp>
       <p:sp>
         <p:nvSpPr>
-          <p:cNvPr id="3" name="header-accent-11">
-            <a:extLst xmlns:a="http://schemas.openxmlformats.org/drawingml/2006/main">
-              <a:ext uri="{FF2B5EF4-FFF2-40B4-BE49-F238E27FC236}">
-                <a16:creationId xmlns:a16="http://schemas.microsoft.com/office/drawing/2014/main" id="{4545EEF1-C021-4BA2-9408-E9F43FE83AE4}"/>
+          <p:cNvPr id="3" name="header-accent-10">
+            <a:extLst xmlns:a="http://schemas.openxmlformats.org/drawingml/2006/main">
+              <a:ext uri="{FF2B5EF4-FFF2-40B4-BE49-F238E27FC236}">
+                <a16:creationId xmlns:a16="http://schemas.microsoft.com/office/drawing/2014/main" id="{208A45C7-8610-4AC5-AD07-61D42845AD86}"/>
               </a:ext>
             </a:extLst>
           </p:cNvPr>
@@ -4003,10 +4020,10 @@
       </p:sp>
       <p:sp>
         <p:nvSpPr>
-          <p:cNvPr id="4" name="title-11">
-            <a:extLst xmlns:a="http://schemas.openxmlformats.org/drawingml/2006/main">
-              <a:ext uri="{FF2B5EF4-FFF2-40B4-BE49-F238E27FC236}">
-                <a16:creationId xmlns:a16="http://schemas.microsoft.com/office/drawing/2014/main" id="{6F7FA0BD-7285-4198-90B3-A6B9DEBFE521}"/>
+          <p:cNvPr id="4" name="title-10">
+            <a:extLst xmlns:a="http://schemas.openxmlformats.org/drawingml/2006/main">
+              <a:ext uri="{FF2B5EF4-FFF2-40B4-BE49-F238E27FC236}">
+                <a16:creationId xmlns:a16="http://schemas.microsoft.com/office/drawing/2014/main" id="{0B954E67-B918-4E55-A44B-D12546C1246D}"/>
               </a:ext>
             </a:extLst>
           </p:cNvPr>
@@ -4031,6 +4048,7 @@
           <a:lstStyle xmlns:a="http://schemas.openxmlformats.org/drawingml/2006/main"/>
           <a:p xmlns:a="http://schemas.openxmlformats.org/drawingml/2006/main">
             <a:pPr algn="l">
+              <a:buNone/>
               <a:defRPr sz="3225" b="1" i="0">
                 <a:solidFill>
                   <a:srgbClr val="FFFFFF"/>
@@ -4041,17 +4059,17 @@
               </a:defRPr>
             </a:pPr>
             <a:r>
-              <a:t>Ein gutes Modell kennt seine Einsatzgrenze</a:t>
-            </a:r>
-          </a:p>
-        </p:txBody>
-      </p:sp>
-      <p:sp>
-        <p:nvSpPr>
-          <p:cNvPr id="5" name="source-11">
-            <a:extLst xmlns:a="http://schemas.openxmlformats.org/drawingml/2006/main">
-              <a:ext uri="{FF2B5EF4-FFF2-40B4-BE49-F238E27FC236}">
-                <a16:creationId xmlns:a16="http://schemas.microsoft.com/office/drawing/2014/main" id="{960D00F3-3CAE-4A61-B148-62C5D45DFCC9}"/>
+              <a:t>K · Marktverlauf: Aktualität und Streuung sichtbar</a:t>
+            </a:r>
+          </a:p>
+        </p:txBody>
+      </p:sp>
+      <p:sp>
+        <p:nvSpPr>
+          <p:cNvPr id="5" name="source-10">
+            <a:extLst xmlns:a="http://schemas.openxmlformats.org/drawingml/2006/main">
+              <a:ext uri="{FF2B5EF4-FFF2-40B4-BE49-F238E27FC236}">
+                <a16:creationId xmlns:a16="http://schemas.microsoft.com/office/drawing/2014/main" id="{BBBFC246-79F3-405A-A68B-D1C942FE6792}"/>
               </a:ext>
             </a:extLst>
           </p:cNvPr>
@@ -4076,6 +4094,7 @@
           <a:lstStyle xmlns:a="http://schemas.openxmlformats.org/drawingml/2006/main"/>
           <a:p xmlns:a="http://schemas.openxmlformats.org/drawingml/2006/main">
             <a:pPr algn="l">
+              <a:buNone/>
               <a:defRPr sz="900" b="0" i="0">
                 <a:solidFill>
                   <a:srgbClr val="667587"/>
@@ -4093,10 +4112,10 @@
       </p:sp>
       <p:sp>
         <p:nvSpPr>
-          <p:cNvPr id="6" name="page-11">
-            <a:extLst xmlns:a="http://schemas.openxmlformats.org/drawingml/2006/main">
-              <a:ext uri="{FF2B5EF4-FFF2-40B4-BE49-F238E27FC236}">
-                <a16:creationId xmlns:a16="http://schemas.microsoft.com/office/drawing/2014/main" id="{E79274EB-7947-41C3-8A02-3F03F4335B2E}"/>
+          <p:cNvPr id="6" name="page-10">
+            <a:extLst xmlns:a="http://schemas.openxmlformats.org/drawingml/2006/main">
+              <a:ext uri="{FF2B5EF4-FFF2-40B4-BE49-F238E27FC236}">
+                <a16:creationId xmlns:a16="http://schemas.microsoft.com/office/drawing/2014/main" id="{4B68A03E-D847-40FB-9609-DF5775C6E9C3}"/>
               </a:ext>
             </a:extLst>
           </p:cNvPr>
@@ -4121,6 +4140,7 @@
           <a:lstStyle xmlns:a="http://schemas.openxmlformats.org/drawingml/2006/main"/>
           <a:p xmlns:a="http://schemas.openxmlformats.org/drawingml/2006/main">
             <a:pPr algn="r">
+              <a:buNone/>
               <a:defRPr sz="975" b="0" i="0">
                 <a:solidFill>
                   <a:srgbClr val="667587"/>
@@ -4138,89 +4158,55 @@
       </p:sp>
       <p:sp>
         <p:nvSpPr>
-          <p:cNvPr id="7" name="limits-lead">
-            <a:extLst xmlns:a="http://schemas.openxmlformats.org/drawingml/2006/main">
-              <a:ext uri="{FF2B5EF4-FFF2-40B4-BE49-F238E27FC236}">
-                <a16:creationId xmlns:a16="http://schemas.microsoft.com/office/drawing/2014/main" id="{A2974C9F-7C28-4462-8412-716EF7648D60}"/>
-              </a:ext>
-            </a:extLst>
-          </p:cNvPr>
-          <p:cNvSpPr>
-            <a:spLocks xmlns:a="http://schemas.openxmlformats.org/drawingml/2006/main" noGrp="1"/>
-          </p:cNvSpPr>
-          <p:nvPr/>
-        </p:nvSpPr>
-        <p:spPr>
-          <a:xfrm xmlns:a="http://schemas.openxmlformats.org/drawingml/2006/main">
-            <a:off x="457200" y="1371600"/>
-            <a:ext cx="11049000" cy="495300"/>
-          </a:xfrm>
-          <a:prstGeom xmlns:a="http://schemas.openxmlformats.org/drawingml/2006/main" prst="rect">
-            <a:avLst/>
-          </a:prstGeom>
-        </p:spPr>
-        <p:txBody>
-          <a:bodyPr xmlns:a="http://schemas.openxmlformats.org/drawingml/2006/main" wrap="square" lIns="0" tIns="0" rIns="0" bIns="0" anchor="t">
-            <a:noAutofit/>
-          </a:bodyPr>
-          <a:lstStyle xmlns:a="http://schemas.openxmlformats.org/drawingml/2006/main"/>
-          <a:p xmlns:a="http://schemas.openxmlformats.org/drawingml/2006/main">
-            <a:pPr algn="l">
-              <a:defRPr sz="1800" b="0" i="0">
-                <a:solidFill>
-                  <a:srgbClr val="667587"/>
-                </a:solidFill>
-                <a:latin typeface="Arial"/>
-                <a:ea typeface="Arial"/>
-                <a:cs typeface="Arial"/>
-              </a:defRPr>
-            </a:pPr>
-            <a:r>
-              <a:t>MietCheck unterstützt Exploration und Transparenz – keine rechtliche oder individuelle Preisentscheidung.</a:t>
-            </a:r>
-          </a:p>
-        </p:txBody>
-      </p:sp>
-      <p:cxnSp>
-        <p:nvCxnSpPr>
-          <p:cNvPr id="36" name="limits-sep"/>
-          <p:cNvCxnSpPr/>
-          <p:nvPr/>
-        </p:nvCxnSpPr>
-        <p:spPr>
-          <a:xfrm xmlns:a="http://schemas.openxmlformats.org/drawingml/2006/main">
-            <a:off x="6096000" y="2133600"/>
-            <a:ext cx="286" cy="3486150"/>
-          </a:xfrm>
-          <a:prstGeom xmlns:a="http://schemas.openxmlformats.org/drawingml/2006/main" prst="straightConnector1">
-            <a:avLst/>
-          </a:prstGeom>
-          <a:ln xmlns:a="http://schemas.openxmlformats.org/drawingml/2006/main" w="19050">
+          <p:cNvPr id="7" name="screenshot-back">
+            <a:extLst xmlns:a="http://schemas.openxmlformats.org/drawingml/2006/main">
+              <a:ext uri="{FF2B5EF4-FFF2-40B4-BE49-F238E27FC236}">
+                <a16:creationId xmlns:a16="http://schemas.microsoft.com/office/drawing/2014/main" id="{4BDF2DE0-9C75-4F74-A351-FC51D8546C4A}"/>
+              </a:ext>
+            </a:extLst>
+          </p:cNvPr>
+          <p:cNvSpPr>
+            <a:spLocks xmlns:a="http://schemas.openxmlformats.org/drawingml/2006/main" noGrp="1"/>
+          </p:cNvSpPr>
+          <p:nvPr/>
+        </p:nvSpPr>
+        <p:spPr>
+          <a:xfrm xmlns:a="http://schemas.openxmlformats.org/drawingml/2006/main">
+            <a:off x="457200" y="1390650"/>
+            <a:ext cx="11049000" cy="4343400"/>
+          </a:xfrm>
+          <a:prstGeom xmlns:a="http://schemas.openxmlformats.org/drawingml/2006/main" prst="rect">
+            <a:avLst/>
+          </a:prstGeom>
+          <a:solidFill xmlns:a="http://schemas.openxmlformats.org/drawingml/2006/main">
+            <a:srgbClr val="FFFFFF"/>
+          </a:solidFill>
+          <a:ln xmlns:a="http://schemas.openxmlformats.org/drawingml/2006/main" w="9525">
             <a:solidFill>
               <a:srgbClr val="D6E1DF"/>
             </a:solidFill>
             <a:prstDash val="solid"/>
           </a:ln>
         </p:spPr>
-      </p:cxnSp>
-      <p:sp>
-        <p:nvSpPr>
-          <p:cNvPr id="9" name="limits-left-title">
-            <a:extLst xmlns:a="http://schemas.openxmlformats.org/drawingml/2006/main">
-              <a:ext uri="{FF2B5EF4-FFF2-40B4-BE49-F238E27FC236}">
-                <a16:creationId xmlns:a16="http://schemas.microsoft.com/office/drawing/2014/main" id="{032A934B-C847-40C6-A537-458E8AE1CE13}"/>
-              </a:ext>
-            </a:extLst>
-          </p:cNvPr>
-          <p:cNvSpPr>
-            <a:spLocks xmlns:a="http://schemas.openxmlformats.org/drawingml/2006/main" noGrp="1"/>
-          </p:cNvSpPr>
-          <p:nvPr/>
-        </p:nvSpPr>
-        <p:spPr>
-          <a:xfrm xmlns:a="http://schemas.openxmlformats.org/drawingml/2006/main">
-            <a:off x="457200" y="2209800"/>
-            <a:ext cx="4953000" cy="400050"/>
+      </p:sp>
+      <p:sp>
+        <p:nvSpPr>
+          <p:cNvPr id="8" name="product-one">
+            <a:extLst xmlns:a="http://schemas.openxmlformats.org/drawingml/2006/main">
+              <a:ext uri="{FF2B5EF4-FFF2-40B4-BE49-F238E27FC236}">
+                <a16:creationId xmlns:a16="http://schemas.microsoft.com/office/drawing/2014/main" id="{09F5E031-EF10-4D41-8CE7-40317B2FF25D}"/>
+              </a:ext>
+            </a:extLst>
+          </p:cNvPr>
+          <p:cNvSpPr>
+            <a:spLocks xmlns:a="http://schemas.openxmlformats.org/drawingml/2006/main" noGrp="1"/>
+          </p:cNvSpPr>
+          <p:nvPr/>
+        </p:nvSpPr>
+        <p:spPr>
+          <a:xfrm xmlns:a="http://schemas.openxmlformats.org/drawingml/2006/main">
+            <a:off x="533400" y="5943600"/>
+            <a:ext cx="3238500" cy="266700"/>
           </a:xfrm>
           <a:prstGeom xmlns:a="http://schemas.openxmlformats.org/drawingml/2006/main" prst="rect">
             <a:avLst/>
@@ -4233,39 +4219,40 @@
           <a:lstStyle xmlns:a="http://schemas.openxmlformats.org/drawingml/2006/main"/>
           <a:p xmlns:a="http://schemas.openxmlformats.org/drawingml/2006/main">
             <a:pPr algn="l">
-              <a:defRPr sz="2100" b="1" i="0">
-                <a:solidFill>
-                  <a:srgbClr val="102138"/>
-                </a:solidFill>
-                <a:latin typeface="Arial"/>
-                <a:ea typeface="Arial"/>
-                <a:cs typeface="Arial"/>
-              </a:defRPr>
-            </a:pPr>
-            <a:r>
-              <a:t>Was fehlt?</a:t>
-            </a:r>
-          </a:p>
-        </p:txBody>
-      </p:sp>
-      <p:sp>
-        <p:nvSpPr>
-          <p:cNvPr id="10" name="limits-right-title">
-            <a:extLst xmlns:a="http://schemas.openxmlformats.org/drawingml/2006/main">
-              <a:ext uri="{FF2B5EF4-FFF2-40B4-BE49-F238E27FC236}">
-                <a16:creationId xmlns:a16="http://schemas.microsoft.com/office/drawing/2014/main" id="{8BF5A322-F572-4231-8032-AE559B818586}"/>
-              </a:ext>
-            </a:extLst>
-          </p:cNvPr>
-          <p:cNvSpPr>
-            <a:spLocks xmlns:a="http://schemas.openxmlformats.org/drawingml/2006/main" noGrp="1"/>
-          </p:cNvSpPr>
-          <p:nvPr/>
-        </p:nvSpPr>
-        <p:spPr>
-          <a:xfrm xmlns:a="http://schemas.openxmlformats.org/drawingml/2006/main">
-            <a:off x="6667500" y="2209800"/>
-            <a:ext cx="4838700" cy="400050"/>
+              <a:buNone/>
+              <a:defRPr sz="1350" b="1" i="0">
+                <a:solidFill>
+                  <a:srgbClr val="0F7B62"/>
+                </a:solidFill>
+                <a:latin typeface="Arial"/>
+                <a:ea typeface="Arial"/>
+                <a:cs typeface="Arial"/>
+              </a:defRPr>
+            </a:pPr>
+            <a:r>
+              <a:t>1 · Region wählen</a:t>
+            </a:r>
+          </a:p>
+        </p:txBody>
+      </p:sp>
+      <p:sp>
+        <p:nvSpPr>
+          <p:cNvPr id="9" name="product-two">
+            <a:extLst xmlns:a="http://schemas.openxmlformats.org/drawingml/2006/main">
+              <a:ext uri="{FF2B5EF4-FFF2-40B4-BE49-F238E27FC236}">
+                <a16:creationId xmlns:a16="http://schemas.microsoft.com/office/drawing/2014/main" id="{70FFCED3-3BF4-498D-86F4-E2F7EBDF0C56}"/>
+              </a:ext>
+            </a:extLst>
+          </p:cNvPr>
+          <p:cNvSpPr>
+            <a:spLocks xmlns:a="http://schemas.openxmlformats.org/drawingml/2006/main" noGrp="1"/>
+          </p:cNvSpPr>
+          <p:nvPr/>
+        </p:nvSpPr>
+        <p:spPr>
+          <a:xfrm xmlns:a="http://schemas.openxmlformats.org/drawingml/2006/main">
+            <a:off x="4333875" y="5943600"/>
+            <a:ext cx="3238500" cy="266700"/>
           </a:xfrm>
           <a:prstGeom xmlns:a="http://schemas.openxmlformats.org/drawingml/2006/main" prst="rect">
             <a:avLst/>
@@ -4278,49 +4265,121 @@
           <a:lstStyle xmlns:a="http://schemas.openxmlformats.org/drawingml/2006/main"/>
           <a:p xmlns:a="http://schemas.openxmlformats.org/drawingml/2006/main">
             <a:pPr algn="l">
-              <a:defRPr sz="2100" b="1" i="0">
-                <a:solidFill>
-                  <a:srgbClr val="0F7B62"/>
-                </a:solidFill>
-                <a:latin typeface="Arial"/>
-                <a:ea typeface="Arial"/>
-                <a:cs typeface="Arial"/>
-              </a:defRPr>
-            </a:pPr>
-            <a:r>
-              <a:t>Wie wird das abgefedert?</a:t>
-            </a:r>
-          </a:p>
-        </p:txBody>
-      </p:sp>
-      <p:sp>
-        <p:nvSpPr>
-          <p:cNvPr id="11" name="limit-dot-0">
-            <a:extLst xmlns:a="http://schemas.openxmlformats.org/drawingml/2006/main">
-              <a:ext uri="{FF2B5EF4-FFF2-40B4-BE49-F238E27FC236}">
-                <a16:creationId xmlns:a16="http://schemas.microsoft.com/office/drawing/2014/main" id="{DDD37B09-8035-4B89-B47E-734E77909635}"/>
-              </a:ext>
-            </a:extLst>
-          </p:cNvPr>
-          <p:cNvSpPr>
-            <a:spLocks xmlns:a="http://schemas.openxmlformats.org/drawingml/2006/main" noGrp="1"/>
-          </p:cNvSpPr>
-          <p:nvPr/>
-        </p:nvSpPr>
-        <p:spPr>
-          <a:xfrm xmlns:a="http://schemas.openxmlformats.org/drawingml/2006/main">
-            <a:off x="495300" y="2933700"/>
-            <a:ext cx="171450" cy="171450"/>
-          </a:xfrm>
-          <a:prstGeom xmlns:a="http://schemas.openxmlformats.org/drawingml/2006/main" prst="ellipse">
+              <a:buNone/>
+              <a:defRPr sz="1350" b="1" i="0">
+                <a:solidFill>
+                  <a:srgbClr val="315CFF"/>
+                </a:solidFill>
+                <a:latin typeface="Arial"/>
+                <a:ea typeface="Arial"/>
+                <a:cs typeface="Arial"/>
+              </a:defRPr>
+            </a:pPr>
+            <a:r>
+              <a:t>2 · Quartalsverlauf</a:t>
+            </a:r>
+          </a:p>
+        </p:txBody>
+      </p:sp>
+      <p:sp>
+        <p:nvSpPr>
+          <p:cNvPr id="10" name="product-three">
+            <a:extLst xmlns:a="http://schemas.openxmlformats.org/drawingml/2006/main">
+              <a:ext uri="{FF2B5EF4-FFF2-40B4-BE49-F238E27FC236}">
+                <a16:creationId xmlns:a16="http://schemas.microsoft.com/office/drawing/2014/main" id="{A29F6F45-2617-4455-A0D0-91E3DBEC130F}"/>
+              </a:ext>
+            </a:extLst>
+          </p:cNvPr>
+          <p:cNvSpPr>
+            <a:spLocks xmlns:a="http://schemas.openxmlformats.org/drawingml/2006/main" noGrp="1"/>
+          </p:cNvSpPr>
+          <p:nvPr/>
+        </p:nvSpPr>
+        <p:spPr>
+          <a:xfrm xmlns:a="http://schemas.openxmlformats.org/drawingml/2006/main">
+            <a:off x="8115300" y="5943600"/>
+            <a:ext cx="3238500" cy="266700"/>
+          </a:xfrm>
+          <a:prstGeom xmlns:a="http://schemas.openxmlformats.org/drawingml/2006/main" prst="rect">
+            <a:avLst/>
+          </a:prstGeom>
+        </p:spPr>
+        <p:txBody>
+          <a:bodyPr xmlns:a="http://schemas.openxmlformats.org/drawingml/2006/main" wrap="square" lIns="0" tIns="0" rIns="0" bIns="0" anchor="t">
+            <a:noAutofit/>
+          </a:bodyPr>
+          <a:lstStyle xmlns:a="http://schemas.openxmlformats.org/drawingml/2006/main"/>
+          <a:p xmlns:a="http://schemas.openxmlformats.org/drawingml/2006/main">
+            <a:pPr algn="l">
+              <a:buNone/>
+              <a:defRPr sz="1350" b="1" i="0">
+                <a:solidFill>
+                  <a:srgbClr val="E85D3F"/>
+                </a:solidFill>
+                <a:latin typeface="Arial"/>
+                <a:ea typeface="Arial"/>
+                <a:cs typeface="Arial"/>
+              </a:defRPr>
+            </a:pPr>
+            <a:r>
+              <a:t>3 · Markt-IQR lesen</a:t>
+            </a:r>
+          </a:p>
+        </p:txBody>
+      </p:sp>
+      <p:pic>
+        <p:nvPicPr>
+          <p:cNvPr id="27" name=""/>
+          <p:cNvPicPr>
+            <a:picLocks xmlns:a="http://schemas.openxmlformats.org/drawingml/2006/main" noChangeAspect="1"/>
+          </p:cNvPicPr>
+          <p:nvPr/>
+        </p:nvPicPr>
+        <p:blipFill>
+          <a:blip xmlns:r="http://schemas.openxmlformats.org/officeDocument/2006/relationships" xmlns:a="http://schemas.openxmlformats.org/drawingml/2006/main" r:embed="R2216b5a7a3184ff2"/>
+          <a:srcRect xmlns:a="http://schemas.openxmlformats.org/drawingml/2006/main" l="0" t="24967" r="0" b="24967"/>
+          <a:stretch xmlns:a="http://schemas.openxmlformats.org/drawingml/2006/main">
+            <a:fillRect l="0" t="0" r="0" b="0"/>
+          </a:stretch>
+        </p:blipFill>
+        <p:spPr>
+          <a:xfrm xmlns:a="http://schemas.openxmlformats.org/drawingml/2006/main" flipH="0" flipV="0">
+            <a:off x="552450" y="1485900"/>
+            <a:ext cx="10858500" cy="4152900"/>
+          </a:xfrm>
+          <a:prstGeom xmlns:a="http://schemas.openxmlformats.org/drawingml/2006/main" prst="rect">
+            <a:avLst/>
+          </a:prstGeom>
+        </p:spPr>
+      </p:pic>
+      <p:sp>
+        <p:nvSpPr>
+          <p:cNvPr id="12" name="product-mask">
+            <a:extLst xmlns:a="http://schemas.openxmlformats.org/drawingml/2006/main">
+              <a:ext uri="{FF2B5EF4-FFF2-40B4-BE49-F238E27FC236}">
+                <a16:creationId xmlns:a16="http://schemas.microsoft.com/office/drawing/2014/main" id="{62E760CC-F31B-42B2-ABD3-B8E6D68FC42C}"/>
+              </a:ext>
+            </a:extLst>
+          </p:cNvPr>
+          <p:cNvSpPr>
+            <a:spLocks xmlns:a="http://schemas.openxmlformats.org/drawingml/2006/main" noGrp="1"/>
+          </p:cNvSpPr>
+          <p:nvPr/>
+        </p:nvSpPr>
+        <p:spPr>
+          <a:xfrm xmlns:a="http://schemas.openxmlformats.org/drawingml/2006/main">
+            <a:off x="3419475" y="1485900"/>
+            <a:ext cx="7991475" cy="1581150"/>
+          </a:xfrm>
+          <a:prstGeom xmlns:a="http://schemas.openxmlformats.org/drawingml/2006/main" prst="rect">
             <a:avLst/>
           </a:prstGeom>
           <a:solidFill xmlns:a="http://schemas.openxmlformats.org/drawingml/2006/main">
-            <a:srgbClr val="E85D3F"/>
+            <a:srgbClr val="102138"/>
           </a:solidFill>
           <a:ln xmlns:a="http://schemas.openxmlformats.org/drawingml/2006/main" w="0">
             <a:solidFill>
-              <a:srgbClr val="E85D3F"/>
+              <a:srgbClr val="102138"/>
             </a:solidFill>
             <a:prstDash val="solid"/>
           </a:ln>
@@ -4328,22 +4387,22 @@
       </p:sp>
       <p:sp>
         <p:nvSpPr>
-          <p:cNvPr id="12" name="limit-copy-0">
-            <a:extLst xmlns:a="http://schemas.openxmlformats.org/drawingml/2006/main">
-              <a:ext uri="{FF2B5EF4-FFF2-40B4-BE49-F238E27FC236}">
-                <a16:creationId xmlns:a16="http://schemas.microsoft.com/office/drawing/2014/main" id="{4AC89F28-5CCE-4F3A-AA44-5D84CBE39F5D}"/>
-              </a:ext>
-            </a:extLst>
-          </p:cNvPr>
-          <p:cNvSpPr>
-            <a:spLocks xmlns:a="http://schemas.openxmlformats.org/drawingml/2006/main" noGrp="1"/>
-          </p:cNvSpPr>
-          <p:nvPr/>
-        </p:nvSpPr>
-        <p:spPr>
-          <a:xfrm xmlns:a="http://schemas.openxmlformats.org/drawingml/2006/main">
-            <a:off x="838200" y="2857500"/>
-            <a:ext cx="4857750" cy="514350"/>
+          <p:cNvPr id="13" name="product-mask-copy">
+            <a:extLst xmlns:a="http://schemas.openxmlformats.org/drawingml/2006/main">
+              <a:ext uri="{FF2B5EF4-FFF2-40B4-BE49-F238E27FC236}">
+                <a16:creationId xmlns:a16="http://schemas.microsoft.com/office/drawing/2014/main" id="{0A346937-0234-4B35-9F4B-D02F8DE28D72}"/>
+              </a:ext>
+            </a:extLst>
+          </p:cNvPr>
+          <p:cNvSpPr>
+            <a:spLocks xmlns:a="http://schemas.openxmlformats.org/drawingml/2006/main" noGrp="1"/>
+          </p:cNvSpPr>
+          <p:nvPr/>
+        </p:nvSpPr>
+        <p:spPr>
+          <a:xfrm xmlns:a="http://schemas.openxmlformats.org/drawingml/2006/main">
+            <a:off x="3733800" y="1695450"/>
+            <a:ext cx="7334250" cy="342900"/>
           </a:xfrm>
           <a:prstGeom xmlns:a="http://schemas.openxmlformats.org/drawingml/2006/main" prst="rect">
             <a:avLst/>
@@ -4356,72 +4415,40 @@
           <a:lstStyle xmlns:a="http://schemas.openxmlformats.org/drawingml/2006/main"/>
           <a:p xmlns:a="http://schemas.openxmlformats.org/drawingml/2006/main">
             <a:pPr algn="l">
-              <a:defRPr sz="1575" b="0" i="0">
-                <a:solidFill>
-                  <a:srgbClr val="667587"/>
-                </a:solidFill>
-                <a:latin typeface="Arial"/>
-                <a:ea typeface="Arial"/>
-                <a:cs typeface="Arial"/>
-              </a:defRPr>
-            </a:pPr>
-            <a:r>
-              <a:t>Ausstattung, Energiezustand, Etage und Mikrolage</a:t>
-            </a:r>
-          </a:p>
-        </p:txBody>
-      </p:sp>
-      <p:sp>
-        <p:nvSpPr>
-          <p:cNvPr id="13" name="mit-dot-0">
-            <a:extLst xmlns:a="http://schemas.openxmlformats.org/drawingml/2006/main">
-              <a:ext uri="{FF2B5EF4-FFF2-40B4-BE49-F238E27FC236}">
-                <a16:creationId xmlns:a16="http://schemas.microsoft.com/office/drawing/2014/main" id="{E4713A01-42DB-4F73-AA07-658794D1B491}"/>
-              </a:ext>
-            </a:extLst>
-          </p:cNvPr>
-          <p:cNvSpPr>
-            <a:spLocks xmlns:a="http://schemas.openxmlformats.org/drawingml/2006/main" noGrp="1"/>
-          </p:cNvSpPr>
-          <p:nvPr/>
-        </p:nvSpPr>
-        <p:spPr>
-          <a:xfrm xmlns:a="http://schemas.openxmlformats.org/drawingml/2006/main">
-            <a:off x="6705600" y="2933700"/>
-            <a:ext cx="171450" cy="171450"/>
-          </a:xfrm>
-          <a:prstGeom xmlns:a="http://schemas.openxmlformats.org/drawingml/2006/main" prst="ellipse">
-            <a:avLst/>
-          </a:prstGeom>
-          <a:solidFill xmlns:a="http://schemas.openxmlformats.org/drawingml/2006/main">
-            <a:srgbClr val="0F7B62"/>
-          </a:solidFill>
-          <a:ln xmlns:a="http://schemas.openxmlformats.org/drawingml/2006/main" w="0">
-            <a:solidFill>
-              <a:srgbClr val="0F7B62"/>
-            </a:solidFill>
-            <a:prstDash val="solid"/>
-          </a:ln>
-        </p:spPr>
-      </p:sp>
-      <p:sp>
-        <p:nvSpPr>
-          <p:cNvPr id="14" name="mit-copy-0">
-            <a:extLst xmlns:a="http://schemas.openxmlformats.org/drawingml/2006/main">
-              <a:ext uri="{FF2B5EF4-FFF2-40B4-BE49-F238E27FC236}">
-                <a16:creationId xmlns:a16="http://schemas.microsoft.com/office/drawing/2014/main" id="{CBE6039B-582C-46A1-A37C-8BA5B2B87CCD}"/>
-              </a:ext>
-            </a:extLst>
-          </p:cNvPr>
-          <p:cNvSpPr>
-            <a:spLocks xmlns:a="http://schemas.openxmlformats.org/drawingml/2006/main" noGrp="1"/>
-          </p:cNvSpPr>
-          <p:nvPr/>
-        </p:nvSpPr>
-        <p:spPr>
-          <a:xfrm xmlns:a="http://schemas.openxmlformats.org/drawingml/2006/main">
-            <a:off x="7048500" y="2857500"/>
-            <a:ext cx="4286250" cy="514350"/>
+              <a:buNone/>
+              <a:defRPr sz="1875" b="1" i="0">
+                <a:solidFill>
+                  <a:srgbClr val="FFFFFF"/>
+                </a:solidFill>
+                <a:latin typeface="Arial"/>
+                <a:ea typeface="Arial"/>
+                <a:cs typeface="Arial"/>
+              </a:defRPr>
+            </a:pPr>
+            <a:r>
+              <a:t>GREIX 2026-Q1 · unabhängig vom ML-Ziel</a:t>
+            </a:r>
+          </a:p>
+        </p:txBody>
+      </p:sp>
+      <p:sp>
+        <p:nvSpPr>
+          <p:cNvPr id="14" name="product-mask-subcopy">
+            <a:extLst xmlns:a="http://schemas.openxmlformats.org/drawingml/2006/main">
+              <a:ext uri="{FF2B5EF4-FFF2-40B4-BE49-F238E27FC236}">
+                <a16:creationId xmlns:a16="http://schemas.microsoft.com/office/drawing/2014/main" id="{8843F53C-923D-460A-B35A-EB8DD0FBD449}"/>
+              </a:ext>
+            </a:extLst>
+          </p:cNvPr>
+          <p:cNvSpPr>
+            <a:spLocks xmlns:a="http://schemas.openxmlformats.org/drawingml/2006/main" noGrp="1"/>
+          </p:cNvSpPr>
+          <p:nvPr/>
+        </p:nvSpPr>
+        <p:spPr>
+          <a:xfrm xmlns:a="http://schemas.openxmlformats.org/drawingml/2006/main">
+            <a:off x="3733800" y="2238375"/>
+            <a:ext cx="7334250" cy="304800"/>
           </a:xfrm>
           <a:prstGeom xmlns:a="http://schemas.openxmlformats.org/drawingml/2006/main" prst="rect">
             <a:avLst/>
@@ -4434,563 +4461,18 @@
           <a:lstStyle xmlns:a="http://schemas.openxmlformats.org/drawingml/2006/main"/>
           <a:p xmlns:a="http://schemas.openxmlformats.org/drawingml/2006/main">
             <a:pPr algn="l">
-              <a:defRPr sz="1575" b="0" i="0">
-                <a:solidFill>
-                  <a:srgbClr val="667587"/>
-                </a:solidFill>
-                <a:latin typeface="Arial"/>
-                <a:ea typeface="Arial"/>
-                <a:cs typeface="Arial"/>
-              </a:defRPr>
-            </a:pPr>
-            <a:r>
-              <a:t>keine adressgenaue oder rechtliche Behauptung</a:t>
-            </a:r>
-          </a:p>
-        </p:txBody>
-      </p:sp>
-      <p:sp>
-        <p:nvSpPr>
-          <p:cNvPr id="15" name="limit-dot-1">
-            <a:extLst xmlns:a="http://schemas.openxmlformats.org/drawingml/2006/main">
-              <a:ext uri="{FF2B5EF4-FFF2-40B4-BE49-F238E27FC236}">
-                <a16:creationId xmlns:a16="http://schemas.microsoft.com/office/drawing/2014/main" id="{735C978F-BD3A-4A2F-9F0A-517367332DBC}"/>
-              </a:ext>
-            </a:extLst>
-          </p:cNvPr>
-          <p:cNvSpPr>
-            <a:spLocks xmlns:a="http://schemas.openxmlformats.org/drawingml/2006/main" noGrp="1"/>
-          </p:cNvSpPr>
-          <p:nvPr/>
-        </p:nvSpPr>
-        <p:spPr>
-          <a:xfrm xmlns:a="http://schemas.openxmlformats.org/drawingml/2006/main">
-            <a:off x="495300" y="3619500"/>
-            <a:ext cx="171450" cy="171450"/>
-          </a:xfrm>
-          <a:prstGeom xmlns:a="http://schemas.openxmlformats.org/drawingml/2006/main" prst="ellipse">
-            <a:avLst/>
-          </a:prstGeom>
-          <a:solidFill xmlns:a="http://schemas.openxmlformats.org/drawingml/2006/main">
-            <a:srgbClr val="E85D3F"/>
-          </a:solidFill>
-          <a:ln xmlns:a="http://schemas.openxmlformats.org/drawingml/2006/main" w="0">
-            <a:solidFill>
-              <a:srgbClr val="E85D3F"/>
-            </a:solidFill>
-            <a:prstDash val="solid"/>
-          </a:ln>
-        </p:spPr>
-      </p:sp>
-      <p:sp>
-        <p:nvSpPr>
-          <p:cNvPr id="16" name="limit-copy-1">
-            <a:extLst xmlns:a="http://schemas.openxmlformats.org/drawingml/2006/main">
-              <a:ext uri="{FF2B5EF4-FFF2-40B4-BE49-F238E27FC236}">
-                <a16:creationId xmlns:a16="http://schemas.microsoft.com/office/drawing/2014/main" id="{D421D142-943C-4107-972A-97DC39AAF03D}"/>
-              </a:ext>
-            </a:extLst>
-          </p:cNvPr>
-          <p:cNvSpPr>
-            <a:spLocks xmlns:a="http://schemas.openxmlformats.org/drawingml/2006/main" noGrp="1"/>
-          </p:cNvSpPr>
-          <p:nvPr/>
-        </p:nvSpPr>
-        <p:spPr>
-          <a:xfrm xmlns:a="http://schemas.openxmlformats.org/drawingml/2006/main">
-            <a:off x="838200" y="3543300"/>
-            <a:ext cx="4857750" cy="514350"/>
-          </a:xfrm>
-          <a:prstGeom xmlns:a="http://schemas.openxmlformats.org/drawingml/2006/main" prst="rect">
-            <a:avLst/>
-          </a:prstGeom>
-        </p:spPr>
-        <p:txBody>
-          <a:bodyPr xmlns:a="http://schemas.openxmlformats.org/drawingml/2006/main" wrap="square" lIns="0" tIns="0" rIns="0" bIns="0" anchor="t">
-            <a:noAutofit/>
-          </a:bodyPr>
-          <a:lstStyle xmlns:a="http://schemas.openxmlformats.org/drawingml/2006/main"/>
-          <a:p xmlns:a="http://schemas.openxmlformats.org/drawingml/2006/main">
-            <a:pPr algn="l">
-              <a:defRPr sz="1575" b="0" i="0">
-                <a:solidFill>
-                  <a:srgbClr val="667587"/>
-                </a:solidFill>
-                <a:latin typeface="Arial"/>
-                <a:ea typeface="Arial"/>
-                <a:cs typeface="Arial"/>
-              </a:defRPr>
-            </a:pPr>
-            <a:r>
-              <a:t>Vertragsbeginn und rechtliche Besonderheiten</a:t>
-            </a:r>
-          </a:p>
-        </p:txBody>
-      </p:sp>
-      <p:sp>
-        <p:nvSpPr>
-          <p:cNvPr id="17" name="mit-dot-1">
-            <a:extLst xmlns:a="http://schemas.openxmlformats.org/drawingml/2006/main">
-              <a:ext uri="{FF2B5EF4-FFF2-40B4-BE49-F238E27FC236}">
-                <a16:creationId xmlns:a16="http://schemas.microsoft.com/office/drawing/2014/main" id="{67B7C1AB-9E09-4067-89BC-3ED8B76004E3}"/>
-              </a:ext>
-            </a:extLst>
-          </p:cNvPr>
-          <p:cNvSpPr>
-            <a:spLocks xmlns:a="http://schemas.openxmlformats.org/drawingml/2006/main" noGrp="1"/>
-          </p:cNvSpPr>
-          <p:nvPr/>
-        </p:nvSpPr>
-        <p:spPr>
-          <a:xfrm xmlns:a="http://schemas.openxmlformats.org/drawingml/2006/main">
-            <a:off x="6705600" y="3619500"/>
-            <a:ext cx="171450" cy="171450"/>
-          </a:xfrm>
-          <a:prstGeom xmlns:a="http://schemas.openxmlformats.org/drawingml/2006/main" prst="ellipse">
-            <a:avLst/>
-          </a:prstGeom>
-          <a:solidFill xmlns:a="http://schemas.openxmlformats.org/drawingml/2006/main">
-            <a:srgbClr val="0F7B62"/>
-          </a:solidFill>
-          <a:ln xmlns:a="http://schemas.openxmlformats.org/drawingml/2006/main" w="0">
-            <a:solidFill>
-              <a:srgbClr val="0F7B62"/>
-            </a:solidFill>
-            <a:prstDash val="solid"/>
-          </a:ln>
-        </p:spPr>
-      </p:sp>
-      <p:sp>
-        <p:nvSpPr>
-          <p:cNvPr id="18" name="mit-copy-1">
-            <a:extLst xmlns:a="http://schemas.openxmlformats.org/drawingml/2006/main">
-              <a:ext uri="{FF2B5EF4-FFF2-40B4-BE49-F238E27FC236}">
-                <a16:creationId xmlns:a16="http://schemas.microsoft.com/office/drawing/2014/main" id="{F8644C7B-BF1E-48BC-B788-FD05FE1DEC20}"/>
-              </a:ext>
-            </a:extLst>
-          </p:cNvPr>
-          <p:cNvSpPr>
-            <a:spLocks xmlns:a="http://schemas.openxmlformats.org/drawingml/2006/main" noGrp="1"/>
-          </p:cNvSpPr>
-          <p:nvPr/>
-        </p:nvSpPr>
-        <p:spPr>
-          <a:xfrm xmlns:a="http://schemas.openxmlformats.org/drawingml/2006/main">
-            <a:off x="7048500" y="3543300"/>
-            <a:ext cx="4286250" cy="514350"/>
-          </a:xfrm>
-          <a:prstGeom xmlns:a="http://schemas.openxmlformats.org/drawingml/2006/main" prst="rect">
-            <a:avLst/>
-          </a:prstGeom>
-        </p:spPr>
-        <p:txBody>
-          <a:bodyPr xmlns:a="http://schemas.openxmlformats.org/drawingml/2006/main" wrap="square" lIns="0" tIns="0" rIns="0" bIns="0" anchor="t">
-            <a:noAutofit/>
-          </a:bodyPr>
-          <a:lstStyle xmlns:a="http://schemas.openxmlformats.org/drawingml/2006/main"/>
-          <a:p xmlns:a="http://schemas.openxmlformats.org/drawingml/2006/main">
-            <a:pPr algn="l">
-              <a:defRPr sz="1575" b="0" i="0">
-                <a:solidFill>
-                  <a:srgbClr val="667587"/>
-                </a:solidFill>
-                <a:latin typeface="Arial"/>
-                <a:ea typeface="Arial"/>
-                <a:cs typeface="Arial"/>
-              </a:defRPr>
-            </a:pPr>
-            <a:r>
-              <a:t>Regionen ohne GREIX werden nicht erfunden</a:t>
-            </a:r>
-          </a:p>
-        </p:txBody>
-      </p:sp>
-      <p:sp>
-        <p:nvSpPr>
-          <p:cNvPr id="19" name="limit-dot-2">
-            <a:extLst xmlns:a="http://schemas.openxmlformats.org/drawingml/2006/main">
-              <a:ext uri="{FF2B5EF4-FFF2-40B4-BE49-F238E27FC236}">
-                <a16:creationId xmlns:a16="http://schemas.microsoft.com/office/drawing/2014/main" id="{B72C6549-DA74-4AA6-9F21-90E3D4309EBC}"/>
-              </a:ext>
-            </a:extLst>
-          </p:cNvPr>
-          <p:cNvSpPr>
-            <a:spLocks xmlns:a="http://schemas.openxmlformats.org/drawingml/2006/main" noGrp="1"/>
-          </p:cNvSpPr>
-          <p:nvPr/>
-        </p:nvSpPr>
-        <p:spPr>
-          <a:xfrm xmlns:a="http://schemas.openxmlformats.org/drawingml/2006/main">
-            <a:off x="495300" y="4305300"/>
-            <a:ext cx="171450" cy="171450"/>
-          </a:xfrm>
-          <a:prstGeom xmlns:a="http://schemas.openxmlformats.org/drawingml/2006/main" prst="ellipse">
-            <a:avLst/>
-          </a:prstGeom>
-          <a:solidFill xmlns:a="http://schemas.openxmlformats.org/drawingml/2006/main">
-            <a:srgbClr val="E85D3F"/>
-          </a:solidFill>
-          <a:ln xmlns:a="http://schemas.openxmlformats.org/drawingml/2006/main" w="0">
-            <a:solidFill>
-              <a:srgbClr val="E85D3F"/>
-            </a:solidFill>
-            <a:prstDash val="solid"/>
-          </a:ln>
-        </p:spPr>
-      </p:sp>
-      <p:sp>
-        <p:nvSpPr>
-          <p:cNvPr id="20" name="limit-copy-2">
-            <a:extLst xmlns:a="http://schemas.openxmlformats.org/drawingml/2006/main">
-              <a:ext uri="{FF2B5EF4-FFF2-40B4-BE49-F238E27FC236}">
-                <a16:creationId xmlns:a16="http://schemas.microsoft.com/office/drawing/2014/main" id="{FD9A2864-D2E7-4D66-A7E6-A1733FD4D267}"/>
-              </a:ext>
-            </a:extLst>
-          </p:cNvPr>
-          <p:cNvSpPr>
-            <a:spLocks xmlns:a="http://schemas.openxmlformats.org/drawingml/2006/main" noGrp="1"/>
-          </p:cNvSpPr>
-          <p:nvPr/>
-        </p:nvSpPr>
-        <p:spPr>
-          <a:xfrm xmlns:a="http://schemas.openxmlformats.org/drawingml/2006/main">
-            <a:off x="838200" y="4229100"/>
-            <a:ext cx="4857750" cy="514350"/>
-          </a:xfrm>
-          <a:prstGeom xmlns:a="http://schemas.openxmlformats.org/drawingml/2006/main" prst="rect">
-            <a:avLst/>
-          </a:prstGeom>
-        </p:spPr>
-        <p:txBody>
-          <a:bodyPr xmlns:a="http://schemas.openxmlformats.org/drawingml/2006/main" wrap="square" lIns="0" tIns="0" rIns="0" bIns="0" anchor="t">
-            <a:noAutofit/>
-          </a:bodyPr>
-          <a:lstStyle xmlns:a="http://schemas.openxmlformats.org/drawingml/2006/main"/>
-          <a:p xmlns:a="http://schemas.openxmlformats.org/drawingml/2006/main">
-            <a:pPr algn="l">
-              <a:defRPr sz="1575" b="0" i="0">
-                <a:solidFill>
-                  <a:srgbClr val="667587"/>
-                </a:solidFill>
-                <a:latin typeface="Arial"/>
-                <a:ea typeface="Arial"/>
-                <a:cs typeface="Arial"/>
-              </a:defRPr>
-            </a:pPr>
-            <a:r>
-              <a:t>lokale Angebotsdaten außerhalb der 37 GREIX-Märkte</a:t>
-            </a:r>
-          </a:p>
-        </p:txBody>
-      </p:sp>
-      <p:sp>
-        <p:nvSpPr>
-          <p:cNvPr id="21" name="mit-dot-2">
-            <a:extLst xmlns:a="http://schemas.openxmlformats.org/drawingml/2006/main">
-              <a:ext uri="{FF2B5EF4-FFF2-40B4-BE49-F238E27FC236}">
-                <a16:creationId xmlns:a16="http://schemas.microsoft.com/office/drawing/2014/main" id="{DBB39BF6-D06F-4604-9961-5696EB5ECD5D}"/>
-              </a:ext>
-            </a:extLst>
-          </p:cNvPr>
-          <p:cNvSpPr>
-            <a:spLocks xmlns:a="http://schemas.openxmlformats.org/drawingml/2006/main" noGrp="1"/>
-          </p:cNvSpPr>
-          <p:nvPr/>
-        </p:nvSpPr>
-        <p:spPr>
-          <a:xfrm xmlns:a="http://schemas.openxmlformats.org/drawingml/2006/main">
-            <a:off x="6705600" y="4305300"/>
-            <a:ext cx="171450" cy="171450"/>
-          </a:xfrm>
-          <a:prstGeom xmlns:a="http://schemas.openxmlformats.org/drawingml/2006/main" prst="ellipse">
-            <a:avLst/>
-          </a:prstGeom>
-          <a:solidFill xmlns:a="http://schemas.openxmlformats.org/drawingml/2006/main">
-            <a:srgbClr val="0F7B62"/>
-          </a:solidFill>
-          <a:ln xmlns:a="http://schemas.openxmlformats.org/drawingml/2006/main" w="0">
-            <a:solidFill>
-              <a:srgbClr val="0F7B62"/>
-            </a:solidFill>
-            <a:prstDash val="solid"/>
-          </a:ln>
-        </p:spPr>
-      </p:sp>
-      <p:sp>
-        <p:nvSpPr>
-          <p:cNvPr id="22" name="mit-copy-2">
-            <a:extLst xmlns:a="http://schemas.openxmlformats.org/drawingml/2006/main">
-              <a:ext uri="{FF2B5EF4-FFF2-40B4-BE49-F238E27FC236}">
-                <a16:creationId xmlns:a16="http://schemas.microsoft.com/office/drawing/2014/main" id="{DEA41A41-08DC-484A-B0EF-4580F6645CF1}"/>
-              </a:ext>
-            </a:extLst>
-          </p:cNvPr>
-          <p:cNvSpPr>
-            <a:spLocks xmlns:a="http://schemas.openxmlformats.org/drawingml/2006/main" noGrp="1"/>
-          </p:cNvSpPr>
-          <p:nvPr/>
-        </p:nvSpPr>
-        <p:spPr>
-          <a:xfrm xmlns:a="http://schemas.openxmlformats.org/drawingml/2006/main">
-            <a:off x="7048500" y="4229100"/>
-            <a:ext cx="4286250" cy="514350"/>
-          </a:xfrm>
-          <a:prstGeom xmlns:a="http://schemas.openxmlformats.org/drawingml/2006/main" prst="rect">
-            <a:avLst/>
-          </a:prstGeom>
-        </p:spPr>
-        <p:txBody>
-          <a:bodyPr xmlns:a="http://schemas.openxmlformats.org/drawingml/2006/main" wrap="square" lIns="0" tIns="0" rIns="0" bIns="0" anchor="t">
-            <a:noAutofit/>
-          </a:bodyPr>
-          <a:lstStyle xmlns:a="http://schemas.openxmlformats.org/drawingml/2006/main"/>
-          <a:p xmlns:a="http://schemas.openxmlformats.org/drawingml/2006/main">
-            <a:pPr algn="l">
-              <a:defRPr sz="1575" b="0" i="0">
-                <a:solidFill>
-                  <a:srgbClr val="667587"/>
-                </a:solidFill>
-                <a:latin typeface="Arial"/>
-                <a:ea typeface="Arial"/>
-                <a:cs typeface="Arial"/>
-              </a:defRPr>
-            </a:pPr>
-            <a:r>
-              <a:t>empirische 86,8 % statt nominale 90 % anzeigen</a:t>
-            </a:r>
-          </a:p>
-        </p:txBody>
-      </p:sp>
-      <p:sp>
-        <p:nvSpPr>
-          <p:cNvPr id="23" name="limit-dot-3">
-            <a:extLst xmlns:a="http://schemas.openxmlformats.org/drawingml/2006/main">
-              <a:ext uri="{FF2B5EF4-FFF2-40B4-BE49-F238E27FC236}">
-                <a16:creationId xmlns:a16="http://schemas.microsoft.com/office/drawing/2014/main" id="{E1065956-2E0E-4DBC-BD7C-899E8FCDA5E7}"/>
-              </a:ext>
-            </a:extLst>
-          </p:cNvPr>
-          <p:cNvSpPr>
-            <a:spLocks xmlns:a="http://schemas.openxmlformats.org/drawingml/2006/main" noGrp="1"/>
-          </p:cNvSpPr>
-          <p:nvPr/>
-        </p:nvSpPr>
-        <p:spPr>
-          <a:xfrm xmlns:a="http://schemas.openxmlformats.org/drawingml/2006/main">
-            <a:off x="495300" y="4991100"/>
-            <a:ext cx="171450" cy="171450"/>
-          </a:xfrm>
-          <a:prstGeom xmlns:a="http://schemas.openxmlformats.org/drawingml/2006/main" prst="ellipse">
-            <a:avLst/>
-          </a:prstGeom>
-          <a:solidFill xmlns:a="http://schemas.openxmlformats.org/drawingml/2006/main">
-            <a:srgbClr val="E85D3F"/>
-          </a:solidFill>
-          <a:ln xmlns:a="http://schemas.openxmlformats.org/drawingml/2006/main" w="0">
-            <a:solidFill>
-              <a:srgbClr val="E85D3F"/>
-            </a:solidFill>
-            <a:prstDash val="solid"/>
-          </a:ln>
-        </p:spPr>
-      </p:sp>
-      <p:sp>
-        <p:nvSpPr>
-          <p:cNvPr id="24" name="limit-copy-3">
-            <a:extLst xmlns:a="http://schemas.openxmlformats.org/drawingml/2006/main">
-              <a:ext uri="{FF2B5EF4-FFF2-40B4-BE49-F238E27FC236}">
-                <a16:creationId xmlns:a16="http://schemas.microsoft.com/office/drawing/2014/main" id="{4AF22B09-425D-4468-B63E-058F57B68285}"/>
-              </a:ext>
-            </a:extLst>
-          </p:cNvPr>
-          <p:cNvSpPr>
-            <a:spLocks xmlns:a="http://schemas.openxmlformats.org/drawingml/2006/main" noGrp="1"/>
-          </p:cNvSpPr>
-          <p:nvPr/>
-        </p:nvSpPr>
-        <p:spPr>
-          <a:xfrm xmlns:a="http://schemas.openxmlformats.org/drawingml/2006/main">
-            <a:off x="838200" y="4914900"/>
-            <a:ext cx="4857750" cy="514350"/>
-          </a:xfrm>
-          <a:prstGeom xmlns:a="http://schemas.openxmlformats.org/drawingml/2006/main" prst="rect">
-            <a:avLst/>
-          </a:prstGeom>
-        </p:spPr>
-        <p:txBody>
-          <a:bodyPr xmlns:a="http://schemas.openxmlformats.org/drawingml/2006/main" wrap="square" lIns="0" tIns="0" rIns="0" bIns="0" anchor="t">
-            <a:noAutofit/>
-          </a:bodyPr>
-          <a:lstStyle xmlns:a="http://schemas.openxmlformats.org/drawingml/2006/main"/>
-          <a:p xmlns:a="http://schemas.openxmlformats.org/drawingml/2006/main">
-            <a:pPr algn="l">
-              <a:defRPr sz="1575" b="0" i="0">
-                <a:solidFill>
-                  <a:srgbClr val="667587"/>
-                </a:solidFill>
-                <a:latin typeface="Arial"/>
-                <a:ea typeface="Arial"/>
-                <a:cs typeface="Arial"/>
-              </a:defRPr>
-            </a:pPr>
-            <a:r>
-              <a:t>stabile 90-%-Coverage bei räumlichem Shift</a:t>
-            </a:r>
-          </a:p>
-        </p:txBody>
-      </p:sp>
-      <p:sp>
-        <p:nvSpPr>
-          <p:cNvPr id="25" name="mit-dot-3">
-            <a:extLst xmlns:a="http://schemas.openxmlformats.org/drawingml/2006/main">
-              <a:ext uri="{FF2B5EF4-FFF2-40B4-BE49-F238E27FC236}">
-                <a16:creationId xmlns:a16="http://schemas.microsoft.com/office/drawing/2014/main" id="{D1BA2AFD-3626-4EBE-AA4E-4B1BEF48B8F9}"/>
-              </a:ext>
-            </a:extLst>
-          </p:cNvPr>
-          <p:cNvSpPr>
-            <a:spLocks xmlns:a="http://schemas.openxmlformats.org/drawingml/2006/main" noGrp="1"/>
-          </p:cNvSpPr>
-          <p:nvPr/>
-        </p:nvSpPr>
-        <p:spPr>
-          <a:xfrm xmlns:a="http://schemas.openxmlformats.org/drawingml/2006/main">
-            <a:off x="6705600" y="4991100"/>
-            <a:ext cx="171450" cy="171450"/>
-          </a:xfrm>
-          <a:prstGeom xmlns:a="http://schemas.openxmlformats.org/drawingml/2006/main" prst="ellipse">
-            <a:avLst/>
-          </a:prstGeom>
-          <a:solidFill xmlns:a="http://schemas.openxmlformats.org/drawingml/2006/main">
-            <a:srgbClr val="0F7B62"/>
-          </a:solidFill>
-          <a:ln xmlns:a="http://schemas.openxmlformats.org/drawingml/2006/main" w="0">
-            <a:solidFill>
-              <a:srgbClr val="0F7B62"/>
-            </a:solidFill>
-            <a:prstDash val="solid"/>
-          </a:ln>
-        </p:spPr>
-      </p:sp>
-      <p:sp>
-        <p:nvSpPr>
-          <p:cNvPr id="26" name="mit-copy-3">
-            <a:extLst xmlns:a="http://schemas.openxmlformats.org/drawingml/2006/main">
-              <a:ext uri="{FF2B5EF4-FFF2-40B4-BE49-F238E27FC236}">
-                <a16:creationId xmlns:a16="http://schemas.microsoft.com/office/drawing/2014/main" id="{D17182A3-0D2D-4DF2-A106-4F150423EBC3}"/>
-              </a:ext>
-            </a:extLst>
-          </p:cNvPr>
-          <p:cNvSpPr>
-            <a:spLocks xmlns:a="http://schemas.openxmlformats.org/drawingml/2006/main" noGrp="1"/>
-          </p:cNvSpPr>
-          <p:nvPr/>
-        </p:nvSpPr>
-        <p:spPr>
-          <a:xfrm xmlns:a="http://schemas.openxmlformats.org/drawingml/2006/main">
-            <a:off x="7048500" y="4914900"/>
-            <a:ext cx="4286250" cy="514350"/>
-          </a:xfrm>
-          <a:prstGeom xmlns:a="http://schemas.openxmlformats.org/drawingml/2006/main" prst="rect">
-            <a:avLst/>
-          </a:prstGeom>
-        </p:spPr>
-        <p:txBody>
-          <a:bodyPr xmlns:a="http://schemas.openxmlformats.org/drawingml/2006/main" wrap="square" lIns="0" tIns="0" rIns="0" bIns="0" anchor="t">
-            <a:noAutofit/>
-          </a:bodyPr>
-          <a:lstStyle xmlns:a="http://schemas.openxmlformats.org/drawingml/2006/main"/>
-          <a:p xmlns:a="http://schemas.openxmlformats.org/drawingml/2006/main">
-            <a:pPr algn="l">
-              <a:defRPr sz="1575" b="0" i="0">
-                <a:solidFill>
-                  <a:srgbClr val="667587"/>
-                </a:solidFill>
-                <a:latin typeface="Arial"/>
-                <a:ea typeface="Arial"/>
-                <a:cs typeface="Arial"/>
-              </a:defRPr>
-            </a:pPr>
-            <a:r>
-              <a:t>Bias, Datenschutz und Missbrauch im Risk Assessment</a:t>
-            </a:r>
-          </a:p>
-        </p:txBody>
-      </p:sp>
-      <p:sp>
-        <p:nvSpPr>
-          <p:cNvPr id="27" name="not-advice">
-            <a:extLst xmlns:a="http://schemas.openxmlformats.org/drawingml/2006/main">
-              <a:ext uri="{FF2B5EF4-FFF2-40B4-BE49-F238E27FC236}">
-                <a16:creationId xmlns:a16="http://schemas.microsoft.com/office/drawing/2014/main" id="{D8247965-B413-4039-8BA9-83240F1781FA}"/>
-              </a:ext>
-            </a:extLst>
-          </p:cNvPr>
-          <p:cNvSpPr>
-            <a:spLocks xmlns:a="http://schemas.openxmlformats.org/drawingml/2006/main" noGrp="1"/>
-          </p:cNvSpPr>
-          <p:nvPr/>
-        </p:nvSpPr>
-        <p:spPr>
-          <a:xfrm xmlns:a="http://schemas.openxmlformats.org/drawingml/2006/main">
-            <a:off x="457200" y="5791200"/>
-            <a:ext cx="11049000" cy="419100"/>
-          </a:xfrm>
-          <a:prstGeom xmlns:a="http://schemas.openxmlformats.org/drawingml/2006/main" prst="rect">
-            <a:avLst/>
-          </a:prstGeom>
-          <a:solidFill xmlns:a="http://schemas.openxmlformats.org/drawingml/2006/main">
-            <a:srgbClr val="FFFFFF"/>
-          </a:solidFill>
-          <a:ln xmlns:a="http://schemas.openxmlformats.org/drawingml/2006/main" w="0">
-            <a:solidFill>
-              <a:srgbClr val="FFFFFF"/>
-            </a:solidFill>
-            <a:prstDash val="solid"/>
-          </a:ln>
-        </p:spPr>
-      </p:sp>
-      <p:sp>
-        <p:nvSpPr>
-          <p:cNvPr id="28" name="not-advice-text">
-            <a:extLst xmlns:a="http://schemas.openxmlformats.org/drawingml/2006/main">
-              <a:ext uri="{FF2B5EF4-FFF2-40B4-BE49-F238E27FC236}">
-                <a16:creationId xmlns:a16="http://schemas.microsoft.com/office/drawing/2014/main" id="{DD9BC2A2-4C9F-4C0A-B305-B70F79AD05EB}"/>
-              </a:ext>
-            </a:extLst>
-          </p:cNvPr>
-          <p:cNvSpPr>
-            <a:spLocks xmlns:a="http://schemas.openxmlformats.org/drawingml/2006/main" noGrp="1"/>
-          </p:cNvSpPr>
-          <p:nvPr/>
-        </p:nvSpPr>
-        <p:spPr>
-          <a:xfrm xmlns:a="http://schemas.openxmlformats.org/drawingml/2006/main">
-            <a:off x="666750" y="5886450"/>
-            <a:ext cx="10629900" cy="247650"/>
-          </a:xfrm>
-          <a:prstGeom xmlns:a="http://schemas.openxmlformats.org/drawingml/2006/main" prst="rect">
-            <a:avLst/>
-          </a:prstGeom>
-        </p:spPr>
-        <p:txBody>
-          <a:bodyPr xmlns:a="http://schemas.openxmlformats.org/drawingml/2006/main" wrap="square" lIns="0" tIns="0" rIns="0" bIns="0" anchor="t">
-            <a:noAutofit/>
-          </a:bodyPr>
-          <a:lstStyle xmlns:a="http://schemas.openxmlformats.org/drawingml/2006/main"/>
-          <a:p xmlns:a="http://schemas.openxmlformats.org/drawingml/2006/main">
-            <a:pPr algn="ctr">
-              <a:defRPr sz="1425" b="1" i="0">
-                <a:solidFill>
-                  <a:srgbClr val="102138"/>
-                </a:solidFill>
-                <a:latin typeface="Arial"/>
-                <a:ea typeface="Arial"/>
-                <a:cs typeface="Arial"/>
-              </a:defRPr>
-            </a:pPr>
-            <a:r>
-              <a:t>Kein amtlicher Mietspiegel · keine Rechtsberatung · keine Bonitäts- oder Vermieterentscheidung</a:t>
+              <a:buNone/>
+              <a:defRPr sz="1275" b="0" i="0">
+                <a:solidFill>
+                  <a:srgbClr val="CFE8DF"/>
+                </a:solidFill>
+                <a:latin typeface="Arial"/>
+                <a:ea typeface="Arial"/>
+                <a:cs typeface="Arial"/>
+              </a:defRPr>
+            </a:pPr>
+            <a:r>
+              <a:t>Der Angebotsmarkt aktualisiert die App, ohne den Zensus 2022 umzudeuten.</a:t>
             </a:r>
           </a:p>
         </p:txBody>
@@ -4998,7 +4480,7 @@
     </p:spTree>
     <p:extLst>
       <p:ext uri="{BB962C8B-B14F-4D97-AF65-F5344CB8AC3E}">
-        <p14:creationId xmlns:p14="http://schemas.microsoft.com/office/powerpoint/2010/main" val="541892130"/>
+        <p14:creationId xmlns:p14="http://schemas.microsoft.com/office/powerpoint/2010/main" val="140045120"/>
       </p:ext>
     </p:extLst>
   </p:cSld>
@@ -5011,7 +4493,7 @@
     <p:bg>
       <p:bgPr>
         <a:solidFill xmlns:a="http://schemas.openxmlformats.org/drawingml/2006/main">
-          <a:srgbClr val="102138"/>
+          <a:srgbClr val="F7F9F8"/>
         </a:solidFill>
       </p:bgPr>
     </p:bg>
@@ -5026,180 +4508,121 @@
       </p:grpSpPr>
       <p:sp>
         <p:nvSpPr>
-          <p:cNvPr id="7" name="conclusion-kicker">
-            <a:extLst xmlns:a="http://schemas.openxmlformats.org/drawingml/2006/main">
-              <a:ext uri="{FF2B5EF4-FFF2-40B4-BE49-F238E27FC236}">
-                <a16:creationId xmlns:a16="http://schemas.microsoft.com/office/drawing/2014/main" id="{A9783E21-7A02-4E63-BEE7-7D97DBAC251C}"/>
-              </a:ext>
-            </a:extLst>
-          </p:cNvPr>
-          <p:cNvSpPr>
-            <a:spLocks xmlns:a="http://schemas.openxmlformats.org/drawingml/2006/main" noGrp="1"/>
-          </p:cNvSpPr>
-          <p:nvPr/>
-        </p:nvSpPr>
-        <p:spPr>
-          <a:xfrm xmlns:a="http://schemas.openxmlformats.org/drawingml/2006/main">
-            <a:off x="533400" y="457200"/>
-            <a:ext cx="1905000" cy="323850"/>
-          </a:xfrm>
-          <a:prstGeom xmlns:a="http://schemas.openxmlformats.org/drawingml/2006/main" prst="rect">
-            <a:avLst/>
-          </a:prstGeom>
-        </p:spPr>
-        <p:txBody>
-          <a:bodyPr xmlns:a="http://schemas.openxmlformats.org/drawingml/2006/main" wrap="square" lIns="0" tIns="0" rIns="0" bIns="0" anchor="t">
-            <a:noAutofit/>
-          </a:bodyPr>
-          <a:lstStyle xmlns:a="http://schemas.openxmlformats.org/drawingml/2006/main"/>
-          <a:p xmlns:a="http://schemas.openxmlformats.org/drawingml/2006/main">
-            <a:pPr algn="l">
-              <a:defRPr sz="1500" b="1" i="0">
-                <a:solidFill>
-                  <a:srgbClr val="71E2B7"/>
-                </a:solidFill>
-                <a:latin typeface="Arial"/>
-                <a:ea typeface="Arial"/>
-                <a:cs typeface="Arial"/>
-              </a:defRPr>
-            </a:pPr>
-            <a:r>
-              <a:t>FAZIT</a:t>
-            </a:r>
-          </a:p>
-        </p:txBody>
-      </p:sp>
-      <p:sp>
-        <p:nvSpPr>
-          <p:cNvPr id="2" name="conclusion-title">
-            <a:extLst xmlns:a="http://schemas.openxmlformats.org/drawingml/2006/main">
-              <a:ext uri="{FF2B5EF4-FFF2-40B4-BE49-F238E27FC236}">
-                <a16:creationId xmlns:a16="http://schemas.microsoft.com/office/drawing/2014/main" id="{12A9F7B3-107F-4DA8-BA91-CF1A94295C6F}"/>
-              </a:ext>
-            </a:extLst>
-          </p:cNvPr>
-          <p:cNvSpPr>
-            <a:spLocks xmlns:a="http://schemas.openxmlformats.org/drawingml/2006/main" noGrp="1"/>
-          </p:cNvSpPr>
-          <p:nvPr/>
-        </p:nvSpPr>
-        <p:spPr>
-          <a:xfrm xmlns:a="http://schemas.openxmlformats.org/drawingml/2006/main">
-            <a:off x="533400" y="1543050"/>
-            <a:ext cx="10668000" cy="2095500"/>
-          </a:xfrm>
-          <a:prstGeom xmlns:a="http://schemas.openxmlformats.org/drawingml/2006/main" prst="rect">
-            <a:avLst/>
-          </a:prstGeom>
-        </p:spPr>
-        <p:txBody>
-          <a:bodyPr xmlns:a="http://schemas.openxmlformats.org/drawingml/2006/main" wrap="square" lIns="0" tIns="0" rIns="0" bIns="0" anchor="t">
-            <a:noAutofit/>
-          </a:bodyPr>
-          <a:lstStyle xmlns:a="http://schemas.openxmlformats.org/drawingml/2006/main"/>
-          <a:p xmlns:a="http://schemas.openxmlformats.org/drawingml/2006/main">
-            <a:pPr algn="l">
-              <a:defRPr sz="5400" b="1" i="0">
-                <a:solidFill>
-                  <a:srgbClr val="FFFFFF"/>
-                </a:solidFill>
-                <a:latin typeface="Arial"/>
-                <a:ea typeface="Arial"/>
-                <a:cs typeface="Arial"/>
-              </a:defRPr>
-            </a:pPr>
-            <a:r>
-              <a:t>Nicht eine „faire“ Miete.
-Drei sauber getrennte Realitäten.</a:t>
-            </a:r>
-          </a:p>
-        </p:txBody>
-      </p:sp>
-      <p:sp>
-        <p:nvSpPr>
-          <p:cNvPr id="3" name="conclusion-proof">
-            <a:extLst xmlns:a="http://schemas.openxmlformats.org/drawingml/2006/main">
-              <a:ext uri="{FF2B5EF4-FFF2-40B4-BE49-F238E27FC236}">
-                <a16:creationId xmlns:a16="http://schemas.microsoft.com/office/drawing/2014/main" id="{426EFC8B-986D-4707-814A-5F17FA452352}"/>
-              </a:ext>
-            </a:extLst>
-          </p:cNvPr>
-          <p:cNvSpPr>
-            <a:spLocks xmlns:a="http://schemas.openxmlformats.org/drawingml/2006/main" noGrp="1"/>
-          </p:cNvSpPr>
-          <p:nvPr/>
-        </p:nvSpPr>
-        <p:spPr>
-          <a:xfrm xmlns:a="http://schemas.openxmlformats.org/drawingml/2006/main">
-            <a:off x="533400" y="4095750"/>
-            <a:ext cx="10668000" cy="723900"/>
-          </a:xfrm>
-          <a:prstGeom xmlns:a="http://schemas.openxmlformats.org/drawingml/2006/main" prst="rect">
-            <a:avLst/>
-          </a:prstGeom>
-        </p:spPr>
-        <p:txBody>
-          <a:bodyPr xmlns:a="http://schemas.openxmlformats.org/drawingml/2006/main" wrap="square" lIns="0" tIns="0" rIns="0" bIns="0" anchor="t">
-            <a:noAutofit/>
-          </a:bodyPr>
-          <a:lstStyle xmlns:a="http://schemas.openxmlformats.org/drawingml/2006/main"/>
-          <a:p xmlns:a="http://schemas.openxmlformats.org/drawingml/2006/main">
-            <a:pPr algn="l">
-              <a:defRPr sz="1800" b="0" i="0">
-                <a:solidFill>
-                  <a:srgbClr val="D7DEE8"/>
-                </a:solidFill>
-                <a:latin typeface="Arial"/>
-                <a:ea typeface="Arial"/>
-                <a:cs typeface="Arial"/>
-              </a:defRPr>
-            </a:pPr>
-            <a:r>
-              <a:t>2,06 Mio. Modellzeilen · räumlicher Holdout · 38,3 % Baseline-Verbesserung · transparente 86,8 % Coverage</a:t>
-            </a:r>
-          </a:p>
-        </p:txBody>
-      </p:sp>
-      <p:cxnSp>
-        <p:nvCxnSpPr>
-          <p:cNvPr id="10" name="conclusion-rule"/>
-          <p:cNvCxnSpPr/>
-          <p:nvPr/>
-        </p:nvCxnSpPr>
-        <p:spPr>
-          <a:xfrm xmlns:a="http://schemas.openxmlformats.org/drawingml/2006/main">
-            <a:off x="533400" y="5295900"/>
-            <a:ext cx="10668000" cy="286"/>
-          </a:xfrm>
-          <a:prstGeom xmlns:a="http://schemas.openxmlformats.org/drawingml/2006/main" prst="straightConnector1">
-            <a:avLst/>
-          </a:prstGeom>
-          <a:ln xmlns:a="http://schemas.openxmlformats.org/drawingml/2006/main" w="19050">
+          <p:cNvPr id="15" name="header-10">
+            <a:extLst xmlns:a="http://schemas.openxmlformats.org/drawingml/2006/main">
+              <a:ext uri="{FF2B5EF4-FFF2-40B4-BE49-F238E27FC236}">
+                <a16:creationId xmlns:a16="http://schemas.microsoft.com/office/drawing/2014/main" id="{82D220AE-A37C-40D3-B430-DD3AC338E8AB}"/>
+              </a:ext>
+            </a:extLst>
+          </p:cNvPr>
+          <p:cNvSpPr>
+            <a:spLocks xmlns:a="http://schemas.openxmlformats.org/drawingml/2006/main" noGrp="1"/>
+          </p:cNvSpPr>
+          <p:nvPr/>
+        </p:nvSpPr>
+        <p:spPr>
+          <a:xfrm xmlns:a="http://schemas.openxmlformats.org/drawingml/2006/main">
+            <a:off x="0" y="0"/>
+            <a:ext cx="12192000" cy="1066800"/>
+          </a:xfrm>
+          <a:prstGeom xmlns:a="http://schemas.openxmlformats.org/drawingml/2006/main" prst="rect">
+            <a:avLst/>
+          </a:prstGeom>
+          <a:solidFill xmlns:a="http://schemas.openxmlformats.org/drawingml/2006/main">
+            <a:srgbClr val="0F2134"/>
+          </a:solidFill>
+          <a:ln xmlns:a="http://schemas.openxmlformats.org/drawingml/2006/main" w="0">
             <a:solidFill>
-              <a:srgbClr val="3B4B60"/>
+              <a:srgbClr val="0F2134"/>
             </a:solidFill>
             <a:prstDash val="solid"/>
           </a:ln>
         </p:spPr>
-      </p:cxnSp>
-      <p:sp>
-        <p:nvSpPr>
-          <p:cNvPr id="5" name="conclusion-close">
-            <a:extLst xmlns:a="http://schemas.openxmlformats.org/drawingml/2006/main">
-              <a:ext uri="{FF2B5EF4-FFF2-40B4-BE49-F238E27FC236}">
-                <a16:creationId xmlns:a16="http://schemas.microsoft.com/office/drawing/2014/main" id="{8B624221-185C-4722-8C76-79EA142DE066}"/>
-              </a:ext>
-            </a:extLst>
-          </p:cNvPr>
-          <p:cNvSpPr>
-            <a:spLocks xmlns:a="http://schemas.openxmlformats.org/drawingml/2006/main" noGrp="1"/>
-          </p:cNvSpPr>
-          <p:nvPr/>
-        </p:nvSpPr>
-        <p:spPr>
-          <a:xfrm xmlns:a="http://schemas.openxmlformats.org/drawingml/2006/main">
-            <a:off x="533400" y="5562600"/>
-            <a:ext cx="9906000" cy="571500"/>
+      </p:sp>
+      <p:sp>
+        <p:nvSpPr>
+          <p:cNvPr id="2" name="header-teal-10">
+            <a:extLst xmlns:a="http://schemas.openxmlformats.org/drawingml/2006/main">
+              <a:ext uri="{FF2B5EF4-FFF2-40B4-BE49-F238E27FC236}">
+                <a16:creationId xmlns:a16="http://schemas.microsoft.com/office/drawing/2014/main" id="{DAC24D5E-7B44-43F7-8880-EC321B193C33}"/>
+              </a:ext>
+            </a:extLst>
+          </p:cNvPr>
+          <p:cNvSpPr>
+            <a:spLocks xmlns:a="http://schemas.openxmlformats.org/drawingml/2006/main" noGrp="1"/>
+          </p:cNvSpPr>
+          <p:nvPr/>
+        </p:nvSpPr>
+        <p:spPr>
+          <a:xfrm xmlns:a="http://schemas.openxmlformats.org/drawingml/2006/main">
+            <a:off x="9525000" y="0"/>
+            <a:ext cx="2667000" cy="1066800"/>
+          </a:xfrm>
+          <a:prstGeom xmlns:a="http://schemas.openxmlformats.org/drawingml/2006/main" prst="rect">
+            <a:avLst/>
+          </a:prstGeom>
+          <a:solidFill xmlns:a="http://schemas.openxmlformats.org/drawingml/2006/main">
+            <a:srgbClr val="174F50"/>
+          </a:solidFill>
+          <a:ln xmlns:a="http://schemas.openxmlformats.org/drawingml/2006/main" w="0">
+            <a:solidFill>
+              <a:srgbClr val="174F50"/>
+            </a:solidFill>
+            <a:prstDash val="solid"/>
+          </a:ln>
+        </p:spPr>
+      </p:sp>
+      <p:sp>
+        <p:nvSpPr>
+          <p:cNvPr id="3" name="header-accent-10">
+            <a:extLst xmlns:a="http://schemas.openxmlformats.org/drawingml/2006/main">
+              <a:ext uri="{FF2B5EF4-FFF2-40B4-BE49-F238E27FC236}">
+                <a16:creationId xmlns:a16="http://schemas.microsoft.com/office/drawing/2014/main" id="{208A45C7-8610-4AC5-AD07-61D42845AD86}"/>
+              </a:ext>
+            </a:extLst>
+          </p:cNvPr>
+          <p:cNvSpPr>
+            <a:spLocks xmlns:a="http://schemas.openxmlformats.org/drawingml/2006/main" noGrp="1"/>
+          </p:cNvSpPr>
+          <p:nvPr/>
+        </p:nvSpPr>
+        <p:spPr>
+          <a:xfrm xmlns:a="http://schemas.openxmlformats.org/drawingml/2006/main">
+            <a:off x="0" y="0"/>
+            <a:ext cx="95250" cy="1066800"/>
+          </a:xfrm>
+          <a:prstGeom xmlns:a="http://schemas.openxmlformats.org/drawingml/2006/main" prst="rect">
+            <a:avLst/>
+          </a:prstGeom>
+          <a:solidFill xmlns:a="http://schemas.openxmlformats.org/drawingml/2006/main">
+            <a:srgbClr val="19C99A"/>
+          </a:solidFill>
+          <a:ln xmlns:a="http://schemas.openxmlformats.org/drawingml/2006/main" w="0">
+            <a:solidFill>
+              <a:srgbClr val="19C99A"/>
+            </a:solidFill>
+            <a:prstDash val="solid"/>
+          </a:ln>
+        </p:spPr>
+      </p:sp>
+      <p:sp>
+        <p:nvSpPr>
+          <p:cNvPr id="4" name="title-10">
+            <a:extLst xmlns:a="http://schemas.openxmlformats.org/drawingml/2006/main">
+              <a:ext uri="{FF2B5EF4-FFF2-40B4-BE49-F238E27FC236}">
+                <a16:creationId xmlns:a16="http://schemas.microsoft.com/office/drawing/2014/main" id="{0B954E67-B918-4E55-A44B-D12546C1246D}"/>
+              </a:ext>
+            </a:extLst>
+          </p:cNvPr>
+          <p:cNvSpPr>
+            <a:spLocks xmlns:a="http://schemas.openxmlformats.org/drawingml/2006/main" noGrp="1"/>
+          </p:cNvSpPr>
+          <p:nvPr/>
+        </p:nvSpPr>
+        <p:spPr>
+          <a:xfrm xmlns:a="http://schemas.openxmlformats.org/drawingml/2006/main">
+            <a:off x="457200" y="285750"/>
+            <a:ext cx="10763250" cy="647700"/>
           </a:xfrm>
           <a:prstGeom xmlns:a="http://schemas.openxmlformats.org/drawingml/2006/main" prst="rect">
             <a:avLst/>
@@ -5212,39 +4635,86 @@
           <a:lstStyle xmlns:a="http://schemas.openxmlformats.org/drawingml/2006/main"/>
           <a:p xmlns:a="http://schemas.openxmlformats.org/drawingml/2006/main">
             <a:pPr algn="l">
-              <a:defRPr sz="1950" b="1" i="0">
-                <a:solidFill>
-                  <a:srgbClr val="71E2B7"/>
-                </a:solidFill>
-                <a:latin typeface="Arial"/>
-                <a:ea typeface="Arial"/>
-                <a:cs typeface="Arial"/>
-              </a:defRPr>
-            </a:pPr>
-            <a:r>
-              <a:t>Der echte Mehrwert ist nicht die Prognose allein – sondern eine nachvollziehbare Umzugsentscheidung.</a:t>
-            </a:r>
-          </a:p>
-        </p:txBody>
-      </p:sp>
-      <p:sp>
-        <p:nvSpPr>
-          <p:cNvPr id="6" name="conclusion-page">
-            <a:extLst xmlns:a="http://schemas.openxmlformats.org/drawingml/2006/main">
-              <a:ext uri="{FF2B5EF4-FFF2-40B4-BE49-F238E27FC236}">
-                <a16:creationId xmlns:a16="http://schemas.microsoft.com/office/drawing/2014/main" id="{FD6BCA4C-6701-4E94-94B4-47B92254C342}"/>
-              </a:ext>
-            </a:extLst>
-          </p:cNvPr>
-          <p:cNvSpPr>
-            <a:spLocks xmlns:a="http://schemas.openxmlformats.org/drawingml/2006/main" noGrp="1"/>
-          </p:cNvSpPr>
-          <p:nvPr/>
-        </p:nvSpPr>
-        <p:spPr>
-          <a:xfrm xmlns:a="http://schemas.openxmlformats.org/drawingml/2006/main">
-            <a:off x="11049000" y="6381750"/>
-            <a:ext cx="457200" cy="228600"/>
+              <a:buNone/>
+              <a:defRPr sz="3225" b="1" i="0">
+                <a:solidFill>
+                  <a:srgbClr val="FFFFFF"/>
+                </a:solidFill>
+                <a:latin typeface="Arial"/>
+                <a:ea typeface="Arial"/>
+                <a:cs typeface="Arial"/>
+              </a:defRPr>
+            </a:pPr>
+            <a:r>
+              <a:t>K · Methodik: Modellgüte, Quellen und Grenzen</a:t>
+            </a:r>
+          </a:p>
+        </p:txBody>
+      </p:sp>
+      <p:sp>
+        <p:nvSpPr>
+          <p:cNvPr id="5" name="source-10">
+            <a:extLst xmlns:a="http://schemas.openxmlformats.org/drawingml/2006/main">
+              <a:ext uri="{FF2B5EF4-FFF2-40B4-BE49-F238E27FC236}">
+                <a16:creationId xmlns:a16="http://schemas.microsoft.com/office/drawing/2014/main" id="{BBBFC246-79F3-405A-A68B-D1C942FE6792}"/>
+              </a:ext>
+            </a:extLst>
+          </p:cNvPr>
+          <p:cNvSpPr>
+            <a:spLocks xmlns:a="http://schemas.openxmlformats.org/drawingml/2006/main" noGrp="1"/>
+          </p:cNvSpPr>
+          <p:nvPr/>
+        </p:nvSpPr>
+        <p:spPr>
+          <a:xfrm xmlns:a="http://schemas.openxmlformats.org/drawingml/2006/main">
+            <a:off x="457200" y="6429375"/>
+            <a:ext cx="10287000" cy="228600"/>
+          </a:xfrm>
+          <a:prstGeom xmlns:a="http://schemas.openxmlformats.org/drawingml/2006/main" prst="rect">
+            <a:avLst/>
+          </a:prstGeom>
+        </p:spPr>
+        <p:txBody>
+          <a:bodyPr xmlns:a="http://schemas.openxmlformats.org/drawingml/2006/main" wrap="square" lIns="0" tIns="0" rIns="0" bIns="0" anchor="t">
+            <a:noAutofit/>
+          </a:bodyPr>
+          <a:lstStyle xmlns:a="http://schemas.openxmlformats.org/drawingml/2006/main"/>
+          <a:p xmlns:a="http://schemas.openxmlformats.org/drawingml/2006/main">
+            <a:pPr algn="l">
+              <a:buNone/>
+              <a:defRPr sz="900" b="0" i="0">
+                <a:solidFill>
+                  <a:srgbClr val="667587"/>
+                </a:solidFill>
+                <a:latin typeface="Arial"/>
+                <a:ea typeface="Arial"/>
+                <a:cs typeface="Arial"/>
+              </a:defRPr>
+            </a:pPr>
+            <a:r>
+              <a:t/>
+            </a:r>
+          </a:p>
+        </p:txBody>
+      </p:sp>
+      <p:sp>
+        <p:nvSpPr>
+          <p:cNvPr id="6" name="page-10">
+            <a:extLst xmlns:a="http://schemas.openxmlformats.org/drawingml/2006/main">
+              <a:ext uri="{FF2B5EF4-FFF2-40B4-BE49-F238E27FC236}">
+                <a16:creationId xmlns:a16="http://schemas.microsoft.com/office/drawing/2014/main" id="{4B68A03E-D847-40FB-9609-DF5775C6E9C3}"/>
+              </a:ext>
+            </a:extLst>
+          </p:cNvPr>
+          <p:cNvSpPr>
+            <a:spLocks xmlns:a="http://schemas.openxmlformats.org/drawingml/2006/main" noGrp="1"/>
+          </p:cNvSpPr>
+          <p:nvPr/>
+        </p:nvSpPr>
+        <p:spPr>
+          <a:xfrm xmlns:a="http://schemas.openxmlformats.org/drawingml/2006/main">
+            <a:off x="11106150" y="6429375"/>
+            <a:ext cx="400050" cy="228600"/>
           </a:xfrm>
           <a:prstGeom xmlns:a="http://schemas.openxmlformats.org/drawingml/2006/main" prst="rect">
             <a:avLst/>
@@ -5257,9 +4727,10 @@
           <a:lstStyle xmlns:a="http://schemas.openxmlformats.org/drawingml/2006/main"/>
           <a:p xmlns:a="http://schemas.openxmlformats.org/drawingml/2006/main">
             <a:pPr algn="r">
+              <a:buNone/>
               <a:defRPr sz="975" b="0" i="0">
                 <a:solidFill>
-                  <a:srgbClr val="AAB5C3"/>
+                  <a:srgbClr val="667587"/>
                 </a:solidFill>
                 <a:latin typeface="Arial"/>
                 <a:ea typeface="Arial"/>
@@ -5268,6 +4739,327 @@
             </a:pPr>
             <a:r>
               <a:t>12</a:t>
+            </a:r>
+          </a:p>
+        </p:txBody>
+      </p:sp>
+      <p:sp>
+        <p:nvSpPr>
+          <p:cNvPr id="7" name="screenshot-back">
+            <a:extLst xmlns:a="http://schemas.openxmlformats.org/drawingml/2006/main">
+              <a:ext uri="{FF2B5EF4-FFF2-40B4-BE49-F238E27FC236}">
+                <a16:creationId xmlns:a16="http://schemas.microsoft.com/office/drawing/2014/main" id="{4BDF2DE0-9C75-4F74-A351-FC51D8546C4A}"/>
+              </a:ext>
+            </a:extLst>
+          </p:cNvPr>
+          <p:cNvSpPr>
+            <a:spLocks xmlns:a="http://schemas.openxmlformats.org/drawingml/2006/main" noGrp="1"/>
+          </p:cNvSpPr>
+          <p:nvPr/>
+        </p:nvSpPr>
+        <p:spPr>
+          <a:xfrm xmlns:a="http://schemas.openxmlformats.org/drawingml/2006/main">
+            <a:off x="457200" y="1390650"/>
+            <a:ext cx="11049000" cy="4343400"/>
+          </a:xfrm>
+          <a:prstGeom xmlns:a="http://schemas.openxmlformats.org/drawingml/2006/main" prst="rect">
+            <a:avLst/>
+          </a:prstGeom>
+          <a:solidFill xmlns:a="http://schemas.openxmlformats.org/drawingml/2006/main">
+            <a:srgbClr val="FFFFFF"/>
+          </a:solidFill>
+          <a:ln xmlns:a="http://schemas.openxmlformats.org/drawingml/2006/main" w="9525">
+            <a:solidFill>
+              <a:srgbClr val="D6E1DF"/>
+            </a:solidFill>
+            <a:prstDash val="solid"/>
+          </a:ln>
+        </p:spPr>
+      </p:sp>
+      <p:sp>
+        <p:nvSpPr>
+          <p:cNvPr id="8" name="product-one">
+            <a:extLst xmlns:a="http://schemas.openxmlformats.org/drawingml/2006/main">
+              <a:ext uri="{FF2B5EF4-FFF2-40B4-BE49-F238E27FC236}">
+                <a16:creationId xmlns:a16="http://schemas.microsoft.com/office/drawing/2014/main" id="{09F5E031-EF10-4D41-8CE7-40317B2FF25D}"/>
+              </a:ext>
+            </a:extLst>
+          </p:cNvPr>
+          <p:cNvSpPr>
+            <a:spLocks xmlns:a="http://schemas.openxmlformats.org/drawingml/2006/main" noGrp="1"/>
+          </p:cNvSpPr>
+          <p:nvPr/>
+        </p:nvSpPr>
+        <p:spPr>
+          <a:xfrm xmlns:a="http://schemas.openxmlformats.org/drawingml/2006/main">
+            <a:off x="533400" y="5943600"/>
+            <a:ext cx="3238500" cy="266700"/>
+          </a:xfrm>
+          <a:prstGeom xmlns:a="http://schemas.openxmlformats.org/drawingml/2006/main" prst="rect">
+            <a:avLst/>
+          </a:prstGeom>
+        </p:spPr>
+        <p:txBody>
+          <a:bodyPr xmlns:a="http://schemas.openxmlformats.org/drawingml/2006/main" wrap="square" lIns="0" tIns="0" rIns="0" bIns="0" anchor="t">
+            <a:noAutofit/>
+          </a:bodyPr>
+          <a:lstStyle xmlns:a="http://schemas.openxmlformats.org/drawingml/2006/main"/>
+          <a:p xmlns:a="http://schemas.openxmlformats.org/drawingml/2006/main">
+            <a:pPr algn="l">
+              <a:buNone/>
+              <a:defRPr sz="1350" b="1" i="0">
+                <a:solidFill>
+                  <a:srgbClr val="0F7B62"/>
+                </a:solidFill>
+                <a:latin typeface="Arial"/>
+                <a:ea typeface="Arial"/>
+                <a:cs typeface="Arial"/>
+              </a:defRPr>
+            </a:pPr>
+            <a:r>
+              <a:t>1 · Datenstand</a:t>
+            </a:r>
+          </a:p>
+        </p:txBody>
+      </p:sp>
+      <p:sp>
+        <p:nvSpPr>
+          <p:cNvPr id="9" name="product-two">
+            <a:extLst xmlns:a="http://schemas.openxmlformats.org/drawingml/2006/main">
+              <a:ext uri="{FF2B5EF4-FFF2-40B4-BE49-F238E27FC236}">
+                <a16:creationId xmlns:a16="http://schemas.microsoft.com/office/drawing/2014/main" id="{70FFCED3-3BF4-498D-86F4-E2F7EBDF0C56}"/>
+              </a:ext>
+            </a:extLst>
+          </p:cNvPr>
+          <p:cNvSpPr>
+            <a:spLocks xmlns:a="http://schemas.openxmlformats.org/drawingml/2006/main" noGrp="1"/>
+          </p:cNvSpPr>
+          <p:nvPr/>
+        </p:nvSpPr>
+        <p:spPr>
+          <a:xfrm xmlns:a="http://schemas.openxmlformats.org/drawingml/2006/main">
+            <a:off x="4333875" y="5943600"/>
+            <a:ext cx="3238500" cy="266700"/>
+          </a:xfrm>
+          <a:prstGeom xmlns:a="http://schemas.openxmlformats.org/drawingml/2006/main" prst="rect">
+            <a:avLst/>
+          </a:prstGeom>
+        </p:spPr>
+        <p:txBody>
+          <a:bodyPr xmlns:a="http://schemas.openxmlformats.org/drawingml/2006/main" wrap="square" lIns="0" tIns="0" rIns="0" bIns="0" anchor="t">
+            <a:noAutofit/>
+          </a:bodyPr>
+          <a:lstStyle xmlns:a="http://schemas.openxmlformats.org/drawingml/2006/main"/>
+          <a:p xmlns:a="http://schemas.openxmlformats.org/drawingml/2006/main">
+            <a:pPr algn="l">
+              <a:buNone/>
+              <a:defRPr sz="1350" b="1" i="0">
+                <a:solidFill>
+                  <a:srgbClr val="315CFF"/>
+                </a:solidFill>
+                <a:latin typeface="Arial"/>
+                <a:ea typeface="Arial"/>
+                <a:cs typeface="Arial"/>
+              </a:defRPr>
+            </a:pPr>
+            <a:r>
+              <a:t>2 · Spatial Holdout</a:t>
+            </a:r>
+          </a:p>
+        </p:txBody>
+      </p:sp>
+      <p:sp>
+        <p:nvSpPr>
+          <p:cNvPr id="10" name="product-three">
+            <a:extLst xmlns:a="http://schemas.openxmlformats.org/drawingml/2006/main">
+              <a:ext uri="{FF2B5EF4-FFF2-40B4-BE49-F238E27FC236}">
+                <a16:creationId xmlns:a16="http://schemas.microsoft.com/office/drawing/2014/main" id="{A29F6F45-2617-4455-A0D0-91E3DBEC130F}"/>
+              </a:ext>
+            </a:extLst>
+          </p:cNvPr>
+          <p:cNvSpPr>
+            <a:spLocks xmlns:a="http://schemas.openxmlformats.org/drawingml/2006/main" noGrp="1"/>
+          </p:cNvSpPr>
+          <p:nvPr/>
+        </p:nvSpPr>
+        <p:spPr>
+          <a:xfrm xmlns:a="http://schemas.openxmlformats.org/drawingml/2006/main">
+            <a:off x="8115300" y="5943600"/>
+            <a:ext cx="3238500" cy="266700"/>
+          </a:xfrm>
+          <a:prstGeom xmlns:a="http://schemas.openxmlformats.org/drawingml/2006/main" prst="rect">
+            <a:avLst/>
+          </a:prstGeom>
+        </p:spPr>
+        <p:txBody>
+          <a:bodyPr xmlns:a="http://schemas.openxmlformats.org/drawingml/2006/main" wrap="square" lIns="0" tIns="0" rIns="0" bIns="0" anchor="t">
+            <a:noAutofit/>
+          </a:bodyPr>
+          <a:lstStyle xmlns:a="http://schemas.openxmlformats.org/drawingml/2006/main"/>
+          <a:p xmlns:a="http://schemas.openxmlformats.org/drawingml/2006/main">
+            <a:pPr algn="l">
+              <a:buNone/>
+              <a:defRPr sz="1350" b="1" i="0">
+                <a:solidFill>
+                  <a:srgbClr val="E85D3F"/>
+                </a:solidFill>
+                <a:latin typeface="Arial"/>
+                <a:ea typeface="Arial"/>
+                <a:cs typeface="Arial"/>
+              </a:defRPr>
+            </a:pPr>
+            <a:r>
+              <a:t>3 · Coverage &amp; Disclaimer</a:t>
+            </a:r>
+          </a:p>
+        </p:txBody>
+      </p:sp>
+      <p:pic>
+        <p:nvPicPr>
+          <p:cNvPr id="27" name=""/>
+          <p:cNvPicPr>
+            <a:picLocks xmlns:a="http://schemas.openxmlformats.org/drawingml/2006/main" noChangeAspect="1"/>
+          </p:cNvPicPr>
+          <p:nvPr/>
+        </p:nvPicPr>
+        <p:blipFill>
+          <a:blip xmlns:r="http://schemas.openxmlformats.org/officeDocument/2006/relationships" xmlns:a="http://schemas.openxmlformats.org/drawingml/2006/main" r:embed="R43eb2a6d3d1e4257"/>
+          <a:srcRect xmlns:a="http://schemas.openxmlformats.org/drawingml/2006/main" l="0" t="24967" r="0" b="24967"/>
+          <a:stretch xmlns:a="http://schemas.openxmlformats.org/drawingml/2006/main">
+            <a:fillRect l="0" t="0" r="0" b="0"/>
+          </a:stretch>
+        </p:blipFill>
+        <p:spPr>
+          <a:xfrm xmlns:a="http://schemas.openxmlformats.org/drawingml/2006/main" flipH="0" flipV="0">
+            <a:off x="552450" y="1485900"/>
+            <a:ext cx="10858500" cy="4152900"/>
+          </a:xfrm>
+          <a:prstGeom xmlns:a="http://schemas.openxmlformats.org/drawingml/2006/main" prst="rect">
+            <a:avLst/>
+          </a:prstGeom>
+        </p:spPr>
+      </p:pic>
+      <p:sp>
+        <p:nvSpPr>
+          <p:cNvPr id="12" name="product-mask">
+            <a:extLst xmlns:a="http://schemas.openxmlformats.org/drawingml/2006/main">
+              <a:ext uri="{FF2B5EF4-FFF2-40B4-BE49-F238E27FC236}">
+                <a16:creationId xmlns:a16="http://schemas.microsoft.com/office/drawing/2014/main" id="{62E760CC-F31B-42B2-ABD3-B8E6D68FC42C}"/>
+              </a:ext>
+            </a:extLst>
+          </p:cNvPr>
+          <p:cNvSpPr>
+            <a:spLocks xmlns:a="http://schemas.openxmlformats.org/drawingml/2006/main" noGrp="1"/>
+          </p:cNvSpPr>
+          <p:nvPr/>
+        </p:nvSpPr>
+        <p:spPr>
+          <a:xfrm xmlns:a="http://schemas.openxmlformats.org/drawingml/2006/main">
+            <a:off x="3419475" y="1485900"/>
+            <a:ext cx="7991475" cy="1581150"/>
+          </a:xfrm>
+          <a:prstGeom xmlns:a="http://schemas.openxmlformats.org/drawingml/2006/main" prst="rect">
+            <a:avLst/>
+          </a:prstGeom>
+          <a:solidFill xmlns:a="http://schemas.openxmlformats.org/drawingml/2006/main">
+            <a:srgbClr val="102138"/>
+          </a:solidFill>
+          <a:ln xmlns:a="http://schemas.openxmlformats.org/drawingml/2006/main" w="0">
+            <a:solidFill>
+              <a:srgbClr val="102138"/>
+            </a:solidFill>
+            <a:prstDash val="solid"/>
+          </a:ln>
+        </p:spPr>
+      </p:sp>
+      <p:sp>
+        <p:nvSpPr>
+          <p:cNvPr id="13" name="product-mask-copy">
+            <a:extLst xmlns:a="http://schemas.openxmlformats.org/drawingml/2006/main">
+              <a:ext uri="{FF2B5EF4-FFF2-40B4-BE49-F238E27FC236}">
+                <a16:creationId xmlns:a16="http://schemas.microsoft.com/office/drawing/2014/main" id="{0A346937-0234-4B35-9F4B-D02F8DE28D72}"/>
+              </a:ext>
+            </a:extLst>
+          </p:cNvPr>
+          <p:cNvSpPr>
+            <a:spLocks xmlns:a="http://schemas.openxmlformats.org/drawingml/2006/main" noGrp="1"/>
+          </p:cNvSpPr>
+          <p:nvPr/>
+        </p:nvSpPr>
+        <p:spPr>
+          <a:xfrm xmlns:a="http://schemas.openxmlformats.org/drawingml/2006/main">
+            <a:off x="3733800" y="1695450"/>
+            <a:ext cx="7334250" cy="342900"/>
+          </a:xfrm>
+          <a:prstGeom xmlns:a="http://schemas.openxmlformats.org/drawingml/2006/main" prst="rect">
+            <a:avLst/>
+          </a:prstGeom>
+        </p:spPr>
+        <p:txBody>
+          <a:bodyPr xmlns:a="http://schemas.openxmlformats.org/drawingml/2006/main" wrap="square" lIns="0" tIns="0" rIns="0" bIns="0" anchor="t">
+            <a:noAutofit/>
+          </a:bodyPr>
+          <a:lstStyle xmlns:a="http://schemas.openxmlformats.org/drawingml/2006/main"/>
+          <a:p xmlns:a="http://schemas.openxmlformats.org/drawingml/2006/main">
+            <a:pPr algn="l">
+              <a:buNone/>
+              <a:defRPr sz="1875" b="1" i="0">
+                <a:solidFill>
+                  <a:srgbClr val="FFFFFF"/>
+                </a:solidFill>
+                <a:latin typeface="Arial"/>
+                <a:ea typeface="Arial"/>
+                <a:cs typeface="Arial"/>
+              </a:defRPr>
+            </a:pPr>
+            <a:r>
+              <a:t>Transparenz ist Teil des Produkts</a:t>
+            </a:r>
+          </a:p>
+        </p:txBody>
+      </p:sp>
+      <p:sp>
+        <p:nvSpPr>
+          <p:cNvPr id="14" name="product-mask-subcopy">
+            <a:extLst xmlns:a="http://schemas.openxmlformats.org/drawingml/2006/main">
+              <a:ext uri="{FF2B5EF4-FFF2-40B4-BE49-F238E27FC236}">
+                <a16:creationId xmlns:a16="http://schemas.microsoft.com/office/drawing/2014/main" id="{8843F53C-923D-460A-B35A-EB8DD0FBD449}"/>
+              </a:ext>
+            </a:extLst>
+          </p:cNvPr>
+          <p:cNvSpPr>
+            <a:spLocks xmlns:a="http://schemas.openxmlformats.org/drawingml/2006/main" noGrp="1"/>
+          </p:cNvSpPr>
+          <p:nvPr/>
+        </p:nvSpPr>
+        <p:spPr>
+          <a:xfrm xmlns:a="http://schemas.openxmlformats.org/drawingml/2006/main">
+            <a:off x="3733800" y="2238375"/>
+            <a:ext cx="7334250" cy="304800"/>
+          </a:xfrm>
+          <a:prstGeom xmlns:a="http://schemas.openxmlformats.org/drawingml/2006/main" prst="rect">
+            <a:avLst/>
+          </a:prstGeom>
+        </p:spPr>
+        <p:txBody>
+          <a:bodyPr xmlns:a="http://schemas.openxmlformats.org/drawingml/2006/main" wrap="square" lIns="0" tIns="0" rIns="0" bIns="0" anchor="t">
+            <a:noAutofit/>
+          </a:bodyPr>
+          <a:lstStyle xmlns:a="http://schemas.openxmlformats.org/drawingml/2006/main"/>
+          <a:p xmlns:a="http://schemas.openxmlformats.org/drawingml/2006/main">
+            <a:pPr algn="l">
+              <a:buNone/>
+              <a:defRPr sz="1275" b="0" i="0">
+                <a:solidFill>
+                  <a:srgbClr val="CFE8DF"/>
+                </a:solidFill>
+                <a:latin typeface="Arial"/>
+                <a:ea typeface="Arial"/>
+                <a:cs typeface="Arial"/>
+              </a:defRPr>
+            </a:pPr>
+            <a:r>
+              <a:t>Nutzer sehen Datenquellen, 7-Kandidaten-Vergleich, Testgüte und 86,8 % Coverage.</a:t>
             </a:r>
           </a:p>
         </p:txBody>
@@ -5275,7 +5067,7 @@
     </p:spTree>
     <p:extLst>
       <p:ext uri="{BB962C8B-B14F-4D97-AF65-F5344CB8AC3E}">
-        <p14:creationId xmlns:p14="http://schemas.microsoft.com/office/powerpoint/2010/main" val="851703861"/>
+        <p14:creationId xmlns:p14="http://schemas.microsoft.com/office/powerpoint/2010/main" val="140045120"/>
       </p:ext>
     </p:extLst>
   </p:cSld>
@@ -5303,10 +5095,10 @@
       </p:grpSpPr>
       <p:sp>
         <p:nvSpPr>
-          <p:cNvPr id="16" name="header-13">
-            <a:extLst xmlns:a="http://schemas.openxmlformats.org/drawingml/2006/main">
-              <a:ext uri="{FF2B5EF4-FFF2-40B4-BE49-F238E27FC236}">
-                <a16:creationId xmlns:a16="http://schemas.microsoft.com/office/drawing/2014/main" id="{2CD076FD-D4E2-433F-B474-C7867F3D538B}"/>
+          <p:cNvPr id="29" name="header-11">
+            <a:extLst xmlns:a="http://schemas.openxmlformats.org/drawingml/2006/main">
+              <a:ext uri="{FF2B5EF4-FFF2-40B4-BE49-F238E27FC236}">
+                <a16:creationId xmlns:a16="http://schemas.microsoft.com/office/drawing/2014/main" id="{69C0D3BE-8666-42D8-A511-6D32A785DAAB}"/>
               </a:ext>
             </a:extLst>
           </p:cNvPr>
@@ -5336,10 +5128,10 @@
       </p:sp>
       <p:sp>
         <p:nvSpPr>
-          <p:cNvPr id="2" name="header-teal-13">
-            <a:extLst xmlns:a="http://schemas.openxmlformats.org/drawingml/2006/main">
-              <a:ext uri="{FF2B5EF4-FFF2-40B4-BE49-F238E27FC236}">
-                <a16:creationId xmlns:a16="http://schemas.microsoft.com/office/drawing/2014/main" id="{6E18CD19-21E4-4971-B783-F35A938F560A}"/>
+          <p:cNvPr id="2" name="header-teal-11">
+            <a:extLst xmlns:a="http://schemas.openxmlformats.org/drawingml/2006/main">
+              <a:ext uri="{FF2B5EF4-FFF2-40B4-BE49-F238E27FC236}">
+                <a16:creationId xmlns:a16="http://schemas.microsoft.com/office/drawing/2014/main" id="{2241EBF9-3B9C-45FA-BF42-71FDB3E5C263}"/>
               </a:ext>
             </a:extLst>
           </p:cNvPr>
@@ -5369,10 +5161,10 @@
       </p:sp>
       <p:sp>
         <p:nvSpPr>
-          <p:cNvPr id="3" name="header-accent-13">
-            <a:extLst xmlns:a="http://schemas.openxmlformats.org/drawingml/2006/main">
-              <a:ext uri="{FF2B5EF4-FFF2-40B4-BE49-F238E27FC236}">
-                <a16:creationId xmlns:a16="http://schemas.microsoft.com/office/drawing/2014/main" id="{CCF94777-7A5C-4147-B3E4-A13E01D3EBD9}"/>
+          <p:cNvPr id="3" name="header-accent-11">
+            <a:extLst xmlns:a="http://schemas.openxmlformats.org/drawingml/2006/main">
+              <a:ext uri="{FF2B5EF4-FFF2-40B4-BE49-F238E27FC236}">
+                <a16:creationId xmlns:a16="http://schemas.microsoft.com/office/drawing/2014/main" id="{4545EEF1-C021-4BA2-9408-E9F43FE83AE4}"/>
               </a:ext>
             </a:extLst>
           </p:cNvPr>
@@ -5402,10 +5194,10 @@
       </p:sp>
       <p:sp>
         <p:nvSpPr>
-          <p:cNvPr id="4" name="title-13">
-            <a:extLst xmlns:a="http://schemas.openxmlformats.org/drawingml/2006/main">
-              <a:ext uri="{FF2B5EF4-FFF2-40B4-BE49-F238E27FC236}">
-                <a16:creationId xmlns:a16="http://schemas.microsoft.com/office/drawing/2014/main" id="{E920D481-0D5D-4D08-BDF4-AF2BE3028EB2}"/>
+          <p:cNvPr id="4" name="title-11">
+            <a:extLst xmlns:a="http://schemas.openxmlformats.org/drawingml/2006/main">
+              <a:ext uri="{FF2B5EF4-FFF2-40B4-BE49-F238E27FC236}">
+                <a16:creationId xmlns:a16="http://schemas.microsoft.com/office/drawing/2014/main" id="{6F7FA0BD-7285-4198-90B3-A6B9DEBFE521}"/>
               </a:ext>
             </a:extLst>
           </p:cNvPr>
@@ -5430,6 +5222,7 @@
           <a:lstStyle xmlns:a="http://schemas.openxmlformats.org/drawingml/2006/main"/>
           <a:p xmlns:a="http://schemas.openxmlformats.org/drawingml/2006/main">
             <a:pPr algn="l">
+              <a:buNone/>
               <a:defRPr sz="3225" b="1" i="0">
                 <a:solidFill>
                   <a:srgbClr val="FFFFFF"/>
@@ -5440,17 +5233,17 @@
               </a:defRPr>
             </a:pPr>
             <a:r>
-              <a:t>Quellen und Reproduzierbarkeit</a:t>
-            </a:r>
-          </a:p>
-        </p:txBody>
-      </p:sp>
-      <p:sp>
-        <p:nvSpPr>
-          <p:cNvPr id="5" name="source-13">
-            <a:extLst xmlns:a="http://schemas.openxmlformats.org/drawingml/2006/main">
-              <a:ext uri="{FF2B5EF4-FFF2-40B4-BE49-F238E27FC236}">
-                <a16:creationId xmlns:a16="http://schemas.microsoft.com/office/drawing/2014/main" id="{22EF8BF9-60F6-4D2D-BF33-19F40312D271}"/>
+              <a:t>C/K · Ein gutes Modell kennt seine Einsatzgrenze</a:t>
+            </a:r>
+          </a:p>
+        </p:txBody>
+      </p:sp>
+      <p:sp>
+        <p:nvSpPr>
+          <p:cNvPr id="5" name="source-11">
+            <a:extLst xmlns:a="http://schemas.openxmlformats.org/drawingml/2006/main">
+              <a:ext uri="{FF2B5EF4-FFF2-40B4-BE49-F238E27FC236}">
+                <a16:creationId xmlns:a16="http://schemas.microsoft.com/office/drawing/2014/main" id="{960D00F3-3CAE-4A61-B148-62C5D45DFCC9}"/>
               </a:ext>
             </a:extLst>
           </p:cNvPr>
@@ -5475,6 +5268,7 @@
           <a:lstStyle xmlns:a="http://schemas.openxmlformats.org/drawingml/2006/main"/>
           <a:p xmlns:a="http://schemas.openxmlformats.org/drawingml/2006/main">
             <a:pPr algn="l">
+              <a:buNone/>
               <a:defRPr sz="900" b="0" i="0">
                 <a:solidFill>
                   <a:srgbClr val="667587"/>
@@ -5492,10 +5286,10 @@
       </p:sp>
       <p:sp>
         <p:nvSpPr>
-          <p:cNvPr id="6" name="page-13">
-            <a:extLst xmlns:a="http://schemas.openxmlformats.org/drawingml/2006/main">
-              <a:ext uri="{FF2B5EF4-FFF2-40B4-BE49-F238E27FC236}">
-                <a16:creationId xmlns:a16="http://schemas.microsoft.com/office/drawing/2014/main" id="{6530395F-337D-4405-9E2C-F25840B63ECC}"/>
+          <p:cNvPr id="6" name="page-11">
+            <a:extLst xmlns:a="http://schemas.openxmlformats.org/drawingml/2006/main">
+              <a:ext uri="{FF2B5EF4-FFF2-40B4-BE49-F238E27FC236}">
+                <a16:creationId xmlns:a16="http://schemas.microsoft.com/office/drawing/2014/main" id="{E79274EB-7947-41C3-8A02-3F03F4335B2E}"/>
               </a:ext>
             </a:extLst>
           </p:cNvPr>
@@ -5520,6 +5314,7 @@
           <a:lstStyle xmlns:a="http://schemas.openxmlformats.org/drawingml/2006/main"/>
           <a:p xmlns:a="http://schemas.openxmlformats.org/drawingml/2006/main">
             <a:pPr algn="r">
+              <a:buNone/>
               <a:defRPr sz="975" b="0" i="0">
                 <a:solidFill>
                   <a:srgbClr val="667587"/>
@@ -5537,22 +5332,22 @@
       </p:sp>
       <p:sp>
         <p:nvSpPr>
-          <p:cNvPr id="7" name="sources-one-title">
-            <a:extLst xmlns:a="http://schemas.openxmlformats.org/drawingml/2006/main">
-              <a:ext uri="{FF2B5EF4-FFF2-40B4-BE49-F238E27FC236}">
-                <a16:creationId xmlns:a16="http://schemas.microsoft.com/office/drawing/2014/main" id="{B47C0066-7B17-4687-B334-E76AEA45A722}"/>
-              </a:ext>
-            </a:extLst>
-          </p:cNvPr>
-          <p:cNvSpPr>
-            <a:spLocks xmlns:a="http://schemas.openxmlformats.org/drawingml/2006/main" noGrp="1"/>
-          </p:cNvSpPr>
-          <p:nvPr/>
-        </p:nvSpPr>
-        <p:spPr>
-          <a:xfrm xmlns:a="http://schemas.openxmlformats.org/drawingml/2006/main">
-            <a:off x="457200" y="1524000"/>
-            <a:ext cx="3143250" cy="323850"/>
+          <p:cNvPr id="7" name="limits-lead">
+            <a:extLst xmlns:a="http://schemas.openxmlformats.org/drawingml/2006/main">
+              <a:ext uri="{FF2B5EF4-FFF2-40B4-BE49-F238E27FC236}">
+                <a16:creationId xmlns:a16="http://schemas.microsoft.com/office/drawing/2014/main" id="{A2974C9F-7C28-4462-8412-716EF7648D60}"/>
+              </a:ext>
+            </a:extLst>
+          </p:cNvPr>
+          <p:cNvSpPr>
+            <a:spLocks xmlns:a="http://schemas.openxmlformats.org/drawingml/2006/main" noGrp="1"/>
+          </p:cNvSpPr>
+          <p:nvPr/>
+        </p:nvSpPr>
+        <p:spPr>
+          <a:xfrm xmlns:a="http://schemas.openxmlformats.org/drawingml/2006/main">
+            <a:off x="457200" y="1371600"/>
+            <a:ext cx="11049000" cy="495300"/>
           </a:xfrm>
           <a:prstGeom xmlns:a="http://schemas.openxmlformats.org/drawingml/2006/main" prst="rect">
             <a:avLst/>
@@ -5565,52 +5360,8 @@
           <a:lstStyle xmlns:a="http://schemas.openxmlformats.org/drawingml/2006/main"/>
           <a:p xmlns:a="http://schemas.openxmlformats.org/drawingml/2006/main">
             <a:pPr algn="l">
-              <a:defRPr sz="1950" b="1" i="0">
-                <a:solidFill>
-                  <a:srgbClr val="0F7B62"/>
-                </a:solidFill>
-                <a:latin typeface="Arial"/>
-                <a:ea typeface="Arial"/>
-                <a:cs typeface="Arial"/>
-              </a:defRPr>
-            </a:pPr>
-            <a:r>
-              <a:t>Zensus 2022</a:t>
-            </a:r>
-          </a:p>
-        </p:txBody>
-      </p:sp>
-      <p:sp>
-        <p:nvSpPr>
-          <p:cNvPr id="8" name="sources-one-body">
-            <a:extLst xmlns:a="http://schemas.openxmlformats.org/drawingml/2006/main">
-              <a:ext uri="{FF2B5EF4-FFF2-40B4-BE49-F238E27FC236}">
-                <a16:creationId xmlns:a16="http://schemas.microsoft.com/office/drawing/2014/main" id="{52420C3A-CEA9-4C96-B15D-52FA05D22C13}"/>
-              </a:ext>
-            </a:extLst>
-          </p:cNvPr>
-          <p:cNvSpPr>
-            <a:spLocks xmlns:a="http://schemas.openxmlformats.org/drawingml/2006/main" noGrp="1"/>
-          </p:cNvSpPr>
-          <p:nvPr/>
-        </p:nvSpPr>
-        <p:spPr>
-          <a:xfrm xmlns:a="http://schemas.openxmlformats.org/drawingml/2006/main">
-            <a:off x="457200" y="2000250"/>
-            <a:ext cx="4953000" cy="1181100"/>
-          </a:xfrm>
-          <a:prstGeom xmlns:a="http://schemas.openxmlformats.org/drawingml/2006/main" prst="rect">
-            <a:avLst/>
-          </a:prstGeom>
-        </p:spPr>
-        <p:txBody>
-          <a:bodyPr xmlns:a="http://schemas.openxmlformats.org/drawingml/2006/main" wrap="square" lIns="0" tIns="0" rIns="0" bIns="0" anchor="t">
-            <a:noAutofit/>
-          </a:bodyPr>
-          <a:lstStyle xmlns:a="http://schemas.openxmlformats.org/drawingml/2006/main"/>
-          <a:p xmlns:a="http://schemas.openxmlformats.org/drawingml/2006/main">
-            <a:pPr algn="l">
-              <a:defRPr sz="1575" b="0" i="0">
+              <a:buNone/>
+              <a:defRPr sz="1800" b="0" i="0">
                 <a:solidFill>
                   <a:srgbClr val="667587"/>
                 </a:solidFill>
@@ -5620,115 +5371,21 @@
               </a:defRPr>
             </a:pPr>
             <a:r>
-              <a:t>Statistische Ämter des Bundes und der Länder
-100-m-Gitterdaten · Datenlizenz Deutschland – Namensnennung 2.0
-Stichtag: 15.05.2022 · Veröffentlichung 2025</a:t>
-            </a:r>
-          </a:p>
-        </p:txBody>
-      </p:sp>
-      <p:sp>
-        <p:nvSpPr>
-          <p:cNvPr id="9" name="sources-two-title">
-            <a:extLst xmlns:a="http://schemas.openxmlformats.org/drawingml/2006/main">
-              <a:ext uri="{FF2B5EF4-FFF2-40B4-BE49-F238E27FC236}">
-                <a16:creationId xmlns:a16="http://schemas.microsoft.com/office/drawing/2014/main" id="{73B91E00-1407-4856-8C68-6E11CE870C78}"/>
-              </a:ext>
-            </a:extLst>
-          </p:cNvPr>
-          <p:cNvSpPr>
-            <a:spLocks xmlns:a="http://schemas.openxmlformats.org/drawingml/2006/main" noGrp="1"/>
-          </p:cNvSpPr>
-          <p:nvPr/>
-        </p:nvSpPr>
-        <p:spPr>
-          <a:xfrm xmlns:a="http://schemas.openxmlformats.org/drawingml/2006/main">
-            <a:off x="6286500" y="1524000"/>
-            <a:ext cx="4000500" cy="323850"/>
-          </a:xfrm>
-          <a:prstGeom xmlns:a="http://schemas.openxmlformats.org/drawingml/2006/main" prst="rect">
-            <a:avLst/>
-          </a:prstGeom>
-        </p:spPr>
-        <p:txBody>
-          <a:bodyPr xmlns:a="http://schemas.openxmlformats.org/drawingml/2006/main" wrap="square" lIns="0" tIns="0" rIns="0" bIns="0" anchor="t">
-            <a:noAutofit/>
-          </a:bodyPr>
-          <a:lstStyle xmlns:a="http://schemas.openxmlformats.org/drawingml/2006/main"/>
-          <a:p xmlns:a="http://schemas.openxmlformats.org/drawingml/2006/main">
-            <a:pPr algn="l">
-              <a:defRPr sz="1950" b="1" i="0">
-                <a:solidFill>
-                  <a:srgbClr val="315CFF"/>
-                </a:solidFill>
-                <a:latin typeface="Arial"/>
-                <a:ea typeface="Arial"/>
-                <a:cs typeface="Arial"/>
-              </a:defRPr>
-            </a:pPr>
-            <a:r>
-              <a:t>GREIX Mietpreisindex</a:t>
-            </a:r>
-          </a:p>
-        </p:txBody>
-      </p:sp>
-      <p:sp>
-        <p:nvSpPr>
-          <p:cNvPr id="10" name="sources-two-body">
-            <a:extLst xmlns:a="http://schemas.openxmlformats.org/drawingml/2006/main">
-              <a:ext uri="{FF2B5EF4-FFF2-40B4-BE49-F238E27FC236}">
-                <a16:creationId xmlns:a16="http://schemas.microsoft.com/office/drawing/2014/main" id="{07CB8445-206B-4569-8FB3-E385D5A620DC}"/>
-              </a:ext>
-            </a:extLst>
-          </p:cNvPr>
-          <p:cNvSpPr>
-            <a:spLocks xmlns:a="http://schemas.openxmlformats.org/drawingml/2006/main" noGrp="1"/>
-          </p:cNvSpPr>
-          <p:nvPr/>
-        </p:nvSpPr>
-        <p:spPr>
-          <a:xfrm xmlns:a="http://schemas.openxmlformats.org/drawingml/2006/main">
-            <a:off x="6286500" y="2000250"/>
-            <a:ext cx="5219700" cy="1181100"/>
-          </a:xfrm>
-          <a:prstGeom xmlns:a="http://schemas.openxmlformats.org/drawingml/2006/main" prst="rect">
-            <a:avLst/>
-          </a:prstGeom>
-        </p:spPr>
-        <p:txBody>
-          <a:bodyPr xmlns:a="http://schemas.openxmlformats.org/drawingml/2006/main" wrap="square" lIns="0" tIns="0" rIns="0" bIns="0" anchor="t">
-            <a:noAutofit/>
-          </a:bodyPr>
-          <a:lstStyle xmlns:a="http://schemas.openxmlformats.org/drawingml/2006/main"/>
-          <a:p xmlns:a="http://schemas.openxmlformats.org/drawingml/2006/main">
-            <a:pPr algn="l">
-              <a:defRPr sz="1575" b="0" i="0">
-                <a:solidFill>
-                  <a:srgbClr val="667587"/>
-                </a:solidFill>
-                <a:latin typeface="Arial"/>
-                <a:ea typeface="Arial"/>
-                <a:cs typeface="Arial"/>
-              </a:defRPr>
-            </a:pPr>
-            <a:r>
-              <a:t>Kiel Institut für Weltwirtschaft auf Basis der VALUE Marktdatenbank
-Nominale Quartalswerte 2012-Q1 bis 2026-Q1
-37 lokale Märkte plus Deutschlandreferenz</a:t>
+              <a:t>MietCheck unterstützt Exploration und Umzugsentscheidungen – keine rechtliche Preisfeststellung.</a:t>
             </a:r>
           </a:p>
         </p:txBody>
       </p:sp>
       <p:cxnSp>
         <p:nvCxnSpPr>
-          <p:cNvPr id="26" name="sources-divider"/>
+          <p:cNvPr id="52" name="limits-sep"/>
           <p:cNvCxnSpPr/>
           <p:nvPr/>
         </p:nvCxnSpPr>
         <p:spPr>
           <a:xfrm xmlns:a="http://schemas.openxmlformats.org/drawingml/2006/main">
-            <a:off x="457200" y="3543300"/>
-            <a:ext cx="11049000" cy="286"/>
+            <a:off x="6096000" y="2133600"/>
+            <a:ext cx="286" cy="3486150"/>
           </a:xfrm>
           <a:prstGeom xmlns:a="http://schemas.openxmlformats.org/drawingml/2006/main" prst="straightConnector1">
             <a:avLst/>
@@ -5743,22 +5400,22 @@
       </p:cxnSp>
       <p:sp>
         <p:nvSpPr>
-          <p:cNvPr id="12" name="sources-repro-title">
-            <a:extLst xmlns:a="http://schemas.openxmlformats.org/drawingml/2006/main">
-              <a:ext uri="{FF2B5EF4-FFF2-40B4-BE49-F238E27FC236}">
-                <a16:creationId xmlns:a16="http://schemas.microsoft.com/office/drawing/2014/main" id="{F8D67AEF-8165-4356-B8ED-2A174E8AE818}"/>
-              </a:ext>
-            </a:extLst>
-          </p:cNvPr>
-          <p:cNvSpPr>
-            <a:spLocks xmlns:a="http://schemas.openxmlformats.org/drawingml/2006/main" noGrp="1"/>
-          </p:cNvSpPr>
-          <p:nvPr/>
-        </p:nvSpPr>
-        <p:spPr>
-          <a:xfrm xmlns:a="http://schemas.openxmlformats.org/drawingml/2006/main">
-            <a:off x="457200" y="3905250"/>
-            <a:ext cx="4000500" cy="323850"/>
+          <p:cNvPr id="9" name="limits-left-title">
+            <a:extLst xmlns:a="http://schemas.openxmlformats.org/drawingml/2006/main">
+              <a:ext uri="{FF2B5EF4-FFF2-40B4-BE49-F238E27FC236}">
+                <a16:creationId xmlns:a16="http://schemas.microsoft.com/office/drawing/2014/main" id="{032A934B-C847-40C6-A537-458E8AE1CE13}"/>
+              </a:ext>
+            </a:extLst>
+          </p:cNvPr>
+          <p:cNvSpPr>
+            <a:spLocks xmlns:a="http://schemas.openxmlformats.org/drawingml/2006/main" noGrp="1"/>
+          </p:cNvSpPr>
+          <p:nvPr/>
+        </p:nvSpPr>
+        <p:spPr>
+          <a:xfrm xmlns:a="http://schemas.openxmlformats.org/drawingml/2006/main">
+            <a:off x="457200" y="2209800"/>
+            <a:ext cx="4953000" cy="400050"/>
           </a:xfrm>
           <a:prstGeom xmlns:a="http://schemas.openxmlformats.org/drawingml/2006/main" prst="rect">
             <a:avLst/>
@@ -5771,7 +5428,8 @@
           <a:lstStyle xmlns:a="http://schemas.openxmlformats.org/drawingml/2006/main"/>
           <a:p xmlns:a="http://schemas.openxmlformats.org/drawingml/2006/main">
             <a:pPr algn="l">
-              <a:defRPr sz="1950" b="1" i="0">
+              <a:buNone/>
+              <a:defRPr sz="2100" b="1" i="0">
                 <a:solidFill>
                   <a:srgbClr val="102138"/>
                 </a:solidFill>
@@ -5781,74 +5439,707 @@
               </a:defRPr>
             </a:pPr>
             <a:r>
-              <a:t>Reproduzierbar im Repository</a:t>
-            </a:r>
-          </a:p>
-        </p:txBody>
-      </p:sp>
-      <p:sp>
-        <p:nvSpPr>
-          <p:cNvPr id="13" name="sources-repro-body">
-            <a:extLst xmlns:a="http://schemas.openxmlformats.org/drawingml/2006/main">
-              <a:ext uri="{FF2B5EF4-FFF2-40B4-BE49-F238E27FC236}">
-                <a16:creationId xmlns:a16="http://schemas.microsoft.com/office/drawing/2014/main" id="{74CED86B-6349-4E4D-996A-92AAF05EE255}"/>
-              </a:ext>
-            </a:extLst>
-          </p:cNvPr>
-          <p:cNvSpPr>
-            <a:spLocks xmlns:a="http://schemas.openxmlformats.org/drawingml/2006/main" noGrp="1"/>
-          </p:cNvSpPr>
-          <p:nvPr/>
-        </p:nvSpPr>
-        <p:spPr>
-          <a:xfrm xmlns:a="http://schemas.openxmlformats.org/drawingml/2006/main">
-            <a:off x="457200" y="4419600"/>
+              <a:t>Was fehlt?</a:t>
+            </a:r>
+          </a:p>
+        </p:txBody>
+      </p:sp>
+      <p:sp>
+        <p:nvSpPr>
+          <p:cNvPr id="10" name="limits-right-title">
+            <a:extLst xmlns:a="http://schemas.openxmlformats.org/drawingml/2006/main">
+              <a:ext uri="{FF2B5EF4-FFF2-40B4-BE49-F238E27FC236}">
+                <a16:creationId xmlns:a16="http://schemas.microsoft.com/office/drawing/2014/main" id="{8BF5A322-F572-4231-8032-AE559B818586}"/>
+              </a:ext>
+            </a:extLst>
+          </p:cNvPr>
+          <p:cNvSpPr>
+            <a:spLocks xmlns:a="http://schemas.openxmlformats.org/drawingml/2006/main" noGrp="1"/>
+          </p:cNvSpPr>
+          <p:nvPr/>
+        </p:nvSpPr>
+        <p:spPr>
+          <a:xfrm xmlns:a="http://schemas.openxmlformats.org/drawingml/2006/main">
+            <a:off x="6667500" y="2209800"/>
+            <a:ext cx="4838700" cy="400050"/>
+          </a:xfrm>
+          <a:prstGeom xmlns:a="http://schemas.openxmlformats.org/drawingml/2006/main" prst="rect">
+            <a:avLst/>
+          </a:prstGeom>
+        </p:spPr>
+        <p:txBody>
+          <a:bodyPr xmlns:a="http://schemas.openxmlformats.org/drawingml/2006/main" wrap="square" lIns="0" tIns="0" rIns="0" bIns="0" anchor="t">
+            <a:noAutofit/>
+          </a:bodyPr>
+          <a:lstStyle xmlns:a="http://schemas.openxmlformats.org/drawingml/2006/main"/>
+          <a:p xmlns:a="http://schemas.openxmlformats.org/drawingml/2006/main">
+            <a:pPr algn="l">
+              <a:buNone/>
+              <a:defRPr sz="2100" b="1" i="0">
+                <a:solidFill>
+                  <a:srgbClr val="0F7B62"/>
+                </a:solidFill>
+                <a:latin typeface="Arial"/>
+                <a:ea typeface="Arial"/>
+                <a:cs typeface="Arial"/>
+              </a:defRPr>
+            </a:pPr>
+            <a:r>
+              <a:t>Wie wird das abgefedert?</a:t>
+            </a:r>
+          </a:p>
+        </p:txBody>
+      </p:sp>
+      <p:sp>
+        <p:nvSpPr>
+          <p:cNvPr id="11" name="limit-dot-0">
+            <a:extLst xmlns:a="http://schemas.openxmlformats.org/drawingml/2006/main">
+              <a:ext uri="{FF2B5EF4-FFF2-40B4-BE49-F238E27FC236}">
+                <a16:creationId xmlns:a16="http://schemas.microsoft.com/office/drawing/2014/main" id="{DDD37B09-8035-4B89-B47E-734E77909635}"/>
+              </a:ext>
+            </a:extLst>
+          </p:cNvPr>
+          <p:cNvSpPr>
+            <a:spLocks xmlns:a="http://schemas.openxmlformats.org/drawingml/2006/main" noGrp="1"/>
+          </p:cNvSpPr>
+          <p:nvPr/>
+        </p:nvSpPr>
+        <p:spPr>
+          <a:xfrm xmlns:a="http://schemas.openxmlformats.org/drawingml/2006/main">
+            <a:off x="495300" y="2933700"/>
+            <a:ext cx="171450" cy="171450"/>
+          </a:xfrm>
+          <a:prstGeom xmlns:a="http://schemas.openxmlformats.org/drawingml/2006/main" prst="ellipse">
+            <a:avLst/>
+          </a:prstGeom>
+          <a:solidFill xmlns:a="http://schemas.openxmlformats.org/drawingml/2006/main">
+            <a:srgbClr val="E85D3F"/>
+          </a:solidFill>
+          <a:ln xmlns:a="http://schemas.openxmlformats.org/drawingml/2006/main" w="0">
+            <a:solidFill>
+              <a:srgbClr val="E85D3F"/>
+            </a:solidFill>
+            <a:prstDash val="solid"/>
+          </a:ln>
+        </p:spPr>
+      </p:sp>
+      <p:sp>
+        <p:nvSpPr>
+          <p:cNvPr id="12" name="limit-copy-0">
+            <a:extLst xmlns:a="http://schemas.openxmlformats.org/drawingml/2006/main">
+              <a:ext uri="{FF2B5EF4-FFF2-40B4-BE49-F238E27FC236}">
+                <a16:creationId xmlns:a16="http://schemas.microsoft.com/office/drawing/2014/main" id="{4AC89F28-5CCE-4F3A-AA44-5D84CBE39F5D}"/>
+              </a:ext>
+            </a:extLst>
+          </p:cNvPr>
+          <p:cNvSpPr>
+            <a:spLocks xmlns:a="http://schemas.openxmlformats.org/drawingml/2006/main" noGrp="1"/>
+          </p:cNvSpPr>
+          <p:nvPr/>
+        </p:nvSpPr>
+        <p:spPr>
+          <a:xfrm xmlns:a="http://schemas.openxmlformats.org/drawingml/2006/main">
+            <a:off x="838200" y="2857500"/>
+            <a:ext cx="4857750" cy="514350"/>
+          </a:xfrm>
+          <a:prstGeom xmlns:a="http://schemas.openxmlformats.org/drawingml/2006/main" prst="rect">
+            <a:avLst/>
+          </a:prstGeom>
+        </p:spPr>
+        <p:txBody>
+          <a:bodyPr xmlns:a="http://schemas.openxmlformats.org/drawingml/2006/main" wrap="square" lIns="0" tIns="0" rIns="0" bIns="0" anchor="t">
+            <a:noAutofit/>
+          </a:bodyPr>
+          <a:lstStyle xmlns:a="http://schemas.openxmlformats.org/drawingml/2006/main"/>
+          <a:p xmlns:a="http://schemas.openxmlformats.org/drawingml/2006/main">
+            <a:pPr algn="l">
+              <a:buNone/>
+              <a:defRPr sz="1575" b="0" i="0">
+                <a:solidFill>
+                  <a:srgbClr val="667587"/>
+                </a:solidFill>
+                <a:latin typeface="Arial"/>
+                <a:ea typeface="Arial"/>
+                <a:cs typeface="Arial"/>
+              </a:defRPr>
+            </a:pPr>
+            <a:r>
+              <a:t>Ausstattung, Energiezustand, Etage und Mikrolage</a:t>
+            </a:r>
+          </a:p>
+        </p:txBody>
+      </p:sp>
+      <p:sp>
+        <p:nvSpPr>
+          <p:cNvPr id="13" name="mit-dot-0">
+            <a:extLst xmlns:a="http://schemas.openxmlformats.org/drawingml/2006/main">
+              <a:ext uri="{FF2B5EF4-FFF2-40B4-BE49-F238E27FC236}">
+                <a16:creationId xmlns:a16="http://schemas.microsoft.com/office/drawing/2014/main" id="{E4713A01-42DB-4F73-AA07-658794D1B491}"/>
+              </a:ext>
+            </a:extLst>
+          </p:cNvPr>
+          <p:cNvSpPr>
+            <a:spLocks xmlns:a="http://schemas.openxmlformats.org/drawingml/2006/main" noGrp="1"/>
+          </p:cNvSpPr>
+          <p:nvPr/>
+        </p:nvSpPr>
+        <p:spPr>
+          <a:xfrm xmlns:a="http://schemas.openxmlformats.org/drawingml/2006/main">
+            <a:off x="6705600" y="2933700"/>
+            <a:ext cx="171450" cy="171450"/>
+          </a:xfrm>
+          <a:prstGeom xmlns:a="http://schemas.openxmlformats.org/drawingml/2006/main" prst="ellipse">
+            <a:avLst/>
+          </a:prstGeom>
+          <a:solidFill xmlns:a="http://schemas.openxmlformats.org/drawingml/2006/main">
+            <a:srgbClr val="0F7B62"/>
+          </a:solidFill>
+          <a:ln xmlns:a="http://schemas.openxmlformats.org/drawingml/2006/main" w="0">
+            <a:solidFill>
+              <a:srgbClr val="0F7B62"/>
+            </a:solidFill>
+            <a:prstDash val="solid"/>
+          </a:ln>
+        </p:spPr>
+      </p:sp>
+      <p:sp>
+        <p:nvSpPr>
+          <p:cNvPr id="14" name="mit-copy-0">
+            <a:extLst xmlns:a="http://schemas.openxmlformats.org/drawingml/2006/main">
+              <a:ext uri="{FF2B5EF4-FFF2-40B4-BE49-F238E27FC236}">
+                <a16:creationId xmlns:a16="http://schemas.microsoft.com/office/drawing/2014/main" id="{CBE6039B-582C-46A1-A37C-8BA5B2B87CCD}"/>
+              </a:ext>
+            </a:extLst>
+          </p:cNvPr>
+          <p:cNvSpPr>
+            <a:spLocks xmlns:a="http://schemas.openxmlformats.org/drawingml/2006/main" noGrp="1"/>
+          </p:cNvSpPr>
+          <p:nvPr/>
+        </p:nvSpPr>
+        <p:spPr>
+          <a:xfrm xmlns:a="http://schemas.openxmlformats.org/drawingml/2006/main">
+            <a:off x="7048500" y="2857500"/>
+            <a:ext cx="4286250" cy="514350"/>
+          </a:xfrm>
+          <a:prstGeom xmlns:a="http://schemas.openxmlformats.org/drawingml/2006/main" prst="rect">
+            <a:avLst/>
+          </a:prstGeom>
+        </p:spPr>
+        <p:txBody>
+          <a:bodyPr xmlns:a="http://schemas.openxmlformats.org/drawingml/2006/main" wrap="square" lIns="0" tIns="0" rIns="0" bIns="0" anchor="t">
+            <a:noAutofit/>
+          </a:bodyPr>
+          <a:lstStyle xmlns:a="http://schemas.openxmlformats.org/drawingml/2006/main"/>
+          <a:p xmlns:a="http://schemas.openxmlformats.org/drawingml/2006/main">
+            <a:pPr algn="l">
+              <a:buNone/>
+              <a:defRPr sz="1575" b="0" i="0">
+                <a:solidFill>
+                  <a:srgbClr val="667587"/>
+                </a:solidFill>
+                <a:latin typeface="Arial"/>
+                <a:ea typeface="Arial"/>
+                <a:cs typeface="Arial"/>
+              </a:defRPr>
+            </a:pPr>
+            <a:r>
+              <a:t>keine adressgenaue oder rechtliche Behauptung</a:t>
+            </a:r>
+          </a:p>
+        </p:txBody>
+      </p:sp>
+      <p:sp>
+        <p:nvSpPr>
+          <p:cNvPr id="15" name="limit-dot-1">
+            <a:extLst xmlns:a="http://schemas.openxmlformats.org/drawingml/2006/main">
+              <a:ext uri="{FF2B5EF4-FFF2-40B4-BE49-F238E27FC236}">
+                <a16:creationId xmlns:a16="http://schemas.microsoft.com/office/drawing/2014/main" id="{735C978F-BD3A-4A2F-9F0A-517367332DBC}"/>
+              </a:ext>
+            </a:extLst>
+          </p:cNvPr>
+          <p:cNvSpPr>
+            <a:spLocks xmlns:a="http://schemas.openxmlformats.org/drawingml/2006/main" noGrp="1"/>
+          </p:cNvSpPr>
+          <p:nvPr/>
+        </p:nvSpPr>
+        <p:spPr>
+          <a:xfrm xmlns:a="http://schemas.openxmlformats.org/drawingml/2006/main">
+            <a:off x="495300" y="3619500"/>
+            <a:ext cx="171450" cy="171450"/>
+          </a:xfrm>
+          <a:prstGeom xmlns:a="http://schemas.openxmlformats.org/drawingml/2006/main" prst="ellipse">
+            <a:avLst/>
+          </a:prstGeom>
+          <a:solidFill xmlns:a="http://schemas.openxmlformats.org/drawingml/2006/main">
+            <a:srgbClr val="E85D3F"/>
+          </a:solidFill>
+          <a:ln xmlns:a="http://schemas.openxmlformats.org/drawingml/2006/main" w="0">
+            <a:solidFill>
+              <a:srgbClr val="E85D3F"/>
+            </a:solidFill>
+            <a:prstDash val="solid"/>
+          </a:ln>
+        </p:spPr>
+      </p:sp>
+      <p:sp>
+        <p:nvSpPr>
+          <p:cNvPr id="16" name="limit-copy-1">
+            <a:extLst xmlns:a="http://schemas.openxmlformats.org/drawingml/2006/main">
+              <a:ext uri="{FF2B5EF4-FFF2-40B4-BE49-F238E27FC236}">
+                <a16:creationId xmlns:a16="http://schemas.microsoft.com/office/drawing/2014/main" id="{D421D142-943C-4107-972A-97DC39AAF03D}"/>
+              </a:ext>
+            </a:extLst>
+          </p:cNvPr>
+          <p:cNvSpPr>
+            <a:spLocks xmlns:a="http://schemas.openxmlformats.org/drawingml/2006/main" noGrp="1"/>
+          </p:cNvSpPr>
+          <p:nvPr/>
+        </p:nvSpPr>
+        <p:spPr>
+          <a:xfrm xmlns:a="http://schemas.openxmlformats.org/drawingml/2006/main">
+            <a:off x="838200" y="3543300"/>
+            <a:ext cx="4857750" cy="514350"/>
+          </a:xfrm>
+          <a:prstGeom xmlns:a="http://schemas.openxmlformats.org/drawingml/2006/main" prst="rect">
+            <a:avLst/>
+          </a:prstGeom>
+        </p:spPr>
+        <p:txBody>
+          <a:bodyPr xmlns:a="http://schemas.openxmlformats.org/drawingml/2006/main" wrap="square" lIns="0" tIns="0" rIns="0" bIns="0" anchor="t">
+            <a:noAutofit/>
+          </a:bodyPr>
+          <a:lstStyle xmlns:a="http://schemas.openxmlformats.org/drawingml/2006/main"/>
+          <a:p xmlns:a="http://schemas.openxmlformats.org/drawingml/2006/main">
+            <a:pPr algn="l">
+              <a:buNone/>
+              <a:defRPr sz="1575" b="0" i="0">
+                <a:solidFill>
+                  <a:srgbClr val="667587"/>
+                </a:solidFill>
+                <a:latin typeface="Arial"/>
+                <a:ea typeface="Arial"/>
+                <a:cs typeface="Arial"/>
+              </a:defRPr>
+            </a:pPr>
+            <a:r>
+              <a:t>Zensus-Stichtag 2022 und räumlicher Shift</a:t>
+            </a:r>
+          </a:p>
+        </p:txBody>
+      </p:sp>
+      <p:sp>
+        <p:nvSpPr>
+          <p:cNvPr id="17" name="mit-dot-1">
+            <a:extLst xmlns:a="http://schemas.openxmlformats.org/drawingml/2006/main">
+              <a:ext uri="{FF2B5EF4-FFF2-40B4-BE49-F238E27FC236}">
+                <a16:creationId xmlns:a16="http://schemas.microsoft.com/office/drawing/2014/main" id="{67B7C1AB-9E09-4067-89BC-3ED8B76004E3}"/>
+              </a:ext>
+            </a:extLst>
+          </p:cNvPr>
+          <p:cNvSpPr>
+            <a:spLocks xmlns:a="http://schemas.openxmlformats.org/drawingml/2006/main" noGrp="1"/>
+          </p:cNvSpPr>
+          <p:nvPr/>
+        </p:nvSpPr>
+        <p:spPr>
+          <a:xfrm xmlns:a="http://schemas.openxmlformats.org/drawingml/2006/main">
+            <a:off x="6705600" y="3619500"/>
+            <a:ext cx="171450" cy="171450"/>
+          </a:xfrm>
+          <a:prstGeom xmlns:a="http://schemas.openxmlformats.org/drawingml/2006/main" prst="ellipse">
+            <a:avLst/>
+          </a:prstGeom>
+          <a:solidFill xmlns:a="http://schemas.openxmlformats.org/drawingml/2006/main">
+            <a:srgbClr val="0F7B62"/>
+          </a:solidFill>
+          <a:ln xmlns:a="http://schemas.openxmlformats.org/drawingml/2006/main" w="0">
+            <a:solidFill>
+              <a:srgbClr val="0F7B62"/>
+            </a:solidFill>
+            <a:prstDash val="solid"/>
+          </a:ln>
+        </p:spPr>
+      </p:sp>
+      <p:sp>
+        <p:nvSpPr>
+          <p:cNvPr id="18" name="mit-copy-1">
+            <a:extLst xmlns:a="http://schemas.openxmlformats.org/drawingml/2006/main">
+              <a:ext uri="{FF2B5EF4-FFF2-40B4-BE49-F238E27FC236}">
+                <a16:creationId xmlns:a16="http://schemas.microsoft.com/office/drawing/2014/main" id="{F8644C7B-BF1E-48BC-B788-FD05FE1DEC20}"/>
+              </a:ext>
+            </a:extLst>
+          </p:cNvPr>
+          <p:cNvSpPr>
+            <a:spLocks xmlns:a="http://schemas.openxmlformats.org/drawingml/2006/main" noGrp="1"/>
+          </p:cNvSpPr>
+          <p:nvPr/>
+        </p:nvSpPr>
+        <p:spPr>
+          <a:xfrm xmlns:a="http://schemas.openxmlformats.org/drawingml/2006/main">
+            <a:off x="7048500" y="3543300"/>
+            <a:ext cx="4286250" cy="514350"/>
+          </a:xfrm>
+          <a:prstGeom xmlns:a="http://schemas.openxmlformats.org/drawingml/2006/main" prst="rect">
+            <a:avLst/>
+          </a:prstGeom>
+        </p:spPr>
+        <p:txBody>
+          <a:bodyPr xmlns:a="http://schemas.openxmlformats.org/drawingml/2006/main" wrap="square" lIns="0" tIns="0" rIns="0" bIns="0" anchor="t">
+            <a:noAutofit/>
+          </a:bodyPr>
+          <a:lstStyle xmlns:a="http://schemas.openxmlformats.org/drawingml/2006/main"/>
+          <a:p xmlns:a="http://schemas.openxmlformats.org/drawingml/2006/main">
+            <a:pPr algn="l">
+              <a:buNone/>
+              <a:defRPr sz="1575" b="0" i="0">
+                <a:solidFill>
+                  <a:srgbClr val="667587"/>
+                </a:solidFill>
+                <a:latin typeface="Arial"/>
+                <a:ea typeface="Arial"/>
+                <a:cs typeface="Arial"/>
+              </a:defRPr>
+            </a:pPr>
+            <a:r>
+              <a:t>aktuellen GREIX-Markt separat ausweisen</a:t>
+            </a:r>
+          </a:p>
+        </p:txBody>
+      </p:sp>
+      <p:sp>
+        <p:nvSpPr>
+          <p:cNvPr id="19" name="limit-dot-2">
+            <a:extLst xmlns:a="http://schemas.openxmlformats.org/drawingml/2006/main">
+              <a:ext uri="{FF2B5EF4-FFF2-40B4-BE49-F238E27FC236}">
+                <a16:creationId xmlns:a16="http://schemas.microsoft.com/office/drawing/2014/main" id="{B72C6549-DA74-4AA6-9F21-90E3D4309EBC}"/>
+              </a:ext>
+            </a:extLst>
+          </p:cNvPr>
+          <p:cNvSpPr>
+            <a:spLocks xmlns:a="http://schemas.openxmlformats.org/drawingml/2006/main" noGrp="1"/>
+          </p:cNvSpPr>
+          <p:nvPr/>
+        </p:nvSpPr>
+        <p:spPr>
+          <a:xfrm xmlns:a="http://schemas.openxmlformats.org/drawingml/2006/main">
+            <a:off x="495300" y="4305300"/>
+            <a:ext cx="171450" cy="171450"/>
+          </a:xfrm>
+          <a:prstGeom xmlns:a="http://schemas.openxmlformats.org/drawingml/2006/main" prst="ellipse">
+            <a:avLst/>
+          </a:prstGeom>
+          <a:solidFill xmlns:a="http://schemas.openxmlformats.org/drawingml/2006/main">
+            <a:srgbClr val="E85D3F"/>
+          </a:solidFill>
+          <a:ln xmlns:a="http://schemas.openxmlformats.org/drawingml/2006/main" w="0">
+            <a:solidFill>
+              <a:srgbClr val="E85D3F"/>
+            </a:solidFill>
+            <a:prstDash val="solid"/>
+          </a:ln>
+        </p:spPr>
+      </p:sp>
+      <p:sp>
+        <p:nvSpPr>
+          <p:cNvPr id="20" name="limit-copy-2">
+            <a:extLst xmlns:a="http://schemas.openxmlformats.org/drawingml/2006/main">
+              <a:ext uri="{FF2B5EF4-FFF2-40B4-BE49-F238E27FC236}">
+                <a16:creationId xmlns:a16="http://schemas.microsoft.com/office/drawing/2014/main" id="{FD9A2864-D2E7-4D66-A7E6-A1733FD4D267}"/>
+              </a:ext>
+            </a:extLst>
+          </p:cNvPr>
+          <p:cNvSpPr>
+            <a:spLocks xmlns:a="http://schemas.openxmlformats.org/drawingml/2006/main" noGrp="1"/>
+          </p:cNvSpPr>
+          <p:nvPr/>
+        </p:nvSpPr>
+        <p:spPr>
+          <a:xfrm xmlns:a="http://schemas.openxmlformats.org/drawingml/2006/main">
+            <a:off x="838200" y="4229100"/>
+            <a:ext cx="4857750" cy="514350"/>
+          </a:xfrm>
+          <a:prstGeom xmlns:a="http://schemas.openxmlformats.org/drawingml/2006/main" prst="rect">
+            <a:avLst/>
+          </a:prstGeom>
+        </p:spPr>
+        <p:txBody>
+          <a:bodyPr xmlns:a="http://schemas.openxmlformats.org/drawingml/2006/main" wrap="square" lIns="0" tIns="0" rIns="0" bIns="0" anchor="t">
+            <a:noAutofit/>
+          </a:bodyPr>
+          <a:lstStyle xmlns:a="http://schemas.openxmlformats.org/drawingml/2006/main"/>
+          <a:p xmlns:a="http://schemas.openxmlformats.org/drawingml/2006/main">
+            <a:pPr algn="l">
+              <a:buNone/>
+              <a:defRPr sz="1575" b="0" i="0">
+                <a:solidFill>
+                  <a:srgbClr val="667587"/>
+                </a:solidFill>
+                <a:latin typeface="Arial"/>
+                <a:ea typeface="Arial"/>
+                <a:cs typeface="Arial"/>
+              </a:defRPr>
+            </a:pPr>
+            <a:r>
+              <a:t>Angebotsdaten außerhalb der GREIX-Märkte</a:t>
+            </a:r>
+          </a:p>
+        </p:txBody>
+      </p:sp>
+      <p:sp>
+        <p:nvSpPr>
+          <p:cNvPr id="21" name="mit-dot-2">
+            <a:extLst xmlns:a="http://schemas.openxmlformats.org/drawingml/2006/main">
+              <a:ext uri="{FF2B5EF4-FFF2-40B4-BE49-F238E27FC236}">
+                <a16:creationId xmlns:a16="http://schemas.microsoft.com/office/drawing/2014/main" id="{DBB39BF6-D06F-4604-9961-5696EB5ECD5D}"/>
+              </a:ext>
+            </a:extLst>
+          </p:cNvPr>
+          <p:cNvSpPr>
+            <a:spLocks xmlns:a="http://schemas.openxmlformats.org/drawingml/2006/main" noGrp="1"/>
+          </p:cNvSpPr>
+          <p:nvPr/>
+        </p:nvSpPr>
+        <p:spPr>
+          <a:xfrm xmlns:a="http://schemas.openxmlformats.org/drawingml/2006/main">
+            <a:off x="6705600" y="4305300"/>
+            <a:ext cx="171450" cy="171450"/>
+          </a:xfrm>
+          <a:prstGeom xmlns:a="http://schemas.openxmlformats.org/drawingml/2006/main" prst="ellipse">
+            <a:avLst/>
+          </a:prstGeom>
+          <a:solidFill xmlns:a="http://schemas.openxmlformats.org/drawingml/2006/main">
+            <a:srgbClr val="0F7B62"/>
+          </a:solidFill>
+          <a:ln xmlns:a="http://schemas.openxmlformats.org/drawingml/2006/main" w="0">
+            <a:solidFill>
+              <a:srgbClr val="0F7B62"/>
+            </a:solidFill>
+            <a:prstDash val="solid"/>
+          </a:ln>
+        </p:spPr>
+      </p:sp>
+      <p:sp>
+        <p:nvSpPr>
+          <p:cNvPr id="22" name="mit-copy-2">
+            <a:extLst xmlns:a="http://schemas.openxmlformats.org/drawingml/2006/main">
+              <a:ext uri="{FF2B5EF4-FFF2-40B4-BE49-F238E27FC236}">
+                <a16:creationId xmlns:a16="http://schemas.microsoft.com/office/drawing/2014/main" id="{DEA41A41-08DC-484A-B0EF-4580F6645CF1}"/>
+              </a:ext>
+            </a:extLst>
+          </p:cNvPr>
+          <p:cNvSpPr>
+            <a:spLocks xmlns:a="http://schemas.openxmlformats.org/drawingml/2006/main" noGrp="1"/>
+          </p:cNvSpPr>
+          <p:nvPr/>
+        </p:nvSpPr>
+        <p:spPr>
+          <a:xfrm xmlns:a="http://schemas.openxmlformats.org/drawingml/2006/main">
+            <a:off x="7048500" y="4229100"/>
+            <a:ext cx="4286250" cy="514350"/>
+          </a:xfrm>
+          <a:prstGeom xmlns:a="http://schemas.openxmlformats.org/drawingml/2006/main" prst="rect">
+            <a:avLst/>
+          </a:prstGeom>
+        </p:spPr>
+        <p:txBody>
+          <a:bodyPr xmlns:a="http://schemas.openxmlformats.org/drawingml/2006/main" wrap="square" lIns="0" tIns="0" rIns="0" bIns="0" anchor="t">
+            <a:noAutofit/>
+          </a:bodyPr>
+          <a:lstStyle xmlns:a="http://schemas.openxmlformats.org/drawingml/2006/main"/>
+          <a:p xmlns:a="http://schemas.openxmlformats.org/drawingml/2006/main">
+            <a:pPr algn="l">
+              <a:buNone/>
+              <a:defRPr sz="1575" b="0" i="0">
+                <a:solidFill>
+                  <a:srgbClr val="667587"/>
+                </a:solidFill>
+                <a:latin typeface="Arial"/>
+                <a:ea typeface="Arial"/>
+                <a:cs typeface="Arial"/>
+              </a:defRPr>
+            </a:pPr>
+            <a:r>
+              <a:t>keine fehlenden Regionen erfinden</a:t>
+            </a:r>
+          </a:p>
+        </p:txBody>
+      </p:sp>
+      <p:sp>
+        <p:nvSpPr>
+          <p:cNvPr id="23" name="limit-dot-3">
+            <a:extLst xmlns:a="http://schemas.openxmlformats.org/drawingml/2006/main">
+              <a:ext uri="{FF2B5EF4-FFF2-40B4-BE49-F238E27FC236}">
+                <a16:creationId xmlns:a16="http://schemas.microsoft.com/office/drawing/2014/main" id="{E1065956-2E0E-4DBC-BD7C-899E8FCDA5E7}"/>
+              </a:ext>
+            </a:extLst>
+          </p:cNvPr>
+          <p:cNvSpPr>
+            <a:spLocks xmlns:a="http://schemas.openxmlformats.org/drawingml/2006/main" noGrp="1"/>
+          </p:cNvSpPr>
+          <p:nvPr/>
+        </p:nvSpPr>
+        <p:spPr>
+          <a:xfrm xmlns:a="http://schemas.openxmlformats.org/drawingml/2006/main">
+            <a:off x="495300" y="4991100"/>
+            <a:ext cx="171450" cy="171450"/>
+          </a:xfrm>
+          <a:prstGeom xmlns:a="http://schemas.openxmlformats.org/drawingml/2006/main" prst="ellipse">
+            <a:avLst/>
+          </a:prstGeom>
+          <a:solidFill xmlns:a="http://schemas.openxmlformats.org/drawingml/2006/main">
+            <a:srgbClr val="E85D3F"/>
+          </a:solidFill>
+          <a:ln xmlns:a="http://schemas.openxmlformats.org/drawingml/2006/main" w="0">
+            <a:solidFill>
+              <a:srgbClr val="E85D3F"/>
+            </a:solidFill>
+            <a:prstDash val="solid"/>
+          </a:ln>
+        </p:spPr>
+      </p:sp>
+      <p:sp>
+        <p:nvSpPr>
+          <p:cNvPr id="24" name="limit-copy-3">
+            <a:extLst xmlns:a="http://schemas.openxmlformats.org/drawingml/2006/main">
+              <a:ext uri="{FF2B5EF4-FFF2-40B4-BE49-F238E27FC236}">
+                <a16:creationId xmlns:a16="http://schemas.microsoft.com/office/drawing/2014/main" id="{4AF22B09-425D-4468-B63E-058F57B68285}"/>
+              </a:ext>
+            </a:extLst>
+          </p:cNvPr>
+          <p:cNvSpPr>
+            <a:spLocks xmlns:a="http://schemas.openxmlformats.org/drawingml/2006/main" noGrp="1"/>
+          </p:cNvSpPr>
+          <p:nvPr/>
+        </p:nvSpPr>
+        <p:spPr>
+          <a:xfrm xmlns:a="http://schemas.openxmlformats.org/drawingml/2006/main">
+            <a:off x="838200" y="4914900"/>
+            <a:ext cx="4857750" cy="514350"/>
+          </a:xfrm>
+          <a:prstGeom xmlns:a="http://schemas.openxmlformats.org/drawingml/2006/main" prst="rect">
+            <a:avLst/>
+          </a:prstGeom>
+        </p:spPr>
+        <p:txBody>
+          <a:bodyPr xmlns:a="http://schemas.openxmlformats.org/drawingml/2006/main" wrap="square" lIns="0" tIns="0" rIns="0" bIns="0" anchor="t">
+            <a:noAutofit/>
+          </a:bodyPr>
+          <a:lstStyle xmlns:a="http://schemas.openxmlformats.org/drawingml/2006/main"/>
+          <a:p xmlns:a="http://schemas.openxmlformats.org/drawingml/2006/main">
+            <a:pPr algn="l">
+              <a:buNone/>
+              <a:defRPr sz="1575" b="0" i="0">
+                <a:solidFill>
+                  <a:srgbClr val="667587"/>
+                </a:solidFill>
+                <a:latin typeface="Arial"/>
+                <a:ea typeface="Arial"/>
+                <a:cs typeface="Arial"/>
+              </a:defRPr>
+            </a:pPr>
+            <a:r>
+              <a:t>nominale 90-%-Coverage nicht erreicht</a:t>
+            </a:r>
+          </a:p>
+        </p:txBody>
+      </p:sp>
+      <p:sp>
+        <p:nvSpPr>
+          <p:cNvPr id="25" name="mit-dot-3">
+            <a:extLst xmlns:a="http://schemas.openxmlformats.org/drawingml/2006/main">
+              <a:ext uri="{FF2B5EF4-FFF2-40B4-BE49-F238E27FC236}">
+                <a16:creationId xmlns:a16="http://schemas.microsoft.com/office/drawing/2014/main" id="{D1BA2AFD-3626-4EBE-AA4E-4B1BEF48B8F9}"/>
+              </a:ext>
+            </a:extLst>
+          </p:cNvPr>
+          <p:cNvSpPr>
+            <a:spLocks xmlns:a="http://schemas.openxmlformats.org/drawingml/2006/main" noGrp="1"/>
+          </p:cNvSpPr>
+          <p:nvPr/>
+        </p:nvSpPr>
+        <p:spPr>
+          <a:xfrm xmlns:a="http://schemas.openxmlformats.org/drawingml/2006/main">
+            <a:off x="6705600" y="4991100"/>
+            <a:ext cx="171450" cy="171450"/>
+          </a:xfrm>
+          <a:prstGeom xmlns:a="http://schemas.openxmlformats.org/drawingml/2006/main" prst="ellipse">
+            <a:avLst/>
+          </a:prstGeom>
+          <a:solidFill xmlns:a="http://schemas.openxmlformats.org/drawingml/2006/main">
+            <a:srgbClr val="0F7B62"/>
+          </a:solidFill>
+          <a:ln xmlns:a="http://schemas.openxmlformats.org/drawingml/2006/main" w="0">
+            <a:solidFill>
+              <a:srgbClr val="0F7B62"/>
+            </a:solidFill>
+            <a:prstDash val="solid"/>
+          </a:ln>
+        </p:spPr>
+      </p:sp>
+      <p:sp>
+        <p:nvSpPr>
+          <p:cNvPr id="26" name="mit-copy-3">
+            <a:extLst xmlns:a="http://schemas.openxmlformats.org/drawingml/2006/main">
+              <a:ext uri="{FF2B5EF4-FFF2-40B4-BE49-F238E27FC236}">
+                <a16:creationId xmlns:a16="http://schemas.microsoft.com/office/drawing/2014/main" id="{D17182A3-0D2D-4DF2-A106-4F150423EBC3}"/>
+              </a:ext>
+            </a:extLst>
+          </p:cNvPr>
+          <p:cNvSpPr>
+            <a:spLocks xmlns:a="http://schemas.openxmlformats.org/drawingml/2006/main" noGrp="1"/>
+          </p:cNvSpPr>
+          <p:nvPr/>
+        </p:nvSpPr>
+        <p:spPr>
+          <a:xfrm xmlns:a="http://schemas.openxmlformats.org/drawingml/2006/main">
+            <a:off x="7048500" y="4914900"/>
+            <a:ext cx="4286250" cy="514350"/>
+          </a:xfrm>
+          <a:prstGeom xmlns:a="http://schemas.openxmlformats.org/drawingml/2006/main" prst="rect">
+            <a:avLst/>
+          </a:prstGeom>
+        </p:spPr>
+        <p:txBody>
+          <a:bodyPr xmlns:a="http://schemas.openxmlformats.org/drawingml/2006/main" wrap="square" lIns="0" tIns="0" rIns="0" bIns="0" anchor="t">
+            <a:noAutofit/>
+          </a:bodyPr>
+          <a:lstStyle xmlns:a="http://schemas.openxmlformats.org/drawingml/2006/main"/>
+          <a:p xmlns:a="http://schemas.openxmlformats.org/drawingml/2006/main">
+            <a:pPr algn="l">
+              <a:buNone/>
+              <a:defRPr sz="1575" b="0" i="0">
+                <a:solidFill>
+                  <a:srgbClr val="667587"/>
+                </a:solidFill>
+                <a:latin typeface="Arial"/>
+                <a:ea typeface="Arial"/>
+                <a:cs typeface="Arial"/>
+              </a:defRPr>
+            </a:pPr>
+            <a:r>
+              <a:t>empirische 86,8 % offen kommunizieren</a:t>
+            </a:r>
+          </a:p>
+        </p:txBody>
+      </p:sp>
+      <p:sp>
+        <p:nvSpPr>
+          <p:cNvPr id="27" name="not-advice">
+            <a:extLst xmlns:a="http://schemas.openxmlformats.org/drawingml/2006/main">
+              <a:ext uri="{FF2B5EF4-FFF2-40B4-BE49-F238E27FC236}">
+                <a16:creationId xmlns:a16="http://schemas.microsoft.com/office/drawing/2014/main" id="{D8247965-B413-4039-8BA9-83240F1781FA}"/>
+              </a:ext>
+            </a:extLst>
+          </p:cNvPr>
+          <p:cNvSpPr>
+            <a:spLocks xmlns:a="http://schemas.openxmlformats.org/drawingml/2006/main" noGrp="1"/>
+          </p:cNvSpPr>
+          <p:nvPr/>
+        </p:nvSpPr>
+        <p:spPr>
+          <a:xfrm xmlns:a="http://schemas.openxmlformats.org/drawingml/2006/main">
+            <a:off x="457200" y="5791200"/>
             <a:ext cx="11049000" cy="419100"/>
-          </a:xfrm>
-          <a:prstGeom xmlns:a="http://schemas.openxmlformats.org/drawingml/2006/main" prst="rect">
-            <a:avLst/>
-          </a:prstGeom>
-        </p:spPr>
-        <p:txBody>
-          <a:bodyPr xmlns:a="http://schemas.openxmlformats.org/drawingml/2006/main" wrap="square" lIns="0" tIns="0" rIns="0" bIns="0" anchor="t">
-            <a:noAutofit/>
-          </a:bodyPr>
-          <a:lstStyle xmlns:a="http://schemas.openxmlformats.org/drawingml/2006/main"/>
-          <a:p xmlns:a="http://schemas.openxmlformats.org/drawingml/2006/main">
-            <a:pPr algn="l">
-              <a:defRPr sz="1725" b="0" i="0">
-                <a:solidFill>
-                  <a:srgbClr val="667587"/>
-                </a:solidFill>
-                <a:latin typeface="Arial"/>
-                <a:ea typeface="Arial"/>
-                <a:cs typeface="Arial"/>
-              </a:defRPr>
-            </a:pPr>
-            <a:r>
-              <a:t>Download → Build → Spatial CV → Tuning → finales Training → GREIX-Profile → Notebooks → Streamlit</a:t>
-            </a:r>
-          </a:p>
-        </p:txBody>
-      </p:sp>
-      <p:sp>
-        <p:nvSpPr>
-          <p:cNvPr id="14" name="sources-code">
-            <a:extLst xmlns:a="http://schemas.openxmlformats.org/drawingml/2006/main">
-              <a:ext uri="{FF2B5EF4-FFF2-40B4-BE49-F238E27FC236}">
-                <a16:creationId xmlns:a16="http://schemas.microsoft.com/office/drawing/2014/main" id="{A6283417-4B44-4B98-BB27-C7DA65ADE49E}"/>
-              </a:ext>
-            </a:extLst>
-          </p:cNvPr>
-          <p:cNvSpPr>
-            <a:spLocks xmlns:a="http://schemas.openxmlformats.org/drawingml/2006/main" noGrp="1"/>
-          </p:cNvSpPr>
-          <p:nvPr/>
-        </p:nvSpPr>
-        <p:spPr>
-          <a:xfrm xmlns:a="http://schemas.openxmlformats.org/drawingml/2006/main">
-            <a:off x="457200" y="5162550"/>
-            <a:ext cx="11049000" cy="819150"/>
           </a:xfrm>
           <a:prstGeom xmlns:a="http://schemas.openxmlformats.org/drawingml/2006/main" prst="rect">
             <a:avLst/>
@@ -5866,22 +6157,22 @@
       </p:sp>
       <p:sp>
         <p:nvSpPr>
-          <p:cNvPr id="15" name="sources-code-text">
-            <a:extLst xmlns:a="http://schemas.openxmlformats.org/drawingml/2006/main">
-              <a:ext uri="{FF2B5EF4-FFF2-40B4-BE49-F238E27FC236}">
-                <a16:creationId xmlns:a16="http://schemas.microsoft.com/office/drawing/2014/main" id="{F34B8F02-9BD0-4C66-B679-6A54855A78C7}"/>
-              </a:ext>
-            </a:extLst>
-          </p:cNvPr>
-          <p:cNvSpPr>
-            <a:spLocks xmlns:a="http://schemas.openxmlformats.org/drawingml/2006/main" noGrp="1"/>
-          </p:cNvSpPr>
-          <p:nvPr/>
-        </p:nvSpPr>
-        <p:spPr>
-          <a:xfrm xmlns:a="http://schemas.openxmlformats.org/drawingml/2006/main">
-            <a:off x="685800" y="5410200"/>
-            <a:ext cx="10591800" cy="400050"/>
+          <p:cNvPr id="28" name="not-advice-text">
+            <a:extLst xmlns:a="http://schemas.openxmlformats.org/drawingml/2006/main">
+              <a:ext uri="{FF2B5EF4-FFF2-40B4-BE49-F238E27FC236}">
+                <a16:creationId xmlns:a16="http://schemas.microsoft.com/office/drawing/2014/main" id="{DD9BC2A2-4C9F-4C0A-B305-B70F79AD05EB}"/>
+              </a:ext>
+            </a:extLst>
+          </p:cNvPr>
+          <p:cNvSpPr>
+            <a:spLocks xmlns:a="http://schemas.openxmlformats.org/drawingml/2006/main" noGrp="1"/>
+          </p:cNvSpPr>
+          <p:nvPr/>
+        </p:nvSpPr>
+        <p:spPr>
+          <a:xfrm xmlns:a="http://schemas.openxmlformats.org/drawingml/2006/main">
+            <a:off x="666750" y="5886450"/>
+            <a:ext cx="10629900" cy="247650"/>
           </a:xfrm>
           <a:prstGeom xmlns:a="http://schemas.openxmlformats.org/drawingml/2006/main" prst="rect">
             <a:avLst/>
@@ -5894,7 +6185,8 @@
           <a:lstStyle xmlns:a="http://schemas.openxmlformats.org/drawingml/2006/main"/>
           <a:p xmlns:a="http://schemas.openxmlformats.org/drawingml/2006/main">
             <a:pPr algn="ctr">
-              <a:defRPr sz="1650" b="1" i="0">
+              <a:buNone/>
+              <a:defRPr sz="1425" b="1" i="0">
                 <a:solidFill>
                   <a:srgbClr val="102138"/>
                 </a:solidFill>
@@ -5904,7 +6196,7 @@
               </a:defRPr>
             </a:pPr>
             <a:r>
-              <a:t>scripts/ · notebooks/ · reports/ · models/ · tests/ · docs/DATA_CARD.md · docs/MODEL_CARD.md</a:t>
+              <a:t>Kein amtlicher Mietspiegel · keine Rechtsberatung · keine Bonitäts- oder Vermieterentscheidung</a:t>
             </a:r>
           </a:p>
         </p:txBody>
@@ -5912,7 +6204,7 @@
     </p:spTree>
     <p:extLst>
       <p:ext uri="{BB962C8B-B14F-4D97-AF65-F5344CB8AC3E}">
-        <p14:creationId xmlns:p14="http://schemas.microsoft.com/office/powerpoint/2010/main" val="815019331"/>
+        <p14:creationId xmlns:p14="http://schemas.microsoft.com/office/powerpoint/2010/main" val="541892130"/>
       </p:ext>
     </p:extLst>
   </p:cSld>
@@ -5920,6 +6212,288 @@
 </file>
 
 <file path=ppt/slides/slide14.xml><?xml version="1.0" encoding="utf-8"?>
+<p:sld xmlns:p="http://schemas.openxmlformats.org/presentationml/2006/main">
+  <p:cSld>
+    <p:bg>
+      <p:bgPr>
+        <a:solidFill xmlns:a="http://schemas.openxmlformats.org/drawingml/2006/main">
+          <a:srgbClr val="102138"/>
+        </a:solidFill>
+      </p:bgPr>
+    </p:bg>
+    <p:spTree>
+      <p:nvGrpSpPr>
+        <p:cNvPr id="1" name=""/>
+        <p:cNvGrpSpPr/>
+        <p:nvPr/>
+      </p:nvGrpSpPr>
+      <p:grpSpPr>
+        <a:xfrm xmlns:a="http://schemas.openxmlformats.org/drawingml/2006/main"/>
+      </p:grpSpPr>
+      <p:sp>
+        <p:nvSpPr>
+          <p:cNvPr id="7" name="conclusion-kicker">
+            <a:extLst xmlns:a="http://schemas.openxmlformats.org/drawingml/2006/main">
+              <a:ext uri="{FF2B5EF4-FFF2-40B4-BE49-F238E27FC236}">
+                <a16:creationId xmlns:a16="http://schemas.microsoft.com/office/drawing/2014/main" id="{A9783E21-7A02-4E63-BEE7-7D97DBAC251C}"/>
+              </a:ext>
+            </a:extLst>
+          </p:cNvPr>
+          <p:cNvSpPr>
+            <a:spLocks xmlns:a="http://schemas.openxmlformats.org/drawingml/2006/main" noGrp="1"/>
+          </p:cNvSpPr>
+          <p:nvPr/>
+        </p:nvSpPr>
+        <p:spPr>
+          <a:xfrm xmlns:a="http://schemas.openxmlformats.org/drawingml/2006/main">
+            <a:off x="533400" y="457200"/>
+            <a:ext cx="1905000" cy="323850"/>
+          </a:xfrm>
+          <a:prstGeom xmlns:a="http://schemas.openxmlformats.org/drawingml/2006/main" prst="rect">
+            <a:avLst/>
+          </a:prstGeom>
+        </p:spPr>
+        <p:txBody>
+          <a:bodyPr xmlns:a="http://schemas.openxmlformats.org/drawingml/2006/main" wrap="square" lIns="0" tIns="0" rIns="0" bIns="0" anchor="t">
+            <a:noAutofit/>
+          </a:bodyPr>
+          <a:lstStyle xmlns:a="http://schemas.openxmlformats.org/drawingml/2006/main"/>
+          <a:p xmlns:a="http://schemas.openxmlformats.org/drawingml/2006/main">
+            <a:pPr algn="l">
+              <a:buNone/>
+              <a:defRPr sz="1500" b="1" i="0">
+                <a:solidFill>
+                  <a:srgbClr val="71E2B7"/>
+                </a:solidFill>
+                <a:latin typeface="Arial"/>
+                <a:ea typeface="Arial"/>
+                <a:cs typeface="Arial"/>
+              </a:defRPr>
+            </a:pPr>
+            <a:r>
+              <a:t>FAZIT · QUA³CK GESCHLOSSEN</a:t>
+            </a:r>
+          </a:p>
+        </p:txBody>
+      </p:sp>
+      <p:sp>
+        <p:nvSpPr>
+          <p:cNvPr id="2" name="conclusion-title">
+            <a:extLst xmlns:a="http://schemas.openxmlformats.org/drawingml/2006/main">
+              <a:ext uri="{FF2B5EF4-FFF2-40B4-BE49-F238E27FC236}">
+                <a16:creationId xmlns:a16="http://schemas.microsoft.com/office/drawing/2014/main" id="{12A9F7B3-107F-4DA8-BA91-CF1A94295C6F}"/>
+              </a:ext>
+            </a:extLst>
+          </p:cNvPr>
+          <p:cNvSpPr>
+            <a:spLocks xmlns:a="http://schemas.openxmlformats.org/drawingml/2006/main" noGrp="1"/>
+          </p:cNvSpPr>
+          <p:nvPr/>
+        </p:nvSpPr>
+        <p:spPr>
+          <a:xfrm xmlns:a="http://schemas.openxmlformats.org/drawingml/2006/main">
+            <a:off x="533400" y="1543050"/>
+            <a:ext cx="10668000" cy="2095500"/>
+          </a:xfrm>
+          <a:prstGeom xmlns:a="http://schemas.openxmlformats.org/drawingml/2006/main" prst="rect">
+            <a:avLst/>
+          </a:prstGeom>
+        </p:spPr>
+        <p:txBody>
+          <a:bodyPr xmlns:a="http://schemas.openxmlformats.org/drawingml/2006/main" wrap="square" lIns="0" tIns="0" rIns="0" bIns="0" anchor="t">
+            <a:noAutofit/>
+          </a:bodyPr>
+          <a:lstStyle xmlns:a="http://schemas.openxmlformats.org/drawingml/2006/main"/>
+          <a:p xmlns:a="http://schemas.openxmlformats.org/drawingml/2006/main">
+            <a:pPr algn="l">
+              <a:buNone/>
+              <a:defRPr sz="5400" b="1" i="0">
+                <a:solidFill>
+                  <a:srgbClr val="FFFFFF"/>
+                </a:solidFill>
+                <a:latin typeface="Arial"/>
+                <a:ea typeface="Arial"/>
+                <a:cs typeface="Arial"/>
+              </a:defRPr>
+            </a:pPr>
+            <a:r>
+              <a:t>Nicht eine „faire“ Miete.
+Eine nachvollziehbare Umzugsentscheidung.</a:t>
+            </a:r>
+          </a:p>
+        </p:txBody>
+      </p:sp>
+      <p:sp>
+        <p:nvSpPr>
+          <p:cNvPr id="3" name="conclusion-proof">
+            <a:extLst xmlns:a="http://schemas.openxmlformats.org/drawingml/2006/main">
+              <a:ext uri="{FF2B5EF4-FFF2-40B4-BE49-F238E27FC236}">
+                <a16:creationId xmlns:a16="http://schemas.microsoft.com/office/drawing/2014/main" id="{426EFC8B-986D-4707-814A-5F17FA452352}"/>
+              </a:ext>
+            </a:extLst>
+          </p:cNvPr>
+          <p:cNvSpPr>
+            <a:spLocks xmlns:a="http://schemas.openxmlformats.org/drawingml/2006/main" noGrp="1"/>
+          </p:cNvSpPr>
+          <p:nvPr/>
+        </p:nvSpPr>
+        <p:spPr>
+          <a:xfrm xmlns:a="http://schemas.openxmlformats.org/drawingml/2006/main">
+            <a:off x="533400" y="4095750"/>
+            <a:ext cx="10668000" cy="723900"/>
+          </a:xfrm>
+          <a:prstGeom xmlns:a="http://schemas.openxmlformats.org/drawingml/2006/main" prst="rect">
+            <a:avLst/>
+          </a:prstGeom>
+        </p:spPr>
+        <p:txBody>
+          <a:bodyPr xmlns:a="http://schemas.openxmlformats.org/drawingml/2006/main" wrap="square" lIns="0" tIns="0" rIns="0" bIns="0" anchor="t">
+            <a:noAutofit/>
+          </a:bodyPr>
+          <a:lstStyle xmlns:a="http://schemas.openxmlformats.org/drawingml/2006/main"/>
+          <a:p xmlns:a="http://schemas.openxmlformats.org/drawingml/2006/main">
+            <a:pPr algn="l">
+              <a:buNone/>
+              <a:defRPr sz="1800" b="0" i="0">
+                <a:solidFill>
+                  <a:srgbClr val="D7DEE8"/>
+                </a:solidFill>
+                <a:latin typeface="Arial"/>
+                <a:ea typeface="Arial"/>
+                <a:cs typeface="Arial"/>
+              </a:defRPr>
+            </a:pPr>
+            <a:r>
+              <a:t>2,06 Mio. Zeilen · StandardScaler verstanden · 7 Kandidaten · Spatial Holdout · 38,3 % Gewinn · 86,8 % Coverage</a:t>
+            </a:r>
+          </a:p>
+        </p:txBody>
+      </p:sp>
+      <p:cxnSp>
+        <p:nvCxnSpPr>
+          <p:cNvPr id="18" name="conclusion-rule"/>
+          <p:cNvCxnSpPr/>
+          <p:nvPr/>
+        </p:nvCxnSpPr>
+        <p:spPr>
+          <a:xfrm xmlns:a="http://schemas.openxmlformats.org/drawingml/2006/main">
+            <a:off x="533400" y="5295900"/>
+            <a:ext cx="10668000" cy="286"/>
+          </a:xfrm>
+          <a:prstGeom xmlns:a="http://schemas.openxmlformats.org/drawingml/2006/main" prst="straightConnector1">
+            <a:avLst/>
+          </a:prstGeom>
+          <a:ln xmlns:a="http://schemas.openxmlformats.org/drawingml/2006/main" w="19050">
+            <a:solidFill>
+              <a:srgbClr val="3B4B60"/>
+            </a:solidFill>
+            <a:prstDash val="solid"/>
+          </a:ln>
+        </p:spPr>
+      </p:cxnSp>
+      <p:sp>
+        <p:nvSpPr>
+          <p:cNvPr id="5" name="conclusion-close">
+            <a:extLst xmlns:a="http://schemas.openxmlformats.org/drawingml/2006/main">
+              <a:ext uri="{FF2B5EF4-FFF2-40B4-BE49-F238E27FC236}">
+                <a16:creationId xmlns:a16="http://schemas.microsoft.com/office/drawing/2014/main" id="{8B624221-185C-4722-8C76-79EA142DE066}"/>
+              </a:ext>
+            </a:extLst>
+          </p:cNvPr>
+          <p:cNvSpPr>
+            <a:spLocks xmlns:a="http://schemas.openxmlformats.org/drawingml/2006/main" noGrp="1"/>
+          </p:cNvSpPr>
+          <p:nvPr/>
+        </p:nvSpPr>
+        <p:spPr>
+          <a:xfrm xmlns:a="http://schemas.openxmlformats.org/drawingml/2006/main">
+            <a:off x="533400" y="5562600"/>
+            <a:ext cx="9906000" cy="571500"/>
+          </a:xfrm>
+          <a:prstGeom xmlns:a="http://schemas.openxmlformats.org/drawingml/2006/main" prst="rect">
+            <a:avLst/>
+          </a:prstGeom>
+        </p:spPr>
+        <p:txBody>
+          <a:bodyPr xmlns:a="http://schemas.openxmlformats.org/drawingml/2006/main" wrap="square" lIns="0" tIns="0" rIns="0" bIns="0" anchor="t">
+            <a:noAutofit/>
+          </a:bodyPr>
+          <a:lstStyle xmlns:a="http://schemas.openxmlformats.org/drawingml/2006/main"/>
+          <a:p xmlns:a="http://schemas.openxmlformats.org/drawingml/2006/main">
+            <a:pPr algn="l">
+              <a:buNone/>
+              <a:defRPr sz="1950" b="1" i="0">
+                <a:solidFill>
+                  <a:srgbClr val="71E2B7"/>
+                </a:solidFill>
+                <a:latin typeface="Arial"/>
+                <a:ea typeface="Arial"/>
+                <a:cs typeface="Arial"/>
+              </a:defRPr>
+            </a:pPr>
+            <a:r>
+              <a:t>MietCheck übersetzt Big Data und ehrliches Machine Learning in einen echten persönlichen Mehrwert.</a:t>
+            </a:r>
+          </a:p>
+        </p:txBody>
+      </p:sp>
+      <p:sp>
+        <p:nvSpPr>
+          <p:cNvPr id="6" name="conclusion-page">
+            <a:extLst xmlns:a="http://schemas.openxmlformats.org/drawingml/2006/main">
+              <a:ext uri="{FF2B5EF4-FFF2-40B4-BE49-F238E27FC236}">
+                <a16:creationId xmlns:a16="http://schemas.microsoft.com/office/drawing/2014/main" id="{FD6BCA4C-6701-4E94-94B4-47B92254C342}"/>
+              </a:ext>
+            </a:extLst>
+          </p:cNvPr>
+          <p:cNvSpPr>
+            <a:spLocks xmlns:a="http://schemas.openxmlformats.org/drawingml/2006/main" noGrp="1"/>
+          </p:cNvSpPr>
+          <p:nvPr/>
+        </p:nvSpPr>
+        <p:spPr>
+          <a:xfrm xmlns:a="http://schemas.openxmlformats.org/drawingml/2006/main">
+            <a:off x="11049000" y="6381750"/>
+            <a:ext cx="457200" cy="228600"/>
+          </a:xfrm>
+          <a:prstGeom xmlns:a="http://schemas.openxmlformats.org/drawingml/2006/main" prst="rect">
+            <a:avLst/>
+          </a:prstGeom>
+        </p:spPr>
+        <p:txBody>
+          <a:bodyPr xmlns:a="http://schemas.openxmlformats.org/drawingml/2006/main" wrap="square" lIns="0" tIns="0" rIns="0" bIns="0" anchor="t">
+            <a:noAutofit/>
+          </a:bodyPr>
+          <a:lstStyle xmlns:a="http://schemas.openxmlformats.org/drawingml/2006/main"/>
+          <a:p xmlns:a="http://schemas.openxmlformats.org/drawingml/2006/main">
+            <a:pPr algn="r">
+              <a:buNone/>
+              <a:defRPr sz="975" b="0" i="0">
+                <a:solidFill>
+                  <a:srgbClr val="AAB5C3"/>
+                </a:solidFill>
+                <a:latin typeface="Arial"/>
+                <a:ea typeface="Arial"/>
+                <a:cs typeface="Arial"/>
+              </a:defRPr>
+            </a:pPr>
+            <a:r>
+              <a:t>14</a:t>
+            </a:r>
+          </a:p>
+        </p:txBody>
+      </p:sp>
+    </p:spTree>
+    <p:extLst>
+      <p:ext uri="{BB962C8B-B14F-4D97-AF65-F5344CB8AC3E}">
+        <p14:creationId xmlns:p14="http://schemas.microsoft.com/office/powerpoint/2010/main" val="851703861"/>
+      </p:ext>
+    </p:extLst>
+  </p:cSld>
+</p:sld>
+</file>
+
+<file path=ppt/slides/slide15.xml><?xml version="1.0" encoding="utf-8"?>
 <p:sld xmlns:p="http://schemas.openxmlformats.org/presentationml/2006/main">
   <p:cSld>
     <p:bg>
@@ -5940,10 +6514,10 @@
       </p:grpSpPr>
       <p:sp>
         <p:nvSpPr>
-          <p:cNvPr id="10" name="header-14">
-            <a:extLst xmlns:a="http://schemas.openxmlformats.org/drawingml/2006/main">
-              <a:ext uri="{FF2B5EF4-FFF2-40B4-BE49-F238E27FC236}">
-                <a16:creationId xmlns:a16="http://schemas.microsoft.com/office/drawing/2014/main" id="{E261884E-116B-4B66-8E75-4712AA8E4843}"/>
+          <p:cNvPr id="16" name="header-13">
+            <a:extLst xmlns:a="http://schemas.openxmlformats.org/drawingml/2006/main">
+              <a:ext uri="{FF2B5EF4-FFF2-40B4-BE49-F238E27FC236}">
+                <a16:creationId xmlns:a16="http://schemas.microsoft.com/office/drawing/2014/main" id="{2CD076FD-D4E2-433F-B474-C7867F3D538B}"/>
               </a:ext>
             </a:extLst>
           </p:cNvPr>
@@ -5973,10 +6547,10 @@
       </p:sp>
       <p:sp>
         <p:nvSpPr>
-          <p:cNvPr id="2" name="header-teal-14">
-            <a:extLst xmlns:a="http://schemas.openxmlformats.org/drawingml/2006/main">
-              <a:ext uri="{FF2B5EF4-FFF2-40B4-BE49-F238E27FC236}">
-                <a16:creationId xmlns:a16="http://schemas.microsoft.com/office/drawing/2014/main" id="{3B84F365-066A-4BFA-B48A-96B2533189D7}"/>
+          <p:cNvPr id="2" name="header-teal-13">
+            <a:extLst xmlns:a="http://schemas.openxmlformats.org/drawingml/2006/main">
+              <a:ext uri="{FF2B5EF4-FFF2-40B4-BE49-F238E27FC236}">
+                <a16:creationId xmlns:a16="http://schemas.microsoft.com/office/drawing/2014/main" id="{6E18CD19-21E4-4971-B783-F35A938F560A}"/>
               </a:ext>
             </a:extLst>
           </p:cNvPr>
@@ -6006,10 +6580,10 @@
       </p:sp>
       <p:sp>
         <p:nvSpPr>
-          <p:cNvPr id="3" name="header-accent-14">
-            <a:extLst xmlns:a="http://schemas.openxmlformats.org/drawingml/2006/main">
-              <a:ext uri="{FF2B5EF4-FFF2-40B4-BE49-F238E27FC236}">
-                <a16:creationId xmlns:a16="http://schemas.microsoft.com/office/drawing/2014/main" id="{AA8CB4CA-CD3E-48FA-969E-749C88489132}"/>
+          <p:cNvPr id="3" name="header-accent-13">
+            <a:extLst xmlns:a="http://schemas.openxmlformats.org/drawingml/2006/main">
+              <a:ext uri="{FF2B5EF4-FFF2-40B4-BE49-F238E27FC236}">
+                <a16:creationId xmlns:a16="http://schemas.microsoft.com/office/drawing/2014/main" id="{CCF94777-7A5C-4147-B3E4-A13E01D3EBD9}"/>
               </a:ext>
             </a:extLst>
           </p:cNvPr>
@@ -6039,10 +6613,10 @@
       </p:sp>
       <p:sp>
         <p:nvSpPr>
-          <p:cNvPr id="4" name="title-14">
-            <a:extLst xmlns:a="http://schemas.openxmlformats.org/drawingml/2006/main">
-              <a:ext uri="{FF2B5EF4-FFF2-40B4-BE49-F238E27FC236}">
-                <a16:creationId xmlns:a16="http://schemas.microsoft.com/office/drawing/2014/main" id="{101A38BC-0DA2-48A8-8F9E-E1B6AF093A83}"/>
+          <p:cNvPr id="4" name="title-13">
+            <a:extLst xmlns:a="http://schemas.openxmlformats.org/drawingml/2006/main">
+              <a:ext uri="{FF2B5EF4-FFF2-40B4-BE49-F238E27FC236}">
+                <a16:creationId xmlns:a16="http://schemas.microsoft.com/office/drawing/2014/main" id="{E920D481-0D5D-4D08-BDF4-AF2BE3028EB2}"/>
               </a:ext>
             </a:extLst>
           </p:cNvPr>
@@ -6067,6 +6641,7 @@
           <a:lstStyle xmlns:a="http://schemas.openxmlformats.org/drawingml/2006/main"/>
           <a:p xmlns:a="http://schemas.openxmlformats.org/drawingml/2006/main">
             <a:pPr algn="l">
+              <a:buNone/>
               <a:defRPr sz="3225" b="1" i="0">
                 <a:solidFill>
                   <a:srgbClr val="FFFFFF"/>
@@ -6077,17 +6652,17 @@
               </a:defRPr>
             </a:pPr>
             <a:r>
-              <a:t>Methodische Detailwerte für Rückfragen</a:t>
-            </a:r>
-          </a:p>
-        </p:txBody>
-      </p:sp>
-      <p:sp>
-        <p:nvSpPr>
-          <p:cNvPr id="5" name="source-14">
-            <a:extLst xmlns:a="http://schemas.openxmlformats.org/drawingml/2006/main">
-              <a:ext uri="{FF2B5EF4-FFF2-40B4-BE49-F238E27FC236}">
-                <a16:creationId xmlns:a16="http://schemas.microsoft.com/office/drawing/2014/main" id="{2104415F-5FB0-4BF8-A836-F3616AC2B626}"/>
+              <a:t>Backup · Quellen und Reproduzierbarkeit</a:t>
+            </a:r>
+          </a:p>
+        </p:txBody>
+      </p:sp>
+      <p:sp>
+        <p:nvSpPr>
+          <p:cNvPr id="5" name="source-13">
+            <a:extLst xmlns:a="http://schemas.openxmlformats.org/drawingml/2006/main">
+              <a:ext uri="{FF2B5EF4-FFF2-40B4-BE49-F238E27FC236}">
+                <a16:creationId xmlns:a16="http://schemas.microsoft.com/office/drawing/2014/main" id="{22EF8BF9-60F6-4D2D-BF33-19F40312D271}"/>
               </a:ext>
             </a:extLst>
           </p:cNvPr>
@@ -6112,6 +6687,7 @@
           <a:lstStyle xmlns:a="http://schemas.openxmlformats.org/drawingml/2006/main"/>
           <a:p xmlns:a="http://schemas.openxmlformats.org/drawingml/2006/main">
             <a:pPr algn="l">
+              <a:buNone/>
               <a:defRPr sz="900" b="0" i="0">
                 <a:solidFill>
                   <a:srgbClr val="667587"/>
@@ -6122,17 +6698,17 @@
               </a:defRPr>
             </a:pPr>
             <a:r>
-              <a:t>Quelle: models/zensus_hgb_meta.json und reports/final_model_evaluation.json.</a:t>
-            </a:r>
-          </a:p>
-        </p:txBody>
-      </p:sp>
-      <p:sp>
-        <p:nvSpPr>
-          <p:cNvPr id="6" name="page-14">
-            <a:extLst xmlns:a="http://schemas.openxmlformats.org/drawingml/2006/main">
-              <a:ext uri="{FF2B5EF4-FFF2-40B4-BE49-F238E27FC236}">
-                <a16:creationId xmlns:a16="http://schemas.microsoft.com/office/drawing/2014/main" id="{F9F78A5B-62B3-4372-AB70-A2FE5159DE1B}"/>
+              <a:t/>
+            </a:r>
+          </a:p>
+        </p:txBody>
+      </p:sp>
+      <p:sp>
+        <p:nvSpPr>
+          <p:cNvPr id="6" name="page-13">
+            <a:extLst xmlns:a="http://schemas.openxmlformats.org/drawingml/2006/main">
+              <a:ext uri="{FF2B5EF4-FFF2-40B4-BE49-F238E27FC236}">
+                <a16:creationId xmlns:a16="http://schemas.microsoft.com/office/drawing/2014/main" id="{6530395F-337D-4405-9E2C-F25840B63ECC}"/>
               </a:ext>
             </a:extLst>
           </p:cNvPr>
@@ -6157,6 +6733,7 @@
           <a:lstStyle xmlns:a="http://schemas.openxmlformats.org/drawingml/2006/main"/>
           <a:p xmlns:a="http://schemas.openxmlformats.org/drawingml/2006/main">
             <a:pPr algn="r">
+              <a:buNone/>
               <a:defRPr sz="975" b="0" i="0">
                 <a:solidFill>
                   <a:srgbClr val="667587"/>
@@ -6167,29 +6744,29 @@
               </a:defRPr>
             </a:pPr>
             <a:r>
-              <a:t>14</a:t>
-            </a:r>
-          </a:p>
-        </p:txBody>
-      </p:sp>
-      <p:sp>
-        <p:nvSpPr>
-          <p:cNvPr id="7" name="method-detail-lead">
-            <a:extLst xmlns:a="http://schemas.openxmlformats.org/drawingml/2006/main">
-              <a:ext uri="{FF2B5EF4-FFF2-40B4-BE49-F238E27FC236}">
-                <a16:creationId xmlns:a16="http://schemas.microsoft.com/office/drawing/2014/main" id="{8F2FB01A-1EBA-4530-AD71-CD7346F8F4C5}"/>
-              </a:ext>
-            </a:extLst>
-          </p:cNvPr>
-          <p:cNvSpPr>
-            <a:spLocks xmlns:a="http://schemas.openxmlformats.org/drawingml/2006/main" noGrp="1"/>
-          </p:cNvSpPr>
-          <p:nvPr/>
-        </p:nvSpPr>
-        <p:spPr>
-          <a:xfrm xmlns:a="http://schemas.openxmlformats.org/drawingml/2006/main">
-            <a:off x="457200" y="1352550"/>
-            <a:ext cx="11049000" cy="476250"/>
+              <a:t>15</a:t>
+            </a:r>
+          </a:p>
+        </p:txBody>
+      </p:sp>
+      <p:sp>
+        <p:nvSpPr>
+          <p:cNvPr id="7" name="sources-one-title">
+            <a:extLst xmlns:a="http://schemas.openxmlformats.org/drawingml/2006/main">
+              <a:ext uri="{FF2B5EF4-FFF2-40B4-BE49-F238E27FC236}">
+                <a16:creationId xmlns:a16="http://schemas.microsoft.com/office/drawing/2014/main" id="{B47C0066-7B17-4687-B334-E76AEA45A722}"/>
+              </a:ext>
+            </a:extLst>
+          </p:cNvPr>
+          <p:cNvSpPr>
+            <a:spLocks xmlns:a="http://schemas.openxmlformats.org/drawingml/2006/main" noGrp="1"/>
+          </p:cNvSpPr>
+          <p:nvPr/>
+        </p:nvSpPr>
+        <p:spPr>
+          <a:xfrm xmlns:a="http://schemas.openxmlformats.org/drawingml/2006/main">
+            <a:off x="457200" y="1524000"/>
+            <a:ext cx="3143250" cy="323850"/>
           </a:xfrm>
           <a:prstGeom xmlns:a="http://schemas.openxmlformats.org/drawingml/2006/main" prst="rect">
             <a:avLst/>
@@ -6202,7 +6779,54 @@
           <a:lstStyle xmlns:a="http://schemas.openxmlformats.org/drawingml/2006/main"/>
           <a:p xmlns:a="http://schemas.openxmlformats.org/drawingml/2006/main">
             <a:pPr algn="l">
-              <a:defRPr sz="1650" b="0" i="0">
+              <a:buNone/>
+              <a:defRPr sz="1950" b="1" i="0">
+                <a:solidFill>
+                  <a:srgbClr val="0F7B62"/>
+                </a:solidFill>
+                <a:latin typeface="Arial"/>
+                <a:ea typeface="Arial"/>
+                <a:cs typeface="Arial"/>
+              </a:defRPr>
+            </a:pPr>
+            <a:r>
+              <a:t>Zensus 2022</a:t>
+            </a:r>
+          </a:p>
+        </p:txBody>
+      </p:sp>
+      <p:sp>
+        <p:nvSpPr>
+          <p:cNvPr id="8" name="sources-one-body">
+            <a:extLst xmlns:a="http://schemas.openxmlformats.org/drawingml/2006/main">
+              <a:ext uri="{FF2B5EF4-FFF2-40B4-BE49-F238E27FC236}">
+                <a16:creationId xmlns:a16="http://schemas.microsoft.com/office/drawing/2014/main" id="{52420C3A-CEA9-4C96-B15D-52FA05D22C13}"/>
+              </a:ext>
+            </a:extLst>
+          </p:cNvPr>
+          <p:cNvSpPr>
+            <a:spLocks xmlns:a="http://schemas.openxmlformats.org/drawingml/2006/main" noGrp="1"/>
+          </p:cNvSpPr>
+          <p:nvPr/>
+        </p:nvSpPr>
+        <p:spPr>
+          <a:xfrm xmlns:a="http://schemas.openxmlformats.org/drawingml/2006/main">
+            <a:off x="457200" y="2000250"/>
+            <a:ext cx="4953000" cy="1181100"/>
+          </a:xfrm>
+          <a:prstGeom xmlns:a="http://schemas.openxmlformats.org/drawingml/2006/main" prst="rect">
+            <a:avLst/>
+          </a:prstGeom>
+        </p:spPr>
+        <p:txBody>
+          <a:bodyPr xmlns:a="http://schemas.openxmlformats.org/drawingml/2006/main" wrap="square" lIns="0" tIns="0" rIns="0" bIns="0" anchor="t">
+            <a:noAutofit/>
+          </a:bodyPr>
+          <a:lstStyle xmlns:a="http://schemas.openxmlformats.org/drawingml/2006/main"/>
+          <a:p xmlns:a="http://schemas.openxmlformats.org/drawingml/2006/main">
+            <a:pPr algn="l">
+              <a:buNone/>
+              <a:defRPr sz="1575" b="0" i="0">
                 <a:solidFill>
                   <a:srgbClr val="667587"/>
                 </a:solidFill>
@@ -6212,451 +6836,275 @@
               </a:defRPr>
             </a:pPr>
             <a:r>
-              <a:t>Finales HGB: learning_rate 0,06 · 300 Iterationen · 127 Blätter · min. 100 Zeilen/Blatt · L2 = 5</a:t>
-            </a:r>
-          </a:p>
-        </p:txBody>
-      </p:sp>
-      <p:graphicFrame>
-        <p:nvGraphicFramePr>
-          <p:cNvPr id="17" name=""/>
-          <p:cNvGraphicFramePr/>
-          <p:nvPr/>
-        </p:nvGraphicFramePr>
-        <p:xfrm>
-          <a:off xmlns:a="http://schemas.openxmlformats.org/drawingml/2006/main" x="457200" y="2190750"/>
-          <a:ext xmlns:a="http://schemas.openxmlformats.org/drawingml/2006/main" cx="11049000" cy="2857500"/>
-        </p:xfrm>
-        <a:graphic xmlns:a="http://schemas.openxmlformats.org/drawingml/2006/main">
-          <a:graphicData uri="http://schemas.openxmlformats.org/drawingml/2006/table">
-            <a:tbl>
-              <a:tblPr/>
-              <a:tblGrid>
-                <a:gridCol w="4572000"/>
-                <a:gridCol w="2000250"/>
-                <a:gridCol w="2000250"/>
-                <a:gridCol w="2476500"/>
-              </a:tblGrid>
-              <a:tr h="571500">
-                <a:tc>
-                  <a:txBody>
-                    <a:bodyPr/>
-                    <a:lstStyle/>
-                    <a:p>
-                      <a:r>
-                        <a:rPr sz="1350" b="1">
-                          <a:solidFill>
-                            <a:srgbClr val="FFFFFF"/>
-                          </a:solidFill>
-                        </a:rPr>
-                        <a:t>Subgruppe</a:t>
-                      </a:r>
-                    </a:p>
-                  </a:txBody>
-                  <a:tcPr marL="114300" marR="114300" marT="114300" marB="114300">
-                    <a:solidFill>
-                      <a:srgbClr val="102138"/>
-                    </a:solidFill>
-                  </a:tcPr>
-                </a:tc>
-                <a:tc>
-                  <a:txBody>
-                    <a:bodyPr/>
-                    <a:lstStyle/>
-                    <a:p>
-                      <a:r>
-                        <a:rPr sz="1350" b="1">
-                          <a:solidFill>
-                            <a:srgbClr val="FFFFFF"/>
-                          </a:solidFill>
-                        </a:rPr>
-                        <a:t>Zeilen</a:t>
-                      </a:r>
-                    </a:p>
-                  </a:txBody>
-                  <a:tcPr marL="114300" marR="114300" marT="114300" marB="114300">
-                    <a:solidFill>
-                      <a:srgbClr val="102138"/>
-                    </a:solidFill>
-                  </a:tcPr>
-                </a:tc>
-                <a:tc>
-                  <a:txBody>
-                    <a:bodyPr/>
-                    <a:lstStyle/>
-                    <a:p>
-                      <a:r>
-                        <a:rPr sz="1350" b="1">
-                          <a:solidFill>
-                            <a:srgbClr val="FFFFFF"/>
-                          </a:solidFill>
-                        </a:rPr>
-                        <a:t>MAE €/m²</a:t>
-                      </a:r>
-                    </a:p>
-                  </a:txBody>
-                  <a:tcPr marL="114300" marR="114300" marT="114300" marB="114300">
-                    <a:solidFill>
-                      <a:srgbClr val="102138"/>
-                    </a:solidFill>
-                  </a:tcPr>
-                </a:tc>
-                <a:tc>
-                  <a:txBody>
-                    <a:bodyPr/>
-                    <a:lstStyle/>
-                    <a:p>
-                      <a:r>
-                        <a:rPr sz="1350" b="1">
-                          <a:solidFill>
-                            <a:srgbClr val="FFFFFF"/>
-                          </a:solidFill>
-                        </a:rPr>
-                        <a:t>Intervall-Coverage</a:t>
-                      </a:r>
-                    </a:p>
-                  </a:txBody>
-                  <a:tcPr marL="114300" marR="114300" marT="114300" marB="114300">
-                    <a:solidFill>
-                      <a:srgbClr val="102138"/>
-                    </a:solidFill>
-                  </a:tcPr>
-                </a:tc>
-              </a:tr>
-              <a:tr h="571500">
-                <a:tc>
-                  <a:txBody>
-                    <a:bodyPr/>
-                    <a:lstStyle/>
-                    <a:p>
-                      <a:r>
-                        <a:rPr sz="1350">
-                          <a:solidFill>
-                            <a:srgbClr val="102138"/>
-                          </a:solidFill>
-                        </a:rPr>
-                        <a:t>Gebäude bis 1990 · ≤65 m²</a:t>
-                      </a:r>
-                    </a:p>
-                  </a:txBody>
-                  <a:tcPr marL="114300" marR="114300" marT="114300" marB="114300"/>
-                </a:tc>
-                <a:tc>
-                  <a:txBody>
-                    <a:bodyPr/>
-                    <a:lstStyle/>
-                    <a:p>
-                      <a:r>
-                        <a:rPr sz="1350">
-                          <a:solidFill>
-                            <a:srgbClr val="102138"/>
-                          </a:solidFill>
-                        </a:rPr>
-                        <a:t>81.662</a:t>
-                      </a:r>
-                    </a:p>
-                  </a:txBody>
-                  <a:tcPr marL="114300" marR="114300" marT="114300" marB="114300"/>
-                </a:tc>
-                <a:tc>
-                  <a:txBody>
-                    <a:bodyPr/>
-                    <a:lstStyle/>
-                    <a:p>
-                      <a:r>
-                        <a:rPr sz="1350">
-                          <a:solidFill>
-                            <a:srgbClr val="102138"/>
-                          </a:solidFill>
-                        </a:rPr>
-                        <a:t>1,436</a:t>
-                      </a:r>
-                    </a:p>
-                  </a:txBody>
-                  <a:tcPr marL="114300" marR="114300" marT="114300" marB="114300"/>
-                </a:tc>
-                <a:tc>
-                  <a:txBody>
-                    <a:bodyPr/>
-                    <a:lstStyle/>
-                    <a:p>
-                      <a:r>
-                        <a:rPr sz="1350">
-                          <a:solidFill>
-                            <a:srgbClr val="102138"/>
-                          </a:solidFill>
-                        </a:rPr>
-                        <a:t>87,4 %</a:t>
-                      </a:r>
-                    </a:p>
-                  </a:txBody>
-                  <a:tcPr marL="114300" marR="114300" marT="114300" marB="114300"/>
-                </a:tc>
-              </a:tr>
-              <a:tr h="571500">
-                <a:tc>
-                  <a:txBody>
-                    <a:bodyPr/>
-                    <a:lstStyle/>
-                    <a:p>
-                      <a:r>
-                        <a:rPr sz="1350">
-                          <a:solidFill>
-                            <a:srgbClr val="102138"/>
-                          </a:solidFill>
-                        </a:rPr>
-                        <a:t>Gebäude bis 1990 · &gt;65 m²</a:t>
-                      </a:r>
-                    </a:p>
-                  </a:txBody>
-                  <a:tcPr marL="114300" marR="114300" marT="114300" marB="114300"/>
-                </a:tc>
-                <a:tc>
-                  <a:txBody>
-                    <a:bodyPr/>
-                    <a:lstStyle/>
-                    <a:p>
-                      <a:r>
-                        <a:rPr sz="1350">
-                          <a:solidFill>
-                            <a:srgbClr val="102138"/>
-                          </a:solidFill>
-                        </a:rPr>
-                        <a:t>114.791</a:t>
-                      </a:r>
-                    </a:p>
-                  </a:txBody>
-                  <a:tcPr marL="114300" marR="114300" marT="114300" marB="114300"/>
-                </a:tc>
-                <a:tc>
-                  <a:txBody>
-                    <a:bodyPr/>
-                    <a:lstStyle/>
-                    <a:p>
-                      <a:r>
-                        <a:rPr sz="1350">
-                          <a:solidFill>
-                            <a:srgbClr val="102138"/>
-                          </a:solidFill>
-                        </a:rPr>
-                        <a:t>1,170</a:t>
-                      </a:r>
-                    </a:p>
-                  </a:txBody>
-                  <a:tcPr marL="114300" marR="114300" marT="114300" marB="114300"/>
-                </a:tc>
-                <a:tc>
-                  <a:txBody>
-                    <a:bodyPr/>
-                    <a:lstStyle/>
-                    <a:p>
-                      <a:r>
-                        <a:rPr sz="1350">
-                          <a:solidFill>
-                            <a:srgbClr val="102138"/>
-                          </a:solidFill>
-                        </a:rPr>
-                        <a:t>87,6 %</a:t>
-                      </a:r>
-                    </a:p>
-                  </a:txBody>
-                  <a:tcPr marL="114300" marR="114300" marT="114300" marB="114300"/>
-                </a:tc>
-              </a:tr>
-              <a:tr h="571500">
-                <a:tc>
-                  <a:txBody>
-                    <a:bodyPr/>
-                    <a:lstStyle/>
-                    <a:p>
-                      <a:r>
-                        <a:rPr sz="1350">
-                          <a:solidFill>
-                            <a:srgbClr val="102138"/>
-                          </a:solidFill>
-                        </a:rPr>
-                        <a:t>Gebäude nach 1990 · ≤65 m²</a:t>
-                      </a:r>
-                    </a:p>
-                  </a:txBody>
-                  <a:tcPr marL="114300" marR="114300" marT="114300" marB="114300">
-                    <a:solidFill>
-                      <a:srgbClr val="FEF3C7"/>
-                    </a:solidFill>
-                  </a:tcPr>
-                </a:tc>
-                <a:tc>
-                  <a:txBody>
-                    <a:bodyPr/>
-                    <a:lstStyle/>
-                    <a:p>
-                      <a:r>
-                        <a:rPr sz="1350">
-                          <a:solidFill>
-                            <a:srgbClr val="102138"/>
-                          </a:solidFill>
-                        </a:rPr>
-                        <a:t>29.417</a:t>
-                      </a:r>
-                    </a:p>
-                  </a:txBody>
-                  <a:tcPr marL="114300" marR="114300" marT="114300" marB="114300">
-                    <a:solidFill>
-                      <a:srgbClr val="FEF3C7"/>
-                    </a:solidFill>
-                  </a:tcPr>
-                </a:tc>
-                <a:tc>
-                  <a:txBody>
-                    <a:bodyPr/>
-                    <a:lstStyle/>
-                    <a:p>
-                      <a:r>
-                        <a:rPr sz="1350">
-                          <a:solidFill>
-                            <a:srgbClr val="102138"/>
-                          </a:solidFill>
-                        </a:rPr>
-                        <a:t>1,907</a:t>
-                      </a:r>
-                    </a:p>
-                  </a:txBody>
-                  <a:tcPr marL="114300" marR="114300" marT="114300" marB="114300">
-                    <a:solidFill>
-                      <a:srgbClr val="FEF3C7"/>
-                    </a:solidFill>
-                  </a:tcPr>
-                </a:tc>
-                <a:tc>
-                  <a:txBody>
-                    <a:bodyPr/>
-                    <a:lstStyle/>
-                    <a:p>
-                      <a:r>
-                        <a:rPr sz="1350">
-                          <a:solidFill>
-                            <a:srgbClr val="102138"/>
-                          </a:solidFill>
-                        </a:rPr>
-                        <a:t>85,2 %</a:t>
-                      </a:r>
-                    </a:p>
-                  </a:txBody>
-                  <a:tcPr marL="114300" marR="114300" marT="114300" marB="114300">
-                    <a:solidFill>
-                      <a:srgbClr val="FEF3C7"/>
-                    </a:solidFill>
-                  </a:tcPr>
-                </a:tc>
-              </a:tr>
-              <a:tr h="571500">
-                <a:tc>
-                  <a:txBody>
-                    <a:bodyPr/>
-                    <a:lstStyle/>
-                    <a:p>
-                      <a:r>
-                        <a:rPr sz="1350">
-                          <a:solidFill>
-                            <a:srgbClr val="102138"/>
-                          </a:solidFill>
-                        </a:rPr>
-                        <a:t>Gebäude nach 1990 · &gt;65 m²</a:t>
-                      </a:r>
-                    </a:p>
-                  </a:txBody>
-                  <a:tcPr marL="114300" marR="114300" marT="114300" marB="114300">
-                    <a:solidFill>
-                      <a:srgbClr val="FEF3C7"/>
-                    </a:solidFill>
-                  </a:tcPr>
-                </a:tc>
-                <a:tc>
-                  <a:txBody>
-                    <a:bodyPr/>
-                    <a:lstStyle/>
-                    <a:p>
-                      <a:r>
-                        <a:rPr sz="1350">
-                          <a:solidFill>
-                            <a:srgbClr val="102138"/>
-                          </a:solidFill>
-                        </a:rPr>
-                        <a:t>50.588</a:t>
-                      </a:r>
-                    </a:p>
-                  </a:txBody>
-                  <a:tcPr marL="114300" marR="114300" marT="114300" marB="114300">
-                    <a:solidFill>
-                      <a:srgbClr val="FEF3C7"/>
-                    </a:solidFill>
-                  </a:tcPr>
-                </a:tc>
-                <a:tc>
-                  <a:txBody>
-                    <a:bodyPr/>
-                    <a:lstStyle/>
-                    <a:p>
-                      <a:r>
-                        <a:rPr sz="1350">
-                          <a:solidFill>
-                            <a:srgbClr val="102138"/>
-                          </a:solidFill>
-                        </a:rPr>
-                        <a:t>1,642</a:t>
-                      </a:r>
-                    </a:p>
-                  </a:txBody>
-                  <a:tcPr marL="114300" marR="114300" marT="114300" marB="114300">
-                    <a:solidFill>
-                      <a:srgbClr val="FEF3C7"/>
-                    </a:solidFill>
-                  </a:tcPr>
-                </a:tc>
-                <a:tc>
-                  <a:txBody>
-                    <a:bodyPr/>
-                    <a:lstStyle/>
-                    <a:p>
-                      <a:r>
-                        <a:rPr sz="1350">
-                          <a:solidFill>
-                            <a:srgbClr val="102138"/>
-                          </a:solidFill>
-                        </a:rPr>
-                        <a:t>85,1 %</a:t>
-                      </a:r>
-                    </a:p>
-                  </a:txBody>
-                  <a:tcPr marL="114300" marR="114300" marT="114300" marB="114300">
-                    <a:solidFill>
-                      <a:srgbClr val="FEF3C7"/>
-                    </a:solidFill>
-                  </a:tcPr>
-                </a:tc>
-              </a:tr>
-            </a:tbl>
-          </a:graphicData>
-        </a:graphic>
-      </p:graphicFrame>
-      <p:sp>
-        <p:nvSpPr>
-          <p:cNvPr id="9" name="method-detail-conclusion">
-            <a:extLst xmlns:a="http://schemas.openxmlformats.org/drawingml/2006/main">
-              <a:ext uri="{FF2B5EF4-FFF2-40B4-BE49-F238E27FC236}">
-                <a16:creationId xmlns:a16="http://schemas.microsoft.com/office/drawing/2014/main" id="{93BB9590-1783-4A46-9CDB-B658ADECD9EF}"/>
-              </a:ext>
-            </a:extLst>
-          </p:cNvPr>
-          <p:cNvSpPr>
-            <a:spLocks xmlns:a="http://schemas.openxmlformats.org/drawingml/2006/main" noGrp="1"/>
-          </p:cNvSpPr>
-          <p:nvPr/>
-        </p:nvSpPr>
-        <p:spPr>
-          <a:xfrm xmlns:a="http://schemas.openxmlformats.org/drawingml/2006/main">
-            <a:off x="457200" y="5429250"/>
-            <a:ext cx="11049000" cy="457200"/>
+              <a:t>Statistische Ämter des Bundes und der Länder
+100-m-Gitterdaten · Datenlizenz Deutschland – Namensnennung 2.0
+Stichtag: 15.05.2022 · Veröffentlichung 2025</a:t>
+            </a:r>
+          </a:p>
+        </p:txBody>
+      </p:sp>
+      <p:sp>
+        <p:nvSpPr>
+          <p:cNvPr id="9" name="sources-two-title">
+            <a:extLst xmlns:a="http://schemas.openxmlformats.org/drawingml/2006/main">
+              <a:ext uri="{FF2B5EF4-FFF2-40B4-BE49-F238E27FC236}">
+                <a16:creationId xmlns:a16="http://schemas.microsoft.com/office/drawing/2014/main" id="{73B91E00-1407-4856-8C68-6E11CE870C78}"/>
+              </a:ext>
+            </a:extLst>
+          </p:cNvPr>
+          <p:cNvSpPr>
+            <a:spLocks xmlns:a="http://schemas.openxmlformats.org/drawingml/2006/main" noGrp="1"/>
+          </p:cNvSpPr>
+          <p:nvPr/>
+        </p:nvSpPr>
+        <p:spPr>
+          <a:xfrm xmlns:a="http://schemas.openxmlformats.org/drawingml/2006/main">
+            <a:off x="6286500" y="1524000"/>
+            <a:ext cx="4000500" cy="323850"/>
+          </a:xfrm>
+          <a:prstGeom xmlns:a="http://schemas.openxmlformats.org/drawingml/2006/main" prst="rect">
+            <a:avLst/>
+          </a:prstGeom>
+        </p:spPr>
+        <p:txBody>
+          <a:bodyPr xmlns:a="http://schemas.openxmlformats.org/drawingml/2006/main" wrap="square" lIns="0" tIns="0" rIns="0" bIns="0" anchor="t">
+            <a:noAutofit/>
+          </a:bodyPr>
+          <a:lstStyle xmlns:a="http://schemas.openxmlformats.org/drawingml/2006/main"/>
+          <a:p xmlns:a="http://schemas.openxmlformats.org/drawingml/2006/main">
+            <a:pPr algn="l">
+              <a:buNone/>
+              <a:defRPr sz="1950" b="1" i="0">
+                <a:solidFill>
+                  <a:srgbClr val="315CFF"/>
+                </a:solidFill>
+                <a:latin typeface="Arial"/>
+                <a:ea typeface="Arial"/>
+                <a:cs typeface="Arial"/>
+              </a:defRPr>
+            </a:pPr>
+            <a:r>
+              <a:t>GREIX Mietpreisindex</a:t>
+            </a:r>
+          </a:p>
+        </p:txBody>
+      </p:sp>
+      <p:sp>
+        <p:nvSpPr>
+          <p:cNvPr id="10" name="sources-two-body">
+            <a:extLst xmlns:a="http://schemas.openxmlformats.org/drawingml/2006/main">
+              <a:ext uri="{FF2B5EF4-FFF2-40B4-BE49-F238E27FC236}">
+                <a16:creationId xmlns:a16="http://schemas.microsoft.com/office/drawing/2014/main" id="{07CB8445-206B-4569-8FB3-E385D5A620DC}"/>
+              </a:ext>
+            </a:extLst>
+          </p:cNvPr>
+          <p:cNvSpPr>
+            <a:spLocks xmlns:a="http://schemas.openxmlformats.org/drawingml/2006/main" noGrp="1"/>
+          </p:cNvSpPr>
+          <p:nvPr/>
+        </p:nvSpPr>
+        <p:spPr>
+          <a:xfrm xmlns:a="http://schemas.openxmlformats.org/drawingml/2006/main">
+            <a:off x="6286500" y="2000250"/>
+            <a:ext cx="5219700" cy="1181100"/>
+          </a:xfrm>
+          <a:prstGeom xmlns:a="http://schemas.openxmlformats.org/drawingml/2006/main" prst="rect">
+            <a:avLst/>
+          </a:prstGeom>
+        </p:spPr>
+        <p:txBody>
+          <a:bodyPr xmlns:a="http://schemas.openxmlformats.org/drawingml/2006/main" wrap="square" lIns="0" tIns="0" rIns="0" bIns="0" anchor="t">
+            <a:noAutofit/>
+          </a:bodyPr>
+          <a:lstStyle xmlns:a="http://schemas.openxmlformats.org/drawingml/2006/main"/>
+          <a:p xmlns:a="http://schemas.openxmlformats.org/drawingml/2006/main">
+            <a:pPr algn="l">
+              <a:buNone/>
+              <a:defRPr sz="1575" b="0" i="0">
+                <a:solidFill>
+                  <a:srgbClr val="667587"/>
+                </a:solidFill>
+                <a:latin typeface="Arial"/>
+                <a:ea typeface="Arial"/>
+                <a:cs typeface="Arial"/>
+              </a:defRPr>
+            </a:pPr>
+            <a:r>
+              <a:t>Kiel Institut für Weltwirtschaft auf Basis der VALUE Marktdatenbank
+Nominale Quartalswerte 2012-Q1 bis 2026-Q1
+37 lokale Märkte plus Deutschlandreferenz</a:t>
+            </a:r>
+          </a:p>
+        </p:txBody>
+      </p:sp>
+      <p:cxnSp>
+        <p:nvCxnSpPr>
+          <p:cNvPr id="48" name="sources-divider"/>
+          <p:cNvCxnSpPr/>
+          <p:nvPr/>
+        </p:nvCxnSpPr>
+        <p:spPr>
+          <a:xfrm xmlns:a="http://schemas.openxmlformats.org/drawingml/2006/main">
+            <a:off x="457200" y="3543300"/>
+            <a:ext cx="11049000" cy="286"/>
+          </a:xfrm>
+          <a:prstGeom xmlns:a="http://schemas.openxmlformats.org/drawingml/2006/main" prst="straightConnector1">
+            <a:avLst/>
+          </a:prstGeom>
+          <a:ln xmlns:a="http://schemas.openxmlformats.org/drawingml/2006/main" w="19050">
+            <a:solidFill>
+              <a:srgbClr val="D6E1DF"/>
+            </a:solidFill>
+            <a:prstDash val="solid"/>
+          </a:ln>
+        </p:spPr>
+      </p:cxnSp>
+      <p:sp>
+        <p:nvSpPr>
+          <p:cNvPr id="12" name="sources-repro-title">
+            <a:extLst xmlns:a="http://schemas.openxmlformats.org/drawingml/2006/main">
+              <a:ext uri="{FF2B5EF4-FFF2-40B4-BE49-F238E27FC236}">
+                <a16:creationId xmlns:a16="http://schemas.microsoft.com/office/drawing/2014/main" id="{F8D67AEF-8165-4356-B8ED-2A174E8AE818}"/>
+              </a:ext>
+            </a:extLst>
+          </p:cNvPr>
+          <p:cNvSpPr>
+            <a:spLocks xmlns:a="http://schemas.openxmlformats.org/drawingml/2006/main" noGrp="1"/>
+          </p:cNvSpPr>
+          <p:nvPr/>
+        </p:nvSpPr>
+        <p:spPr>
+          <a:xfrm xmlns:a="http://schemas.openxmlformats.org/drawingml/2006/main">
+            <a:off x="457200" y="3905250"/>
+            <a:ext cx="4000500" cy="323850"/>
+          </a:xfrm>
+          <a:prstGeom xmlns:a="http://schemas.openxmlformats.org/drawingml/2006/main" prst="rect">
+            <a:avLst/>
+          </a:prstGeom>
+        </p:spPr>
+        <p:txBody>
+          <a:bodyPr xmlns:a="http://schemas.openxmlformats.org/drawingml/2006/main" wrap="square" lIns="0" tIns="0" rIns="0" bIns="0" anchor="t">
+            <a:noAutofit/>
+          </a:bodyPr>
+          <a:lstStyle xmlns:a="http://schemas.openxmlformats.org/drawingml/2006/main"/>
+          <a:p xmlns:a="http://schemas.openxmlformats.org/drawingml/2006/main">
+            <a:pPr algn="l">
+              <a:buNone/>
+              <a:defRPr sz="1950" b="1" i="0">
+                <a:solidFill>
+                  <a:srgbClr val="102138"/>
+                </a:solidFill>
+                <a:latin typeface="Arial"/>
+                <a:ea typeface="Arial"/>
+                <a:cs typeface="Arial"/>
+              </a:defRPr>
+            </a:pPr>
+            <a:r>
+              <a:t>Reproduzierbar im Repository</a:t>
+            </a:r>
+          </a:p>
+        </p:txBody>
+      </p:sp>
+      <p:sp>
+        <p:nvSpPr>
+          <p:cNvPr id="13" name="sources-repro-body">
+            <a:extLst xmlns:a="http://schemas.openxmlformats.org/drawingml/2006/main">
+              <a:ext uri="{FF2B5EF4-FFF2-40B4-BE49-F238E27FC236}">
+                <a16:creationId xmlns:a16="http://schemas.microsoft.com/office/drawing/2014/main" id="{74CED86B-6349-4E4D-996A-92AAF05EE255}"/>
+              </a:ext>
+            </a:extLst>
+          </p:cNvPr>
+          <p:cNvSpPr>
+            <a:spLocks xmlns:a="http://schemas.openxmlformats.org/drawingml/2006/main" noGrp="1"/>
+          </p:cNvSpPr>
+          <p:nvPr/>
+        </p:nvSpPr>
+        <p:spPr>
+          <a:xfrm xmlns:a="http://schemas.openxmlformats.org/drawingml/2006/main">
+            <a:off x="457200" y="4419600"/>
+            <a:ext cx="11049000" cy="419100"/>
+          </a:xfrm>
+          <a:prstGeom xmlns:a="http://schemas.openxmlformats.org/drawingml/2006/main" prst="rect">
+            <a:avLst/>
+          </a:prstGeom>
+        </p:spPr>
+        <p:txBody>
+          <a:bodyPr xmlns:a="http://schemas.openxmlformats.org/drawingml/2006/main" wrap="square" lIns="0" tIns="0" rIns="0" bIns="0" anchor="t">
+            <a:noAutofit/>
+          </a:bodyPr>
+          <a:lstStyle xmlns:a="http://schemas.openxmlformats.org/drawingml/2006/main"/>
+          <a:p xmlns:a="http://schemas.openxmlformats.org/drawingml/2006/main">
+            <a:pPr algn="l">
+              <a:buNone/>
+              <a:defRPr sz="1725" b="0" i="0">
+                <a:solidFill>
+                  <a:srgbClr val="667587"/>
+                </a:solidFill>
+                <a:latin typeface="Arial"/>
+                <a:ea typeface="Arial"/>
+                <a:cs typeface="Arial"/>
+              </a:defRPr>
+            </a:pPr>
+            <a:r>
+              <a:t>Q-, U-, A- und C-Phase als ausgeführte Notebooks
+K-Phase als Knowledge-Transfer-Dokument
+24/24 Codezellen ohne Fehler · JSON-Reports · GitHub Actions
+Model/Data/Risk Cards · MLflow Registry · Docker</a:t>
+            </a:r>
+          </a:p>
+        </p:txBody>
+      </p:sp>
+      <p:sp>
+        <p:nvSpPr>
+          <p:cNvPr id="14" name="sources-code">
+            <a:extLst xmlns:a="http://schemas.openxmlformats.org/drawingml/2006/main">
+              <a:ext uri="{FF2B5EF4-FFF2-40B4-BE49-F238E27FC236}">
+                <a16:creationId xmlns:a16="http://schemas.microsoft.com/office/drawing/2014/main" id="{A6283417-4B44-4B98-BB27-C7DA65ADE49E}"/>
+              </a:ext>
+            </a:extLst>
+          </p:cNvPr>
+          <p:cNvSpPr>
+            <a:spLocks xmlns:a="http://schemas.openxmlformats.org/drawingml/2006/main" noGrp="1"/>
+          </p:cNvSpPr>
+          <p:nvPr/>
+        </p:nvSpPr>
+        <p:spPr>
+          <a:xfrm xmlns:a="http://schemas.openxmlformats.org/drawingml/2006/main">
+            <a:off x="457200" y="5162550"/>
+            <a:ext cx="11049000" cy="819150"/>
+          </a:xfrm>
+          <a:prstGeom xmlns:a="http://schemas.openxmlformats.org/drawingml/2006/main" prst="rect">
+            <a:avLst/>
+          </a:prstGeom>
+          <a:solidFill xmlns:a="http://schemas.openxmlformats.org/drawingml/2006/main">
+            <a:srgbClr val="FFFFFF"/>
+          </a:solidFill>
+          <a:ln xmlns:a="http://schemas.openxmlformats.org/drawingml/2006/main" w="0">
+            <a:solidFill>
+              <a:srgbClr val="FFFFFF"/>
+            </a:solidFill>
+            <a:prstDash val="solid"/>
+          </a:ln>
+        </p:spPr>
+      </p:sp>
+      <p:sp>
+        <p:nvSpPr>
+          <p:cNvPr id="15" name="sources-code-text">
+            <a:extLst xmlns:a="http://schemas.openxmlformats.org/drawingml/2006/main">
+              <a:ext uri="{FF2B5EF4-FFF2-40B4-BE49-F238E27FC236}">
+                <a16:creationId xmlns:a16="http://schemas.microsoft.com/office/drawing/2014/main" id="{F34B8F02-9BD0-4C66-B679-6A54855A78C7}"/>
+              </a:ext>
+            </a:extLst>
+          </p:cNvPr>
+          <p:cNvSpPr>
+            <a:spLocks xmlns:a="http://schemas.openxmlformats.org/drawingml/2006/main" noGrp="1"/>
+          </p:cNvSpPr>
+          <p:nvPr/>
+        </p:nvSpPr>
+        <p:spPr>
+          <a:xfrm xmlns:a="http://schemas.openxmlformats.org/drawingml/2006/main">
+            <a:off x="685800" y="5410200"/>
+            <a:ext cx="10591800" cy="400050"/>
           </a:xfrm>
           <a:prstGeom xmlns:a="http://schemas.openxmlformats.org/drawingml/2006/main" prst="rect">
             <a:avLst/>
@@ -6669,17 +7117,18 @@
           <a:lstStyle xmlns:a="http://schemas.openxmlformats.org/drawingml/2006/main"/>
           <a:p xmlns:a="http://schemas.openxmlformats.org/drawingml/2006/main">
             <a:pPr algn="ctr">
-              <a:defRPr sz="1725" b="1" i="0">
-                <a:solidFill>
-                  <a:srgbClr val="D97706"/>
-                </a:solidFill>
-                <a:latin typeface="Arial"/>
-                <a:ea typeface="Arial"/>
-                <a:cs typeface="Arial"/>
-              </a:defRPr>
-            </a:pPr>
-            <a:r>
-              <a:t>Neubauten generalisieren schwächer – deshalb nutzt MietCheck kategoriespezifische Intervallbreiten.</a:t>
+              <a:buNone/>
+              <a:defRPr sz="1650" b="1" i="0">
+                <a:solidFill>
+                  <a:srgbClr val="102138"/>
+                </a:solidFill>
+                <a:latin typeface="Arial"/>
+                <a:ea typeface="Arial"/>
+                <a:cs typeface="Arial"/>
+              </a:defRPr>
+            </a:pPr>
+            <a:r>
+              <a:t>scripts/ · notebooks/ · reports/ · models/ · tests/ · docs/DATA_CARD.md · docs/MODEL_CARD.md</a:t>
             </a:r>
           </a:p>
         </p:txBody>
@@ -6687,7 +7136,7 @@
     </p:spTree>
     <p:extLst>
       <p:ext uri="{BB962C8B-B14F-4D97-AF65-F5344CB8AC3E}">
-        <p14:creationId xmlns:p14="http://schemas.microsoft.com/office/powerpoint/2010/main" val="279829541"/>
+        <p14:creationId xmlns:p14="http://schemas.microsoft.com/office/powerpoint/2010/main" val="815019331"/>
       </p:ext>
     </p:extLst>
   </p:cSld>
@@ -6842,6 +7291,7 @@
           <a:lstStyle xmlns:a="http://schemas.openxmlformats.org/drawingml/2006/main"/>
           <a:p xmlns:a="http://schemas.openxmlformats.org/drawingml/2006/main">
             <a:pPr algn="l">
+              <a:buNone/>
               <a:defRPr sz="3225" b="1" i="0">
                 <a:solidFill>
                   <a:srgbClr val="FFFFFF"/>
@@ -6852,7 +7302,7 @@
               </a:defRPr>
             </a:pPr>
             <a:r>
-              <a:t>Es gibt nicht die eine Miete</a:t>
+              <a:t>Q · Forschungsfrage: Was kostet ein Umzug wirklich?</a:t>
             </a:r>
           </a:p>
         </p:txBody>
@@ -6887,6 +7337,7 @@
           <a:lstStyle xmlns:a="http://schemas.openxmlformats.org/drawingml/2006/main"/>
           <a:p xmlns:a="http://schemas.openxmlformats.org/drawingml/2006/main">
             <a:pPr algn="l">
+              <a:buNone/>
               <a:defRPr sz="900" b="0" i="0">
                 <a:solidFill>
                   <a:srgbClr val="667587"/>
@@ -6932,6 +7383,7 @@
           <a:lstStyle xmlns:a="http://schemas.openxmlformats.org/drawingml/2006/main"/>
           <a:p xmlns:a="http://schemas.openxmlformats.org/drawingml/2006/main">
             <a:pPr algn="r">
+              <a:buNone/>
               <a:defRPr sz="975" b="0" i="0">
                 <a:solidFill>
                   <a:srgbClr val="667587"/>
@@ -6977,6 +7429,7 @@
           <a:lstStyle xmlns:a="http://schemas.openxmlformats.org/drawingml/2006/main"/>
           <a:p xmlns:a="http://schemas.openxmlformats.org/drawingml/2006/main">
             <a:pPr algn="l">
+              <a:buNone/>
               <a:defRPr sz="1875" b="0" i="0">
                 <a:solidFill>
                   <a:srgbClr val="667587"/>
@@ -6987,14 +7440,14 @@
               </a:defRPr>
             </a:pPr>
             <a:r>
-              <a:t>Bestand, Angebot und persönliche Belastung messen unterschiedliche Realitäten. Erst ihre Trennung macht den Umzugseffekt sichtbar.</a:t>
+              <a:t>Wie groß ist die Lücke zwischen lokalem Bestand, aktuellem Angebot und persönlicher Mietbelastung?</a:t>
             </a:r>
           </a:p>
         </p:txBody>
       </p:sp>
       <p:cxnSp>
         <p:nvCxnSpPr>
-          <p:cNvPr id="31" name="sep-one"/>
+          <p:cNvPr id="49" name="sep-one"/>
           <p:cNvCxnSpPr/>
           <p:nvPr/>
         </p:nvCxnSpPr>
@@ -7016,7 +7469,7 @@
       </p:cxnSp>
       <p:cxnSp>
         <p:nvCxnSpPr>
-          <p:cNvPr id="32" name="sep-two"/>
+          <p:cNvPr id="50" name="sep-two"/>
           <p:cNvCxnSpPr/>
           <p:nvPr/>
         </p:nvCxnSpPr>
@@ -7099,6 +7552,7 @@
           <a:lstStyle xmlns:a="http://schemas.openxmlformats.org/drawingml/2006/main"/>
           <a:p xmlns:a="http://schemas.openxmlformats.org/drawingml/2006/main">
             <a:pPr algn="l">
+              <a:buNone/>
               <a:defRPr sz="1350" b="1" i="0">
                 <a:solidFill>
                   <a:srgbClr val="0F7B62"/>
@@ -7109,7 +7563,7 @@
               </a:defRPr>
             </a:pPr>
             <a:r>
-              <a:t>BESTAND</a:t>
+              <a:t>BESTANDSANKER</a:t>
             </a:r>
           </a:p>
         </p:txBody>
@@ -7144,6 +7598,7 @@
           <a:lstStyle xmlns:a="http://schemas.openxmlformats.org/drawingml/2006/main"/>
           <a:p xmlns:a="http://schemas.openxmlformats.org/drawingml/2006/main">
             <a:pPr algn="l">
+              <a:buNone/>
               <a:defRPr sz="3225" b="1" i="0">
                 <a:solidFill>
                   <a:srgbClr val="102138"/>
@@ -7189,6 +7644,7 @@
           <a:lstStyle xmlns:a="http://schemas.openxmlformats.org/drawingml/2006/main"/>
           <a:p xmlns:a="http://schemas.openxmlformats.org/drawingml/2006/main">
             <a:pPr algn="l">
+              <a:buNone/>
               <a:defRPr sz="1725" b="0" i="0">
                 <a:solidFill>
                   <a:srgbClr val="667587"/>
@@ -7199,7 +7655,7 @@
               </a:defRPr>
             </a:pPr>
             <a:r>
-              <a:t>Amtliche Zensus-Miete im lokalen Wohnungsbestand</a:t>
+              <a:t>ML-Schätzung im lokalen Zensus-Wohnungsbestand</a:t>
             </a:r>
           </a:p>
         </p:txBody>
@@ -7267,6 +7723,7 @@
           <a:lstStyle xmlns:a="http://schemas.openxmlformats.org/drawingml/2006/main"/>
           <a:p xmlns:a="http://schemas.openxmlformats.org/drawingml/2006/main">
             <a:pPr algn="l">
+              <a:buNone/>
               <a:defRPr sz="1350" b="1" i="0">
                 <a:solidFill>
                   <a:srgbClr val="315CFF"/>
@@ -7277,7 +7734,7 @@
               </a:defRPr>
             </a:pPr>
             <a:r>
-              <a:t>ANGEBOT</a:t>
+              <a:t>ANGEBOTSMARKT</a:t>
             </a:r>
           </a:p>
         </p:txBody>
@@ -7312,6 +7769,7 @@
           <a:lstStyle xmlns:a="http://schemas.openxmlformats.org/drawingml/2006/main"/>
           <a:p xmlns:a="http://schemas.openxmlformats.org/drawingml/2006/main">
             <a:pPr algn="l">
+              <a:buNone/>
               <a:defRPr sz="3225" b="1" i="0">
                 <a:solidFill>
                   <a:srgbClr val="102138"/>
@@ -7357,6 +7815,7 @@
           <a:lstStyle xmlns:a="http://schemas.openxmlformats.org/drawingml/2006/main"/>
           <a:p xmlns:a="http://schemas.openxmlformats.org/drawingml/2006/main">
             <a:pPr algn="l">
+              <a:buNone/>
               <a:defRPr sz="1725" b="0" i="0">
                 <a:solidFill>
                   <a:srgbClr val="667587"/>
@@ -7367,7 +7826,7 @@
               </a:defRPr>
             </a:pPr>
             <a:r>
-              <a:t>GREIX-Median aktueller Inserate im lokalen Markt</a:t>
+              <a:t>GREIX-Median plus Marktstreuung heutiger Inserate</a:t>
             </a:r>
           </a:p>
         </p:txBody>
@@ -7435,6 +7894,7 @@
           <a:lstStyle xmlns:a="http://schemas.openxmlformats.org/drawingml/2006/main"/>
           <a:p xmlns:a="http://schemas.openxmlformats.org/drawingml/2006/main">
             <a:pPr algn="l">
+              <a:buNone/>
               <a:defRPr sz="1350" b="1" i="0">
                 <a:solidFill>
                   <a:srgbClr val="E85D3F"/>
@@ -7480,6 +7940,7 @@
           <a:lstStyle xmlns:a="http://schemas.openxmlformats.org/drawingml/2006/main"/>
           <a:p xmlns:a="http://schemas.openxmlformats.org/drawingml/2006/main">
             <a:pPr algn="l">
+              <a:buNone/>
               <a:defRPr sz="3225" b="1" i="0">
                 <a:solidFill>
                   <a:srgbClr val="102138"/>
@@ -7525,6 +7986,7 @@
           <a:lstStyle xmlns:a="http://schemas.openxmlformats.org/drawingml/2006/main"/>
           <a:p xmlns:a="http://schemas.openxmlformats.org/drawingml/2006/main">
             <a:pPr algn="l">
+              <a:buNone/>
               <a:defRPr sz="1725" b="0" i="0">
                 <a:solidFill>
                   <a:srgbClr val="667587"/>
@@ -7535,7 +7997,7 @@
               </a:defRPr>
             </a:pPr>
             <a:r>
-              <a:t>Vertrag, Wohnfläche und Haushaltsnettoeinkommen</a:t>
+              <a:t>Vertragsmiete, Fläche und Haushaltsnettoeinkommen</a:t>
             </a:r>
           </a:p>
         </p:txBody>
@@ -7603,6 +8065,7 @@
           <a:lstStyle xmlns:a="http://schemas.openxmlformats.org/drawingml/2006/main"/>
           <a:p xmlns:a="http://schemas.openxmlformats.org/drawingml/2006/main">
             <a:pPr algn="l">
+              <a:buNone/>
               <a:defRPr sz="1800" b="1" i="0">
                 <a:solidFill>
                   <a:srgbClr val="0F7B62"/>
@@ -7613,7 +8076,7 @@
               </a:defRPr>
             </a:pPr>
             <a:r>
-              <a:t>MietChecks USP: Der Umzugsaufschlag quantifiziert die Lücke – mit Datenstand, Marktstreuung und Modellunsicherheit.</a:t>
+              <a:t>USP: Der Umzugsaufschlag verbindet die drei Realitäten – mit Datenstand, Markt-IQR und Modellband.</a:t>
             </a:r>
           </a:p>
         </p:txBody>
@@ -7776,6 +8239,7 @@
           <a:lstStyle xmlns:a="http://schemas.openxmlformats.org/drawingml/2006/main"/>
           <a:p xmlns:a="http://schemas.openxmlformats.org/drawingml/2006/main">
             <a:pPr algn="l">
+              <a:buNone/>
               <a:defRPr sz="3225" b="1" i="0">
                 <a:solidFill>
                   <a:srgbClr val="FFFFFF"/>
@@ -7786,7 +8250,7 @@
               </a:defRPr>
             </a:pPr>
             <a:r>
-              <a:t>Der USP ist die Kombination, nicht der Preisrechner</a:t>
+              <a:t>Q · Der USP ist die Kombination – mit klaren Gates</a:t>
             </a:r>
           </a:p>
         </p:txBody>
@@ -7821,6 +8285,7 @@
           <a:lstStyle xmlns:a="http://schemas.openxmlformats.org/drawingml/2006/main"/>
           <a:p xmlns:a="http://schemas.openxmlformats.org/drawingml/2006/main">
             <a:pPr algn="l">
+              <a:buNone/>
               <a:defRPr sz="900" b="0" i="0">
                 <a:solidFill>
                   <a:srgbClr val="667587"/>
@@ -7831,7 +8296,7 @@
               </a:defRPr>
             </a:pPr>
             <a:r>
-              <a:t>Quellen: öffentliche Produktseiten von Destatis, Immowelt, Immolyze und kommunalen Mietspiegeln; Audit vom 16.07.2026.</a:t>
+              <a:t>Q-Gates vor dem finalen Test: ≥2 Mio. Zeilen · ≥7 Kandidaten inkl. Baseline · Spatial Holdout · ≥15 % MAE-Gewinn.</a:t>
             </a:r>
           </a:p>
         </p:txBody>
@@ -7866,6 +8331,7 @@
           <a:lstStyle xmlns:a="http://schemas.openxmlformats.org/drawingml/2006/main"/>
           <a:p xmlns:a="http://schemas.openxmlformats.org/drawingml/2006/main">
             <a:pPr algn="r">
+              <a:buNone/>
               <a:defRPr sz="975" b="0" i="0">
                 <a:solidFill>
                   <a:srgbClr val="667587"/>
@@ -7911,6 +8377,7 @@
           <a:lstStyle xmlns:a="http://schemas.openxmlformats.org/drawingml/2006/main"/>
           <a:p xmlns:a="http://schemas.openxmlformats.org/drawingml/2006/main">
             <a:pPr algn="l">
+              <a:buNone/>
               <a:defRPr sz="1800" b="0" i="0">
                 <a:solidFill>
                   <a:srgbClr val="667587"/>
@@ -7921,14 +8388,14 @@
               </a:defRPr>
             </a:pPr>
             <a:r>
-              <a:t>Kein geprüftes Angebot verbindet alle fünf Bausteine in einer quellenoffenen Anwendung.</a:t>
+              <a:t>Kein geprüftes Angebot verbindet Bestand, aktuellen Markt, persönliche Belastung, Unsicherheit und offene ML-Methode.</a:t>
             </a:r>
           </a:p>
         </p:txBody>
       </p:sp>
       <p:graphicFrame>
         <p:nvGraphicFramePr>
-          <p:cNvPr id="16" name=""/>
+          <p:cNvPr id="18" name=""/>
           <p:cNvGraphicFramePr/>
           <p:nvPr/>
         </p:nvGraphicFramePr>
@@ -8782,6 +9249,7 @@
           <a:lstStyle xmlns:a="http://schemas.openxmlformats.org/drawingml/2006/main"/>
           <a:p xmlns:a="http://schemas.openxmlformats.org/drawingml/2006/main">
             <a:pPr algn="l">
+              <a:buNone/>
               <a:defRPr sz="3225" b="1" i="0">
                 <a:solidFill>
                   <a:srgbClr val="FFFFFF"/>
@@ -8792,7 +9260,7 @@
               </a:defRPr>
             </a:pPr>
             <a:r>
-              <a:t>2,06 Mio. Rasterwerte – mit prüfbarer Herkunft</a:t>
+              <a:t>U · 2,06 Mio. Rasterwerte – mit prüfbarer Herkunft</a:t>
             </a:r>
           </a:p>
         </p:txBody>
@@ -8827,6 +9295,7 @@
           <a:lstStyle xmlns:a="http://schemas.openxmlformats.org/drawingml/2006/main"/>
           <a:p xmlns:a="http://schemas.openxmlformats.org/drawingml/2006/main">
             <a:pPr algn="l">
+              <a:buNone/>
               <a:defRPr sz="900" b="0" i="0">
                 <a:solidFill>
                   <a:srgbClr val="667587"/>
@@ -8872,6 +9341,7 @@
           <a:lstStyle xmlns:a="http://schemas.openxmlformats.org/drawingml/2006/main"/>
           <a:p xmlns:a="http://schemas.openxmlformats.org/drawingml/2006/main">
             <a:pPr algn="r">
+              <a:buNone/>
               <a:defRPr sz="975" b="0" i="0">
                 <a:solidFill>
                   <a:srgbClr val="667587"/>
@@ -8917,6 +9387,7 @@
           <a:lstStyle xmlns:a="http://schemas.openxmlformats.org/drawingml/2006/main"/>
           <a:p xmlns:a="http://schemas.openxmlformats.org/drawingml/2006/main">
             <a:pPr algn="l">
+              <a:buNone/>
               <a:defRPr sz="1800" b="0" i="0">
                 <a:solidFill>
                   <a:srgbClr val="667587"/>
@@ -8927,7 +9398,7 @@
               </a:defRPr>
             </a:pPr>
             <a:r>
-              <a:t>Sieben Zensusprodukte bilden die ML-Basis; GREIX bleibt als aktuelle Marktquelle methodisch getrennt.</a:t>
+              <a:t>Sieben Zensusprodukte bilden die ML-Basis; GREIX bleibt zeitlich und methodisch getrennt.</a:t>
             </a:r>
           </a:p>
         </p:txBody>
@@ -8995,6 +9466,7 @@
           <a:lstStyle xmlns:a="http://schemas.openxmlformats.org/drawingml/2006/main"/>
           <a:p xmlns:a="http://schemas.openxmlformats.org/drawingml/2006/main">
             <a:pPr algn="l">
+              <a:buNone/>
               <a:defRPr sz="3600" b="1" i="0">
                 <a:solidFill>
                   <a:srgbClr val="102138"/>
@@ -9040,6 +9512,7 @@
           <a:lstStyle xmlns:a="http://schemas.openxmlformats.org/drawingml/2006/main"/>
           <a:p xmlns:a="http://schemas.openxmlformats.org/drawingml/2006/main">
             <a:pPr algn="l">
+              <a:buNone/>
               <a:defRPr sz="1650" b="1" i="0">
                 <a:solidFill>
                   <a:srgbClr val="102138"/>
@@ -9085,6 +9558,7 @@
           <a:lstStyle xmlns:a="http://schemas.openxmlformats.org/drawingml/2006/main"/>
           <a:p xmlns:a="http://schemas.openxmlformats.org/drawingml/2006/main">
             <a:pPr algn="l">
+              <a:buNone/>
               <a:defRPr sz="1500" b="0" i="0">
                 <a:solidFill>
                   <a:srgbClr val="667587"/>
@@ -9095,7 +9569,7 @@
               </a:defRPr>
             </a:pPr>
             <a:r>
-              <a:t>Miete × Gebäudealter × Wohnungsgröße</a:t>
+              <a:t>Ziel × Baualter × Wohnungsgröße</a:t>
             </a:r>
           </a:p>
         </p:txBody>
@@ -9163,6 +9637,7 @@
           <a:lstStyle xmlns:a="http://schemas.openxmlformats.org/drawingml/2006/main"/>
           <a:p xmlns:a="http://schemas.openxmlformats.org/drawingml/2006/main">
             <a:pPr algn="l">
+              <a:buNone/>
               <a:defRPr sz="3600" b="1" i="0">
                 <a:solidFill>
                   <a:srgbClr val="102138"/>
@@ -9208,6 +9683,7 @@
           <a:lstStyle xmlns:a="http://schemas.openxmlformats.org/drawingml/2006/main"/>
           <a:p xmlns:a="http://schemas.openxmlformats.org/drawingml/2006/main">
             <a:pPr algn="l">
+              <a:buNone/>
               <a:defRPr sz="1650" b="1" i="0">
                 <a:solidFill>
                   <a:srgbClr val="102138"/>
@@ -9218,7 +9694,7 @@
               </a:defRPr>
             </a:pPr>
             <a:r>
-              <a:t>100-m-Gitter</a:t>
+              <a:t>eindeutige Zellen</a:t>
             </a:r>
           </a:p>
         </p:txBody>
@@ -9253,6 +9729,7 @@
           <a:lstStyle xmlns:a="http://schemas.openxmlformats.org/drawingml/2006/main"/>
           <a:p xmlns:a="http://schemas.openxmlformats.org/drawingml/2006/main">
             <a:pPr algn="l">
+              <a:buNone/>
               <a:defRPr sz="1500" b="0" i="0">
                 <a:solidFill>
                   <a:srgbClr val="667587"/>
@@ -9263,7 +9740,7 @@
               </a:defRPr>
             </a:pPr>
             <a:r>
-              <a:t>kleinräumige amtliche Zensuszellen</a:t>
+              <a:t>100-m-Gitter mit räumlicher Struktur</a:t>
             </a:r>
           </a:p>
         </p:txBody>
@@ -9331,6 +9808,7 @@
           <a:lstStyle xmlns:a="http://schemas.openxmlformats.org/drawingml/2006/main"/>
           <a:p xmlns:a="http://schemas.openxmlformats.org/drawingml/2006/main">
             <a:pPr algn="l">
+              <a:buNone/>
               <a:defRPr sz="3600" b="1" i="0">
                 <a:solidFill>
                   <a:srgbClr val="102138"/>
@@ -9376,6 +9854,7 @@
           <a:lstStyle xmlns:a="http://schemas.openxmlformats.org/drawingml/2006/main"/>
           <a:p xmlns:a="http://schemas.openxmlformats.org/drawingml/2006/main">
             <a:pPr algn="l">
+              <a:buNone/>
               <a:defRPr sz="1650" b="1" i="0">
                 <a:solidFill>
                   <a:srgbClr val="102138"/>
@@ -9421,6 +9900,7 @@
           <a:lstStyle xmlns:a="http://schemas.openxmlformats.org/drawingml/2006/main"/>
           <a:p xmlns:a="http://schemas.openxmlformats.org/drawingml/2006/main">
             <a:pPr algn="l">
+              <a:buNone/>
               <a:defRPr sz="1500" b="0" i="0">
                 <a:solidFill>
                   <a:srgbClr val="667587"/>
@@ -9431,14 +9911,14 @@
               </a:defRPr>
             </a:pPr>
             <a:r>
-              <a:t>37 lokale GREIX-Märkte + Deutschland</a:t>
+              <a:t>37 lokale Märkte + Deutschland</a:t>
             </a:r>
           </a:p>
         </p:txBody>
       </p:sp>
       <p:cxnSp>
         <p:nvCxnSpPr>
-          <p:cNvPr id="44" name="provenance-line"/>
+          <p:cNvPr id="84" name="provenance-line"/>
           <p:cNvCxnSpPr/>
           <p:nvPr/>
         </p:nvCxnSpPr>
@@ -9488,6 +9968,7 @@
           <a:lstStyle xmlns:a="http://schemas.openxmlformats.org/drawingml/2006/main"/>
           <a:p xmlns:a="http://schemas.openxmlformats.org/drawingml/2006/main">
             <a:pPr algn="l">
+              <a:buNone/>
               <a:defRPr sz="1425" b="1" i="0">
                 <a:solidFill>
                   <a:srgbClr val="0F7B62"/>
@@ -9498,7 +9979,7 @@
               </a:defRPr>
             </a:pPr>
             <a:r>
-              <a:t>Offizielle URL</a:t>
+              <a:t>offizielle URLs</a:t>
             </a:r>
           </a:p>
         </p:txBody>
@@ -9533,6 +10014,7 @@
           <a:lstStyle xmlns:a="http://schemas.openxmlformats.org/drawingml/2006/main"/>
           <a:p xmlns:a="http://schemas.openxmlformats.org/drawingml/2006/main">
             <a:pPr algn="l">
+              <a:buNone/>
               <a:defRPr sz="1425" b="1" i="0">
                 <a:solidFill>
                   <a:srgbClr val="0F7B62"/>
@@ -9543,7 +10025,7 @@
               </a:defRPr>
             </a:pPr>
             <a:r>
-              <a:t>SHA-256-Manifest</a:t>
+              <a:t>SHA-256-Hashes</a:t>
             </a:r>
           </a:p>
         </p:txBody>
@@ -9578,6 +10060,7 @@
           <a:lstStyle xmlns:a="http://schemas.openxmlformats.org/drawingml/2006/main"/>
           <a:p xmlns:a="http://schemas.openxmlformats.org/drawingml/2006/main">
             <a:pPr algn="l">
+              <a:buNone/>
               <a:defRPr sz="1425" b="1" i="0">
                 <a:solidFill>
                   <a:srgbClr val="0F7B62"/>
@@ -9588,7 +10071,7 @@
               </a:defRPr>
             </a:pPr>
             <a:r>
-              <a:t>Datenverträge</a:t>
+              <a:t>Missingness &lt; 1 %</a:t>
             </a:r>
           </a:p>
         </p:txBody>
@@ -9623,6 +10106,7 @@
           <a:lstStyle xmlns:a="http://schemas.openxmlformats.org/drawingml/2006/main"/>
           <a:p xmlns:a="http://schemas.openxmlformats.org/drawingml/2006/main">
             <a:pPr algn="l">
+              <a:buNone/>
               <a:defRPr sz="1425" b="1" i="0">
                 <a:solidFill>
                   <a:srgbClr val="0F7B62"/>
@@ -9633,7 +10117,7 @@
               </a:defRPr>
             </a:pPr>
             <a:r>
-              <a:t>reproduzierbarer Build</a:t>
+              <a:t>reproduzierbarer Join</a:t>
             </a:r>
           </a:p>
         </p:txBody>
@@ -9796,6 +10280,7 @@
           <a:lstStyle xmlns:a="http://schemas.openxmlformats.org/drawingml/2006/main"/>
           <a:p xmlns:a="http://schemas.openxmlformats.org/drawingml/2006/main">
             <a:pPr algn="l">
+              <a:buNone/>
               <a:defRPr sz="3225" b="1" i="0">
                 <a:solidFill>
                   <a:srgbClr val="FFFFFF"/>
@@ -9806,7 +10291,7 @@
               </a:defRPr>
             </a:pPr>
             <a:r>
-              <a:t>QUA³CK macht jede Entscheidung prüfbar</a:t>
+              <a:t>U · StandardScaler: fit nur im Trainingsfold</a:t>
             </a:r>
           </a:p>
         </p:txBody>
@@ -9841,6 +10326,7 @@
           <a:lstStyle xmlns:a="http://schemas.openxmlformats.org/drawingml/2006/main"/>
           <a:p xmlns:a="http://schemas.openxmlformats.org/drawingml/2006/main">
             <a:pPr algn="l">
+              <a:buNone/>
               <a:defRPr sz="900" b="0" i="0">
                 <a:solidFill>
                   <a:srgbClr val="667587"/>
@@ -9886,6 +10372,7 @@
           <a:lstStyle xmlns:a="http://schemas.openxmlformats.org/drawingml/2006/main"/>
           <a:p xmlns:a="http://schemas.openxmlformats.org/drawingml/2006/main">
             <a:pPr algn="r">
+              <a:buNone/>
               <a:defRPr sz="975" b="0" i="0">
                 <a:solidFill>
                   <a:srgbClr val="667587"/>
@@ -9931,6 +10418,7 @@
           <a:lstStyle xmlns:a="http://schemas.openxmlformats.org/drawingml/2006/main"/>
           <a:p xmlns:a="http://schemas.openxmlformats.org/drawingml/2006/main">
             <a:pPr algn="l">
+              <a:buNone/>
               <a:defRPr sz="1800" b="0" i="0">
                 <a:solidFill>
                   <a:srgbClr val="667587"/>
@@ -9941,14 +10429,14 @@
               </a:defRPr>
             </a:pPr>
             <a:r>
-              <a:t>Jede Phase endet in versionierten Reports, ausgeführten Notebooks und einem überprüfbaren Gate.</a:t>
+              <a:t>Große Einheiten dürfen Ridge, SVM und MLP nicht dominieren – und der Scaler darf keine Testinformation sehen.</a:t>
             </a:r>
           </a:p>
         </p:txBody>
       </p:sp>
       <p:cxnSp>
         <p:nvCxnSpPr>
-          <p:cNvPr id="46" name="qua-line"/>
+          <p:cNvPr id="62" name="qua-line"/>
           <p:cNvCxnSpPr/>
           <p:nvPr/>
         </p:nvCxnSpPr>
@@ -10031,6 +10519,7 @@
           <a:lstStyle xmlns:a="http://schemas.openxmlformats.org/drawingml/2006/main"/>
           <a:p xmlns:a="http://schemas.openxmlformats.org/drawingml/2006/main">
             <a:pPr algn="ctr">
+              <a:buNone/>
               <a:defRPr sz="1200" b="1" i="0">
                 <a:solidFill>
                   <a:srgbClr val="FFFFFF"/>
@@ -10041,7 +10530,7 @@
               </a:defRPr>
             </a:pPr>
             <a:r>
-              <a:t>Q</a:t>
+              <a:t>RAW</a:t>
             </a:r>
           </a:p>
         </p:txBody>
@@ -10076,6 +10565,7 @@
           <a:lstStyle xmlns:a="http://schemas.openxmlformats.org/drawingml/2006/main"/>
           <a:p xmlns:a="http://schemas.openxmlformats.org/drawingml/2006/main">
             <a:pPr algn="ctr">
+              <a:buNone/>
               <a:defRPr sz="1500" b="1" i="0">
                 <a:solidFill>
                   <a:srgbClr val="102138"/>
@@ -10086,7 +10576,7 @@
               </a:defRPr>
             </a:pPr>
             <a:r>
-              <a:t>Question</a:t>
+              <a:t>Rohdaten</a:t>
             </a:r>
           </a:p>
         </p:txBody>
@@ -10121,6 +10611,7 @@
           <a:lstStyle xmlns:a="http://schemas.openxmlformats.org/drawingml/2006/main"/>
           <a:p xmlns:a="http://schemas.openxmlformats.org/drawingml/2006/main">
             <a:pPr algn="ctr">
+              <a:buNone/>
               <a:defRPr sz="1350" b="0" i="0">
                 <a:solidFill>
                   <a:srgbClr val="667587"/>
@@ -10131,8 +10622,8 @@
               </a:defRPr>
             </a:pPr>
             <a:r>
-              <a:t>Problem, Zielgruppe,
-KPIs, USP</a:t>
+              <a:t>Meter, Anzahl,
+Prozent</a:t>
             </a:r>
           </a:p>
         </p:txBody>
@@ -10200,6 +10691,7 @@
           <a:lstStyle xmlns:a="http://schemas.openxmlformats.org/drawingml/2006/main"/>
           <a:p xmlns:a="http://schemas.openxmlformats.org/drawingml/2006/main">
             <a:pPr algn="ctr">
+              <a:buNone/>
               <a:defRPr sz="1200" b="1" i="0">
                 <a:solidFill>
                   <a:srgbClr val="FFFFFF"/>
@@ -10210,7 +10702,7 @@
               </a:defRPr>
             </a:pPr>
             <a:r>
-              <a:t>U</a:t>
+              <a:t>I</a:t>
             </a:r>
           </a:p>
         </p:txBody>
@@ -10245,6 +10737,7 @@
           <a:lstStyle xmlns:a="http://schemas.openxmlformats.org/drawingml/2006/main"/>
           <a:p xmlns:a="http://schemas.openxmlformats.org/drawingml/2006/main">
             <a:pPr algn="ctr">
+              <a:buNone/>
               <a:defRPr sz="1500" b="1" i="0">
                 <a:solidFill>
                   <a:srgbClr val="102138"/>
@@ -10255,7 +10748,7 @@
               </a:defRPr>
             </a:pPr>
             <a:r>
-              <a:t>Understanding</a:t>
+              <a:t>Imputation</a:t>
             </a:r>
           </a:p>
         </p:txBody>
@@ -10290,6 +10783,7 @@
           <a:lstStyle xmlns:a="http://schemas.openxmlformats.org/drawingml/2006/main"/>
           <a:p xmlns:a="http://schemas.openxmlformats.org/drawingml/2006/main">
             <a:pPr algn="ctr">
+              <a:buNone/>
               <a:defRPr sz="1350" b="0" i="0">
                 <a:solidFill>
                   <a:srgbClr val="667587"/>
@@ -10300,8 +10794,8 @@
               </a:defRPr>
             </a:pPr>
             <a:r>
-              <a:t>Quellen, Qualität,
-EDA, Raum</a:t>
+              <a:t>Median nur im
+Trainingsfold</a:t>
             </a:r>
           </a:p>
         </p:txBody>
@@ -10369,6 +10863,7 @@
           <a:lstStyle xmlns:a="http://schemas.openxmlformats.org/drawingml/2006/main"/>
           <a:p xmlns:a="http://schemas.openxmlformats.org/drawingml/2006/main">
             <a:pPr algn="ctr">
+              <a:buNone/>
               <a:defRPr sz="1200" b="1" i="0">
                 <a:solidFill>
                   <a:srgbClr val="FFFFFF"/>
@@ -10379,7 +10874,7 @@
               </a:defRPr>
             </a:pPr>
             <a:r>
-              <a:t>A¹</a:t>
+              <a:t>FIT</a:t>
             </a:r>
           </a:p>
         </p:txBody>
@@ -10414,6 +10909,7 @@
           <a:lstStyle xmlns:a="http://schemas.openxmlformats.org/drawingml/2006/main"/>
           <a:p xmlns:a="http://schemas.openxmlformats.org/drawingml/2006/main">
             <a:pPr algn="ctr">
+              <a:buNone/>
               <a:defRPr sz="1500" b="1" i="0">
                 <a:solidFill>
                   <a:srgbClr val="102138"/>
@@ -10424,7 +10920,7 @@
               </a:defRPr>
             </a:pPr>
             <a:r>
-              <a:t>Auswahl</a:t>
+              <a:t>Scaler fit</a:t>
             </a:r>
           </a:p>
         </p:txBody>
@@ -10459,6 +10955,7 @@
           <a:lstStyle xmlns:a="http://schemas.openxmlformats.org/drawingml/2006/main"/>
           <a:p xmlns:a="http://schemas.openxmlformats.org/drawingml/2006/main">
             <a:pPr algn="ctr">
+              <a:buNone/>
               <a:defRPr sz="1350" b="0" i="0">
                 <a:solidFill>
                   <a:srgbClr val="667587"/>
@@ -10469,8 +10966,8 @@
               </a:defRPr>
             </a:pPr>
             <a:r>
-              <a:t>5 Modelle,
-Spatial CV</a:t>
+              <a:t>μtrain und
+σtrain</a:t>
             </a:r>
           </a:p>
         </p:txBody>
@@ -10538,6 +11035,7 @@
           <a:lstStyle xmlns:a="http://schemas.openxmlformats.org/drawingml/2006/main"/>
           <a:p xmlns:a="http://schemas.openxmlformats.org/drawingml/2006/main">
             <a:pPr algn="ctr">
+              <a:buNone/>
               <a:defRPr sz="1200" b="1" i="0">
                 <a:solidFill>
                   <a:srgbClr val="FFFFFF"/>
@@ -10548,7 +11046,7 @@
               </a:defRPr>
             </a:pPr>
             <a:r>
-              <a:t>A²</a:t>
+              <a:t>z</a:t>
             </a:r>
           </a:p>
         </p:txBody>
@@ -10583,6 +11081,7 @@
           <a:lstStyle xmlns:a="http://schemas.openxmlformats.org/drawingml/2006/main"/>
           <a:p xmlns:a="http://schemas.openxmlformats.org/drawingml/2006/main">
             <a:pPr algn="ctr">
+              <a:buNone/>
               <a:defRPr sz="1500" b="1" i="0">
                 <a:solidFill>
                   <a:srgbClr val="102138"/>
@@ -10593,7 +11092,7 @@
               </a:defRPr>
             </a:pPr>
             <a:r>
-              <a:t>Adapting</a:t>
+              <a:t>Transformation</a:t>
             </a:r>
           </a:p>
         </p:txBody>
@@ -10628,6 +11127,7 @@
           <a:lstStyle xmlns:a="http://schemas.openxmlformats.org/drawingml/2006/main"/>
           <a:p xmlns:a="http://schemas.openxmlformats.org/drawingml/2006/main">
             <a:pPr algn="ctr">
+              <a:buNone/>
               <a:defRPr sz="1350" b="0" i="0">
                 <a:solidFill>
                   <a:srgbClr val="667587"/>
@@ -10638,8 +11138,7 @@
               </a:defRPr>
             </a:pPr>
             <a:r>
-              <a:t>4 Feature-
-Ablationen</a:t>
+              <a:t>z = (x−μ) / σ</a:t>
             </a:r>
           </a:p>
         </p:txBody>
@@ -10707,6 +11206,7 @@
           <a:lstStyle xmlns:a="http://schemas.openxmlformats.org/drawingml/2006/main"/>
           <a:p xmlns:a="http://schemas.openxmlformats.org/drawingml/2006/main">
             <a:pPr algn="ctr">
+              <a:buNone/>
               <a:defRPr sz="1200" b="1" i="0">
                 <a:solidFill>
                   <a:srgbClr val="FFFFFF"/>
@@ -10717,7 +11217,7 @@
               </a:defRPr>
             </a:pPr>
             <a:r>
-              <a:t>A³</a:t>
+              <a:t>≈0</a:t>
             </a:r>
           </a:p>
         </p:txBody>
@@ -10752,6 +11252,7 @@
           <a:lstStyle xmlns:a="http://schemas.openxmlformats.org/drawingml/2006/main"/>
           <a:p xmlns:a="http://schemas.openxmlformats.org/drawingml/2006/main">
             <a:pPr algn="ctr">
+              <a:buNone/>
               <a:defRPr sz="1500" b="1" i="0">
                 <a:solidFill>
                   <a:srgbClr val="102138"/>
@@ -10762,7 +11263,7 @@
               </a:defRPr>
             </a:pPr>
             <a:r>
-              <a:t>Adjusting</a:t>
+              <a:t>Mittelwert</a:t>
             </a:r>
           </a:p>
         </p:txBody>
@@ -10797,6 +11298,7 @@
           <a:lstStyle xmlns:a="http://schemas.openxmlformats.org/drawingml/2006/main"/>
           <a:p xmlns:a="http://schemas.openxmlformats.org/drawingml/2006/main">
             <a:pPr algn="ctr">
+              <a:buNone/>
               <a:defRPr sz="1350" b="0" i="0">
                 <a:solidFill>
                   <a:srgbClr val="667587"/>
@@ -10807,8 +11309,8 @@
               </a:defRPr>
             </a:pPr>
             <a:r>
-              <a:t>8 Tunings,
-Datensperre</a:t>
+              <a:t>skalierte Features
+um 0</a:t>
             </a:r>
           </a:p>
         </p:txBody>
@@ -10876,6 +11378,7 @@
           <a:lstStyle xmlns:a="http://schemas.openxmlformats.org/drawingml/2006/main"/>
           <a:p xmlns:a="http://schemas.openxmlformats.org/drawingml/2006/main">
             <a:pPr algn="ctr">
+              <a:buNone/>
               <a:defRPr sz="1200" b="1" i="0">
                 <a:solidFill>
                   <a:srgbClr val="FFFFFF"/>
@@ -10886,7 +11389,7 @@
               </a:defRPr>
             </a:pPr>
             <a:r>
-              <a:t>C</a:t>
+              <a:t>≈1</a:t>
             </a:r>
           </a:p>
         </p:txBody>
@@ -10921,6 +11424,7 @@
           <a:lstStyle xmlns:a="http://schemas.openxmlformats.org/drawingml/2006/main"/>
           <a:p xmlns:a="http://schemas.openxmlformats.org/drawingml/2006/main">
             <a:pPr algn="ctr">
+              <a:buNone/>
               <a:defRPr sz="1500" b="1" i="0">
                 <a:solidFill>
                   <a:srgbClr val="102138"/>
@@ -10931,7 +11435,7 @@
               </a:defRPr>
             </a:pPr>
             <a:r>
-              <a:t>Comparing</a:t>
+              <a:t>Streuung</a:t>
             </a:r>
           </a:p>
         </p:txBody>
@@ -10966,6 +11470,7 @@
           <a:lstStyle xmlns:a="http://schemas.openxmlformats.org/drawingml/2006/main"/>
           <a:p xmlns:a="http://schemas.openxmlformats.org/drawingml/2006/main">
             <a:pPr algn="ctr">
+              <a:buNone/>
               <a:defRPr sz="1350" b="0" i="0">
                 <a:solidFill>
                   <a:srgbClr val="667587"/>
@@ -10976,8 +11481,8 @@
               </a:defRPr>
             </a:pPr>
             <a:r>
-              <a:t>finaler Test,
-Subgruppen</a:t>
+              <a:t>Standardabw.
+um 1</a:t>
             </a:r>
           </a:p>
         </p:txBody>
@@ -11045,6 +11550,7 @@
           <a:lstStyle xmlns:a="http://schemas.openxmlformats.org/drawingml/2006/main"/>
           <a:p xmlns:a="http://schemas.openxmlformats.org/drawingml/2006/main">
             <a:pPr algn="ctr">
+              <a:buNone/>
               <a:defRPr sz="1200" b="1" i="0">
                 <a:solidFill>
                   <a:srgbClr val="FFFFFF"/>
@@ -11055,7 +11561,7 @@
               </a:defRPr>
             </a:pPr>
             <a:r>
-              <a:t>K</a:t>
+              <a:t>TREE</a:t>
             </a:r>
           </a:p>
         </p:txBody>
@@ -11090,6 +11596,7 @@
           <a:lstStyle xmlns:a="http://schemas.openxmlformats.org/drawingml/2006/main"/>
           <a:p xmlns:a="http://schemas.openxmlformats.org/drawingml/2006/main">
             <a:pPr algn="ctr">
+              <a:buNone/>
               <a:defRPr sz="1500" b="1" i="0">
                 <a:solidFill>
                   <a:srgbClr val="102138"/>
@@ -11100,7 +11607,7 @@
               </a:defRPr>
             </a:pPr>
             <a:r>
-              <a:t>Knowledge</a:t>
+              <a:t>Ausnahme</a:t>
             </a:r>
           </a:p>
         </p:txBody>
@@ -11135,6 +11642,7 @@
           <a:lstStyle xmlns:a="http://schemas.openxmlformats.org/drawingml/2006/main"/>
           <a:p xmlns:a="http://schemas.openxmlformats.org/drawingml/2006/main">
             <a:pPr algn="ctr">
+              <a:buNone/>
               <a:defRPr sz="1350" b="0" i="0">
                 <a:solidFill>
                   <a:srgbClr val="667587"/>
@@ -11145,8 +11653,8 @@
               </a:defRPr>
             </a:pPr>
             <a:r>
-              <a:t>App, USP,
-Umzugsaufschlag</a:t>
+              <a:t>Bäume brauchen
+keinen Scaler</a:t>
             </a:r>
           </a:p>
         </p:txBody>
@@ -11214,6 +11722,7 @@
           <a:lstStyle xmlns:a="http://schemas.openxmlformats.org/drawingml/2006/main"/>
           <a:p xmlns:a="http://schemas.openxmlformats.org/drawingml/2006/main">
             <a:pPr algn="ctr">
+              <a:buNone/>
               <a:defRPr sz="1800" b="1" i="0">
                 <a:solidFill>
                   <a:srgbClr val="315CFF"/>
@@ -11224,7 +11733,7 @@
               </a:defRPr>
             </a:pPr>
             <a:r>
-              <a:t>7/7 Notebooks · 37/37 Codezellen · 0 Fehleroutputs · automatisierter Ausführungsbericht</a:t>
+              <a:t>Pipeline: Imputer → StandardScaler → Ridge / LinearSVR / RBF-SVR / MLP · kein Leakage</a:t>
             </a:r>
           </a:p>
         </p:txBody>
@@ -11387,6 +11896,7 @@
           <a:lstStyle xmlns:a="http://schemas.openxmlformats.org/drawingml/2006/main"/>
           <a:p xmlns:a="http://schemas.openxmlformats.org/drawingml/2006/main">
             <a:pPr algn="l">
+              <a:buNone/>
               <a:defRPr sz="3225" b="1" i="0">
                 <a:solidFill>
                   <a:srgbClr val="FFFFFF"/>
@@ -11397,7 +11907,7 @@
               </a:defRPr>
             </a:pPr>
             <a:r>
-              <a:t>Nachbarzellen dürfen den Test nicht verraten</a:t>
+              <a:t>A · Räumliche Blöcke verhindern Daten-Leakage</a:t>
             </a:r>
           </a:p>
         </p:txBody>
@@ -11432,6 +11942,7 @@
           <a:lstStyle xmlns:a="http://schemas.openxmlformats.org/drawingml/2006/main"/>
           <a:p xmlns:a="http://schemas.openxmlformats.org/drawingml/2006/main">
             <a:pPr algn="l">
+              <a:buNone/>
               <a:defRPr sz="900" b="0" i="0">
                 <a:solidFill>
                   <a:srgbClr val="667587"/>
@@ -11477,6 +11988,7 @@
           <a:lstStyle xmlns:a="http://schemas.openxmlformats.org/drawingml/2006/main"/>
           <a:p xmlns:a="http://schemas.openxmlformats.org/drawingml/2006/main">
             <a:pPr algn="r">
+              <a:buNone/>
               <a:defRPr sz="975" b="0" i="0">
                 <a:solidFill>
                   <a:srgbClr val="667587"/>
@@ -11522,6 +12034,7 @@
           <a:lstStyle xmlns:a="http://schemas.openxmlformats.org/drawingml/2006/main"/>
           <a:p xmlns:a="http://schemas.openxmlformats.org/drawingml/2006/main">
             <a:pPr algn="l">
+              <a:buNone/>
               <a:defRPr sz="1800" b="0" i="0">
                 <a:solidFill>
                   <a:srgbClr val="667587"/>
@@ -11532,14 +12045,14 @@
               </a:defRPr>
             </a:pPr>
             <a:r>
-              <a:t>Deshalb gruppiert MietCheck 100-m-Zellen in 25-km-Blöcke und trennt ganze Räume.</a:t>
+              <a:t>Benachbarte 100-m-Zellen sind ähnlich: MietCheck trennt deshalb ganze 25-km-Räume.</a:t>
             </a:r>
           </a:p>
         </p:txBody>
       </p:sp>
       <p:cxnSp>
         <p:nvCxnSpPr>
-          <p:cNvPr id="36" name="spatial-connector"/>
+          <p:cNvPr id="52" name="spatial-connector"/>
           <p:cNvCxnSpPr/>
           <p:nvPr/>
         </p:nvCxnSpPr>
@@ -11655,6 +12168,7 @@
           <a:lstStyle xmlns:a="http://schemas.openxmlformats.org/drawingml/2006/main"/>
           <a:p xmlns:a="http://schemas.openxmlformats.org/drawingml/2006/main">
             <a:pPr algn="l">
+              <a:buNone/>
               <a:defRPr sz="1725" b="1" i="0">
                 <a:solidFill>
                   <a:srgbClr val="0F7B62"/>
@@ -11700,6 +12214,7 @@
           <a:lstStyle xmlns:a="http://schemas.openxmlformats.org/drawingml/2006/main"/>
           <a:p xmlns:a="http://schemas.openxmlformats.org/drawingml/2006/main">
             <a:pPr algn="l">
+              <a:buNone/>
               <a:defRPr sz="3225" b="1" i="0">
                 <a:solidFill>
                   <a:srgbClr val="102138"/>
@@ -11745,6 +12260,7 @@
           <a:lstStyle xmlns:a="http://schemas.openxmlformats.org/drawingml/2006/main"/>
           <a:p xmlns:a="http://schemas.openxmlformats.org/drawingml/2006/main">
             <a:pPr algn="l">
+              <a:buNone/>
               <a:defRPr sz="1575" b="1" i="0">
                 <a:solidFill>
                   <a:srgbClr val="102138"/>
@@ -11790,6 +12306,7 @@
           <a:lstStyle xmlns:a="http://schemas.openxmlformats.org/drawingml/2006/main"/>
           <a:p xmlns:a="http://schemas.openxmlformats.org/drawingml/2006/main">
             <a:pPr algn="l">
+              <a:buNone/>
               <a:defRPr sz="1500" b="0" i="0">
                 <a:solidFill>
                   <a:srgbClr val="667587"/>
@@ -11800,7 +12317,7 @@
               </a:defRPr>
             </a:pPr>
             <a:r>
-              <a:t>Modellwahl, Tuning und Featureentscheidungen</a:t>
+              <a:t>A¹ Auswahl, A² Features und A³ Tuning</a:t>
             </a:r>
           </a:p>
         </p:txBody>
@@ -11901,6 +12418,7 @@
           <a:lstStyle xmlns:a="http://schemas.openxmlformats.org/drawingml/2006/main"/>
           <a:p xmlns:a="http://schemas.openxmlformats.org/drawingml/2006/main">
             <a:pPr algn="l">
+              <a:buNone/>
               <a:defRPr sz="1725" b="1" i="0">
                 <a:solidFill>
                   <a:srgbClr val="315CFF"/>
@@ -11946,6 +12464,7 @@
           <a:lstStyle xmlns:a="http://schemas.openxmlformats.org/drawingml/2006/main"/>
           <a:p xmlns:a="http://schemas.openxmlformats.org/drawingml/2006/main">
             <a:pPr algn="l">
+              <a:buNone/>
               <a:defRPr sz="3225" b="1" i="0">
                 <a:solidFill>
                   <a:srgbClr val="102138"/>
@@ -11991,6 +12510,7 @@
           <a:lstStyle xmlns:a="http://schemas.openxmlformats.org/drawingml/2006/main"/>
           <a:p xmlns:a="http://schemas.openxmlformats.org/drawingml/2006/main">
             <a:pPr algn="l">
+              <a:buNone/>
               <a:defRPr sz="1575" b="1" i="0">
                 <a:solidFill>
                   <a:srgbClr val="102138"/>
@@ -12036,6 +12556,7 @@
           <a:lstStyle xmlns:a="http://schemas.openxmlformats.org/drawingml/2006/main"/>
           <a:p xmlns:a="http://schemas.openxmlformats.org/drawingml/2006/main">
             <a:pPr algn="l">
+              <a:buNone/>
               <a:defRPr sz="1500" b="0" i="0">
                 <a:solidFill>
                   <a:srgbClr val="667587"/>
@@ -12046,7 +12567,7 @@
               </a:defRPr>
             </a:pPr>
             <a:r>
-              <a:t>ausschließlich für Prognoseintervalle</a:t>
+              <a:t>nur für conformale Modellbänder</a:t>
             </a:r>
           </a:p>
         </p:txBody>
@@ -12147,6 +12668,7 @@
           <a:lstStyle xmlns:a="http://schemas.openxmlformats.org/drawingml/2006/main"/>
           <a:p xmlns:a="http://schemas.openxmlformats.org/drawingml/2006/main">
             <a:pPr algn="l">
+              <a:buNone/>
               <a:defRPr sz="1725" b="1" i="0">
                 <a:solidFill>
                   <a:srgbClr val="E85D3F"/>
@@ -12192,6 +12714,7 @@
           <a:lstStyle xmlns:a="http://schemas.openxmlformats.org/drawingml/2006/main"/>
           <a:p xmlns:a="http://schemas.openxmlformats.org/drawingml/2006/main">
             <a:pPr algn="l">
+              <a:buNone/>
               <a:defRPr sz="3225" b="1" i="0">
                 <a:solidFill>
                   <a:srgbClr val="102138"/>
@@ -12237,6 +12760,7 @@
           <a:lstStyle xmlns:a="http://schemas.openxmlformats.org/drawingml/2006/main"/>
           <a:p xmlns:a="http://schemas.openxmlformats.org/drawingml/2006/main">
             <a:pPr algn="l">
+              <a:buNone/>
               <a:defRPr sz="1575" b="1" i="0">
                 <a:solidFill>
                   <a:srgbClr val="102138"/>
@@ -12282,6 +12806,7 @@
           <a:lstStyle xmlns:a="http://schemas.openxmlformats.org/drawingml/2006/main"/>
           <a:p xmlns:a="http://schemas.openxmlformats.org/drawingml/2006/main">
             <a:pPr algn="l">
+              <a:buNone/>
               <a:defRPr sz="1500" b="0" i="0">
                 <a:solidFill>
                   <a:srgbClr val="667587"/>
@@ -12292,7 +12817,7 @@
               </a:defRPr>
             </a:pPr>
             <a:r>
-              <a:t>einmalige Güte- und Subgruppenmessung</a:t>
+              <a:t>genau einmal für C ausgewertet</a:t>
             </a:r>
           </a:p>
         </p:txBody>
@@ -12360,6 +12885,7 @@
           <a:lstStyle xmlns:a="http://schemas.openxmlformats.org/drawingml/2006/main"/>
           <a:p xmlns:a="http://schemas.openxmlformats.org/drawingml/2006/main">
             <a:pPr algn="ctr">
+              <a:buNone/>
               <a:defRPr sz="1650" b="1" i="0">
                 <a:solidFill>
                   <a:srgbClr val="0F7B62"/>
@@ -12533,6 +13059,7 @@
           <a:lstStyle xmlns:a="http://schemas.openxmlformats.org/drawingml/2006/main"/>
           <a:p xmlns:a="http://schemas.openxmlformats.org/drawingml/2006/main">
             <a:pPr algn="l">
+              <a:buNone/>
               <a:defRPr sz="3225" b="1" i="0">
                 <a:solidFill>
                   <a:srgbClr val="FFFFFF"/>
@@ -12543,7 +13070,7 @@
               </a:defRPr>
             </a:pPr>
             <a:r>
-              <a:t>HGB gewinnt – Random Forest bleibt dicht dahinter</a:t>
+              <a:t>A¹ · Sieben Kandidaten auf identischen Spatial Folds</a:t>
             </a:r>
           </a:p>
         </p:txBody>
@@ -12578,6 +13105,7 @@
           <a:lstStyle xmlns:a="http://schemas.openxmlformats.org/drawingml/2006/main"/>
           <a:p xmlns:a="http://schemas.openxmlformats.org/drawingml/2006/main">
             <a:pPr algn="l">
+              <a:buNone/>
               <a:defRPr sz="900" b="0" i="0">
                 <a:solidFill>
                   <a:srgbClr val="667587"/>
@@ -12588,7 +13116,7 @@
               </a:defRPr>
             </a:pPr>
             <a:r>
-              <a:t>Eigene Berechnung: 600.000 Entwicklungszeilen, identische 3-Fold-Spatial-CV; reports/algorithm_benchmark.json.</a:t>
+              <a:t>600.000 Zeilen · 3-Fold GroupKFold · gleicher Sample/gleiche Raumblöcke · reports/algorithm_benchmark.json.</a:t>
             </a:r>
           </a:p>
         </p:txBody>
@@ -12623,6 +13151,7 @@
           <a:lstStyle xmlns:a="http://schemas.openxmlformats.org/drawingml/2006/main"/>
           <a:p xmlns:a="http://schemas.openxmlformats.org/drawingml/2006/main">
             <a:pPr algn="r">
+              <a:buNone/>
               <a:defRPr sz="975" b="0" i="0">
                 <a:solidFill>
                   <a:srgbClr val="667587"/>
@@ -12701,6 +13230,7 @@
           <a:lstStyle xmlns:a="http://schemas.openxmlformats.org/drawingml/2006/main"/>
           <a:p xmlns:a="http://schemas.openxmlformats.org/drawingml/2006/main">
             <a:pPr algn="l">
+              <a:buNone/>
               <a:defRPr sz="2700" b="1" i="0">
                 <a:solidFill>
                   <a:srgbClr val="0F7B62"/>
@@ -12746,6 +13276,7 @@
           <a:lstStyle xmlns:a="http://schemas.openxmlformats.org/drawingml/2006/main"/>
           <a:p xmlns:a="http://schemas.openxmlformats.org/drawingml/2006/main">
             <a:pPr algn="l">
+              <a:buNone/>
               <a:defRPr sz="1500" b="0" i="0">
                 <a:solidFill>
                   <a:srgbClr val="0F7B62"/>
@@ -12756,7 +13287,7 @@
               </a:defRPr>
             </a:pPr>
             <a:r>
-              <a:t>niedrigster mittlerer CV-MAE</a:t>
+              <a:t>HGB: niedrigster mittlerer CV-MAE</a:t>
             </a:r>
           </a:p>
         </p:txBody>
@@ -12824,6 +13355,7 @@
           <a:lstStyle xmlns:a="http://schemas.openxmlformats.org/drawingml/2006/main"/>
           <a:p xmlns:a="http://schemas.openxmlformats.org/drawingml/2006/main">
             <a:pPr algn="l">
+              <a:buNone/>
               <a:defRPr sz="2700" b="1" i="0">
                 <a:solidFill>
                   <a:srgbClr val="102138"/>
@@ -12834,7 +13366,7 @@
               </a:defRPr>
             </a:pPr>
             <a:r>
-              <a:t>nur 0,016</a:t>
+              <a:t>SVM + Baum</a:t>
             </a:r>
           </a:p>
         </p:txBody>
@@ -12869,6 +13401,7 @@
           <a:lstStyle xmlns:a="http://schemas.openxmlformats.org/drawingml/2006/main"/>
           <a:p xmlns:a="http://schemas.openxmlformats.org/drawingml/2006/main">
             <a:pPr algn="l">
+              <a:buNone/>
               <a:defRPr sz="1500" b="0" i="0">
                 <a:solidFill>
                   <a:srgbClr val="667587"/>
@@ -12879,7 +13412,7 @@
               </a:defRPr>
             </a:pPr>
             <a:r>
-              <a:t>Vorsprung vor Random Forest</a:t>
+              <a:t>klassische Verfahren explizit geprüft</a:t>
             </a:r>
           </a:p>
         </p:txBody>
@@ -12914,6 +13447,7 @@
           <a:lstStyle xmlns:a="http://schemas.openxmlformats.org/drawingml/2006/main"/>
           <a:p xmlns:a="http://schemas.openxmlformats.org/drawingml/2006/main">
             <a:pPr algn="l">
+              <a:buNone/>
               <a:defRPr sz="1650" b="0" i="0">
                 <a:solidFill>
                   <a:srgbClr val="667587"/>
@@ -12924,14 +13458,14 @@
               </a:defRPr>
             </a:pPr>
             <a:r>
-              <a:t>Entscheidung: HGB bietet beste Güte, kleine Artefaktgröße und schnelle Inferenz. RF bleibt dokumentierter Challenger.</a:t>
+              <a:t>HGB gewinnt. Random Forest bleibt Challenger; exakter RBF-SVR ist bei 600k nicht skalierbar.</a:t>
             </a:r>
           </a:p>
         </p:txBody>
       </p:sp>
       <p:graphicFrame>
         <p:nvGraphicFramePr>
-          <p:cNvPr id="28" name="Chart"/>
+          <p:cNvPr id="30" name="Chart"/>
           <p:cNvGraphicFramePr/>
           <p:nvPr/>
         </p:nvGraphicFramePr>
@@ -12941,7 +13475,7 @@
         </p:xfrm>
         <a:graphic xmlns:a="http://schemas.openxmlformats.org/drawingml/2006/main">
           <a:graphicData uri="http://schemas.openxmlformats.org/drawingml/2006/chart">
-            <c:chart xmlns:r="http://schemas.openxmlformats.org/officeDocument/2006/relationships" xmlns:c="http://schemas.openxmlformats.org/drawingml/2006/chart" r:id="R717e8e0011c34b19"/>
+            <c:chart xmlns:r="http://schemas.openxmlformats.org/officeDocument/2006/relationships" xmlns:c="http://schemas.openxmlformats.org/drawingml/2006/chart" r:id="R5701dbc3da0640c0"/>
           </a:graphicData>
         </a:graphic>
       </p:graphicFrame>
@@ -13103,6 +13637,7 @@
           <a:lstStyle xmlns:a="http://schemas.openxmlformats.org/drawingml/2006/main"/>
           <a:p xmlns:a="http://schemas.openxmlformats.org/drawingml/2006/main">
             <a:pPr algn="l">
+              <a:buNone/>
               <a:defRPr sz="3225" b="1" i="0">
                 <a:solidFill>
                   <a:srgbClr val="FFFFFF"/>
@@ -13113,7 +13648,7 @@
               </a:defRPr>
             </a:pPr>
             <a:r>
-              <a:t>Finaler Test: 38,3 % weniger Fehler</a:t>
+              <a:t>A²/A³ · Features anpassen, acht HGB-Varianten tunen</a:t>
             </a:r>
           </a:p>
         </p:txBody>
@@ -13148,6 +13683,7 @@
           <a:lstStyle xmlns:a="http://schemas.openxmlformats.org/drawingml/2006/main"/>
           <a:p xmlns:a="http://schemas.openxmlformats.org/drawingml/2006/main">
             <a:pPr algn="l">
+              <a:buNone/>
               <a:defRPr sz="900" b="0" i="0">
                 <a:solidFill>
                   <a:srgbClr val="667587"/>
@@ -13158,7 +13694,7 @@
               </a:defRPr>
             </a:pPr>
             <a:r>
-              <a:t>Eigene Berechnung auf 276.458 Zeilen aus 99 gesperrten Raumblöcken; reports/final_model_evaluation.json.</a:t>
+              <a:t>Eigene Berechnung: reports/feature_ablation.json und reports/hgb_tuning.json.</a:t>
             </a:r>
           </a:p>
         </p:txBody>
@@ -13193,6 +13729,7 @@
           <a:lstStyle xmlns:a="http://schemas.openxmlformats.org/drawingml/2006/main"/>
           <a:p xmlns:a="http://schemas.openxmlformats.org/drawingml/2006/main">
             <a:pPr algn="r">
+              <a:buNone/>
               <a:defRPr sz="975" b="0" i="0">
                 <a:solidFill>
                   <a:srgbClr val="667587"/>
@@ -13238,6 +13775,7 @@
           <a:lstStyle xmlns:a="http://schemas.openxmlformats.org/drawingml/2006/main"/>
           <a:p xmlns:a="http://schemas.openxmlformats.org/drawingml/2006/main">
             <a:pPr algn="l">
+              <a:buNone/>
               <a:defRPr sz="1725" b="0" i="0">
                 <a:solidFill>
                   <a:srgbClr val="667587"/>
@@ -13248,7 +13786,7 @@
               </a:defRPr>
             </a:pPr>
             <a:r>
-              <a:t>Das nominale 90-%-Intervall erreicht räumlich 86,8 % – und genau das zeigt die App.</a:t>
+              <a:t>Lage liefert den größten Zusatznutzen; Kalibrierung und Test bleiben während des Tunings gesperrt.</a:t>
             </a:r>
           </a:p>
         </p:txBody>
@@ -13283,6 +13821,7 @@
           <a:lstStyle xmlns:a="http://schemas.openxmlformats.org/drawingml/2006/main"/>
           <a:p xmlns:a="http://schemas.openxmlformats.org/drawingml/2006/main">
             <a:pPr algn="l">
+              <a:buNone/>
               <a:defRPr sz="1725" b="1" i="0">
                 <a:solidFill>
                   <a:srgbClr val="102138"/>
@@ -13293,7 +13832,7 @@
               </a:defRPr>
             </a:pPr>
             <a:r>
-              <a:t>MAE auf dem finalen Test</a:t>
+              <a:t>MAE der vier Feature-Stufen</a:t>
             </a:r>
           </a:p>
         </p:txBody>
@@ -13361,6 +13900,7 @@
           <a:lstStyle xmlns:a="http://schemas.openxmlformats.org/drawingml/2006/main"/>
           <a:p xmlns:a="http://schemas.openxmlformats.org/drawingml/2006/main">
             <a:pPr algn="l">
+              <a:buNone/>
               <a:defRPr sz="3750" b="1" i="0">
                 <a:solidFill>
                   <a:srgbClr val="0F7B62"/>
@@ -13371,7 +13911,7 @@
               </a:defRPr>
             </a:pPr>
             <a:r>
-              <a:t>38,3 %</a:t>
+              <a:t>4 Stufen</a:t>
             </a:r>
           </a:p>
         </p:txBody>
@@ -13406,6 +13946,7 @@
           <a:lstStyle xmlns:a="http://schemas.openxmlformats.org/drawingml/2006/main"/>
           <a:p xmlns:a="http://schemas.openxmlformats.org/drawingml/2006/main">
             <a:pPr algn="l">
+              <a:buNone/>
               <a:defRPr sz="1575" b="0" i="0">
                 <a:solidFill>
                   <a:srgbClr val="0F7B62"/>
@@ -13416,7 +13957,7 @@
               </a:defRPr>
             </a:pPr>
             <a:r>
-              <a:t>weniger MAE als die Kategorie-Baseline</a:t>
+              <a:t>Kategorien → Lage → Umfeld → Qualität</a:t>
             </a:r>
           </a:p>
         </p:txBody>
@@ -13484,6 +14025,7 @@
           <a:lstStyle xmlns:a="http://schemas.openxmlformats.org/drawingml/2006/main"/>
           <a:p xmlns:a="http://schemas.openxmlformats.org/drawingml/2006/main">
             <a:pPr algn="l">
+              <a:buNone/>
               <a:defRPr sz="3750" b="1" i="0">
                 <a:solidFill>
                   <a:srgbClr val="315CFF"/>
@@ -13494,7 +14036,7 @@
               </a:defRPr>
             </a:pPr>
             <a:r>
-              <a:t>86,8 %</a:t>
+              <a:t>8 Tunings</a:t>
             </a:r>
           </a:p>
         </p:txBody>
@@ -13529,6 +14071,7 @@
           <a:lstStyle xmlns:a="http://schemas.openxmlformats.org/drawingml/2006/main"/>
           <a:p xmlns:a="http://schemas.openxmlformats.org/drawingml/2006/main">
             <a:pPr algn="l">
+              <a:buNone/>
               <a:defRPr sz="1575" b="0" i="0">
                 <a:solidFill>
                   <a:srgbClr val="315CFF"/>
@@ -13539,7 +14082,7 @@
               </a:defRPr>
             </a:pPr>
             <a:r>
-              <a:t>empirische Coverage des nominalen 90-%-Bands</a:t>
+              <a:t>automatisierte, reproduzierbare HGB-Suche</a:t>
             </a:r>
           </a:p>
         </p:txBody>
@@ -13574,6 +14117,7 @@
           <a:lstStyle xmlns:a="http://schemas.openxmlformats.org/drawingml/2006/main"/>
           <a:p xmlns:a="http://schemas.openxmlformats.org/drawingml/2006/main">
             <a:pPr algn="l">
+              <a:buNone/>
               <a:defRPr sz="1500" b="1" i="0">
                 <a:solidFill>
                   <a:srgbClr val="D97706"/>
@@ -13584,14 +14128,14 @@
               </a:defRPr>
             </a:pPr>
             <a:r>
-              <a:t>Keine 90-%-Garantie: räumlicher Verteilungswechsel verletzt perfekte Austauschbarkeit.</a:t>
+              <a:t>Gewählt: Kandidat 6 · 127 Blätter · learning_rate 0,06 · L2 = 5</a:t>
             </a:r>
           </a:p>
         </p:txBody>
       </p:sp>
       <p:graphicFrame>
         <p:nvGraphicFramePr>
-          <p:cNvPr id="32" name="Chart"/>
+          <p:cNvPr id="34" name="Chart"/>
           <p:cNvGraphicFramePr/>
           <p:nvPr/>
         </p:nvGraphicFramePr>
@@ -13601,7 +14145,7 @@
         </p:xfrm>
         <a:graphic xmlns:a="http://schemas.openxmlformats.org/drawingml/2006/main">
           <a:graphicData uri="http://schemas.openxmlformats.org/drawingml/2006/chart">
-            <c:chart xmlns:r="http://schemas.openxmlformats.org/officeDocument/2006/relationships" xmlns:c="http://schemas.openxmlformats.org/drawingml/2006/chart" r:id="R1e8e9e8242374c1c"/>
+            <c:chart xmlns:r="http://schemas.openxmlformats.org/officeDocument/2006/relationships" xmlns:c="http://schemas.openxmlformats.org/drawingml/2006/chart" r:id="Rff0d65f5e92d4918"/>
           </a:graphicData>
         </a:graphic>
       </p:graphicFrame>
@@ -13636,10 +14180,10 @@
       </p:grpSpPr>
       <p:sp>
         <p:nvSpPr>
-          <p:cNvPr id="18" name="header-9">
-            <a:extLst xmlns:a="http://schemas.openxmlformats.org/drawingml/2006/main">
-              <a:ext uri="{FF2B5EF4-FFF2-40B4-BE49-F238E27FC236}">
-                <a16:creationId xmlns:a16="http://schemas.microsoft.com/office/drawing/2014/main" id="{3E41DA95-87D4-4728-9D31-C09067E5DD6F}"/>
+          <p:cNvPr id="17" name="header-8">
+            <a:extLst xmlns:a="http://schemas.openxmlformats.org/drawingml/2006/main">
+              <a:ext uri="{FF2B5EF4-FFF2-40B4-BE49-F238E27FC236}">
+                <a16:creationId xmlns:a16="http://schemas.microsoft.com/office/drawing/2014/main" id="{0043B925-52F2-46FF-B342-5E250D724FFC}"/>
               </a:ext>
             </a:extLst>
           </p:cNvPr>
@@ -13669,10 +14213,10 @@
       </p:sp>
       <p:sp>
         <p:nvSpPr>
-          <p:cNvPr id="2" name="header-teal-9">
-            <a:extLst xmlns:a="http://schemas.openxmlformats.org/drawingml/2006/main">
-              <a:ext uri="{FF2B5EF4-FFF2-40B4-BE49-F238E27FC236}">
-                <a16:creationId xmlns:a16="http://schemas.microsoft.com/office/drawing/2014/main" id="{A1FD412A-3773-4A6F-83C4-2A26BE35EE29}"/>
+          <p:cNvPr id="2" name="header-teal-8">
+            <a:extLst xmlns:a="http://schemas.openxmlformats.org/drawingml/2006/main">
+              <a:ext uri="{FF2B5EF4-FFF2-40B4-BE49-F238E27FC236}">
+                <a16:creationId xmlns:a16="http://schemas.microsoft.com/office/drawing/2014/main" id="{F8D1534A-FC57-47E8-90E5-EBAD92271D93}"/>
               </a:ext>
             </a:extLst>
           </p:cNvPr>
@@ -13702,10 +14246,10 @@
       </p:sp>
       <p:sp>
         <p:nvSpPr>
-          <p:cNvPr id="3" name="header-accent-9">
-            <a:extLst xmlns:a="http://schemas.openxmlformats.org/drawingml/2006/main">
-              <a:ext uri="{FF2B5EF4-FFF2-40B4-BE49-F238E27FC236}">
-                <a16:creationId xmlns:a16="http://schemas.microsoft.com/office/drawing/2014/main" id="{57CA692F-7187-4F3D-8B48-847734F78484}"/>
+          <p:cNvPr id="3" name="header-accent-8">
+            <a:extLst xmlns:a="http://schemas.openxmlformats.org/drawingml/2006/main">
+              <a:ext uri="{FF2B5EF4-FFF2-40B4-BE49-F238E27FC236}">
+                <a16:creationId xmlns:a16="http://schemas.microsoft.com/office/drawing/2014/main" id="{FE687181-EAE2-4DA5-8600-ABBFE0F87BAD}"/>
               </a:ext>
             </a:extLst>
           </p:cNvPr>
@@ -13735,10 +14279,10 @@
       </p:sp>
       <p:sp>
         <p:nvSpPr>
-          <p:cNvPr id="4" name="title-9">
-            <a:extLst xmlns:a="http://schemas.openxmlformats.org/drawingml/2006/main">
-              <a:ext uri="{FF2B5EF4-FFF2-40B4-BE49-F238E27FC236}">
-                <a16:creationId xmlns:a16="http://schemas.microsoft.com/office/drawing/2014/main" id="{C42A0484-2EB5-4ED1-BFC7-DD96E77F629D}"/>
+          <p:cNvPr id="4" name="title-8">
+            <a:extLst xmlns:a="http://schemas.openxmlformats.org/drawingml/2006/main">
+              <a:ext uri="{FF2B5EF4-FFF2-40B4-BE49-F238E27FC236}">
+                <a16:creationId xmlns:a16="http://schemas.microsoft.com/office/drawing/2014/main" id="{C995891B-A9CE-414E-AFD6-416072A2DEE9}"/>
               </a:ext>
             </a:extLst>
           </p:cNvPr>
@@ -13763,6 +14307,7 @@
           <a:lstStyle xmlns:a="http://schemas.openxmlformats.org/drawingml/2006/main"/>
           <a:p xmlns:a="http://schemas.openxmlformats.org/drawingml/2006/main">
             <a:pPr algn="l">
+              <a:buNone/>
               <a:defRPr sz="3225" b="1" i="0">
                 <a:solidFill>
                   <a:srgbClr val="FFFFFF"/>
@@ -13773,17 +14318,17 @@
               </a:defRPr>
             </a:pPr>
             <a:r>
-              <a:t>Berlin zeigt die Lücke zwischen Bestand und Angebot</a:t>
-            </a:r>
-          </a:p>
-        </p:txBody>
-      </p:sp>
-      <p:sp>
-        <p:nvSpPr>
-          <p:cNvPr id="5" name="source-9">
-            <a:extLst xmlns:a="http://schemas.openxmlformats.org/drawingml/2006/main">
-              <a:ext uri="{FF2B5EF4-FFF2-40B4-BE49-F238E27FC236}">
-                <a16:creationId xmlns:a16="http://schemas.microsoft.com/office/drawing/2014/main" id="{122B3FAA-7CCC-4143-9C19-9B9FAFCFA331}"/>
+              <a:t>C · Finaler Test: 38,3 % weniger Fehler</a:t>
+            </a:r>
+          </a:p>
+        </p:txBody>
+      </p:sp>
+      <p:sp>
+        <p:nvSpPr>
+          <p:cNvPr id="5" name="source-8">
+            <a:extLst xmlns:a="http://schemas.openxmlformats.org/drawingml/2006/main">
+              <a:ext uri="{FF2B5EF4-FFF2-40B4-BE49-F238E27FC236}">
+                <a16:creationId xmlns:a16="http://schemas.microsoft.com/office/drawing/2014/main" id="{75360F69-A311-4496-8FF7-65B06D20F6EA}"/>
               </a:ext>
             </a:extLst>
           </p:cNvPr>
@@ -13808,6 +14353,7 @@
           <a:lstStyle xmlns:a="http://schemas.openxmlformats.org/drawingml/2006/main"/>
           <a:p xmlns:a="http://schemas.openxmlformats.org/drawingml/2006/main">
             <a:pPr algn="l">
+              <a:buNone/>
               <a:defRPr sz="900" b="0" i="0">
                 <a:solidFill>
                   <a:srgbClr val="667587"/>
@@ -13818,17 +14364,17 @@
               </a:defRPr>
             </a:pPr>
             <a:r>
-              <a:t>Quelle: GREIX-Mietpreisindex, Kiel Institut / VALUE; Zensus 2022; eigene Verarbeitung. Beispiel: 70 m², bis 1990, &gt;65 m².</a:t>
-            </a:r>
-          </a:p>
-        </p:txBody>
-      </p:sp>
-      <p:sp>
-        <p:nvSpPr>
-          <p:cNvPr id="6" name="page-9">
-            <a:extLst xmlns:a="http://schemas.openxmlformats.org/drawingml/2006/main">
-              <a:ext uri="{FF2B5EF4-FFF2-40B4-BE49-F238E27FC236}">
-                <a16:creationId xmlns:a16="http://schemas.microsoft.com/office/drawing/2014/main" id="{22115B0E-7F2B-4C1F-ACC0-1F951AD68C51}"/>
+              <a:t>Eigene Berechnung auf 276.458 Zeilen aus 99 gesperrten Raumblöcken; reports/final_model_evaluation.json.</a:t>
+            </a:r>
+          </a:p>
+        </p:txBody>
+      </p:sp>
+      <p:sp>
+        <p:nvSpPr>
+          <p:cNvPr id="6" name="page-8">
+            <a:extLst xmlns:a="http://schemas.openxmlformats.org/drawingml/2006/main">
+              <a:ext uri="{FF2B5EF4-FFF2-40B4-BE49-F238E27FC236}">
+                <a16:creationId xmlns:a16="http://schemas.microsoft.com/office/drawing/2014/main" id="{A79F5593-D33E-4449-A496-515624B28DD9}"/>
               </a:ext>
             </a:extLst>
           </p:cNvPr>
@@ -13853,6 +14399,7 @@
           <a:lstStyle xmlns:a="http://schemas.openxmlformats.org/drawingml/2006/main"/>
           <a:p xmlns:a="http://schemas.openxmlformats.org/drawingml/2006/main">
             <a:pPr algn="r">
+              <a:buNone/>
               <a:defRPr sz="975" b="0" i="0">
                 <a:solidFill>
                   <a:srgbClr val="667587"/>
@@ -13870,22 +14417,22 @@
       </p:sp>
       <p:sp>
         <p:nvSpPr>
-          <p:cNvPr id="7" name="berlin-chart-title">
-            <a:extLst xmlns:a="http://schemas.openxmlformats.org/drawingml/2006/main">
-              <a:ext uri="{FF2B5EF4-FFF2-40B4-BE49-F238E27FC236}">
-                <a16:creationId xmlns:a16="http://schemas.microsoft.com/office/drawing/2014/main" id="{4107FA98-DD3E-4789-B731-CBECBDF52DA5}"/>
-              </a:ext>
-            </a:extLst>
-          </p:cNvPr>
-          <p:cNvSpPr>
-            <a:spLocks xmlns:a="http://schemas.openxmlformats.org/drawingml/2006/main" noGrp="1"/>
-          </p:cNvSpPr>
-          <p:nvPr/>
-        </p:nvSpPr>
-        <p:spPr>
-          <a:xfrm xmlns:a="http://schemas.openxmlformats.org/drawingml/2006/main">
-            <a:off x="457200" y="1409700"/>
-            <a:ext cx="6191250" cy="342900"/>
+          <p:cNvPr id="7" name="final-lead">
+            <a:extLst xmlns:a="http://schemas.openxmlformats.org/drawingml/2006/main">
+              <a:ext uri="{FF2B5EF4-FFF2-40B4-BE49-F238E27FC236}">
+                <a16:creationId xmlns:a16="http://schemas.microsoft.com/office/drawing/2014/main" id="{DFA9B1AA-C9AB-4E86-B9A1-422FA2557C86}"/>
+              </a:ext>
+            </a:extLst>
+          </p:cNvPr>
+          <p:cNvSpPr>
+            <a:spLocks xmlns:a="http://schemas.openxmlformats.org/drawingml/2006/main" noGrp="1"/>
+          </p:cNvSpPr>
+          <p:nvPr/>
+        </p:nvSpPr>
+        <p:spPr>
+          <a:xfrm xmlns:a="http://schemas.openxmlformats.org/drawingml/2006/main">
+            <a:off x="457200" y="1257300"/>
+            <a:ext cx="11049000" cy="419100"/>
           </a:xfrm>
           <a:prstGeom xmlns:a="http://schemas.openxmlformats.org/drawingml/2006/main" prst="rect">
             <a:avLst/>
@@ -13898,6 +14445,53 @@
           <a:lstStyle xmlns:a="http://schemas.openxmlformats.org/drawingml/2006/main"/>
           <a:p xmlns:a="http://schemas.openxmlformats.org/drawingml/2006/main">
             <a:pPr algn="l">
+              <a:buNone/>
+              <a:defRPr sz="1725" b="0" i="0">
+                <a:solidFill>
+                  <a:srgbClr val="667587"/>
+                </a:solidFill>
+                <a:latin typeface="Arial"/>
+                <a:ea typeface="Arial"/>
+                <a:cs typeface="Arial"/>
+              </a:defRPr>
+            </a:pPr>
+            <a:r>
+              <a:t>Das nominale 90-%-Intervall erreicht räumlich 86,8 % – und genau das zeigt die App.</a:t>
+            </a:r>
+          </a:p>
+        </p:txBody>
+      </p:sp>
+      <p:sp>
+        <p:nvSpPr>
+          <p:cNvPr id="8" name="final-chart-title">
+            <a:extLst xmlns:a="http://schemas.openxmlformats.org/drawingml/2006/main">
+              <a:ext uri="{FF2B5EF4-FFF2-40B4-BE49-F238E27FC236}">
+                <a16:creationId xmlns:a16="http://schemas.microsoft.com/office/drawing/2014/main" id="{0C5F1998-5D54-4725-A9C4-7B962D9BB6EB}"/>
+              </a:ext>
+            </a:extLst>
+          </p:cNvPr>
+          <p:cNvSpPr>
+            <a:spLocks xmlns:a="http://schemas.openxmlformats.org/drawingml/2006/main" noGrp="1"/>
+          </p:cNvSpPr>
+          <p:nvPr/>
+        </p:nvSpPr>
+        <p:spPr>
+          <a:xfrm xmlns:a="http://schemas.openxmlformats.org/drawingml/2006/main">
+            <a:off x="457200" y="1771650"/>
+            <a:ext cx="5810250" cy="342900"/>
+          </a:xfrm>
+          <a:prstGeom xmlns:a="http://schemas.openxmlformats.org/drawingml/2006/main" prst="rect">
+            <a:avLst/>
+          </a:prstGeom>
+        </p:spPr>
+        <p:txBody>
+          <a:bodyPr xmlns:a="http://schemas.openxmlformats.org/drawingml/2006/main" wrap="square" lIns="0" tIns="0" rIns="0" bIns="0" anchor="t">
+            <a:noAutofit/>
+          </a:bodyPr>
+          <a:lstStyle xmlns:a="http://schemas.openxmlformats.org/drawingml/2006/main"/>
+          <a:p xmlns:a="http://schemas.openxmlformats.org/drawingml/2006/main">
+            <a:pPr algn="l">
+              <a:buNone/>
               <a:defRPr sz="1725" b="1" i="0">
                 <a:solidFill>
                   <a:srgbClr val="102138"/>
@@ -13908,29 +14502,29 @@
               </a:defRPr>
             </a:pPr>
             <a:r>
-              <a:t>GREIX-Angebotsmedian in Berlin</a:t>
-            </a:r>
-          </a:p>
-        </p:txBody>
-      </p:sp>
-      <p:sp>
-        <p:nvSpPr>
-          <p:cNvPr id="8" name="berlin-stock">
-            <a:extLst xmlns:a="http://schemas.openxmlformats.org/drawingml/2006/main">
-              <a:ext uri="{FF2B5EF4-FFF2-40B4-BE49-F238E27FC236}">
-                <a16:creationId xmlns:a16="http://schemas.microsoft.com/office/drawing/2014/main" id="{01E36168-1888-4EC3-89DE-87CF53C97BC5}"/>
-              </a:ext>
-            </a:extLst>
-          </p:cNvPr>
-          <p:cNvSpPr>
-            <a:spLocks xmlns:a="http://schemas.openxmlformats.org/drawingml/2006/main" noGrp="1"/>
-          </p:cNvSpPr>
-          <p:nvPr/>
-        </p:nvSpPr>
-        <p:spPr>
-          <a:xfrm xmlns:a="http://schemas.openxmlformats.org/drawingml/2006/main">
-            <a:off x="7353300" y="1809750"/>
-            <a:ext cx="4152900" cy="1104900"/>
+              <a:t>MAE auf dem finalen Test</a:t>
+            </a:r>
+          </a:p>
+        </p:txBody>
+      </p:sp>
+      <p:sp>
+        <p:nvSpPr>
+          <p:cNvPr id="9" name="final-metric-one">
+            <a:extLst xmlns:a="http://schemas.openxmlformats.org/drawingml/2006/main">
+              <a:ext uri="{FF2B5EF4-FFF2-40B4-BE49-F238E27FC236}">
+                <a16:creationId xmlns:a16="http://schemas.microsoft.com/office/drawing/2014/main" id="{DF0A22F3-CDF1-4530-8EA8-75B5204F6FCF}"/>
+              </a:ext>
+            </a:extLst>
+          </p:cNvPr>
+          <p:cNvSpPr>
+            <a:spLocks xmlns:a="http://schemas.openxmlformats.org/drawingml/2006/main" noGrp="1"/>
+          </p:cNvSpPr>
+          <p:nvPr/>
+        </p:nvSpPr>
+        <p:spPr>
+          <a:xfrm xmlns:a="http://schemas.openxmlformats.org/drawingml/2006/main">
+            <a:off x="7143750" y="1676400"/>
+            <a:ext cx="4362450" cy="1619250"/>
           </a:xfrm>
           <a:prstGeom xmlns:a="http://schemas.openxmlformats.org/drawingml/2006/main" prst="rect">
             <a:avLst/>
@@ -13948,22 +14542,22 @@
       </p:sp>
       <p:sp>
         <p:nvSpPr>
-          <p:cNvPr id="9" name="berlin-stock-stat">
-            <a:extLst xmlns:a="http://schemas.openxmlformats.org/drawingml/2006/main">
-              <a:ext uri="{FF2B5EF4-FFF2-40B4-BE49-F238E27FC236}">
-                <a16:creationId xmlns:a16="http://schemas.microsoft.com/office/drawing/2014/main" id="{C5BBCF2E-9784-43C8-ACA9-F476D4D652B8}"/>
-              </a:ext>
-            </a:extLst>
-          </p:cNvPr>
-          <p:cNvSpPr>
-            <a:spLocks xmlns:a="http://schemas.openxmlformats.org/drawingml/2006/main" noGrp="1"/>
-          </p:cNvSpPr>
-          <p:nvPr/>
-        </p:nvSpPr>
-        <p:spPr>
-          <a:xfrm xmlns:a="http://schemas.openxmlformats.org/drawingml/2006/main">
-            <a:off x="7639050" y="1981200"/>
-            <a:ext cx="3581400" cy="476250"/>
+          <p:cNvPr id="10" name="final-metric-one-stat">
+            <a:extLst xmlns:a="http://schemas.openxmlformats.org/drawingml/2006/main">
+              <a:ext uri="{FF2B5EF4-FFF2-40B4-BE49-F238E27FC236}">
+                <a16:creationId xmlns:a16="http://schemas.microsoft.com/office/drawing/2014/main" id="{0AEC8CE9-09CB-4CB8-AD3B-54199BB383A9}"/>
+              </a:ext>
+            </a:extLst>
+          </p:cNvPr>
+          <p:cNvSpPr>
+            <a:spLocks xmlns:a="http://schemas.openxmlformats.org/drawingml/2006/main" noGrp="1"/>
+          </p:cNvSpPr>
+          <p:nvPr/>
+        </p:nvSpPr>
+        <p:spPr>
+          <a:xfrm xmlns:a="http://schemas.openxmlformats.org/drawingml/2006/main">
+            <a:off x="7448550" y="1924050"/>
+            <a:ext cx="3714750" cy="666750"/>
           </a:xfrm>
           <a:prstGeom xmlns:a="http://schemas.openxmlformats.org/drawingml/2006/main" prst="rect">
             <a:avLst/>
@@ -13976,7 +14570,8 @@
           <a:lstStyle xmlns:a="http://schemas.openxmlformats.org/drawingml/2006/main"/>
           <a:p xmlns:a="http://schemas.openxmlformats.org/drawingml/2006/main">
             <a:pPr algn="l">
-              <a:defRPr sz="2700" b="1" i="0">
+              <a:buNone/>
+              <a:defRPr sz="3750" b="1" i="0">
                 <a:solidFill>
                   <a:srgbClr val="0F7B62"/>
                 </a:solidFill>
@@ -13986,29 +14581,29 @@
               </a:defRPr>
             </a:pPr>
             <a:r>
-              <a:t>7,27 €/m²</a:t>
-            </a:r>
-          </a:p>
-        </p:txBody>
-      </p:sp>
-      <p:sp>
-        <p:nvSpPr>
-          <p:cNvPr id="10" name="berlin-stock-body">
-            <a:extLst xmlns:a="http://schemas.openxmlformats.org/drawingml/2006/main">
-              <a:ext uri="{FF2B5EF4-FFF2-40B4-BE49-F238E27FC236}">
-                <a16:creationId xmlns:a16="http://schemas.microsoft.com/office/drawing/2014/main" id="{44A35A95-8260-4E4D-9B69-CE0AEEBE6ECC}"/>
-              </a:ext>
-            </a:extLst>
-          </p:cNvPr>
-          <p:cNvSpPr>
-            <a:spLocks xmlns:a="http://schemas.openxmlformats.org/drawingml/2006/main" noGrp="1"/>
-          </p:cNvSpPr>
-          <p:nvPr/>
-        </p:nvSpPr>
-        <p:spPr>
-          <a:xfrm xmlns:a="http://schemas.openxmlformats.org/drawingml/2006/main">
-            <a:off x="7639050" y="2552700"/>
-            <a:ext cx="3581400" cy="247650"/>
+              <a:t>38,3 %</a:t>
+            </a:r>
+          </a:p>
+        </p:txBody>
+      </p:sp>
+      <p:sp>
+        <p:nvSpPr>
+          <p:cNvPr id="11" name="final-metric-one-body">
+            <a:extLst xmlns:a="http://schemas.openxmlformats.org/drawingml/2006/main">
+              <a:ext uri="{FF2B5EF4-FFF2-40B4-BE49-F238E27FC236}">
+                <a16:creationId xmlns:a16="http://schemas.microsoft.com/office/drawing/2014/main" id="{87112F32-9566-4332-8B1C-A6626572E778}"/>
+              </a:ext>
+            </a:extLst>
+          </p:cNvPr>
+          <p:cNvSpPr>
+            <a:spLocks xmlns:a="http://schemas.openxmlformats.org/drawingml/2006/main" noGrp="1"/>
+          </p:cNvSpPr>
+          <p:nvPr/>
+        </p:nvSpPr>
+        <p:spPr>
+          <a:xfrm xmlns:a="http://schemas.openxmlformats.org/drawingml/2006/main">
+            <a:off x="7448550" y="2724150"/>
+            <a:ext cx="3714750" cy="419100"/>
           </a:xfrm>
           <a:prstGeom xmlns:a="http://schemas.openxmlformats.org/drawingml/2006/main" prst="rect">
             <a:avLst/>
@@ -14021,7 +14616,8 @@
           <a:lstStyle xmlns:a="http://schemas.openxmlformats.org/drawingml/2006/main"/>
           <a:p xmlns:a="http://schemas.openxmlformats.org/drawingml/2006/main">
             <a:pPr algn="l">
-              <a:defRPr sz="1500" b="0" i="0">
+              <a:buNone/>
+              <a:defRPr sz="1575" b="0" i="0">
                 <a:solidFill>
                   <a:srgbClr val="0F7B62"/>
                 </a:solidFill>
@@ -14031,29 +14627,29 @@
               </a:defRPr>
             </a:pPr>
             <a:r>
-              <a:t>ML-Bestandsanker 2022</a:t>
-            </a:r>
-          </a:p>
-        </p:txBody>
-      </p:sp>
-      <p:sp>
-        <p:nvSpPr>
-          <p:cNvPr id="11" name="berlin-market">
-            <a:extLst xmlns:a="http://schemas.openxmlformats.org/drawingml/2006/main">
-              <a:ext uri="{FF2B5EF4-FFF2-40B4-BE49-F238E27FC236}">
-                <a16:creationId xmlns:a16="http://schemas.microsoft.com/office/drawing/2014/main" id="{EB538EA1-619A-4473-81F8-B0047F41A1F7}"/>
-              </a:ext>
-            </a:extLst>
-          </p:cNvPr>
-          <p:cNvSpPr>
-            <a:spLocks xmlns:a="http://schemas.openxmlformats.org/drawingml/2006/main" noGrp="1"/>
-          </p:cNvSpPr>
-          <p:nvPr/>
-        </p:nvSpPr>
-        <p:spPr>
-          <a:xfrm xmlns:a="http://schemas.openxmlformats.org/drawingml/2006/main">
-            <a:off x="7353300" y="3143250"/>
-            <a:ext cx="4152900" cy="1104900"/>
+              <a:t>weniger MAE als die Kategorie-Baseline</a:t>
+            </a:r>
+          </a:p>
+        </p:txBody>
+      </p:sp>
+      <p:sp>
+        <p:nvSpPr>
+          <p:cNvPr id="12" name="final-metric-two">
+            <a:extLst xmlns:a="http://schemas.openxmlformats.org/drawingml/2006/main">
+              <a:ext uri="{FF2B5EF4-FFF2-40B4-BE49-F238E27FC236}">
+                <a16:creationId xmlns:a16="http://schemas.microsoft.com/office/drawing/2014/main" id="{ACDCE033-3ABF-4FA0-AB47-28B9CA80DB52}"/>
+              </a:ext>
+            </a:extLst>
+          </p:cNvPr>
+          <p:cNvSpPr>
+            <a:spLocks xmlns:a="http://schemas.openxmlformats.org/drawingml/2006/main" noGrp="1"/>
+          </p:cNvSpPr>
+          <p:nvPr/>
+        </p:nvSpPr>
+        <p:spPr>
+          <a:xfrm xmlns:a="http://schemas.openxmlformats.org/drawingml/2006/main">
+            <a:off x="7143750" y="3562350"/>
+            <a:ext cx="4362450" cy="1619250"/>
           </a:xfrm>
           <a:prstGeom xmlns:a="http://schemas.openxmlformats.org/drawingml/2006/main" prst="rect">
             <a:avLst/>
@@ -14071,22 +14667,22 @@
       </p:sp>
       <p:sp>
         <p:nvSpPr>
-          <p:cNvPr id="12" name="berlin-market-stat">
-            <a:extLst xmlns:a="http://schemas.openxmlformats.org/drawingml/2006/main">
-              <a:ext uri="{FF2B5EF4-FFF2-40B4-BE49-F238E27FC236}">
-                <a16:creationId xmlns:a16="http://schemas.microsoft.com/office/drawing/2014/main" id="{AE158FBB-EEDC-4904-AC95-71FC6411A9EF}"/>
-              </a:ext>
-            </a:extLst>
-          </p:cNvPr>
-          <p:cNvSpPr>
-            <a:spLocks xmlns:a="http://schemas.openxmlformats.org/drawingml/2006/main" noGrp="1"/>
-          </p:cNvSpPr>
-          <p:nvPr/>
-        </p:nvSpPr>
-        <p:spPr>
-          <a:xfrm xmlns:a="http://schemas.openxmlformats.org/drawingml/2006/main">
-            <a:off x="7639050" y="3314700"/>
-            <a:ext cx="3581400" cy="476250"/>
+          <p:cNvPr id="13" name="final-metric-two-stat">
+            <a:extLst xmlns:a="http://schemas.openxmlformats.org/drawingml/2006/main">
+              <a:ext uri="{FF2B5EF4-FFF2-40B4-BE49-F238E27FC236}">
+                <a16:creationId xmlns:a16="http://schemas.microsoft.com/office/drawing/2014/main" id="{4E3B9EA6-7721-4C36-A597-158EE100BA6C}"/>
+              </a:ext>
+            </a:extLst>
+          </p:cNvPr>
+          <p:cNvSpPr>
+            <a:spLocks xmlns:a="http://schemas.openxmlformats.org/drawingml/2006/main" noGrp="1"/>
+          </p:cNvSpPr>
+          <p:nvPr/>
+        </p:nvSpPr>
+        <p:spPr>
+          <a:xfrm xmlns:a="http://schemas.openxmlformats.org/drawingml/2006/main">
+            <a:off x="7448550" y="3810000"/>
+            <a:ext cx="3714750" cy="666750"/>
           </a:xfrm>
           <a:prstGeom xmlns:a="http://schemas.openxmlformats.org/drawingml/2006/main" prst="rect">
             <a:avLst/>
@@ -14099,7 +14695,8 @@
           <a:lstStyle xmlns:a="http://schemas.openxmlformats.org/drawingml/2006/main"/>
           <a:p xmlns:a="http://schemas.openxmlformats.org/drawingml/2006/main">
             <a:pPr algn="l">
-              <a:defRPr sz="2700" b="1" i="0">
+              <a:buNone/>
+              <a:defRPr sz="3750" b="1" i="0">
                 <a:solidFill>
                   <a:srgbClr val="315CFF"/>
                 </a:solidFill>
@@ -14109,29 +14706,29 @@
               </a:defRPr>
             </a:pPr>
             <a:r>
-              <a:t>15,50 €/m²</a:t>
-            </a:r>
-          </a:p>
-        </p:txBody>
-      </p:sp>
-      <p:sp>
-        <p:nvSpPr>
-          <p:cNvPr id="13" name="berlin-market-body">
-            <a:extLst xmlns:a="http://schemas.openxmlformats.org/drawingml/2006/main">
-              <a:ext uri="{FF2B5EF4-FFF2-40B4-BE49-F238E27FC236}">
-                <a16:creationId xmlns:a16="http://schemas.microsoft.com/office/drawing/2014/main" id="{CB4C7EB7-7DF5-4C38-9ADE-409AABB7142E}"/>
-              </a:ext>
-            </a:extLst>
-          </p:cNvPr>
-          <p:cNvSpPr>
-            <a:spLocks xmlns:a="http://schemas.openxmlformats.org/drawingml/2006/main" noGrp="1"/>
-          </p:cNvSpPr>
-          <p:nvPr/>
-        </p:nvSpPr>
-        <p:spPr>
-          <a:xfrm xmlns:a="http://schemas.openxmlformats.org/drawingml/2006/main">
-            <a:off x="7639050" y="3886200"/>
-            <a:ext cx="3581400" cy="247650"/>
+              <a:t>86,8 %</a:t>
+            </a:r>
+          </a:p>
+        </p:txBody>
+      </p:sp>
+      <p:sp>
+        <p:nvSpPr>
+          <p:cNvPr id="14" name="final-metric-two-body">
+            <a:extLst xmlns:a="http://schemas.openxmlformats.org/drawingml/2006/main">
+              <a:ext uri="{FF2B5EF4-FFF2-40B4-BE49-F238E27FC236}">
+                <a16:creationId xmlns:a16="http://schemas.microsoft.com/office/drawing/2014/main" id="{31A8896C-2820-412E-931B-55193BA0FD14}"/>
+              </a:ext>
+            </a:extLst>
+          </p:cNvPr>
+          <p:cNvSpPr>
+            <a:spLocks xmlns:a="http://schemas.openxmlformats.org/drawingml/2006/main" noGrp="1"/>
+          </p:cNvSpPr>
+          <p:nvPr/>
+        </p:nvSpPr>
+        <p:spPr>
+          <a:xfrm xmlns:a="http://schemas.openxmlformats.org/drawingml/2006/main">
+            <a:off x="7448550" y="4610100"/>
+            <a:ext cx="3714750" cy="457200"/>
           </a:xfrm>
           <a:prstGeom xmlns:a="http://schemas.openxmlformats.org/drawingml/2006/main" prst="rect">
             <a:avLst/>
@@ -14144,7 +14741,8 @@
           <a:lstStyle xmlns:a="http://schemas.openxmlformats.org/drawingml/2006/main"/>
           <a:p xmlns:a="http://schemas.openxmlformats.org/drawingml/2006/main">
             <a:pPr algn="l">
-              <a:defRPr sz="1500" b="0" i="0">
+              <a:buNone/>
+              <a:defRPr sz="1575" b="0" i="0">
                 <a:solidFill>
                   <a:srgbClr val="315CFF"/>
                 </a:solidFill>
@@ -14154,62 +14752,29 @@
               </a:defRPr>
             </a:pPr>
             <a:r>
-              <a:t>GREIX-Angebotsmedian 2026-Q1</a:t>
-            </a:r>
-          </a:p>
-        </p:txBody>
-      </p:sp>
-      <p:sp>
-        <p:nvSpPr>
-          <p:cNvPr id="14" name="berlin-premium">
-            <a:extLst xmlns:a="http://schemas.openxmlformats.org/drawingml/2006/main">
-              <a:ext uri="{FF2B5EF4-FFF2-40B4-BE49-F238E27FC236}">
-                <a16:creationId xmlns:a16="http://schemas.microsoft.com/office/drawing/2014/main" id="{19032784-5F49-4772-9937-BC841C9D1175}"/>
-              </a:ext>
-            </a:extLst>
-          </p:cNvPr>
-          <p:cNvSpPr>
-            <a:spLocks xmlns:a="http://schemas.openxmlformats.org/drawingml/2006/main" noGrp="1"/>
-          </p:cNvSpPr>
-          <p:nvPr/>
-        </p:nvSpPr>
-        <p:spPr>
-          <a:xfrm xmlns:a="http://schemas.openxmlformats.org/drawingml/2006/main">
-            <a:off x="7353300" y="4476750"/>
-            <a:ext cx="4152900" cy="1352550"/>
-          </a:xfrm>
-          <a:prstGeom xmlns:a="http://schemas.openxmlformats.org/drawingml/2006/main" prst="rect">
-            <a:avLst/>
-          </a:prstGeom>
-          <a:solidFill xmlns:a="http://schemas.openxmlformats.org/drawingml/2006/main">
-            <a:srgbClr val="FFFFFF"/>
-          </a:solidFill>
-          <a:ln xmlns:a="http://schemas.openxmlformats.org/drawingml/2006/main" w="0">
-            <a:solidFill>
-              <a:srgbClr val="FFFFFF"/>
-            </a:solidFill>
-            <a:prstDash val="solid"/>
-          </a:ln>
-        </p:spPr>
-      </p:sp>
-      <p:sp>
-        <p:nvSpPr>
-          <p:cNvPr id="15" name="berlin-premium-stat">
-            <a:extLst xmlns:a="http://schemas.openxmlformats.org/drawingml/2006/main">
-              <a:ext uri="{FF2B5EF4-FFF2-40B4-BE49-F238E27FC236}">
-                <a16:creationId xmlns:a16="http://schemas.microsoft.com/office/drawing/2014/main" id="{5A307EA9-5B4C-42C1-A03C-145D5BC0FC49}"/>
-              </a:ext>
-            </a:extLst>
-          </p:cNvPr>
-          <p:cNvSpPr>
-            <a:spLocks xmlns:a="http://schemas.openxmlformats.org/drawingml/2006/main" noGrp="1"/>
-          </p:cNvSpPr>
-          <p:nvPr/>
-        </p:nvSpPr>
-        <p:spPr>
-          <a:xfrm xmlns:a="http://schemas.openxmlformats.org/drawingml/2006/main">
-            <a:off x="7639050" y="4629150"/>
-            <a:ext cx="3581400" cy="533400"/>
+              <a:t>empirische Coverage des nominalen 90-%-Bands</a:t>
+            </a:r>
+          </a:p>
+        </p:txBody>
+      </p:sp>
+      <p:sp>
+        <p:nvSpPr>
+          <p:cNvPr id="15" name="final-warning">
+            <a:extLst xmlns:a="http://schemas.openxmlformats.org/drawingml/2006/main">
+              <a:ext uri="{FF2B5EF4-FFF2-40B4-BE49-F238E27FC236}">
+                <a16:creationId xmlns:a16="http://schemas.microsoft.com/office/drawing/2014/main" id="{C506B9EE-CB35-4185-90D8-D1FB0836D058}"/>
+              </a:ext>
+            </a:extLst>
+          </p:cNvPr>
+          <p:cNvSpPr>
+            <a:spLocks xmlns:a="http://schemas.openxmlformats.org/drawingml/2006/main" noGrp="1"/>
+          </p:cNvSpPr>
+          <p:nvPr/>
+        </p:nvSpPr>
+        <p:spPr>
+          <a:xfrm xmlns:a="http://schemas.openxmlformats.org/drawingml/2006/main">
+            <a:off x="7143750" y="5486400"/>
+            <a:ext cx="4362450" cy="552450"/>
           </a:xfrm>
           <a:prstGeom xmlns:a="http://schemas.openxmlformats.org/drawingml/2006/main" prst="rect">
             <a:avLst/>
@@ -14222,62 +14787,18 @@
           <a:lstStyle xmlns:a="http://schemas.openxmlformats.org/drawingml/2006/main"/>
           <a:p xmlns:a="http://schemas.openxmlformats.org/drawingml/2006/main">
             <a:pPr algn="l">
-              <a:defRPr sz="3150" b="1" i="0">
-                <a:solidFill>
-                  <a:srgbClr val="E85D3F"/>
-                </a:solidFill>
-                <a:latin typeface="Arial"/>
-                <a:ea typeface="Arial"/>
-                <a:cs typeface="Arial"/>
-              </a:defRPr>
-            </a:pPr>
-            <a:r>
-              <a:t>+113 %</a:t>
-            </a:r>
-          </a:p>
-        </p:txBody>
-      </p:sp>
-      <p:sp>
-        <p:nvSpPr>
-          <p:cNvPr id="16" name="berlin-premium-body">
-            <a:extLst xmlns:a="http://schemas.openxmlformats.org/drawingml/2006/main">
-              <a:ext uri="{FF2B5EF4-FFF2-40B4-BE49-F238E27FC236}">
-                <a16:creationId xmlns:a16="http://schemas.microsoft.com/office/drawing/2014/main" id="{E2101CFF-1986-4A66-BDEA-50451E7C37C3}"/>
-              </a:ext>
-            </a:extLst>
-          </p:cNvPr>
-          <p:cNvSpPr>
-            <a:spLocks xmlns:a="http://schemas.openxmlformats.org/drawingml/2006/main" noGrp="1"/>
-          </p:cNvSpPr>
-          <p:nvPr/>
-        </p:nvSpPr>
-        <p:spPr>
-          <a:xfrm xmlns:a="http://schemas.openxmlformats.org/drawingml/2006/main">
-            <a:off x="7639050" y="5257800"/>
-            <a:ext cx="3581400" cy="457200"/>
-          </a:xfrm>
-          <a:prstGeom xmlns:a="http://schemas.openxmlformats.org/drawingml/2006/main" prst="rect">
-            <a:avLst/>
-          </a:prstGeom>
-        </p:spPr>
-        <p:txBody>
-          <a:bodyPr xmlns:a="http://schemas.openxmlformats.org/drawingml/2006/main" wrap="square" lIns="0" tIns="0" rIns="0" bIns="0" anchor="t">
-            <a:noAutofit/>
-          </a:bodyPr>
-          <a:lstStyle xmlns:a="http://schemas.openxmlformats.org/drawingml/2006/main"/>
-          <a:p xmlns:a="http://schemas.openxmlformats.org/drawingml/2006/main">
-            <a:pPr algn="l">
-              <a:defRPr sz="1500" b="0" i="0">
-                <a:solidFill>
-                  <a:srgbClr val="667587"/>
-                </a:solidFill>
-                <a:latin typeface="Arial"/>
-                <a:ea typeface="Arial"/>
-                <a:cs typeface="Arial"/>
-              </a:defRPr>
-            </a:pPr>
-            <a:r>
-              <a:t>rund 576 € monatlicher Umzugsaufschlag bei 70 m²</a:t>
+              <a:buNone/>
+              <a:defRPr sz="1500" b="1" i="0">
+                <a:solidFill>
+                  <a:srgbClr val="D97706"/>
+                </a:solidFill>
+                <a:latin typeface="Arial"/>
+                <a:ea typeface="Arial"/>
+                <a:cs typeface="Arial"/>
+              </a:defRPr>
+            </a:pPr>
+            <a:r>
+              <a:t>Keine 90-%-Garantie: räumlicher Verteilungswechsel verletzt perfekte Austauschbarkeit.</a:t>
             </a:r>
           </a:p>
         </p:txBody>
@@ -14289,19 +14810,19 @@
           <p:nvPr/>
         </p:nvGraphicFramePr>
         <p:xfrm>
-          <a:off xmlns:a="http://schemas.openxmlformats.org/drawingml/2006/main" x="457200" y="1924050"/>
-          <a:ext xmlns:a="http://schemas.openxmlformats.org/drawingml/2006/main" cx="6191250" cy="3905250"/>
+          <a:off xmlns:a="http://schemas.openxmlformats.org/drawingml/2006/main" x="457200" y="2171700"/>
+          <a:ext xmlns:a="http://schemas.openxmlformats.org/drawingml/2006/main" cx="5810250" cy="3714750"/>
         </p:xfrm>
         <a:graphic xmlns:a="http://schemas.openxmlformats.org/drawingml/2006/main">
           <a:graphicData uri="http://schemas.openxmlformats.org/drawingml/2006/chart">
-            <c:chart xmlns:r="http://schemas.openxmlformats.org/officeDocument/2006/relationships" xmlns:c="http://schemas.openxmlformats.org/drawingml/2006/chart" r:id="R33a248e451ce4ac8"/>
+            <c:chart xmlns:r="http://schemas.openxmlformats.org/officeDocument/2006/relationships" xmlns:c="http://schemas.openxmlformats.org/drawingml/2006/chart" r:id="Re0b9e2f89c794bcb"/>
           </a:graphicData>
         </a:graphic>
       </p:graphicFrame>
     </p:spTree>
     <p:extLst>
       <p:ext uri="{BB962C8B-B14F-4D97-AF65-F5344CB8AC3E}">
-        <p14:creationId xmlns:p14="http://schemas.microsoft.com/office/powerpoint/2010/main" val="963061414"/>
+        <p14:creationId xmlns:p14="http://schemas.microsoft.com/office/powerpoint/2010/main" val="292995133"/>
       </p:ext>
     </p:extLst>
   </p:cSld>

--- a/deliverables/MietCheck_Praesentation.pptx
+++ b/deliverables/MietCheck_Praesentation.pptx
@@ -2,27 +2,27 @@
 <file path=ppt/presentation.xml><?xml version="1.0" encoding="utf-8"?>
 <p:presentation xmlns:p="http://schemas.openxmlformats.org/presentationml/2006/main">
   <p:sldMasterIdLst>
-    <p:sldMasterId xmlns:r="http://schemas.openxmlformats.org/officeDocument/2006/relationships" id="2147483648" r:id="Rd74af7b903c94f74"/>
+    <p:sldMasterId xmlns:r="http://schemas.openxmlformats.org/officeDocument/2006/relationships" id="2147483648" r:id="R486ac3c18ef747c1"/>
   </p:sldMasterIdLst>
   <p:notesMasterIdLst>
-    <p:notesMasterId xmlns:r="http://schemas.openxmlformats.org/officeDocument/2006/relationships" r:id="R6a9eccaec81749cf"/>
+    <p:notesMasterId xmlns:r="http://schemas.openxmlformats.org/officeDocument/2006/relationships" r:id="R95560cb828384f37"/>
   </p:notesMasterIdLst>
   <p:sldIdLst>
-    <p:sldId xmlns:r="http://schemas.openxmlformats.org/officeDocument/2006/relationships" id="256" r:id="R59f82947c98749bf"/>
-    <p:sldId xmlns:r="http://schemas.openxmlformats.org/officeDocument/2006/relationships" id="257" r:id="Rf95952049be54bdc"/>
-    <p:sldId xmlns:r="http://schemas.openxmlformats.org/officeDocument/2006/relationships" id="258" r:id="Rf3a063a0d7ab49c1"/>
-    <p:sldId xmlns:r="http://schemas.openxmlformats.org/officeDocument/2006/relationships" id="259" r:id="Rc2787b436e65461f"/>
-    <p:sldId xmlns:r="http://schemas.openxmlformats.org/officeDocument/2006/relationships" id="260" r:id="Ra51d294c4efe48ae"/>
-    <p:sldId xmlns:r="http://schemas.openxmlformats.org/officeDocument/2006/relationships" id="261" r:id="Ra6e422a3cf984d78"/>
-    <p:sldId xmlns:r="http://schemas.openxmlformats.org/officeDocument/2006/relationships" id="262" r:id="R8fd5b83a351d44d9"/>
-    <p:sldId xmlns:r="http://schemas.openxmlformats.org/officeDocument/2006/relationships" id="263" r:id="R63c68c28d7b54be2"/>
-    <p:sldId xmlns:r="http://schemas.openxmlformats.org/officeDocument/2006/relationships" id="264" r:id="R24d527aeb4fc4a27"/>
-    <p:sldId xmlns:r="http://schemas.openxmlformats.org/officeDocument/2006/relationships" id="265" r:id="R7d0a6b7aa5e6412d"/>
-    <p:sldId xmlns:r="http://schemas.openxmlformats.org/officeDocument/2006/relationships" id="266" r:id="Rca0b0f4d5b9148da"/>
-    <p:sldId xmlns:r="http://schemas.openxmlformats.org/officeDocument/2006/relationships" id="267" r:id="R0b1141bb46c74302"/>
-    <p:sldId xmlns:r="http://schemas.openxmlformats.org/officeDocument/2006/relationships" id="268" r:id="Re54bd115386f448f"/>
-    <p:sldId xmlns:r="http://schemas.openxmlformats.org/officeDocument/2006/relationships" id="269" r:id="Re1b9434ea07247c3"/>
-    <p:sldId xmlns:r="http://schemas.openxmlformats.org/officeDocument/2006/relationships" id="270" r:id="R3b45aeb1fe1e4740"/>
+    <p:sldId xmlns:r="http://schemas.openxmlformats.org/officeDocument/2006/relationships" id="256" r:id="Rcb7a82c4884e465c"/>
+    <p:sldId xmlns:r="http://schemas.openxmlformats.org/officeDocument/2006/relationships" id="257" r:id="R7a267605e68e477f"/>
+    <p:sldId xmlns:r="http://schemas.openxmlformats.org/officeDocument/2006/relationships" id="258" r:id="R53095540859e438d"/>
+    <p:sldId xmlns:r="http://schemas.openxmlformats.org/officeDocument/2006/relationships" id="259" r:id="Rd52ec514c6ba4e89"/>
+    <p:sldId xmlns:r="http://schemas.openxmlformats.org/officeDocument/2006/relationships" id="260" r:id="R700a27651aa14cb2"/>
+    <p:sldId xmlns:r="http://schemas.openxmlformats.org/officeDocument/2006/relationships" id="261" r:id="Rfcf8e8dfd7ae402c"/>
+    <p:sldId xmlns:r="http://schemas.openxmlformats.org/officeDocument/2006/relationships" id="262" r:id="R5506b5c180e245f2"/>
+    <p:sldId xmlns:r="http://schemas.openxmlformats.org/officeDocument/2006/relationships" id="263" r:id="R6dbc020b071a418c"/>
+    <p:sldId xmlns:r="http://schemas.openxmlformats.org/officeDocument/2006/relationships" id="264" r:id="R5a35ccdff2a7428d"/>
+    <p:sldId xmlns:r="http://schemas.openxmlformats.org/officeDocument/2006/relationships" id="265" r:id="R5530bae41cbe4178"/>
+    <p:sldId xmlns:r="http://schemas.openxmlformats.org/officeDocument/2006/relationships" id="266" r:id="Red7fcff715104c62"/>
+    <p:sldId xmlns:r="http://schemas.openxmlformats.org/officeDocument/2006/relationships" id="267" r:id="Rdacf3dae28e445cc"/>
+    <p:sldId xmlns:r="http://schemas.openxmlformats.org/officeDocument/2006/relationships" id="268" r:id="Re1860da7128d45d7"/>
+    <p:sldId xmlns:r="http://schemas.openxmlformats.org/officeDocument/2006/relationships" id="269" r:id="R6c91d26415024273"/>
+    <p:sldId xmlns:r="http://schemas.openxmlformats.org/officeDocument/2006/relationships" id="270" r:id="Ra0469c87642540fc"/>
   </p:sldIdLst>
   <p:sldSz cx="12192000" cy="6858000"/>
   <p:notesSz cx="6858000" cy="9144000"/>
@@ -1669,7 +1669,7 @@
   </p:cSld>
   <p:clrMap bg1="lt1" tx1="dk1" bg2="lt2" tx2="dk2" accent1="accent1" accent2="accent2" accent3="accent3" accent4="accent4" accent5="accent5" accent6="accent6" hlink="hlink" folHlink="folHlink"/>
   <p:sldLayoutIdLst>
-    <p:sldLayoutId xmlns:r="http://schemas.openxmlformats.org/officeDocument/2006/relationships" id="2147483649" r:id="R164199c1b63e4da9"/>
+    <p:sldLayoutId xmlns:r="http://schemas.openxmlformats.org/officeDocument/2006/relationships" id="2147483649" r:id="R96432a40a01040fb"/>
   </p:sldLayoutIdLst>
   <p:txStyles>
     <p:titleStyle>
@@ -3280,18 +3280,43 @@
       </p:sp>
       <p:pic>
         <p:nvPicPr>
-          <p:cNvPr id="22" name=""/>
+          <p:cNvPr id="23" name=""/>
           <p:cNvPicPr>
             <a:picLocks xmlns:a="http://schemas.openxmlformats.org/drawingml/2006/main" noChangeAspect="1"/>
           </p:cNvPicPr>
           <p:nvPr/>
         </p:nvPicPr>
         <p:blipFill>
-          <a:blip xmlns:r="http://schemas.openxmlformats.org/officeDocument/2006/relationships" xmlns:a="http://schemas.openxmlformats.org/drawingml/2006/main" r:embed="R4498b7bb4f214c20"/>
+          <a:blip xmlns:r="http://schemas.openxmlformats.org/officeDocument/2006/relationships" xmlns:a="http://schemas.openxmlformats.org/drawingml/2006/main" r:embed="R14d5faa2807547c8"/>
           <a:srcRect xmlns:a="http://schemas.openxmlformats.org/drawingml/2006/main" l="13781" t="0" r="13781" b="0"/>
           <a:stretch xmlns:a="http://schemas.openxmlformats.org/drawingml/2006/main">
             <a:fillRect l="0" t="0" r="0" b="0"/>
           </a:stretch>
+        </p:blipFill>
+        <p:spPr>
+          <a:xfrm xmlns:a="http://schemas.openxmlformats.org/drawingml/2006/main">
+            <a:off x="6343650" y="495300"/>
+            <a:ext cx="5238750" cy="5524500"/>
+          </a:xfrm>
+          <a:prstGeom xmlns:a="http://schemas.openxmlformats.org/drawingml/2006/main" prst="roundRect">
+            <a:avLst>
+              <a:gd name="adj" fmla="val 2909"/>
+            </a:avLst>
+          </a:prstGeom>
+        </p:spPr>
+      </p:pic>
+      <p:pic>
+        <p:nvPicPr>
+          <p:cNvPr id="24" name=""/>
+          <p:cNvPicPr>
+            <a:picLocks xmlns:a="http://schemas.openxmlformats.org/drawingml/2006/main" noChangeAspect="1"/>
+          </p:cNvPicPr>
+          <p:nvPr/>
+        </p:nvPicPr>
+        <p:blipFill>
+          <a:blip xmlns:r="http://schemas.openxmlformats.org/officeDocument/2006/relationships" xmlns:a="http://schemas.openxmlformats.org/drawingml/2006/main" r:embed="R0e7732814023415b"/>
+          <a:srcRect xmlns:a="http://schemas.openxmlformats.org/drawingml/2006/main" l="13781" t="0" r="13781" b="0"/>
+          <a:stretch xmlns:a="http://schemas.openxmlformats.org/drawingml/2006/main"/>
         </p:blipFill>
         <p:spPr>
           <a:xfrm xmlns:a="http://schemas.openxmlformats.org/drawingml/2006/main" flipH="0" flipV="0">
@@ -3742,21 +3767,21 @@
       </p:sp>
       <p:pic>
         <p:nvPicPr>
-          <p:cNvPr id="27" name=""/>
+          <p:cNvPr id="28" name=""/>
           <p:cNvPicPr>
             <a:picLocks xmlns:a="http://schemas.openxmlformats.org/drawingml/2006/main" noChangeAspect="1"/>
           </p:cNvPicPr>
           <p:nvPr/>
         </p:nvPicPr>
         <p:blipFill>
-          <a:blip xmlns:r="http://schemas.openxmlformats.org/officeDocument/2006/relationships" xmlns:a="http://schemas.openxmlformats.org/drawingml/2006/main" r:embed="R70b145f3195e4925"/>
+          <a:blip xmlns:r="http://schemas.openxmlformats.org/officeDocument/2006/relationships" xmlns:a="http://schemas.openxmlformats.org/drawingml/2006/main" r:embed="Rf30716deb4ce4a81"/>
           <a:srcRect xmlns:a="http://schemas.openxmlformats.org/drawingml/2006/main" l="0" t="24967" r="0" b="24967"/>
           <a:stretch xmlns:a="http://schemas.openxmlformats.org/drawingml/2006/main">
             <a:fillRect l="0" t="0" r="0" b="0"/>
           </a:stretch>
         </p:blipFill>
         <p:spPr>
-          <a:xfrm xmlns:a="http://schemas.openxmlformats.org/drawingml/2006/main" flipH="0" flipV="0">
+          <a:xfrm xmlns:a="http://schemas.openxmlformats.org/drawingml/2006/main">
             <a:off x="552450" y="1485900"/>
             <a:ext cx="10858500" cy="4152900"/>
           </a:xfrm>
@@ -3890,6 +3915,29 @@
           </a:p>
         </p:txBody>
       </p:sp>
+      <p:pic>
+        <p:nvPicPr>
+          <p:cNvPr id="32" name=""/>
+          <p:cNvPicPr>
+            <a:picLocks xmlns:a="http://schemas.openxmlformats.org/drawingml/2006/main" noChangeAspect="1"/>
+          </p:cNvPicPr>
+          <p:nvPr/>
+        </p:nvPicPr>
+        <p:blipFill>
+          <a:blip xmlns:r="http://schemas.openxmlformats.org/officeDocument/2006/relationships" xmlns:a="http://schemas.openxmlformats.org/drawingml/2006/main" r:embed="Rbf96ecff7d2b44d1"/>
+          <a:srcRect xmlns:a="http://schemas.openxmlformats.org/drawingml/2006/main" l="0" t="24967" r="0" b="24967"/>
+          <a:stretch xmlns:a="http://schemas.openxmlformats.org/drawingml/2006/main"/>
+        </p:blipFill>
+        <p:spPr>
+          <a:xfrm xmlns:a="http://schemas.openxmlformats.org/drawingml/2006/main" flipH="0" flipV="0">
+            <a:off x="552450" y="1485900"/>
+            <a:ext cx="10858500" cy="4152900"/>
+          </a:xfrm>
+          <a:prstGeom xmlns:a="http://schemas.openxmlformats.org/drawingml/2006/main" prst="rect">
+            <a:avLst/>
+          </a:prstGeom>
+        </p:spPr>
+      </p:pic>
     </p:spTree>
     <p:extLst>
       <p:ext uri="{BB962C8B-B14F-4D97-AF65-F5344CB8AC3E}">
@@ -4329,21 +4377,21 @@
       </p:sp>
       <p:pic>
         <p:nvPicPr>
-          <p:cNvPr id="27" name=""/>
+          <p:cNvPr id="28" name=""/>
           <p:cNvPicPr>
             <a:picLocks xmlns:a="http://schemas.openxmlformats.org/drawingml/2006/main" noChangeAspect="1"/>
           </p:cNvPicPr>
           <p:nvPr/>
         </p:nvPicPr>
         <p:blipFill>
-          <a:blip xmlns:r="http://schemas.openxmlformats.org/officeDocument/2006/relationships" xmlns:a="http://schemas.openxmlformats.org/drawingml/2006/main" r:embed="R2216b5a7a3184ff2"/>
+          <a:blip xmlns:r="http://schemas.openxmlformats.org/officeDocument/2006/relationships" xmlns:a="http://schemas.openxmlformats.org/drawingml/2006/main" r:embed="Re4be06e879584ceb"/>
           <a:srcRect xmlns:a="http://schemas.openxmlformats.org/drawingml/2006/main" l="0" t="24967" r="0" b="24967"/>
           <a:stretch xmlns:a="http://schemas.openxmlformats.org/drawingml/2006/main">
             <a:fillRect l="0" t="0" r="0" b="0"/>
           </a:stretch>
         </p:blipFill>
         <p:spPr>
-          <a:xfrm xmlns:a="http://schemas.openxmlformats.org/drawingml/2006/main" flipH="0" flipV="0">
+          <a:xfrm xmlns:a="http://schemas.openxmlformats.org/drawingml/2006/main">
             <a:off x="552450" y="1485900"/>
             <a:ext cx="10858500" cy="4152900"/>
           </a:xfrm>
@@ -4477,6 +4525,29 @@
           </a:p>
         </p:txBody>
       </p:sp>
+      <p:pic>
+        <p:nvPicPr>
+          <p:cNvPr id="32" name=""/>
+          <p:cNvPicPr>
+            <a:picLocks xmlns:a="http://schemas.openxmlformats.org/drawingml/2006/main" noChangeAspect="1"/>
+          </p:cNvPicPr>
+          <p:nvPr/>
+        </p:nvPicPr>
+        <p:blipFill>
+          <a:blip xmlns:r="http://schemas.openxmlformats.org/officeDocument/2006/relationships" xmlns:a="http://schemas.openxmlformats.org/drawingml/2006/main" r:embed="R5bd64cf3d9394ebe"/>
+          <a:srcRect xmlns:a="http://schemas.openxmlformats.org/drawingml/2006/main" l="0" t="24967" r="0" b="24967"/>
+          <a:stretch xmlns:a="http://schemas.openxmlformats.org/drawingml/2006/main"/>
+        </p:blipFill>
+        <p:spPr>
+          <a:xfrm xmlns:a="http://schemas.openxmlformats.org/drawingml/2006/main" flipH="0" flipV="0">
+            <a:off x="552450" y="1485900"/>
+            <a:ext cx="10858500" cy="4152900"/>
+          </a:xfrm>
+          <a:prstGeom xmlns:a="http://schemas.openxmlformats.org/drawingml/2006/main" prst="rect">
+            <a:avLst/>
+          </a:prstGeom>
+        </p:spPr>
+      </p:pic>
     </p:spTree>
     <p:extLst>
       <p:ext uri="{BB962C8B-B14F-4D97-AF65-F5344CB8AC3E}">
@@ -4916,21 +4987,21 @@
       </p:sp>
       <p:pic>
         <p:nvPicPr>
-          <p:cNvPr id="27" name=""/>
+          <p:cNvPr id="28" name=""/>
           <p:cNvPicPr>
             <a:picLocks xmlns:a="http://schemas.openxmlformats.org/drawingml/2006/main" noChangeAspect="1"/>
           </p:cNvPicPr>
           <p:nvPr/>
         </p:nvPicPr>
         <p:blipFill>
-          <a:blip xmlns:r="http://schemas.openxmlformats.org/officeDocument/2006/relationships" xmlns:a="http://schemas.openxmlformats.org/drawingml/2006/main" r:embed="R43eb2a6d3d1e4257"/>
+          <a:blip xmlns:r="http://schemas.openxmlformats.org/officeDocument/2006/relationships" xmlns:a="http://schemas.openxmlformats.org/drawingml/2006/main" r:embed="Rca38efdbcdac4d5c"/>
           <a:srcRect xmlns:a="http://schemas.openxmlformats.org/drawingml/2006/main" l="0" t="24967" r="0" b="24967"/>
           <a:stretch xmlns:a="http://schemas.openxmlformats.org/drawingml/2006/main">
             <a:fillRect l="0" t="0" r="0" b="0"/>
           </a:stretch>
         </p:blipFill>
         <p:spPr>
-          <a:xfrm xmlns:a="http://schemas.openxmlformats.org/drawingml/2006/main" flipH="0" flipV="0">
+          <a:xfrm xmlns:a="http://schemas.openxmlformats.org/drawingml/2006/main">
             <a:off x="552450" y="1485900"/>
             <a:ext cx="10858500" cy="4152900"/>
           </a:xfrm>
@@ -5064,6 +5135,29 @@
           </a:p>
         </p:txBody>
       </p:sp>
+      <p:pic>
+        <p:nvPicPr>
+          <p:cNvPr id="32" name=""/>
+          <p:cNvPicPr>
+            <a:picLocks xmlns:a="http://schemas.openxmlformats.org/drawingml/2006/main" noChangeAspect="1"/>
+          </p:cNvPicPr>
+          <p:nvPr/>
+        </p:nvPicPr>
+        <p:blipFill>
+          <a:blip xmlns:r="http://schemas.openxmlformats.org/officeDocument/2006/relationships" xmlns:a="http://schemas.openxmlformats.org/drawingml/2006/main" r:embed="R616d979630954547"/>
+          <a:srcRect xmlns:a="http://schemas.openxmlformats.org/drawingml/2006/main" l="0" t="24967" r="0" b="24967"/>
+          <a:stretch xmlns:a="http://schemas.openxmlformats.org/drawingml/2006/main"/>
+        </p:blipFill>
+        <p:spPr>
+          <a:xfrm xmlns:a="http://schemas.openxmlformats.org/drawingml/2006/main" flipH="0" flipV="0">
+            <a:off x="552450" y="1485900"/>
+            <a:ext cx="10858500" cy="4152900"/>
+          </a:xfrm>
+          <a:prstGeom xmlns:a="http://schemas.openxmlformats.org/drawingml/2006/main" prst="rect">
+            <a:avLst/>
+          </a:prstGeom>
+        </p:spPr>
+      </p:pic>
     </p:spTree>
     <p:extLst>
       <p:ext uri="{BB962C8B-B14F-4D97-AF65-F5344CB8AC3E}">
@@ -13475,7 +13569,7 @@
         </p:xfrm>
         <a:graphic xmlns:a="http://schemas.openxmlformats.org/drawingml/2006/main">
           <a:graphicData uri="http://schemas.openxmlformats.org/drawingml/2006/chart">
-            <c:chart xmlns:r="http://schemas.openxmlformats.org/officeDocument/2006/relationships" xmlns:c="http://schemas.openxmlformats.org/drawingml/2006/chart" r:id="R5701dbc3da0640c0"/>
+            <c:chart xmlns:r="http://schemas.openxmlformats.org/officeDocument/2006/relationships" xmlns:c="http://schemas.openxmlformats.org/drawingml/2006/chart" r:id="Rfec4d31512b34c71"/>
           </a:graphicData>
         </a:graphic>
       </p:graphicFrame>
@@ -14145,7 +14239,7 @@
         </p:xfrm>
         <a:graphic xmlns:a="http://schemas.openxmlformats.org/drawingml/2006/main">
           <a:graphicData uri="http://schemas.openxmlformats.org/drawingml/2006/chart">
-            <c:chart xmlns:r="http://schemas.openxmlformats.org/officeDocument/2006/relationships" xmlns:c="http://schemas.openxmlformats.org/drawingml/2006/chart" r:id="Rff0d65f5e92d4918"/>
+            <c:chart xmlns:r="http://schemas.openxmlformats.org/officeDocument/2006/relationships" xmlns:c="http://schemas.openxmlformats.org/drawingml/2006/chart" r:id="R0bf4d8e300bc4a56"/>
           </a:graphicData>
         </a:graphic>
       </p:graphicFrame>
@@ -14815,7 +14909,7 @@
         </p:xfrm>
         <a:graphic xmlns:a="http://schemas.openxmlformats.org/drawingml/2006/main">
           <a:graphicData uri="http://schemas.openxmlformats.org/drawingml/2006/chart">
-            <c:chart xmlns:r="http://schemas.openxmlformats.org/officeDocument/2006/relationships" xmlns:c="http://schemas.openxmlformats.org/drawingml/2006/chart" r:id="Re0b9e2f89c794bcb"/>
+            <c:chart xmlns:r="http://schemas.openxmlformats.org/officeDocument/2006/relationships" xmlns:c="http://schemas.openxmlformats.org/drawingml/2006/chart" r:id="Rc8a65d3d12c4478f"/>
           </a:graphicData>
         </a:graphic>
       </p:graphicFrame>

--- a/deliverables/MietCheck_Praesentation.pptx
+++ b/deliverables/MietCheck_Praesentation.pptx
@@ -2,28 +2,28 @@
 <file path=ppt/presentation.xml><?xml version="1.0" encoding="utf-8"?>
 <p:presentation xmlns:p="http://schemas.openxmlformats.org/presentationml/2006/main">
   <p:sldMasterIdLst>
-    <p:sldMasterId xmlns:r="http://schemas.openxmlformats.org/officeDocument/2006/relationships" id="2147483648" r:id="R749493b255274424"/>
+    <p:sldMasterId xmlns:r="http://schemas.openxmlformats.org/officeDocument/2006/relationships" id="2147483648" r:id="Reb8f90f8c27247ec"/>
   </p:sldMasterIdLst>
   <p:notesMasterIdLst>
-    <p:notesMasterId xmlns:r="http://schemas.openxmlformats.org/officeDocument/2006/relationships" r:id="R526d73e6cc5549ed"/>
+    <p:notesMasterId xmlns:r="http://schemas.openxmlformats.org/officeDocument/2006/relationships" r:id="Rb41edbe4f2e0489d"/>
   </p:notesMasterIdLst>
   <p:sldIdLst>
-    <p:sldId xmlns:r="http://schemas.openxmlformats.org/officeDocument/2006/relationships" id="256" r:id="R5a7d816358f844f1"/>
-    <p:sldId xmlns:r="http://schemas.openxmlformats.org/officeDocument/2006/relationships" id="257" r:id="R11f90a57e26e4b17"/>
-    <p:sldId xmlns:r="http://schemas.openxmlformats.org/officeDocument/2006/relationships" id="258" r:id="R502ec36242464cab"/>
-    <p:sldId xmlns:r="http://schemas.openxmlformats.org/officeDocument/2006/relationships" id="259" r:id="Rdfe429ecf27a49a9"/>
-    <p:sldId xmlns:r="http://schemas.openxmlformats.org/officeDocument/2006/relationships" id="260" r:id="R9a0a3c8f7d074df4"/>
-    <p:sldId xmlns:r="http://schemas.openxmlformats.org/officeDocument/2006/relationships" id="261" r:id="Ra7e35fa68ded4002"/>
-    <p:sldId xmlns:r="http://schemas.openxmlformats.org/officeDocument/2006/relationships" id="262" r:id="R8da05490e83b4709"/>
-    <p:sldId xmlns:r="http://schemas.openxmlformats.org/officeDocument/2006/relationships" id="263" r:id="R9e86dc857602476a"/>
-    <p:sldId xmlns:r="http://schemas.openxmlformats.org/officeDocument/2006/relationships" id="264" r:id="R614a3c339edb4a99"/>
-    <p:sldId xmlns:r="http://schemas.openxmlformats.org/officeDocument/2006/relationships" id="265" r:id="Ra96ccae2e44743e4"/>
-    <p:sldId xmlns:r="http://schemas.openxmlformats.org/officeDocument/2006/relationships" id="266" r:id="Rd1b35c14e71e45ea"/>
-    <p:sldId xmlns:r="http://schemas.openxmlformats.org/officeDocument/2006/relationships" id="267" r:id="R9ef12811feed449a"/>
-    <p:sldId xmlns:r="http://schemas.openxmlformats.org/officeDocument/2006/relationships" id="268" r:id="Rb63b783804f74d27"/>
-    <p:sldId xmlns:r="http://schemas.openxmlformats.org/officeDocument/2006/relationships" id="269" r:id="R53722f8543c44562"/>
-    <p:sldId xmlns:r="http://schemas.openxmlformats.org/officeDocument/2006/relationships" id="270" r:id="R832dbc96b8db4a84"/>
-    <p:sldId xmlns:r="http://schemas.openxmlformats.org/officeDocument/2006/relationships" id="271" r:id="R72a99535e95143d8"/>
+    <p:sldId xmlns:r="http://schemas.openxmlformats.org/officeDocument/2006/relationships" id="256" r:id="R5cdb9120259f474e"/>
+    <p:sldId xmlns:r="http://schemas.openxmlformats.org/officeDocument/2006/relationships" id="257" r:id="R7351e5bdd5f8478d"/>
+    <p:sldId xmlns:r="http://schemas.openxmlformats.org/officeDocument/2006/relationships" id="258" r:id="R30f2eefc974e45ec"/>
+    <p:sldId xmlns:r="http://schemas.openxmlformats.org/officeDocument/2006/relationships" id="259" r:id="Ra93efe2a9fc248c3"/>
+    <p:sldId xmlns:r="http://schemas.openxmlformats.org/officeDocument/2006/relationships" id="260" r:id="Rad2e1205a1814948"/>
+    <p:sldId xmlns:r="http://schemas.openxmlformats.org/officeDocument/2006/relationships" id="261" r:id="R6fcdf3f9795a4702"/>
+    <p:sldId xmlns:r="http://schemas.openxmlformats.org/officeDocument/2006/relationships" id="262" r:id="R72275164dc3c4b13"/>
+    <p:sldId xmlns:r="http://schemas.openxmlformats.org/officeDocument/2006/relationships" id="263" r:id="Rcd4985b12c4e43b5"/>
+    <p:sldId xmlns:r="http://schemas.openxmlformats.org/officeDocument/2006/relationships" id="264" r:id="R758be1ac363f4a1c"/>
+    <p:sldId xmlns:r="http://schemas.openxmlformats.org/officeDocument/2006/relationships" id="265" r:id="R269309743c8e4e75"/>
+    <p:sldId xmlns:r="http://schemas.openxmlformats.org/officeDocument/2006/relationships" id="266" r:id="R1c0782fd1fcd49ce"/>
+    <p:sldId xmlns:r="http://schemas.openxmlformats.org/officeDocument/2006/relationships" id="267" r:id="R4967b93195eb4b1e"/>
+    <p:sldId xmlns:r="http://schemas.openxmlformats.org/officeDocument/2006/relationships" id="268" r:id="R4e0bc7a4acc14945"/>
+    <p:sldId xmlns:r="http://schemas.openxmlformats.org/officeDocument/2006/relationships" id="269" r:id="R2cc43e94373b4459"/>
+    <p:sldId xmlns:r="http://schemas.openxmlformats.org/officeDocument/2006/relationships" id="270" r:id="Rb648abb7338a4a05"/>
+    <p:sldId xmlns:r="http://schemas.openxmlformats.org/officeDocument/2006/relationships" id="271" r:id="R73c15ef90c904e5c"/>
   </p:sldIdLst>
   <p:sldSz cx="12192000" cy="6858000"/>
   <p:notesSz cx="6858000" cy="9144000"/>
@@ -1351,66 +1351,12 @@
           <a:lstStyle xmlns:a="http://schemas.openxmlformats.org/drawingml/2006/main"/>
           <a:p xmlns:a="http://schemas.openxmlformats.org/drawingml/2006/main">
             <a:r>
-              <a:t>Zeit: ca. 55 </a:t>
-            </a:r>
-            <a:r>
-              <a:t>Sekunden</a:t>
-            </a:r>
-            <a:r>
-              <a:t>.</a:t>
-            </a:r>
-          </a:p>
-          <a:p xmlns:a="http://schemas.openxmlformats.org/drawingml/2006/main">
-            <a:r>
-              <a:t>Nicht </a:t>
-            </a:r>
-            <a:r>
-              <a:t>beobachtete</a:t>
-            </a:r>
-            <a:r>
-              <a:t> </a:t>
-            </a:r>
-            <a:r>
-              <a:t>Wohnungsmerkmale</a:t>
-            </a:r>
-            <a:r>
-              <a:t>, </a:t>
-            </a:r>
-            <a:r>
-              <a:t>Zeitversatz</a:t>
-            </a:r>
-            <a:r>
-              <a:t>, </a:t>
-            </a:r>
-            <a:r>
-              <a:t>begrenzte</a:t>
-            </a:r>
-            <a:r>
-              <a:t> GREIX-</a:t>
-            </a:r>
-            <a:r>
-              <a:t>Abdeckung</a:t>
-            </a:r>
-            <a:r>
-              <a:t> und Coverage-</a:t>
-            </a:r>
-            <a:r>
-              <a:t>Unterdeckung</a:t>
-            </a:r>
-            <a:r>
-              <a:t> </a:t>
-            </a:r>
-            <a:r>
-              <a:t>stehen</a:t>
-            </a:r>
-            <a:r>
-              <a:t> </a:t>
-            </a:r>
-            <a:r>
-              <a:t>sichtbar</a:t>
-            </a:r>
-            <a:r>
-              <a:t> in App, Model Card und Risk Assessment.</a:t>
+              <a:t>Zeit: ca. 45 Sekunden.</a:t>
+            </a:r>
+          </a:p>
+          <a:p xmlns:a="http://schemas.openxmlformats.org/drawingml/2006/main">
+            <a:r>
+              <a:t>Vier Zielgruppen stehen für vier konkrete Entscheidungen: Bleiben oder umziehen, plausible Mehrkosten, persönliche Mietbelastung sowie Markt- und Methodenvergleich. Persönliche Eingaben werden nicht gespeichert.</a:t>
             </a:r>
           </a:p>
         </p:txBody>
@@ -1853,7 +1799,7 @@
   </p:cSld>
   <p:clrMap bg1="lt1" tx1="dk1" bg2="lt2" tx2="dk2" accent1="accent1" accent2="accent2" accent3="accent3" accent4="accent4" accent5="accent5" accent6="accent6" hlink="hlink" folHlink="folHlink"/>
   <p:sldLayoutIdLst>
-    <p:sldLayoutId xmlns:r="http://schemas.openxmlformats.org/officeDocument/2006/relationships" id="2147483649" r:id="R7a87698f8c63404f"/>
+    <p:sldLayoutId xmlns:r="http://schemas.openxmlformats.org/officeDocument/2006/relationships" id="2147483649" r:id="Rfe46d9acd7ac4719"/>
   </p:sldLayoutIdLst>
   <p:txStyles>
     <p:titleStyle>
@@ -3565,7 +3511,7 @@
           <p:nvPr/>
         </p:nvPicPr>
         <p:blipFill>
-          <a:blip xmlns:r="http://schemas.openxmlformats.org/officeDocument/2006/relationships" xmlns:a="http://schemas.openxmlformats.org/drawingml/2006/main" r:embed="R31b9f8e377e34005"/>
+          <a:blip xmlns:r="http://schemas.openxmlformats.org/officeDocument/2006/relationships" xmlns:a="http://schemas.openxmlformats.org/drawingml/2006/main" r:embed="Rbc03e34753544043"/>
           <a:srcRect xmlns:a="http://schemas.openxmlformats.org/drawingml/2006/main" l="13781" t="0" r="13781" b="0"/>
           <a:stretch xmlns:a="http://schemas.openxmlformats.org/drawingml/2006/main">
             <a:fillRect l="0" t="0" r="0" b="0"/>
@@ -3592,7 +3538,7 @@
           <p:nvPr/>
         </p:nvPicPr>
         <p:blipFill>
-          <a:blip xmlns:r="http://schemas.openxmlformats.org/officeDocument/2006/relationships" xmlns:a="http://schemas.openxmlformats.org/drawingml/2006/main" r:embed="R004f2ac74c044a3a"/>
+          <a:blip xmlns:r="http://schemas.openxmlformats.org/officeDocument/2006/relationships" xmlns:a="http://schemas.openxmlformats.org/drawingml/2006/main" r:embed="R9b7bf933e53e4630"/>
           <a:srcRect xmlns:a="http://schemas.openxmlformats.org/drawingml/2006/main" l="13781" t="0" r="13781" b="0"/>
           <a:stretch xmlns:a="http://schemas.openxmlformats.org/drawingml/2006/main"/>
         </p:blipFill>
@@ -4297,7 +4243,7 @@
         </p:xfrm>
         <a:graphic xmlns:a="http://schemas.openxmlformats.org/drawingml/2006/main">
           <a:graphicData uri="http://schemas.openxmlformats.org/drawingml/2006/chart">
-            <c:chart xmlns:r="http://schemas.openxmlformats.org/officeDocument/2006/relationships" xmlns:c="http://schemas.openxmlformats.org/drawingml/2006/chart" r:id="R63e7cc27b4ce4946"/>
+            <c:chart xmlns:r="http://schemas.openxmlformats.org/officeDocument/2006/relationships" xmlns:c="http://schemas.openxmlformats.org/drawingml/2006/chart" r:id="R8eea0f5a229e4985"/>
           </a:graphicData>
         </a:graphic>
       </p:graphicFrame>
@@ -4764,7 +4710,7 @@
           <p:nvPr/>
         </p:nvPicPr>
         <p:blipFill>
-          <a:blip xmlns:r="http://schemas.openxmlformats.org/officeDocument/2006/relationships" xmlns:a="http://schemas.openxmlformats.org/drawingml/2006/main" r:embed="R0d0eeef4d1ba4189"/>
+          <a:blip xmlns:r="http://schemas.openxmlformats.org/officeDocument/2006/relationships" xmlns:a="http://schemas.openxmlformats.org/drawingml/2006/main" r:embed="Rffc56df57e124ec5"/>
           <a:srcRect xmlns:a="http://schemas.openxmlformats.org/drawingml/2006/main" l="0" t="24967" r="0" b="24967"/>
           <a:stretch xmlns:a="http://schemas.openxmlformats.org/drawingml/2006/main">
             <a:fillRect l="0" t="0" r="0" b="0"/>
@@ -4919,7 +4865,7 @@
           <p:nvPr/>
         </p:nvPicPr>
         <p:blipFill>
-          <a:blip xmlns:r="http://schemas.openxmlformats.org/officeDocument/2006/relationships" xmlns:a="http://schemas.openxmlformats.org/drawingml/2006/main" r:embed="R0d9a06380cd345d0"/>
+          <a:blip xmlns:r="http://schemas.openxmlformats.org/officeDocument/2006/relationships" xmlns:a="http://schemas.openxmlformats.org/drawingml/2006/main" r:embed="Raa42d9df0d0c4a4e"/>
           <a:srcRect xmlns:a="http://schemas.openxmlformats.org/drawingml/2006/main" l="0" t="24967" r="0" b="24967"/>
           <a:stretch xmlns:a="http://schemas.openxmlformats.org/drawingml/2006/main"/>
         </p:blipFill>
@@ -5396,7 +5342,7 @@
           <p:nvPr/>
         </p:nvPicPr>
         <p:blipFill>
-          <a:blip xmlns:r="http://schemas.openxmlformats.org/officeDocument/2006/relationships" xmlns:a="http://schemas.openxmlformats.org/drawingml/2006/main" r:embed="R72b4d0c6c056461f"/>
+          <a:blip xmlns:r="http://schemas.openxmlformats.org/officeDocument/2006/relationships" xmlns:a="http://schemas.openxmlformats.org/drawingml/2006/main" r:embed="Ra6f47d66fed842d6"/>
           <a:srcRect xmlns:a="http://schemas.openxmlformats.org/drawingml/2006/main" l="0" t="24967" r="0" b="24967"/>
           <a:stretch xmlns:a="http://schemas.openxmlformats.org/drawingml/2006/main">
             <a:fillRect l="0" t="0" r="0" b="0"/>
@@ -5551,7 +5497,7 @@
           <p:nvPr/>
         </p:nvPicPr>
         <p:blipFill>
-          <a:blip xmlns:r="http://schemas.openxmlformats.org/officeDocument/2006/relationships" xmlns:a="http://schemas.openxmlformats.org/drawingml/2006/main" r:embed="R9bad135d67bd45b0"/>
+          <a:blip xmlns:r="http://schemas.openxmlformats.org/officeDocument/2006/relationships" xmlns:a="http://schemas.openxmlformats.org/drawingml/2006/main" r:embed="R4b95227ebf6a417b"/>
           <a:srcRect xmlns:a="http://schemas.openxmlformats.org/drawingml/2006/main" l="0" t="24967" r="0" b="24967"/>
           <a:stretch xmlns:a="http://schemas.openxmlformats.org/drawingml/2006/main"/>
         </p:blipFill>
@@ -6028,7 +5974,7 @@
           <p:nvPr/>
         </p:nvPicPr>
         <p:blipFill>
-          <a:blip xmlns:r="http://schemas.openxmlformats.org/officeDocument/2006/relationships" xmlns:a="http://schemas.openxmlformats.org/drawingml/2006/main" r:embed="Ree3c3bac76334e46"/>
+          <a:blip xmlns:r="http://schemas.openxmlformats.org/officeDocument/2006/relationships" xmlns:a="http://schemas.openxmlformats.org/drawingml/2006/main" r:embed="Rde921752b5ea4b33"/>
           <a:srcRect xmlns:a="http://schemas.openxmlformats.org/drawingml/2006/main" l="0" t="24967" r="0" b="24967"/>
           <a:stretch xmlns:a="http://schemas.openxmlformats.org/drawingml/2006/main">
             <a:fillRect l="0" t="0" r="0" b="0"/>
@@ -6183,7 +6129,7 @@
           <p:nvPr/>
         </p:nvPicPr>
         <p:blipFill>
-          <a:blip xmlns:r="http://schemas.openxmlformats.org/officeDocument/2006/relationships" xmlns:a="http://schemas.openxmlformats.org/drawingml/2006/main" r:embed="Rd6b632417a7346aa"/>
+          <a:blip xmlns:r="http://schemas.openxmlformats.org/officeDocument/2006/relationships" xmlns:a="http://schemas.openxmlformats.org/drawingml/2006/main" r:embed="R7d258c8939bd4857"/>
           <a:srcRect xmlns:a="http://schemas.openxmlformats.org/drawingml/2006/main" l="0" t="24967" r="0" b="24967"/>
           <a:stretch xmlns:a="http://schemas.openxmlformats.org/drawingml/2006/main"/>
         </p:blipFill>
@@ -16076,7 +16022,7 @@
         </p:xfrm>
         <a:graphic xmlns:a="http://schemas.openxmlformats.org/drawingml/2006/main">
           <a:graphicData uri="http://schemas.openxmlformats.org/drawingml/2006/chart">
-            <c:chart xmlns:r="http://schemas.openxmlformats.org/officeDocument/2006/relationships" xmlns:c="http://schemas.openxmlformats.org/drawingml/2006/chart" r:id="R3c77b21b82bd4957"/>
+            <c:chart xmlns:r="http://schemas.openxmlformats.org/officeDocument/2006/relationships" xmlns:c="http://schemas.openxmlformats.org/drawingml/2006/chart" r:id="R5ea33468558d4809"/>
           </a:graphicData>
         </a:graphic>
       </p:graphicFrame>
@@ -16771,7 +16717,7 @@
         </p:xfrm>
         <a:graphic xmlns:a="http://schemas.openxmlformats.org/drawingml/2006/main">
           <a:graphicData uri="http://schemas.openxmlformats.org/drawingml/2006/chart">
-            <c:chart xmlns:r="http://schemas.openxmlformats.org/officeDocument/2006/relationships" xmlns:c="http://schemas.openxmlformats.org/drawingml/2006/chart" r:id="Rda22121e8a0448c0"/>
+            <c:chart xmlns:r="http://schemas.openxmlformats.org/officeDocument/2006/relationships" xmlns:c="http://schemas.openxmlformats.org/drawingml/2006/chart" r:id="R0d4219b8daba44c8"/>
           </a:graphicData>
         </a:graphic>
       </p:graphicFrame>
